--- a/slides/04a_Computation-Research_Best-Practices.pptx
+++ b/slides/04a_Computation-Research_Best-Practices.pptx
@@ -6,24 +6,31 @@
     <p:sldMasterId id="2147483661" r:id="rId2"/>
   </p:sldMasterIdLst>
   <p:notesMasterIdLst>
-    <p:notesMasterId r:id="rId18"/>
+    <p:notesMasterId r:id="rId25"/>
   </p:notesMasterIdLst>
   <p:sldIdLst>
     <p:sldId id="299" r:id="rId3"/>
     <p:sldId id="272" r:id="rId4"/>
     <p:sldId id="313" r:id="rId5"/>
-    <p:sldId id="343" r:id="rId6"/>
-    <p:sldId id="314" r:id="rId7"/>
-    <p:sldId id="267" r:id="rId8"/>
-    <p:sldId id="351" r:id="rId9"/>
-    <p:sldId id="265" r:id="rId10"/>
-    <p:sldId id="346" r:id="rId11"/>
-    <p:sldId id="348" r:id="rId12"/>
-    <p:sldId id="347" r:id="rId13"/>
-    <p:sldId id="341" r:id="rId14"/>
-    <p:sldId id="352" r:id="rId15"/>
-    <p:sldId id="353" r:id="rId16"/>
-    <p:sldId id="331" r:id="rId17"/>
+    <p:sldId id="359" r:id="rId6"/>
+    <p:sldId id="360" r:id="rId7"/>
+    <p:sldId id="343" r:id="rId8"/>
+    <p:sldId id="314" r:id="rId9"/>
+    <p:sldId id="354" r:id="rId10"/>
+    <p:sldId id="355" r:id="rId11"/>
+    <p:sldId id="267" r:id="rId12"/>
+    <p:sldId id="357" r:id="rId13"/>
+    <p:sldId id="356" r:id="rId14"/>
+    <p:sldId id="351" r:id="rId15"/>
+    <p:sldId id="265" r:id="rId16"/>
+    <p:sldId id="346" r:id="rId17"/>
+    <p:sldId id="348" r:id="rId18"/>
+    <p:sldId id="347" r:id="rId19"/>
+    <p:sldId id="358" r:id="rId20"/>
+    <p:sldId id="341" r:id="rId21"/>
+    <p:sldId id="352" r:id="rId22"/>
+    <p:sldId id="353" r:id="rId23"/>
+    <p:sldId id="331" r:id="rId24"/>
   </p:sldIdLst>
   <p:sldSz cx="12192000" cy="6858000"/>
   <p:notesSz cx="6858000" cy="9144000"/>
@@ -624,6 +631,364 @@
   <p:cSld>
     <p:spTree>
       <p:nvGrpSpPr>
+        <p:cNvPr id="1" name="Shape 136">
+          <a:extLst>
+            <a:ext uri="{FF2B5EF4-FFF2-40B4-BE49-F238E27FC236}">
+              <a16:creationId xmlns:a16="http://schemas.microsoft.com/office/drawing/2014/main" id="{6CF7347D-0F55-2BC1-9CD0-DD305D890973}"/>
+            </a:ext>
+          </a:extLst>
+        </p:cNvPr>
+        <p:cNvGrpSpPr/>
+        <p:nvPr/>
+      </p:nvGrpSpPr>
+      <p:grpSpPr>
+        <a:xfrm>
+          <a:off x="0" y="0"/>
+          <a:ext cx="0" cy="0"/>
+          <a:chOff x="0" y="0"/>
+          <a:chExt cx="0" cy="0"/>
+        </a:xfrm>
+      </p:grpSpPr>
+      <p:sp>
+        <p:nvSpPr>
+          <p:cNvPr id="137" name="Google Shape;137;p5:notes">
+            <a:extLst>
+              <a:ext uri="{FF2B5EF4-FFF2-40B4-BE49-F238E27FC236}">
+                <a16:creationId xmlns:a16="http://schemas.microsoft.com/office/drawing/2014/main" id="{88B4B820-B4C5-F926-0845-D3B4542B3DEC}"/>
+              </a:ext>
+            </a:extLst>
+          </p:cNvPr>
+          <p:cNvSpPr txBox="1">
+            <a:spLocks noGrp="1"/>
+          </p:cNvSpPr>
+          <p:nvPr>
+            <p:ph type="body" idx="1"/>
+          </p:nvPr>
+        </p:nvSpPr>
+        <p:spPr>
+          <a:xfrm>
+            <a:off x="685800" y="4343400"/>
+            <a:ext cx="5486400" cy="4114800"/>
+          </a:xfrm>
+          <a:prstGeom prst="rect">
+            <a:avLst/>
+          </a:prstGeom>
+        </p:spPr>
+        <p:txBody>
+          <a:bodyPr spcFirstLastPara="1" wrap="square" lIns="91425" tIns="91425" rIns="91425" bIns="91425" anchor="t" anchorCtr="0">
+            <a:noAutofit/>
+          </a:bodyPr>
+          <a:lstStyle/>
+          <a:p>
+            <a:pPr marL="0" lvl="0" indent="0" algn="l" rtl="0">
+              <a:spcBef>
+                <a:spcPts val="0"/>
+              </a:spcBef>
+              <a:spcAft>
+                <a:spcPts val="0"/>
+              </a:spcAft>
+              <a:buNone/>
+            </a:pPr>
+            <a:endParaRPr/>
+          </a:p>
+        </p:txBody>
+      </p:sp>
+      <p:sp>
+        <p:nvSpPr>
+          <p:cNvPr id="138" name="Google Shape;138;p5:notes">
+            <a:extLst>
+              <a:ext uri="{FF2B5EF4-FFF2-40B4-BE49-F238E27FC236}">
+                <a16:creationId xmlns:a16="http://schemas.microsoft.com/office/drawing/2014/main" id="{B6ACE105-95C4-0BE1-41F3-D403429153AD}"/>
+              </a:ext>
+            </a:extLst>
+          </p:cNvPr>
+          <p:cNvSpPr>
+            <a:spLocks noGrp="1" noRot="1" noChangeAspect="1"/>
+          </p:cNvSpPr>
+          <p:nvPr>
+            <p:ph type="sldImg" idx="2"/>
+          </p:nvPr>
+        </p:nvSpPr>
+        <p:spPr>
+          <a:xfrm>
+            <a:off x="381000" y="685800"/>
+            <a:ext cx="6096000" cy="3429000"/>
+          </a:xfrm>
+          <a:custGeom>
+            <a:avLst/>
+            <a:gdLst/>
+            <a:ahLst/>
+            <a:cxnLst/>
+            <a:rect l="l" t="t" r="r" b="b"/>
+            <a:pathLst>
+              <a:path w="120000" h="120000" extrusionOk="0">
+                <a:moveTo>
+                  <a:pt x="0" y="0"/>
+                </a:moveTo>
+                <a:lnTo>
+                  <a:pt x="120000" y="0"/>
+                </a:lnTo>
+                <a:lnTo>
+                  <a:pt x="120000" y="120000"/>
+                </a:lnTo>
+                <a:lnTo>
+                  <a:pt x="0" y="120000"/>
+                </a:lnTo>
+                <a:close/>
+              </a:path>
+            </a:pathLst>
+          </a:custGeom>
+        </p:spPr>
+      </p:sp>
+    </p:spTree>
+    <p:extLst>
+      <p:ext uri="{BB962C8B-B14F-4D97-AF65-F5344CB8AC3E}">
+        <p14:creationId xmlns:p14="http://schemas.microsoft.com/office/powerpoint/2010/main" val="3283765547"/>
+      </p:ext>
+    </p:extLst>
+  </p:cSld>
+  <p:clrMapOvr>
+    <a:masterClrMapping/>
+  </p:clrMapOvr>
+</p:notes>
+</file>
+
+<file path=ppt/notesSlides/notesSlide11.xml><?xml version="1.0" encoding="utf-8"?>
+<p:notes xmlns:a="http://schemas.openxmlformats.org/drawingml/2006/main" xmlns:r="http://schemas.openxmlformats.org/officeDocument/2006/relationships" xmlns:p="http://schemas.openxmlformats.org/presentationml/2006/main" showMasterSp="0" showMasterPhAnim="0">
+  <p:cSld>
+    <p:spTree>
+      <p:nvGrpSpPr>
+        <p:cNvPr id="1" name="Shape 173"/>
+        <p:cNvGrpSpPr/>
+        <p:nvPr/>
+      </p:nvGrpSpPr>
+      <p:grpSpPr>
+        <a:xfrm>
+          <a:off x="0" y="0"/>
+          <a:ext cx="0" cy="0"/>
+          <a:chOff x="0" y="0"/>
+          <a:chExt cx="0" cy="0"/>
+        </a:xfrm>
+      </p:grpSpPr>
+      <p:sp>
+        <p:nvSpPr>
+          <p:cNvPr id="174" name="Google Shape;174;p5:notes"/>
+          <p:cNvSpPr txBox="1">
+            <a:spLocks noGrp="1"/>
+          </p:cNvSpPr>
+          <p:nvPr>
+            <p:ph type="body" idx="1"/>
+          </p:nvPr>
+        </p:nvSpPr>
+        <p:spPr>
+          <a:xfrm>
+            <a:off x="685800" y="4343400"/>
+            <a:ext cx="5486400" cy="4114800"/>
+          </a:xfrm>
+          <a:prstGeom prst="rect">
+            <a:avLst/>
+          </a:prstGeom>
+        </p:spPr>
+        <p:txBody>
+          <a:bodyPr spcFirstLastPara="1" wrap="square" lIns="91425" tIns="91425" rIns="91425" bIns="91425" anchor="t" anchorCtr="0">
+            <a:noAutofit/>
+          </a:bodyPr>
+          <a:lstStyle/>
+          <a:p>
+            <a:pPr marL="0" lvl="0" indent="0" algn="l" rtl="0">
+              <a:spcBef>
+                <a:spcPts val="0"/>
+              </a:spcBef>
+              <a:spcAft>
+                <a:spcPts val="0"/>
+              </a:spcAft>
+              <a:buNone/>
+            </a:pPr>
+            <a:endParaRPr/>
+          </a:p>
+        </p:txBody>
+      </p:sp>
+      <p:sp>
+        <p:nvSpPr>
+          <p:cNvPr id="175" name="Google Shape;175;p5:notes"/>
+          <p:cNvSpPr>
+            <a:spLocks noGrp="1" noRot="1" noChangeAspect="1"/>
+          </p:cNvSpPr>
+          <p:nvPr>
+            <p:ph type="sldImg" idx="2"/>
+          </p:nvPr>
+        </p:nvSpPr>
+        <p:spPr>
+          <a:xfrm>
+            <a:off x="381000" y="685800"/>
+            <a:ext cx="6096000" cy="3429000"/>
+          </a:xfrm>
+          <a:custGeom>
+            <a:avLst/>
+            <a:gdLst/>
+            <a:ahLst/>
+            <a:cxnLst/>
+            <a:rect l="l" t="t" r="r" b="b"/>
+            <a:pathLst>
+              <a:path w="120000" h="120000" extrusionOk="0">
+                <a:moveTo>
+                  <a:pt x="0" y="0"/>
+                </a:moveTo>
+                <a:lnTo>
+                  <a:pt x="120000" y="0"/>
+                </a:lnTo>
+                <a:lnTo>
+                  <a:pt x="120000" y="120000"/>
+                </a:lnTo>
+                <a:lnTo>
+                  <a:pt x="0" y="120000"/>
+                </a:lnTo>
+                <a:close/>
+              </a:path>
+            </a:pathLst>
+          </a:custGeom>
+        </p:spPr>
+      </p:sp>
+    </p:spTree>
+  </p:cSld>
+  <p:clrMapOvr>
+    <a:masterClrMapping/>
+  </p:clrMapOvr>
+</p:notes>
+</file>
+
+<file path=ppt/notesSlides/notesSlide12.xml><?xml version="1.0" encoding="utf-8"?>
+<p:notes xmlns:a="http://schemas.openxmlformats.org/drawingml/2006/main" xmlns:r="http://schemas.openxmlformats.org/officeDocument/2006/relationships" xmlns:p="http://schemas.openxmlformats.org/presentationml/2006/main" showMasterSp="0" showMasterPhAnim="0">
+  <p:cSld>
+    <p:spTree>
+      <p:nvGrpSpPr>
+        <p:cNvPr id="1" name="Shape 173">
+          <a:extLst>
+            <a:ext uri="{FF2B5EF4-FFF2-40B4-BE49-F238E27FC236}">
+              <a16:creationId xmlns:a16="http://schemas.microsoft.com/office/drawing/2014/main" id="{96582AB9-6D74-E616-F6B6-750882790D39}"/>
+            </a:ext>
+          </a:extLst>
+        </p:cNvPr>
+        <p:cNvGrpSpPr/>
+        <p:nvPr/>
+      </p:nvGrpSpPr>
+      <p:grpSpPr>
+        <a:xfrm>
+          <a:off x="0" y="0"/>
+          <a:ext cx="0" cy="0"/>
+          <a:chOff x="0" y="0"/>
+          <a:chExt cx="0" cy="0"/>
+        </a:xfrm>
+      </p:grpSpPr>
+      <p:sp>
+        <p:nvSpPr>
+          <p:cNvPr id="174" name="Google Shape;174;p5:notes">
+            <a:extLst>
+              <a:ext uri="{FF2B5EF4-FFF2-40B4-BE49-F238E27FC236}">
+                <a16:creationId xmlns:a16="http://schemas.microsoft.com/office/drawing/2014/main" id="{A93988E6-F327-97EC-48C9-5E62981832C9}"/>
+              </a:ext>
+            </a:extLst>
+          </p:cNvPr>
+          <p:cNvSpPr txBox="1">
+            <a:spLocks noGrp="1"/>
+          </p:cNvSpPr>
+          <p:nvPr>
+            <p:ph type="body" idx="1"/>
+          </p:nvPr>
+        </p:nvSpPr>
+        <p:spPr>
+          <a:xfrm>
+            <a:off x="685800" y="4343400"/>
+            <a:ext cx="5486400" cy="4114800"/>
+          </a:xfrm>
+          <a:prstGeom prst="rect">
+            <a:avLst/>
+          </a:prstGeom>
+        </p:spPr>
+        <p:txBody>
+          <a:bodyPr spcFirstLastPara="1" wrap="square" lIns="91425" tIns="91425" rIns="91425" bIns="91425" anchor="t" anchorCtr="0">
+            <a:noAutofit/>
+          </a:bodyPr>
+          <a:lstStyle/>
+          <a:p>
+            <a:pPr marL="0" lvl="0" indent="0" algn="l" rtl="0">
+              <a:spcBef>
+                <a:spcPts val="0"/>
+              </a:spcBef>
+              <a:spcAft>
+                <a:spcPts val="0"/>
+              </a:spcAft>
+              <a:buNone/>
+            </a:pPr>
+            <a:endParaRPr/>
+          </a:p>
+        </p:txBody>
+      </p:sp>
+      <p:sp>
+        <p:nvSpPr>
+          <p:cNvPr id="175" name="Google Shape;175;p5:notes">
+            <a:extLst>
+              <a:ext uri="{FF2B5EF4-FFF2-40B4-BE49-F238E27FC236}">
+                <a16:creationId xmlns:a16="http://schemas.microsoft.com/office/drawing/2014/main" id="{3A5A555C-26E8-45EA-3959-84B856D24166}"/>
+              </a:ext>
+            </a:extLst>
+          </p:cNvPr>
+          <p:cNvSpPr>
+            <a:spLocks noGrp="1" noRot="1" noChangeAspect="1"/>
+          </p:cNvSpPr>
+          <p:nvPr>
+            <p:ph type="sldImg" idx="2"/>
+          </p:nvPr>
+        </p:nvSpPr>
+        <p:spPr>
+          <a:xfrm>
+            <a:off x="381000" y="685800"/>
+            <a:ext cx="6096000" cy="3429000"/>
+          </a:xfrm>
+          <a:custGeom>
+            <a:avLst/>
+            <a:gdLst/>
+            <a:ahLst/>
+            <a:cxnLst/>
+            <a:rect l="l" t="t" r="r" b="b"/>
+            <a:pathLst>
+              <a:path w="120000" h="120000" extrusionOk="0">
+                <a:moveTo>
+                  <a:pt x="0" y="0"/>
+                </a:moveTo>
+                <a:lnTo>
+                  <a:pt x="120000" y="0"/>
+                </a:lnTo>
+                <a:lnTo>
+                  <a:pt x="120000" y="120000"/>
+                </a:lnTo>
+                <a:lnTo>
+                  <a:pt x="0" y="120000"/>
+                </a:lnTo>
+                <a:close/>
+              </a:path>
+            </a:pathLst>
+          </a:custGeom>
+        </p:spPr>
+      </p:sp>
+    </p:spTree>
+    <p:extLst>
+      <p:ext uri="{BB962C8B-B14F-4D97-AF65-F5344CB8AC3E}">
+        <p14:creationId xmlns:p14="http://schemas.microsoft.com/office/powerpoint/2010/main" val="872193006"/>
+      </p:ext>
+    </p:extLst>
+  </p:cSld>
+  <p:clrMapOvr>
+    <a:masterClrMapping/>
+  </p:clrMapOvr>
+</p:notes>
+</file>
+
+<file path=ppt/notesSlides/notesSlide13.xml><?xml version="1.0" encoding="utf-8"?>
+<p:notes xmlns:a="http://schemas.openxmlformats.org/drawingml/2006/main" xmlns:r="http://schemas.openxmlformats.org/officeDocument/2006/relationships" xmlns:p="http://schemas.openxmlformats.org/presentationml/2006/main" showMasterSp="0" showMasterPhAnim="0">
+  <p:cSld>
+    <p:spTree>
+      <p:nvGrpSpPr>
         <p:cNvPr id="1" name="Shape 173">
           <a:extLst>
             <a:ext uri="{FF2B5EF4-FFF2-40B4-BE49-F238E27FC236}">
@@ -746,7 +1111,7 @@
 </p:notes>
 </file>
 
-<file path=ppt/notesSlides/notesSlide11.xml><?xml version="1.0" encoding="utf-8"?>
+<file path=ppt/notesSlides/notesSlide14.xml><?xml version="1.0" encoding="utf-8"?>
 <p:notes xmlns:a="http://schemas.openxmlformats.org/drawingml/2006/main" xmlns:r="http://schemas.openxmlformats.org/officeDocument/2006/relationships" xmlns:p="http://schemas.openxmlformats.org/presentationml/2006/main" showMasterSp="0" showMasterPhAnim="0">
   <p:cSld>
     <p:spTree>
@@ -873,7 +1238,134 @@
 </p:notes>
 </file>
 
-<file path=ppt/notesSlides/notesSlide12.xml><?xml version="1.0" encoding="utf-8"?>
+<file path=ppt/notesSlides/notesSlide15.xml><?xml version="1.0" encoding="utf-8"?>
+<p:notes xmlns:a="http://schemas.openxmlformats.org/drawingml/2006/main" xmlns:r="http://schemas.openxmlformats.org/officeDocument/2006/relationships" xmlns:p="http://schemas.openxmlformats.org/presentationml/2006/main" showMasterSp="0" showMasterPhAnim="0">
+  <p:cSld>
+    <p:spTree>
+      <p:nvGrpSpPr>
+        <p:cNvPr id="1" name="Shape 173">
+          <a:extLst>
+            <a:ext uri="{FF2B5EF4-FFF2-40B4-BE49-F238E27FC236}">
+              <a16:creationId xmlns:a16="http://schemas.microsoft.com/office/drawing/2014/main" id="{A9DAC043-5502-EBF1-CDBF-73A0BA343EF1}"/>
+            </a:ext>
+          </a:extLst>
+        </p:cNvPr>
+        <p:cNvGrpSpPr/>
+        <p:nvPr/>
+      </p:nvGrpSpPr>
+      <p:grpSpPr>
+        <a:xfrm>
+          <a:off x="0" y="0"/>
+          <a:ext cx="0" cy="0"/>
+          <a:chOff x="0" y="0"/>
+          <a:chExt cx="0" cy="0"/>
+        </a:xfrm>
+      </p:grpSpPr>
+      <p:sp>
+        <p:nvSpPr>
+          <p:cNvPr id="174" name="Google Shape;174;p5:notes">
+            <a:extLst>
+              <a:ext uri="{FF2B5EF4-FFF2-40B4-BE49-F238E27FC236}">
+                <a16:creationId xmlns:a16="http://schemas.microsoft.com/office/drawing/2014/main" id="{ADAE93BD-3798-00DE-5E34-F2A267E92E73}"/>
+              </a:ext>
+            </a:extLst>
+          </p:cNvPr>
+          <p:cNvSpPr txBox="1">
+            <a:spLocks noGrp="1"/>
+          </p:cNvSpPr>
+          <p:nvPr>
+            <p:ph type="body" idx="1"/>
+          </p:nvPr>
+        </p:nvSpPr>
+        <p:spPr>
+          <a:xfrm>
+            <a:off x="685800" y="4343400"/>
+            <a:ext cx="5486400" cy="4114800"/>
+          </a:xfrm>
+          <a:prstGeom prst="rect">
+            <a:avLst/>
+          </a:prstGeom>
+        </p:spPr>
+        <p:txBody>
+          <a:bodyPr spcFirstLastPara="1" wrap="square" lIns="91425" tIns="91425" rIns="91425" bIns="91425" anchor="t" anchorCtr="0">
+            <a:noAutofit/>
+          </a:bodyPr>
+          <a:lstStyle/>
+          <a:p>
+            <a:pPr marL="0" lvl="0" indent="0" algn="l" rtl="0">
+              <a:spcBef>
+                <a:spcPts val="0"/>
+              </a:spcBef>
+              <a:spcAft>
+                <a:spcPts val="0"/>
+              </a:spcAft>
+              <a:buNone/>
+            </a:pPr>
+            <a:endParaRPr/>
+          </a:p>
+        </p:txBody>
+      </p:sp>
+      <p:sp>
+        <p:nvSpPr>
+          <p:cNvPr id="175" name="Google Shape;175;p5:notes">
+            <a:extLst>
+              <a:ext uri="{FF2B5EF4-FFF2-40B4-BE49-F238E27FC236}">
+                <a16:creationId xmlns:a16="http://schemas.microsoft.com/office/drawing/2014/main" id="{33DDE30F-A250-9521-0E57-17C5A6217142}"/>
+              </a:ext>
+            </a:extLst>
+          </p:cNvPr>
+          <p:cNvSpPr>
+            <a:spLocks noGrp="1" noRot="1" noChangeAspect="1"/>
+          </p:cNvSpPr>
+          <p:nvPr>
+            <p:ph type="sldImg" idx="2"/>
+          </p:nvPr>
+        </p:nvSpPr>
+        <p:spPr>
+          <a:xfrm>
+            <a:off x="381000" y="685800"/>
+            <a:ext cx="6096000" cy="3429000"/>
+          </a:xfrm>
+          <a:custGeom>
+            <a:avLst/>
+            <a:gdLst/>
+            <a:ahLst/>
+            <a:cxnLst/>
+            <a:rect l="l" t="t" r="r" b="b"/>
+            <a:pathLst>
+              <a:path w="120000" h="120000" extrusionOk="0">
+                <a:moveTo>
+                  <a:pt x="0" y="0"/>
+                </a:moveTo>
+                <a:lnTo>
+                  <a:pt x="120000" y="0"/>
+                </a:lnTo>
+                <a:lnTo>
+                  <a:pt x="120000" y="120000"/>
+                </a:lnTo>
+                <a:lnTo>
+                  <a:pt x="0" y="120000"/>
+                </a:lnTo>
+                <a:close/>
+              </a:path>
+            </a:pathLst>
+          </a:custGeom>
+        </p:spPr>
+      </p:sp>
+    </p:spTree>
+    <p:extLst>
+      <p:ext uri="{BB962C8B-B14F-4D97-AF65-F5344CB8AC3E}">
+        <p14:creationId xmlns:p14="http://schemas.microsoft.com/office/powerpoint/2010/main" val="1011132538"/>
+      </p:ext>
+    </p:extLst>
+  </p:cSld>
+  <p:clrMapOvr>
+    <a:masterClrMapping/>
+  </p:clrMapOvr>
+</p:notes>
+</file>
+
+<file path=ppt/notesSlides/notesSlide16.xml><?xml version="1.0" encoding="utf-8"?>
 <p:notes xmlns:a="http://schemas.openxmlformats.org/drawingml/2006/main" xmlns:r="http://schemas.openxmlformats.org/officeDocument/2006/relationships" xmlns:p="http://schemas.openxmlformats.org/presentationml/2006/main" showMasterSp="0" showMasterPhAnim="0">
   <p:cSld>
     <p:spTree>
@@ -1000,7 +1492,7 @@
 </p:notes>
 </file>
 
-<file path=ppt/notesSlides/notesSlide13.xml><?xml version="1.0" encoding="utf-8"?>
+<file path=ppt/notesSlides/notesSlide17.xml><?xml version="1.0" encoding="utf-8"?>
 <p:notes xmlns:a="http://schemas.openxmlformats.org/drawingml/2006/main" xmlns:r="http://schemas.openxmlformats.org/officeDocument/2006/relationships" xmlns:p="http://schemas.openxmlformats.org/presentationml/2006/main" showMasterSp="0" showMasterPhAnim="0">
   <p:cSld>
     <p:spTree>
@@ -1127,7 +1619,7 @@
 </p:notes>
 </file>
 
-<file path=ppt/notesSlides/notesSlide14.xml><?xml version="1.0" encoding="utf-8"?>
+<file path=ppt/notesSlides/notesSlide18.xml><?xml version="1.0" encoding="utf-8"?>
 <p:notes xmlns:a="http://schemas.openxmlformats.org/drawingml/2006/main" xmlns:r="http://schemas.openxmlformats.org/officeDocument/2006/relationships" xmlns:p="http://schemas.openxmlformats.org/presentationml/2006/main" showMasterSp="0" showMasterPhAnim="0">
   <p:cSld>
     <p:spTree>
@@ -1254,7 +1746,7 @@
 </p:notes>
 </file>
 
-<file path=ppt/notesSlides/notesSlide15.xml><?xml version="1.0" encoding="utf-8"?>
+<file path=ppt/notesSlides/notesSlide19.xml><?xml version="1.0" encoding="utf-8"?>
 <p:notes xmlns:a="http://schemas.openxmlformats.org/drawingml/2006/main" xmlns:r="http://schemas.openxmlformats.org/officeDocument/2006/relationships" xmlns:p="http://schemas.openxmlformats.org/presentationml/2006/main" showMasterSp="0" showMasterPhAnim="0">
   <p:cSld>
     <p:spTree>
@@ -1640,6 +2132,133 @@
   <p:cSld>
     <p:spTree>
       <p:nvGrpSpPr>
+        <p:cNvPr id="1" name="Shape 136">
+          <a:extLst>
+            <a:ext uri="{FF2B5EF4-FFF2-40B4-BE49-F238E27FC236}">
+              <a16:creationId xmlns:a16="http://schemas.microsoft.com/office/drawing/2014/main" id="{BB11EC38-B226-50BE-1E50-1A00AC44AB5A}"/>
+            </a:ext>
+          </a:extLst>
+        </p:cNvPr>
+        <p:cNvGrpSpPr/>
+        <p:nvPr/>
+      </p:nvGrpSpPr>
+      <p:grpSpPr>
+        <a:xfrm>
+          <a:off x="0" y="0"/>
+          <a:ext cx="0" cy="0"/>
+          <a:chOff x="0" y="0"/>
+          <a:chExt cx="0" cy="0"/>
+        </a:xfrm>
+      </p:grpSpPr>
+      <p:sp>
+        <p:nvSpPr>
+          <p:cNvPr id="137" name="Google Shape;137;p5:notes">
+            <a:extLst>
+              <a:ext uri="{FF2B5EF4-FFF2-40B4-BE49-F238E27FC236}">
+                <a16:creationId xmlns:a16="http://schemas.microsoft.com/office/drawing/2014/main" id="{E5FABE99-952B-188C-9D87-57E664291EAB}"/>
+              </a:ext>
+            </a:extLst>
+          </p:cNvPr>
+          <p:cNvSpPr txBox="1">
+            <a:spLocks noGrp="1"/>
+          </p:cNvSpPr>
+          <p:nvPr>
+            <p:ph type="body" idx="1"/>
+          </p:nvPr>
+        </p:nvSpPr>
+        <p:spPr>
+          <a:xfrm>
+            <a:off x="685800" y="4343400"/>
+            <a:ext cx="5486400" cy="4114800"/>
+          </a:xfrm>
+          <a:prstGeom prst="rect">
+            <a:avLst/>
+          </a:prstGeom>
+        </p:spPr>
+        <p:txBody>
+          <a:bodyPr spcFirstLastPara="1" wrap="square" lIns="91425" tIns="91425" rIns="91425" bIns="91425" anchor="t" anchorCtr="0">
+            <a:noAutofit/>
+          </a:bodyPr>
+          <a:lstStyle/>
+          <a:p>
+            <a:pPr marL="0" lvl="0" indent="0" algn="l" rtl="0">
+              <a:spcBef>
+                <a:spcPts val="0"/>
+              </a:spcBef>
+              <a:spcAft>
+                <a:spcPts val="0"/>
+              </a:spcAft>
+              <a:buNone/>
+            </a:pPr>
+            <a:endParaRPr/>
+          </a:p>
+        </p:txBody>
+      </p:sp>
+      <p:sp>
+        <p:nvSpPr>
+          <p:cNvPr id="138" name="Google Shape;138;p5:notes">
+            <a:extLst>
+              <a:ext uri="{FF2B5EF4-FFF2-40B4-BE49-F238E27FC236}">
+                <a16:creationId xmlns:a16="http://schemas.microsoft.com/office/drawing/2014/main" id="{5A7763B0-07F8-91F3-4CFC-D06F6841095D}"/>
+              </a:ext>
+            </a:extLst>
+          </p:cNvPr>
+          <p:cNvSpPr>
+            <a:spLocks noGrp="1" noRot="1" noChangeAspect="1"/>
+          </p:cNvSpPr>
+          <p:nvPr>
+            <p:ph type="sldImg" idx="2"/>
+          </p:nvPr>
+        </p:nvSpPr>
+        <p:spPr>
+          <a:xfrm>
+            <a:off x="381000" y="685800"/>
+            <a:ext cx="6096000" cy="3429000"/>
+          </a:xfrm>
+          <a:custGeom>
+            <a:avLst/>
+            <a:gdLst/>
+            <a:ahLst/>
+            <a:cxnLst/>
+            <a:rect l="l" t="t" r="r" b="b"/>
+            <a:pathLst>
+              <a:path w="120000" h="120000" extrusionOk="0">
+                <a:moveTo>
+                  <a:pt x="0" y="0"/>
+                </a:moveTo>
+                <a:lnTo>
+                  <a:pt x="120000" y="0"/>
+                </a:lnTo>
+                <a:lnTo>
+                  <a:pt x="120000" y="120000"/>
+                </a:lnTo>
+                <a:lnTo>
+                  <a:pt x="0" y="120000"/>
+                </a:lnTo>
+                <a:close/>
+              </a:path>
+            </a:pathLst>
+          </a:custGeom>
+        </p:spPr>
+      </p:sp>
+    </p:spTree>
+    <p:extLst>
+      <p:ext uri="{BB962C8B-B14F-4D97-AF65-F5344CB8AC3E}">
+        <p14:creationId xmlns:p14="http://schemas.microsoft.com/office/powerpoint/2010/main" val="1058776154"/>
+      </p:ext>
+    </p:extLst>
+  </p:cSld>
+  <p:clrMapOvr>
+    <a:masterClrMapping/>
+  </p:clrMapOvr>
+</p:notes>
+</file>
+
+<file path=ppt/notesSlides/notesSlide5.xml><?xml version="1.0" encoding="utf-8"?>
+<p:notes xmlns:a="http://schemas.openxmlformats.org/drawingml/2006/main" xmlns:r="http://schemas.openxmlformats.org/officeDocument/2006/relationships" xmlns:p="http://schemas.openxmlformats.org/presentationml/2006/main" showMasterSp="0" showMasterPhAnim="0">
+  <p:cSld>
+    <p:spTree>
+      <p:nvGrpSpPr>
         <p:cNvPr id="1" name="Shape 154">
           <a:extLst>
             <a:ext uri="{FF2B5EF4-FFF2-40B4-BE49-F238E27FC236}">
@@ -1762,7 +2381,7 @@
 </p:notes>
 </file>
 
-<file path=ppt/notesSlides/notesSlide5.xml><?xml version="1.0" encoding="utf-8"?>
+<file path=ppt/notesSlides/notesSlide6.xml><?xml version="1.0" encoding="utf-8"?>
 <p:notes xmlns:a="http://schemas.openxmlformats.org/drawingml/2006/main" xmlns:r="http://schemas.openxmlformats.org/officeDocument/2006/relationships" xmlns:p="http://schemas.openxmlformats.org/presentationml/2006/main" showMasterSp="0" showMasterPhAnim="0">
   <p:cSld>
     <p:spTree>
@@ -1889,7 +2508,134 @@
 </p:notes>
 </file>
 
-<file path=ppt/notesSlides/notesSlide6.xml><?xml version="1.0" encoding="utf-8"?>
+<file path=ppt/notesSlides/notesSlide7.xml><?xml version="1.0" encoding="utf-8"?>
+<p:notes xmlns:a="http://schemas.openxmlformats.org/drawingml/2006/main" xmlns:r="http://schemas.openxmlformats.org/officeDocument/2006/relationships" xmlns:p="http://schemas.openxmlformats.org/presentationml/2006/main" showMasterSp="0" showMasterPhAnim="0">
+  <p:cSld>
+    <p:spTree>
+      <p:nvGrpSpPr>
+        <p:cNvPr id="1" name="Shape 136">
+          <a:extLst>
+            <a:ext uri="{FF2B5EF4-FFF2-40B4-BE49-F238E27FC236}">
+              <a16:creationId xmlns:a16="http://schemas.microsoft.com/office/drawing/2014/main" id="{5D257B8B-D94A-26F6-AC0D-2AAEB1FE9CF2}"/>
+            </a:ext>
+          </a:extLst>
+        </p:cNvPr>
+        <p:cNvGrpSpPr/>
+        <p:nvPr/>
+      </p:nvGrpSpPr>
+      <p:grpSpPr>
+        <a:xfrm>
+          <a:off x="0" y="0"/>
+          <a:ext cx="0" cy="0"/>
+          <a:chOff x="0" y="0"/>
+          <a:chExt cx="0" cy="0"/>
+        </a:xfrm>
+      </p:grpSpPr>
+      <p:sp>
+        <p:nvSpPr>
+          <p:cNvPr id="137" name="Google Shape;137;p5:notes">
+            <a:extLst>
+              <a:ext uri="{FF2B5EF4-FFF2-40B4-BE49-F238E27FC236}">
+                <a16:creationId xmlns:a16="http://schemas.microsoft.com/office/drawing/2014/main" id="{5AB2B6F2-DCD1-4F56-5CB9-811A120548C0}"/>
+              </a:ext>
+            </a:extLst>
+          </p:cNvPr>
+          <p:cNvSpPr txBox="1">
+            <a:spLocks noGrp="1"/>
+          </p:cNvSpPr>
+          <p:nvPr>
+            <p:ph type="body" idx="1"/>
+          </p:nvPr>
+        </p:nvSpPr>
+        <p:spPr>
+          <a:xfrm>
+            <a:off x="685800" y="4343400"/>
+            <a:ext cx="5486400" cy="4114800"/>
+          </a:xfrm>
+          <a:prstGeom prst="rect">
+            <a:avLst/>
+          </a:prstGeom>
+        </p:spPr>
+        <p:txBody>
+          <a:bodyPr spcFirstLastPara="1" wrap="square" lIns="91425" tIns="91425" rIns="91425" bIns="91425" anchor="t" anchorCtr="0">
+            <a:noAutofit/>
+          </a:bodyPr>
+          <a:lstStyle/>
+          <a:p>
+            <a:pPr marL="0" lvl="0" indent="0" algn="l" rtl="0">
+              <a:spcBef>
+                <a:spcPts val="0"/>
+              </a:spcBef>
+              <a:spcAft>
+                <a:spcPts val="0"/>
+              </a:spcAft>
+              <a:buNone/>
+            </a:pPr>
+            <a:endParaRPr/>
+          </a:p>
+        </p:txBody>
+      </p:sp>
+      <p:sp>
+        <p:nvSpPr>
+          <p:cNvPr id="138" name="Google Shape;138;p5:notes">
+            <a:extLst>
+              <a:ext uri="{FF2B5EF4-FFF2-40B4-BE49-F238E27FC236}">
+                <a16:creationId xmlns:a16="http://schemas.microsoft.com/office/drawing/2014/main" id="{C9AB94A8-C740-B894-1A91-8AEE94E79682}"/>
+              </a:ext>
+            </a:extLst>
+          </p:cNvPr>
+          <p:cNvSpPr>
+            <a:spLocks noGrp="1" noRot="1" noChangeAspect="1"/>
+          </p:cNvSpPr>
+          <p:nvPr>
+            <p:ph type="sldImg" idx="2"/>
+          </p:nvPr>
+        </p:nvSpPr>
+        <p:spPr>
+          <a:xfrm>
+            <a:off x="381000" y="685800"/>
+            <a:ext cx="6096000" cy="3429000"/>
+          </a:xfrm>
+          <a:custGeom>
+            <a:avLst/>
+            <a:gdLst/>
+            <a:ahLst/>
+            <a:cxnLst/>
+            <a:rect l="l" t="t" r="r" b="b"/>
+            <a:pathLst>
+              <a:path w="120000" h="120000" extrusionOk="0">
+                <a:moveTo>
+                  <a:pt x="0" y="0"/>
+                </a:moveTo>
+                <a:lnTo>
+                  <a:pt x="120000" y="0"/>
+                </a:lnTo>
+                <a:lnTo>
+                  <a:pt x="120000" y="120000"/>
+                </a:lnTo>
+                <a:lnTo>
+                  <a:pt x="0" y="120000"/>
+                </a:lnTo>
+                <a:close/>
+              </a:path>
+            </a:pathLst>
+          </a:custGeom>
+        </p:spPr>
+      </p:sp>
+    </p:spTree>
+    <p:extLst>
+      <p:ext uri="{BB962C8B-B14F-4D97-AF65-F5344CB8AC3E}">
+        <p14:creationId xmlns:p14="http://schemas.microsoft.com/office/powerpoint/2010/main" val="2813939287"/>
+      </p:ext>
+    </p:extLst>
+  </p:cSld>
+  <p:clrMapOvr>
+    <a:masterClrMapping/>
+  </p:clrMapOvr>
+</p:notes>
+</file>
+
+<file path=ppt/notesSlides/notesSlide8.xml><?xml version="1.0" encoding="utf-8"?>
 <p:notes xmlns:a="http://schemas.openxmlformats.org/drawingml/2006/main" xmlns:r="http://schemas.openxmlformats.org/officeDocument/2006/relationships" xmlns:p="http://schemas.openxmlformats.org/presentationml/2006/main" showMasterSp="0" showMasterPhAnim="0">
   <p:cSld>
     <p:spTree>
@@ -2016,7 +2762,7 @@
 </p:notes>
 </file>
 
-<file path=ppt/notesSlides/notesSlide7.xml><?xml version="1.0" encoding="utf-8"?>
+<file path=ppt/notesSlides/notesSlide9.xml><?xml version="1.0" encoding="utf-8"?>
 <p:notes xmlns:a="http://schemas.openxmlformats.org/drawingml/2006/main" xmlns:r="http://schemas.openxmlformats.org/officeDocument/2006/relationships" xmlns:p="http://schemas.openxmlformats.org/presentationml/2006/main" showMasterSp="0" showMasterPhAnim="0">
   <p:cSld>
     <p:spTree>
@@ -2024,7 +2770,7 @@
         <p:cNvPr id="1" name="Shape 136">
           <a:extLst>
             <a:ext uri="{FF2B5EF4-FFF2-40B4-BE49-F238E27FC236}">
-              <a16:creationId xmlns:a16="http://schemas.microsoft.com/office/drawing/2014/main" id="{6CF7347D-0F55-2BC1-9CD0-DD305D890973}"/>
+              <a16:creationId xmlns:a16="http://schemas.microsoft.com/office/drawing/2014/main" id="{5BB5DB9B-FE13-F77C-F27B-51441FB0207F}"/>
             </a:ext>
           </a:extLst>
         </p:cNvPr>
@@ -2044,7 +2790,7 @@
           <p:cNvPr id="137" name="Google Shape;137;p5:notes">
             <a:extLst>
               <a:ext uri="{FF2B5EF4-FFF2-40B4-BE49-F238E27FC236}">
-                <a16:creationId xmlns:a16="http://schemas.microsoft.com/office/drawing/2014/main" id="{88B4B820-B4C5-F926-0845-D3B4542B3DEC}"/>
+                <a16:creationId xmlns:a16="http://schemas.microsoft.com/office/drawing/2014/main" id="{FADB500D-46CB-27A6-DCE0-37D22CEB1AFF}"/>
               </a:ext>
             </a:extLst>
           </p:cNvPr>
@@ -2088,7 +2834,7 @@
           <p:cNvPr id="138" name="Google Shape;138;p5:notes">
             <a:extLst>
               <a:ext uri="{FF2B5EF4-FFF2-40B4-BE49-F238E27FC236}">
-                <a16:creationId xmlns:a16="http://schemas.microsoft.com/office/drawing/2014/main" id="{B6ACE105-95C4-0BE1-41F3-D403429153AD}"/>
+                <a16:creationId xmlns:a16="http://schemas.microsoft.com/office/drawing/2014/main" id="{13536C66-3C66-0F30-486D-4138C5C8036A}"/>
               </a:ext>
             </a:extLst>
           </p:cNvPr>
@@ -2133,238 +2879,7 @@
     </p:spTree>
     <p:extLst>
       <p:ext uri="{BB962C8B-B14F-4D97-AF65-F5344CB8AC3E}">
-        <p14:creationId xmlns:p14="http://schemas.microsoft.com/office/powerpoint/2010/main" val="3283765547"/>
-      </p:ext>
-    </p:extLst>
-  </p:cSld>
-  <p:clrMapOvr>
-    <a:masterClrMapping/>
-  </p:clrMapOvr>
-</p:notes>
-</file>
-
-<file path=ppt/notesSlides/notesSlide8.xml><?xml version="1.0" encoding="utf-8"?>
-<p:notes xmlns:a="http://schemas.openxmlformats.org/drawingml/2006/main" xmlns:r="http://schemas.openxmlformats.org/officeDocument/2006/relationships" xmlns:p="http://schemas.openxmlformats.org/presentationml/2006/main" showMasterSp="0" showMasterPhAnim="0">
-  <p:cSld>
-    <p:spTree>
-      <p:nvGrpSpPr>
-        <p:cNvPr id="1" name="Shape 173"/>
-        <p:cNvGrpSpPr/>
-        <p:nvPr/>
-      </p:nvGrpSpPr>
-      <p:grpSpPr>
-        <a:xfrm>
-          <a:off x="0" y="0"/>
-          <a:ext cx="0" cy="0"/>
-          <a:chOff x="0" y="0"/>
-          <a:chExt cx="0" cy="0"/>
-        </a:xfrm>
-      </p:grpSpPr>
-      <p:sp>
-        <p:nvSpPr>
-          <p:cNvPr id="174" name="Google Shape;174;p5:notes"/>
-          <p:cNvSpPr txBox="1">
-            <a:spLocks noGrp="1"/>
-          </p:cNvSpPr>
-          <p:nvPr>
-            <p:ph type="body" idx="1"/>
-          </p:nvPr>
-        </p:nvSpPr>
-        <p:spPr>
-          <a:xfrm>
-            <a:off x="685800" y="4343400"/>
-            <a:ext cx="5486400" cy="4114800"/>
-          </a:xfrm>
-          <a:prstGeom prst="rect">
-            <a:avLst/>
-          </a:prstGeom>
-        </p:spPr>
-        <p:txBody>
-          <a:bodyPr spcFirstLastPara="1" wrap="square" lIns="91425" tIns="91425" rIns="91425" bIns="91425" anchor="t" anchorCtr="0">
-            <a:noAutofit/>
-          </a:bodyPr>
-          <a:lstStyle/>
-          <a:p>
-            <a:pPr marL="0" lvl="0" indent="0" algn="l" rtl="0">
-              <a:spcBef>
-                <a:spcPts val="0"/>
-              </a:spcBef>
-              <a:spcAft>
-                <a:spcPts val="0"/>
-              </a:spcAft>
-              <a:buNone/>
-            </a:pPr>
-            <a:endParaRPr/>
-          </a:p>
-        </p:txBody>
-      </p:sp>
-      <p:sp>
-        <p:nvSpPr>
-          <p:cNvPr id="175" name="Google Shape;175;p5:notes"/>
-          <p:cNvSpPr>
-            <a:spLocks noGrp="1" noRot="1" noChangeAspect="1"/>
-          </p:cNvSpPr>
-          <p:nvPr>
-            <p:ph type="sldImg" idx="2"/>
-          </p:nvPr>
-        </p:nvSpPr>
-        <p:spPr>
-          <a:xfrm>
-            <a:off x="381000" y="685800"/>
-            <a:ext cx="6096000" cy="3429000"/>
-          </a:xfrm>
-          <a:custGeom>
-            <a:avLst/>
-            <a:gdLst/>
-            <a:ahLst/>
-            <a:cxnLst/>
-            <a:rect l="l" t="t" r="r" b="b"/>
-            <a:pathLst>
-              <a:path w="120000" h="120000" extrusionOk="0">
-                <a:moveTo>
-                  <a:pt x="0" y="0"/>
-                </a:moveTo>
-                <a:lnTo>
-                  <a:pt x="120000" y="0"/>
-                </a:lnTo>
-                <a:lnTo>
-                  <a:pt x="120000" y="120000"/>
-                </a:lnTo>
-                <a:lnTo>
-                  <a:pt x="0" y="120000"/>
-                </a:lnTo>
-                <a:close/>
-              </a:path>
-            </a:pathLst>
-          </a:custGeom>
-        </p:spPr>
-      </p:sp>
-    </p:spTree>
-  </p:cSld>
-  <p:clrMapOvr>
-    <a:masterClrMapping/>
-  </p:clrMapOvr>
-</p:notes>
-</file>
-
-<file path=ppt/notesSlides/notesSlide9.xml><?xml version="1.0" encoding="utf-8"?>
-<p:notes xmlns:a="http://schemas.openxmlformats.org/drawingml/2006/main" xmlns:r="http://schemas.openxmlformats.org/officeDocument/2006/relationships" xmlns:p="http://schemas.openxmlformats.org/presentationml/2006/main" showMasterSp="0" showMasterPhAnim="0">
-  <p:cSld>
-    <p:spTree>
-      <p:nvGrpSpPr>
-        <p:cNvPr id="1" name="Shape 173">
-          <a:extLst>
-            <a:ext uri="{FF2B5EF4-FFF2-40B4-BE49-F238E27FC236}">
-              <a16:creationId xmlns:a16="http://schemas.microsoft.com/office/drawing/2014/main" id="{96582AB9-6D74-E616-F6B6-750882790D39}"/>
-            </a:ext>
-          </a:extLst>
-        </p:cNvPr>
-        <p:cNvGrpSpPr/>
-        <p:nvPr/>
-      </p:nvGrpSpPr>
-      <p:grpSpPr>
-        <a:xfrm>
-          <a:off x="0" y="0"/>
-          <a:ext cx="0" cy="0"/>
-          <a:chOff x="0" y="0"/>
-          <a:chExt cx="0" cy="0"/>
-        </a:xfrm>
-      </p:grpSpPr>
-      <p:sp>
-        <p:nvSpPr>
-          <p:cNvPr id="174" name="Google Shape;174;p5:notes">
-            <a:extLst>
-              <a:ext uri="{FF2B5EF4-FFF2-40B4-BE49-F238E27FC236}">
-                <a16:creationId xmlns:a16="http://schemas.microsoft.com/office/drawing/2014/main" id="{A93988E6-F327-97EC-48C9-5E62981832C9}"/>
-              </a:ext>
-            </a:extLst>
-          </p:cNvPr>
-          <p:cNvSpPr txBox="1">
-            <a:spLocks noGrp="1"/>
-          </p:cNvSpPr>
-          <p:nvPr>
-            <p:ph type="body" idx="1"/>
-          </p:nvPr>
-        </p:nvSpPr>
-        <p:spPr>
-          <a:xfrm>
-            <a:off x="685800" y="4343400"/>
-            <a:ext cx="5486400" cy="4114800"/>
-          </a:xfrm>
-          <a:prstGeom prst="rect">
-            <a:avLst/>
-          </a:prstGeom>
-        </p:spPr>
-        <p:txBody>
-          <a:bodyPr spcFirstLastPara="1" wrap="square" lIns="91425" tIns="91425" rIns="91425" bIns="91425" anchor="t" anchorCtr="0">
-            <a:noAutofit/>
-          </a:bodyPr>
-          <a:lstStyle/>
-          <a:p>
-            <a:pPr marL="0" lvl="0" indent="0" algn="l" rtl="0">
-              <a:spcBef>
-                <a:spcPts val="0"/>
-              </a:spcBef>
-              <a:spcAft>
-                <a:spcPts val="0"/>
-              </a:spcAft>
-              <a:buNone/>
-            </a:pPr>
-            <a:endParaRPr/>
-          </a:p>
-        </p:txBody>
-      </p:sp>
-      <p:sp>
-        <p:nvSpPr>
-          <p:cNvPr id="175" name="Google Shape;175;p5:notes">
-            <a:extLst>
-              <a:ext uri="{FF2B5EF4-FFF2-40B4-BE49-F238E27FC236}">
-                <a16:creationId xmlns:a16="http://schemas.microsoft.com/office/drawing/2014/main" id="{3A5A555C-26E8-45EA-3959-84B856D24166}"/>
-              </a:ext>
-            </a:extLst>
-          </p:cNvPr>
-          <p:cNvSpPr>
-            <a:spLocks noGrp="1" noRot="1" noChangeAspect="1"/>
-          </p:cNvSpPr>
-          <p:nvPr>
-            <p:ph type="sldImg" idx="2"/>
-          </p:nvPr>
-        </p:nvSpPr>
-        <p:spPr>
-          <a:xfrm>
-            <a:off x="381000" y="685800"/>
-            <a:ext cx="6096000" cy="3429000"/>
-          </a:xfrm>
-          <a:custGeom>
-            <a:avLst/>
-            <a:gdLst/>
-            <a:ahLst/>
-            <a:cxnLst/>
-            <a:rect l="l" t="t" r="r" b="b"/>
-            <a:pathLst>
-              <a:path w="120000" h="120000" extrusionOk="0">
-                <a:moveTo>
-                  <a:pt x="0" y="0"/>
-                </a:moveTo>
-                <a:lnTo>
-                  <a:pt x="120000" y="0"/>
-                </a:lnTo>
-                <a:lnTo>
-                  <a:pt x="120000" y="120000"/>
-                </a:lnTo>
-                <a:lnTo>
-                  <a:pt x="0" y="120000"/>
-                </a:lnTo>
-                <a:close/>
-              </a:path>
-            </a:pathLst>
-          </a:custGeom>
-        </p:spPr>
-      </p:sp>
-    </p:spTree>
-    <p:extLst>
-      <p:ext uri="{BB962C8B-B14F-4D97-AF65-F5344CB8AC3E}">
-        <p14:creationId xmlns:p14="http://schemas.microsoft.com/office/powerpoint/2010/main" val="872193006"/>
+        <p14:creationId xmlns:p14="http://schemas.microsoft.com/office/powerpoint/2010/main" val="1781698093"/>
       </p:ext>
     </p:extLst>
   </p:cSld>
@@ -13953,6 +14468,1225 @@
   <p:cSld>
     <p:spTree>
       <p:nvGrpSpPr>
+        <p:cNvPr id="1" name="Shape 139">
+          <a:extLst>
+            <a:ext uri="{FF2B5EF4-FFF2-40B4-BE49-F238E27FC236}">
+              <a16:creationId xmlns:a16="http://schemas.microsoft.com/office/drawing/2014/main" id="{15879BB2-F066-F75E-A8DB-0F7CD248D8F7}"/>
+            </a:ext>
+          </a:extLst>
+        </p:cNvPr>
+        <p:cNvGrpSpPr/>
+        <p:nvPr/>
+      </p:nvGrpSpPr>
+      <p:grpSpPr>
+        <a:xfrm>
+          <a:off x="0" y="0"/>
+          <a:ext cx="0" cy="0"/>
+          <a:chOff x="0" y="0"/>
+          <a:chExt cx="0" cy="0"/>
+        </a:xfrm>
+      </p:grpSpPr>
+      <p:sp>
+        <p:nvSpPr>
+          <p:cNvPr id="141" name="Google Shape;141;p26">
+            <a:extLst>
+              <a:ext uri="{FF2B5EF4-FFF2-40B4-BE49-F238E27FC236}">
+                <a16:creationId xmlns:a16="http://schemas.microsoft.com/office/drawing/2014/main" id="{0C5E1074-6BF4-21EF-64AF-3358BF019D54}"/>
+              </a:ext>
+            </a:extLst>
+          </p:cNvPr>
+          <p:cNvSpPr txBox="1"/>
+          <p:nvPr/>
+        </p:nvSpPr>
+        <p:spPr>
+          <a:xfrm>
+            <a:off x="922202" y="1157695"/>
+            <a:ext cx="8511218" cy="742383"/>
+          </a:xfrm>
+          <a:prstGeom prst="rect">
+            <a:avLst/>
+          </a:prstGeom>
+          <a:noFill/>
+          <a:ln>
+            <a:noFill/>
+          </a:ln>
+        </p:spPr>
+        <p:txBody>
+          <a:bodyPr spcFirstLastPara="1" wrap="square" lIns="0" tIns="0" rIns="0" bIns="0" anchor="t" anchorCtr="0">
+            <a:spAutoFit/>
+          </a:bodyPr>
+          <a:lstStyle/>
+          <a:p>
+            <a:pPr defTabSz="609630">
+              <a:lnSpc>
+                <a:spcPct val="140007"/>
+              </a:lnSpc>
+              <a:buClr>
+                <a:srgbClr val="000000"/>
+              </a:buClr>
+            </a:pPr>
+            <a:r>
+              <a:rPr lang="en-US" sz="3446" kern="0" dirty="0">
+                <a:solidFill>
+                  <a:srgbClr val="00693D"/>
+                </a:solidFill>
+                <a:latin typeface="Anton"/>
+                <a:ea typeface="Anton"/>
+                <a:cs typeface="Anton"/>
+                <a:sym typeface="Anton"/>
+              </a:rPr>
+              <a:t>Open Scholarship Movement</a:t>
+            </a:r>
+            <a:endParaRPr sz="933" kern="0" dirty="0">
+              <a:solidFill>
+                <a:srgbClr val="000000"/>
+              </a:solidFill>
+              <a:latin typeface="Anton"/>
+              <a:ea typeface="Anton"/>
+              <a:cs typeface="Anton"/>
+              <a:sym typeface="Anton"/>
+            </a:endParaRPr>
+          </a:p>
+        </p:txBody>
+      </p:sp>
+      <p:sp>
+        <p:nvSpPr>
+          <p:cNvPr id="142" name="Google Shape;142;p26">
+            <a:extLst>
+              <a:ext uri="{FF2B5EF4-FFF2-40B4-BE49-F238E27FC236}">
+                <a16:creationId xmlns:a16="http://schemas.microsoft.com/office/drawing/2014/main" id="{2F69E860-2826-C663-75C7-D65490E0A9CA}"/>
+              </a:ext>
+            </a:extLst>
+          </p:cNvPr>
+          <p:cNvSpPr txBox="1"/>
+          <p:nvPr/>
+        </p:nvSpPr>
+        <p:spPr>
+          <a:xfrm>
+            <a:off x="922202" y="2187594"/>
+            <a:ext cx="10059742" cy="3093154"/>
+          </a:xfrm>
+          <a:prstGeom prst="rect">
+            <a:avLst/>
+          </a:prstGeom>
+          <a:noFill/>
+          <a:ln>
+            <a:noFill/>
+          </a:ln>
+        </p:spPr>
+        <p:txBody>
+          <a:bodyPr spcFirstLastPara="1" wrap="square" lIns="0" tIns="0" rIns="0" bIns="0" anchor="t" anchorCtr="0">
+            <a:spAutoFit/>
+          </a:bodyPr>
+          <a:lstStyle/>
+          <a:p>
+            <a:r>
+              <a:rPr lang="en-US"/>
+              <a:t>“The </a:t>
+            </a:r>
+            <a:r>
+              <a:rPr lang="en-US" i="1"/>
+              <a:t>open scholarship </a:t>
+            </a:r>
+            <a:r>
+              <a:rPr lang="en-US"/>
+              <a:t>movement seeks to make knowledge of all kinds, openly shared, transparent, rigorously researched, and inclusive.” </a:t>
+            </a:r>
+            <a:r>
+              <a:rPr lang="en-US" sz="2000"/>
+              <a:t> </a:t>
+            </a:r>
+            <a:endParaRPr lang="en-US"/>
+          </a:p>
+          <a:p>
+            <a:r>
+              <a:rPr lang="en-US"/>
+              <a:t>(Azevedo, et al. “</a:t>
+            </a:r>
+            <a:r>
+              <a:rPr lang="en-US" u="sng">
+                <a:hlinkClick r:id="rId3"/>
+              </a:rPr>
+              <a:t>Towards a Culture of Open Scholarship</a:t>
+            </a:r>
+            <a:r>
+              <a:rPr lang="en-US"/>
+              <a:t>” in </a:t>
+            </a:r>
+            <a:r>
+              <a:rPr lang="en-US" i="1"/>
+              <a:t>BMC Res Notes, </a:t>
+            </a:r>
+            <a:r>
+              <a:rPr lang="en-US"/>
+              <a:t>2022)</a:t>
+            </a:r>
+          </a:p>
+          <a:p>
+            <a:br>
+              <a:rPr lang="en-US"/>
+            </a:br>
+            <a:endParaRPr lang="en-US"/>
+          </a:p>
+          <a:p>
+            <a:r>
+              <a:rPr lang="en-US"/>
+              <a:t>“Open scholarship is an umbrella term that refers to the endeavour to improve openness, integrity, social justice, diversity, equity, inclusivity and accessibility in all areas of scholarly activities. Open scholarship extends the more widely used terms open science and open research to include academic fields beyond the sciences and activities beyond academic research.”</a:t>
+            </a:r>
+          </a:p>
+          <a:p>
+            <a:r>
+              <a:rPr lang="en-US"/>
+              <a:t>(Parson, et al. “</a:t>
+            </a:r>
+            <a:r>
+              <a:rPr lang="en-US" u="sng">
+                <a:hlinkClick r:id="rId4"/>
+              </a:rPr>
+              <a:t>A community-sourced glossary of open scholarship terms</a:t>
+            </a:r>
+            <a:r>
+              <a:rPr lang="en-US"/>
+              <a:t>” in </a:t>
+            </a:r>
+            <a:r>
+              <a:rPr lang="en-US" i="1"/>
+              <a:t>Nature Human Behavior, </a:t>
+            </a:r>
+            <a:r>
+              <a:rPr lang="en-US"/>
+              <a:t>2022)</a:t>
+            </a:r>
+            <a:endParaRPr lang="en-US">
+              <a:effectLst/>
+            </a:endParaRPr>
+          </a:p>
+        </p:txBody>
+      </p:sp>
+    </p:spTree>
+    <p:extLst>
+      <p:ext uri="{BB962C8B-B14F-4D97-AF65-F5344CB8AC3E}">
+        <p14:creationId xmlns:p14="http://schemas.microsoft.com/office/powerpoint/2010/main" val="2061279562"/>
+      </p:ext>
+    </p:extLst>
+  </p:cSld>
+  <p:clrMapOvr>
+    <a:masterClrMapping/>
+  </p:clrMapOvr>
+</p:sld>
+</file>
+
+<file path=ppt/slides/slide11.xml><?xml version="1.0" encoding="utf-8"?>
+<p:sld xmlns:a="http://schemas.openxmlformats.org/drawingml/2006/main" xmlns:r="http://schemas.openxmlformats.org/officeDocument/2006/relationships" xmlns:p="http://schemas.openxmlformats.org/presentationml/2006/main">
+  <p:cSld>
+    <p:spTree>
+      <p:nvGrpSpPr>
+        <p:cNvPr id="1" name="Shape 139">
+          <a:extLst>
+            <a:ext uri="{FF2B5EF4-FFF2-40B4-BE49-F238E27FC236}">
+              <a16:creationId xmlns:a16="http://schemas.microsoft.com/office/drawing/2014/main" id="{E2ACC2F4-5F4A-DEFA-C4B9-F5EE25D72449}"/>
+            </a:ext>
+          </a:extLst>
+        </p:cNvPr>
+        <p:cNvGrpSpPr/>
+        <p:nvPr/>
+      </p:nvGrpSpPr>
+      <p:grpSpPr>
+        <a:xfrm>
+          <a:off x="0" y="0"/>
+          <a:ext cx="0" cy="0"/>
+          <a:chOff x="0" y="0"/>
+          <a:chExt cx="0" cy="0"/>
+        </a:xfrm>
+      </p:grpSpPr>
+      <p:sp>
+        <p:nvSpPr>
+          <p:cNvPr id="141" name="Google Shape;141;p26">
+            <a:extLst>
+              <a:ext uri="{FF2B5EF4-FFF2-40B4-BE49-F238E27FC236}">
+                <a16:creationId xmlns:a16="http://schemas.microsoft.com/office/drawing/2014/main" id="{1E4F55B4-E56F-5752-0D8A-34BF9EE4A236}"/>
+              </a:ext>
+            </a:extLst>
+          </p:cNvPr>
+          <p:cNvSpPr txBox="1"/>
+          <p:nvPr/>
+        </p:nvSpPr>
+        <p:spPr>
+          <a:xfrm>
+            <a:off x="922202" y="1157695"/>
+            <a:ext cx="8511218" cy="742383"/>
+          </a:xfrm>
+          <a:prstGeom prst="rect">
+            <a:avLst/>
+          </a:prstGeom>
+          <a:noFill/>
+          <a:ln>
+            <a:noFill/>
+          </a:ln>
+        </p:spPr>
+        <p:txBody>
+          <a:bodyPr spcFirstLastPara="1" wrap="square" lIns="0" tIns="0" rIns="0" bIns="0" anchor="t" anchorCtr="0">
+            <a:spAutoFit/>
+          </a:bodyPr>
+          <a:lstStyle/>
+          <a:p>
+            <a:pPr defTabSz="609630">
+              <a:lnSpc>
+                <a:spcPct val="140007"/>
+              </a:lnSpc>
+              <a:buClr>
+                <a:srgbClr val="000000"/>
+              </a:buClr>
+            </a:pPr>
+            <a:r>
+              <a:rPr lang="en-US" sz="3446" kern="0" dirty="0">
+                <a:solidFill>
+                  <a:srgbClr val="00693D"/>
+                </a:solidFill>
+                <a:latin typeface="Anton"/>
+                <a:ea typeface="Anton"/>
+                <a:cs typeface="Anton"/>
+                <a:sym typeface="Anton"/>
+              </a:rPr>
+              <a:t>Open…</a:t>
+            </a:r>
+            <a:endParaRPr sz="933" kern="0" dirty="0">
+              <a:solidFill>
+                <a:srgbClr val="000000"/>
+              </a:solidFill>
+              <a:latin typeface="Anton"/>
+              <a:ea typeface="Anton"/>
+              <a:cs typeface="Anton"/>
+              <a:sym typeface="Anton"/>
+            </a:endParaRPr>
+          </a:p>
+        </p:txBody>
+      </p:sp>
+      <p:sp>
+        <p:nvSpPr>
+          <p:cNvPr id="2" name="TextBox 1">
+            <a:extLst>
+              <a:ext uri="{FF2B5EF4-FFF2-40B4-BE49-F238E27FC236}">
+                <a16:creationId xmlns:a16="http://schemas.microsoft.com/office/drawing/2014/main" id="{2B00EA71-8E07-521A-C723-3A208373DEA2}"/>
+              </a:ext>
+            </a:extLst>
+          </p:cNvPr>
+          <p:cNvSpPr txBox="1"/>
+          <p:nvPr/>
+        </p:nvSpPr>
+        <p:spPr>
+          <a:xfrm>
+            <a:off x="922202" y="2313432"/>
+            <a:ext cx="8880166" cy="1754326"/>
+          </a:xfrm>
+          <a:prstGeom prst="rect">
+            <a:avLst/>
+          </a:prstGeom>
+          <a:noFill/>
+        </p:spPr>
+        <p:txBody>
+          <a:bodyPr wrap="square" rtlCol="0">
+            <a:spAutoFit/>
+          </a:bodyPr>
+          <a:lstStyle/>
+          <a:p>
+            <a:pPr marL="285750" indent="-285750">
+              <a:buFont typeface="Arial" panose="020B0604020202020204" pitchFamily="34" charset="0"/>
+              <a:buChar char="•"/>
+            </a:pPr>
+            <a:r>
+              <a:rPr lang="en-US" dirty="0"/>
+              <a:t>Access</a:t>
+            </a:r>
+          </a:p>
+          <a:p>
+            <a:pPr marL="285750" indent="-285750">
+              <a:buFont typeface="Arial" panose="020B0604020202020204" pitchFamily="34" charset="0"/>
+              <a:buChar char="•"/>
+            </a:pPr>
+            <a:r>
+              <a:rPr lang="en-US" dirty="0"/>
+              <a:t>Code / software</a:t>
+            </a:r>
+          </a:p>
+          <a:p>
+            <a:pPr marL="285750" indent="-285750">
+              <a:buFont typeface="Arial" panose="020B0604020202020204" pitchFamily="34" charset="0"/>
+              <a:buChar char="•"/>
+            </a:pPr>
+            <a:r>
+              <a:rPr lang="en-US" dirty="0"/>
+              <a:t>Data</a:t>
+            </a:r>
+          </a:p>
+          <a:p>
+            <a:pPr marL="285750" indent="-285750">
+              <a:buFont typeface="Arial" panose="020B0604020202020204" pitchFamily="34" charset="0"/>
+              <a:buChar char="•"/>
+            </a:pPr>
+            <a:r>
+              <a:rPr lang="en-US" dirty="0"/>
+              <a:t>Education Resources</a:t>
+            </a:r>
+          </a:p>
+          <a:p>
+            <a:pPr marL="285750" indent="-285750">
+              <a:buFont typeface="Arial" panose="020B0604020202020204" pitchFamily="34" charset="0"/>
+              <a:buChar char="•"/>
+            </a:pPr>
+            <a:r>
+              <a:rPr lang="en-US" dirty="0"/>
+              <a:t>Methods</a:t>
+            </a:r>
+          </a:p>
+          <a:p>
+            <a:pPr marL="285750" indent="-285750">
+              <a:buFont typeface="Arial" panose="020B0604020202020204" pitchFamily="34" charset="0"/>
+              <a:buChar char="•"/>
+            </a:pPr>
+            <a:r>
+              <a:rPr lang="en-US" dirty="0"/>
+              <a:t>Peer Review</a:t>
+            </a:r>
+          </a:p>
+        </p:txBody>
+      </p:sp>
+    </p:spTree>
+    <p:extLst>
+      <p:ext uri="{BB962C8B-B14F-4D97-AF65-F5344CB8AC3E}">
+        <p14:creationId xmlns:p14="http://schemas.microsoft.com/office/powerpoint/2010/main" val="4018134514"/>
+      </p:ext>
+    </p:extLst>
+  </p:cSld>
+  <p:clrMapOvr>
+    <a:masterClrMapping/>
+  </p:clrMapOvr>
+</p:sld>
+</file>
+
+<file path=ppt/slides/slide12.xml><?xml version="1.0" encoding="utf-8"?>
+<p:sld xmlns:a="http://schemas.openxmlformats.org/drawingml/2006/main" xmlns:r="http://schemas.openxmlformats.org/officeDocument/2006/relationships" xmlns:p="http://schemas.openxmlformats.org/presentationml/2006/main">
+  <p:cSld>
+    <p:spTree>
+      <p:nvGrpSpPr>
+        <p:cNvPr id="1" name=""/>
+        <p:cNvGrpSpPr/>
+        <p:nvPr/>
+      </p:nvGrpSpPr>
+      <p:grpSpPr>
+        <a:xfrm>
+          <a:off x="0" y="0"/>
+          <a:ext cx="0" cy="0"/>
+          <a:chOff x="0" y="0"/>
+          <a:chExt cx="0" cy="0"/>
+        </a:xfrm>
+      </p:grpSpPr>
+    </p:spTree>
+    <p:extLst>
+      <p:ext uri="{BB962C8B-B14F-4D97-AF65-F5344CB8AC3E}">
+        <p14:creationId xmlns:p14="http://schemas.microsoft.com/office/powerpoint/2010/main" val="1163242308"/>
+      </p:ext>
+    </p:extLst>
+  </p:cSld>
+  <p:clrMapOvr>
+    <a:masterClrMapping/>
+  </p:clrMapOvr>
+</p:sld>
+</file>
+
+<file path=ppt/slides/slide13.xml><?xml version="1.0" encoding="utf-8"?>
+<p:sld xmlns:a="http://schemas.openxmlformats.org/drawingml/2006/main" xmlns:r="http://schemas.openxmlformats.org/officeDocument/2006/relationships" xmlns:p="http://schemas.openxmlformats.org/presentationml/2006/main">
+  <p:cSld>
+    <p:spTree>
+      <p:nvGrpSpPr>
+        <p:cNvPr id="1" name="Shape 139">
+          <a:extLst>
+            <a:ext uri="{FF2B5EF4-FFF2-40B4-BE49-F238E27FC236}">
+              <a16:creationId xmlns:a16="http://schemas.microsoft.com/office/drawing/2014/main" id="{5A824A73-D159-B559-745F-F169B325320B}"/>
+            </a:ext>
+          </a:extLst>
+        </p:cNvPr>
+        <p:cNvGrpSpPr/>
+        <p:nvPr/>
+      </p:nvGrpSpPr>
+      <p:grpSpPr>
+        <a:xfrm>
+          <a:off x="0" y="0"/>
+          <a:ext cx="0" cy="0"/>
+          <a:chOff x="0" y="0"/>
+          <a:chExt cx="0" cy="0"/>
+        </a:xfrm>
+      </p:grpSpPr>
+      <p:sp>
+        <p:nvSpPr>
+          <p:cNvPr id="141" name="Google Shape;141;p26">
+            <a:extLst>
+              <a:ext uri="{FF2B5EF4-FFF2-40B4-BE49-F238E27FC236}">
+                <a16:creationId xmlns:a16="http://schemas.microsoft.com/office/drawing/2014/main" id="{522A27CE-7B2A-AA9A-4111-B886DB809C23}"/>
+              </a:ext>
+            </a:extLst>
+          </p:cNvPr>
+          <p:cNvSpPr txBox="1"/>
+          <p:nvPr/>
+        </p:nvSpPr>
+        <p:spPr>
+          <a:xfrm>
+            <a:off x="922202" y="1157695"/>
+            <a:ext cx="8511218" cy="742383"/>
+          </a:xfrm>
+          <a:prstGeom prst="rect">
+            <a:avLst/>
+          </a:prstGeom>
+          <a:noFill/>
+          <a:ln>
+            <a:noFill/>
+          </a:ln>
+        </p:spPr>
+        <p:txBody>
+          <a:bodyPr spcFirstLastPara="1" wrap="square" lIns="0" tIns="0" rIns="0" bIns="0" anchor="t" anchorCtr="0">
+            <a:spAutoFit/>
+          </a:bodyPr>
+          <a:lstStyle/>
+          <a:p>
+            <a:pPr defTabSz="609630">
+              <a:lnSpc>
+                <a:spcPct val="140007"/>
+              </a:lnSpc>
+              <a:buClr>
+                <a:srgbClr val="000000"/>
+              </a:buClr>
+            </a:pPr>
+            <a:r>
+              <a:rPr lang="en-US" sz="3446" kern="0" dirty="0">
+                <a:solidFill>
+                  <a:srgbClr val="00693D"/>
+                </a:solidFill>
+                <a:latin typeface="Anton"/>
+                <a:ea typeface="Anton"/>
+                <a:cs typeface="Anton"/>
+                <a:sym typeface="Anton"/>
+              </a:rPr>
+              <a:t>Open Scholarship</a:t>
+            </a:r>
+            <a:endParaRPr sz="933" kern="0" dirty="0">
+              <a:solidFill>
+                <a:srgbClr val="000000"/>
+              </a:solidFill>
+              <a:latin typeface="Anton"/>
+              <a:ea typeface="Anton"/>
+              <a:cs typeface="Anton"/>
+              <a:sym typeface="Anton"/>
+            </a:endParaRPr>
+          </a:p>
+        </p:txBody>
+      </p:sp>
+      <p:sp>
+        <p:nvSpPr>
+          <p:cNvPr id="142" name="Google Shape;142;p26">
+            <a:extLst>
+              <a:ext uri="{FF2B5EF4-FFF2-40B4-BE49-F238E27FC236}">
+                <a16:creationId xmlns:a16="http://schemas.microsoft.com/office/drawing/2014/main" id="{081DCE9E-3302-2CF3-85E6-5163A6FB583D}"/>
+              </a:ext>
+            </a:extLst>
+          </p:cNvPr>
+          <p:cNvSpPr txBox="1"/>
+          <p:nvPr/>
+        </p:nvSpPr>
+        <p:spPr>
+          <a:xfrm>
+            <a:off x="922202" y="2187594"/>
+            <a:ext cx="10059742" cy="1684307"/>
+          </a:xfrm>
+          <a:prstGeom prst="rect">
+            <a:avLst/>
+          </a:prstGeom>
+          <a:noFill/>
+          <a:ln>
+            <a:noFill/>
+          </a:ln>
+        </p:spPr>
+        <p:txBody>
+          <a:bodyPr spcFirstLastPara="1" wrap="square" lIns="0" tIns="0" rIns="0" bIns="0" anchor="t" anchorCtr="0">
+            <a:spAutoFit/>
+          </a:bodyPr>
+          <a:lstStyle/>
+          <a:p>
+            <a:pPr marL="433260" lvl="1" indent="-216630" defTabSz="609630">
+              <a:lnSpc>
+                <a:spcPct val="140013"/>
+              </a:lnSpc>
+              <a:buClr>
+                <a:srgbClr val="12312B"/>
+              </a:buClr>
+              <a:buSzPts val="3009"/>
+              <a:buFont typeface="Archivo Medium"/>
+              <a:buChar char="•"/>
+            </a:pPr>
+            <a:endParaRPr lang="en-US" sz="2006" b="1" kern="0" dirty="0">
+              <a:solidFill>
+                <a:srgbClr val="12312B"/>
+              </a:solidFill>
+              <a:latin typeface="Archivo Medium"/>
+              <a:ea typeface="Archivo Medium"/>
+              <a:cs typeface="Archivo Medium"/>
+              <a:sym typeface="Archivo Medium"/>
+            </a:endParaRPr>
+          </a:p>
+          <a:p>
+            <a:pPr marL="433260" lvl="1" indent="-216630" defTabSz="609630">
+              <a:lnSpc>
+                <a:spcPct val="140013"/>
+              </a:lnSpc>
+              <a:buClr>
+                <a:srgbClr val="12312B"/>
+              </a:buClr>
+              <a:buSzPts val="3009"/>
+              <a:buFont typeface="Archivo Medium"/>
+              <a:buChar char="•"/>
+            </a:pPr>
+            <a:endParaRPr lang="en-US" sz="2006" b="1" kern="0" dirty="0">
+              <a:solidFill>
+                <a:srgbClr val="12312B"/>
+              </a:solidFill>
+              <a:latin typeface="Archivo Medium"/>
+              <a:ea typeface="Archivo Medium"/>
+              <a:cs typeface="Archivo Medium"/>
+              <a:sym typeface="Archivo Medium"/>
+            </a:endParaRPr>
+          </a:p>
+          <a:p>
+            <a:pPr marL="216630" lvl="1" defTabSz="609630">
+              <a:lnSpc>
+                <a:spcPct val="140013"/>
+              </a:lnSpc>
+              <a:buClr>
+                <a:srgbClr val="12312B"/>
+              </a:buClr>
+              <a:buSzPts val="3009"/>
+            </a:pPr>
+            <a:endParaRPr lang="en-US" dirty="0">
+              <a:solidFill>
+                <a:srgbClr val="12312B"/>
+              </a:solidFill>
+              <a:latin typeface="Archivo Medium"/>
+              <a:sym typeface="Archivo Medium"/>
+            </a:endParaRPr>
+          </a:p>
+          <a:p>
+            <a:pPr defTabSz="609630">
+              <a:lnSpc>
+                <a:spcPct val="140013"/>
+              </a:lnSpc>
+              <a:buClr>
+                <a:srgbClr val="000000"/>
+              </a:buClr>
+            </a:pPr>
+            <a:endParaRPr sz="2006" kern="0" dirty="0">
+              <a:solidFill>
+                <a:srgbClr val="12312B"/>
+              </a:solidFill>
+              <a:latin typeface="Arial"/>
+              <a:ea typeface="Arial"/>
+              <a:cs typeface="Arial"/>
+              <a:sym typeface="Arial"/>
+            </a:endParaRPr>
+          </a:p>
+        </p:txBody>
+      </p:sp>
+    </p:spTree>
+    <p:extLst>
+      <p:ext uri="{BB962C8B-B14F-4D97-AF65-F5344CB8AC3E}">
+        <p14:creationId xmlns:p14="http://schemas.microsoft.com/office/powerpoint/2010/main" val="3512906071"/>
+      </p:ext>
+    </p:extLst>
+  </p:cSld>
+  <p:clrMapOvr>
+    <a:masterClrMapping/>
+  </p:clrMapOvr>
+</p:sld>
+</file>
+
+<file path=ppt/slides/slide14.xml><?xml version="1.0" encoding="utf-8"?>
+<p:sld xmlns:a="http://schemas.openxmlformats.org/drawingml/2006/main" xmlns:r="http://schemas.openxmlformats.org/officeDocument/2006/relationships" xmlns:p="http://schemas.openxmlformats.org/presentationml/2006/main">
+  <p:cSld>
+    <p:spTree>
+      <p:nvGrpSpPr>
+        <p:cNvPr id="1" name="Shape 176"/>
+        <p:cNvGrpSpPr/>
+        <p:nvPr/>
+      </p:nvGrpSpPr>
+      <p:grpSpPr>
+        <a:xfrm>
+          <a:off x="0" y="0"/>
+          <a:ext cx="0" cy="0"/>
+          <a:chOff x="0" y="0"/>
+          <a:chExt cx="0" cy="0"/>
+        </a:xfrm>
+      </p:grpSpPr>
+      <p:sp>
+        <p:nvSpPr>
+          <p:cNvPr id="178" name="Google Shape;178;p31"/>
+          <p:cNvSpPr txBox="1"/>
+          <p:nvPr/>
+        </p:nvSpPr>
+        <p:spPr>
+          <a:xfrm>
+            <a:off x="922202" y="1157695"/>
+            <a:ext cx="6097800" cy="742383"/>
+          </a:xfrm>
+          <a:prstGeom prst="rect">
+            <a:avLst/>
+          </a:prstGeom>
+          <a:noFill/>
+          <a:ln>
+            <a:noFill/>
+          </a:ln>
+        </p:spPr>
+        <p:txBody>
+          <a:bodyPr spcFirstLastPara="1" wrap="square" lIns="0" tIns="0" rIns="0" bIns="0" anchor="t" anchorCtr="0">
+            <a:spAutoFit/>
+          </a:bodyPr>
+          <a:lstStyle/>
+          <a:p>
+            <a:pPr>
+              <a:lnSpc>
+                <a:spcPct val="140007"/>
+              </a:lnSpc>
+            </a:pPr>
+            <a:r>
+              <a:rPr lang="en-US" sz="3446" dirty="0">
+                <a:solidFill>
+                  <a:srgbClr val="00693D"/>
+                </a:solidFill>
+                <a:latin typeface="Anton"/>
+                <a:ea typeface="Anton"/>
+                <a:cs typeface="Anton"/>
+                <a:sym typeface="Anton"/>
+              </a:rPr>
+              <a:t>DATA Principles</a:t>
+            </a:r>
+            <a:endParaRPr sz="1200" dirty="0">
+              <a:latin typeface="Anton"/>
+              <a:ea typeface="Anton"/>
+              <a:cs typeface="Anton"/>
+              <a:sym typeface="Anton"/>
+            </a:endParaRPr>
+          </a:p>
+        </p:txBody>
+      </p:sp>
+      <p:sp>
+        <p:nvSpPr>
+          <p:cNvPr id="179" name="Google Shape;179;p31"/>
+          <p:cNvSpPr txBox="1"/>
+          <p:nvPr/>
+        </p:nvSpPr>
+        <p:spPr>
+          <a:xfrm>
+            <a:off x="922202" y="1736904"/>
+            <a:ext cx="9776400" cy="2160848"/>
+          </a:xfrm>
+          <a:prstGeom prst="rect">
+            <a:avLst/>
+          </a:prstGeom>
+          <a:noFill/>
+          <a:ln>
+            <a:noFill/>
+          </a:ln>
+        </p:spPr>
+        <p:txBody>
+          <a:bodyPr spcFirstLastPara="1" wrap="square" lIns="0" tIns="0" rIns="0" bIns="0" anchor="t" anchorCtr="0">
+            <a:spAutoFit/>
+          </a:bodyPr>
+          <a:lstStyle/>
+          <a:p>
+            <a:pPr marL="673830" lvl="1" indent="-457200">
+              <a:lnSpc>
+                <a:spcPct val="140013"/>
+              </a:lnSpc>
+              <a:buClr>
+                <a:srgbClr val="12312B"/>
+              </a:buClr>
+              <a:buSzPct val="115000"/>
+              <a:buFont typeface="+mj-lt"/>
+              <a:buAutoNum type="arabicPeriod"/>
+            </a:pPr>
+            <a:endParaRPr lang="en-US" sz="2006" dirty="0">
+              <a:solidFill>
+                <a:srgbClr val="12312B"/>
+              </a:solidFill>
+              <a:latin typeface="Archivo Medium"/>
+              <a:ea typeface="Archivo Medium"/>
+              <a:cs typeface="Archivo Medium"/>
+              <a:sym typeface="Archivo Medium"/>
+            </a:endParaRPr>
+          </a:p>
+          <a:p>
+            <a:pPr marL="673830" lvl="1" indent="-457200">
+              <a:lnSpc>
+                <a:spcPct val="140013"/>
+              </a:lnSpc>
+              <a:buClr>
+                <a:srgbClr val="12312B"/>
+              </a:buClr>
+              <a:buSzPct val="115000"/>
+              <a:buFont typeface="+mj-lt"/>
+              <a:buAutoNum type="arabicPeriod"/>
+            </a:pPr>
+            <a:r>
+              <a:rPr lang="en-US" sz="2006" dirty="0">
+                <a:solidFill>
+                  <a:srgbClr val="12312B"/>
+                </a:solidFill>
+                <a:latin typeface="Archivo Medium"/>
+                <a:ea typeface="Archivo Medium"/>
+                <a:cs typeface="Archivo Medium"/>
+                <a:sym typeface="Archivo Medium"/>
+              </a:rPr>
+              <a:t>F.A.I.R.</a:t>
+            </a:r>
+          </a:p>
+          <a:p>
+            <a:pPr marL="673830" lvl="1" indent="-457200">
+              <a:lnSpc>
+                <a:spcPct val="140013"/>
+              </a:lnSpc>
+              <a:buClr>
+                <a:srgbClr val="12312B"/>
+              </a:buClr>
+              <a:buSzPct val="115000"/>
+              <a:buFont typeface="+mj-lt"/>
+              <a:buAutoNum type="arabicPeriod"/>
+            </a:pPr>
+            <a:r>
+              <a:rPr lang="en-US" sz="2006" dirty="0">
+                <a:solidFill>
+                  <a:srgbClr val="12312B"/>
+                </a:solidFill>
+                <a:latin typeface="Archivo Medium"/>
+                <a:ea typeface="Archivo Medium"/>
+                <a:cs typeface="Archivo Medium"/>
+                <a:sym typeface="Archivo Medium"/>
+              </a:rPr>
+              <a:t>C.A.R.E.</a:t>
+            </a:r>
+          </a:p>
+          <a:p>
+            <a:pPr marL="673830" lvl="1" indent="-457200">
+              <a:lnSpc>
+                <a:spcPct val="140013"/>
+              </a:lnSpc>
+              <a:buClr>
+                <a:srgbClr val="12312B"/>
+              </a:buClr>
+              <a:buSzPct val="115000"/>
+              <a:buFont typeface="+mj-lt"/>
+              <a:buAutoNum type="arabicPeriod"/>
+            </a:pPr>
+            <a:r>
+              <a:rPr lang="en-US" sz="2006" dirty="0">
+                <a:solidFill>
+                  <a:srgbClr val="12312B"/>
+                </a:solidFill>
+                <a:latin typeface="Archivo Medium"/>
+                <a:ea typeface="Archivo Medium"/>
+                <a:cs typeface="Archivo Medium"/>
+                <a:sym typeface="Archivo Medium"/>
+              </a:rPr>
+              <a:t>F.A.I.R.E.S.T.</a:t>
+            </a:r>
+            <a:endParaRPr sz="1200" dirty="0">
+              <a:latin typeface="Archivo Medium"/>
+              <a:ea typeface="Archivo Medium"/>
+              <a:cs typeface="Archivo Medium"/>
+              <a:sym typeface="Archivo Medium"/>
+            </a:endParaRPr>
+          </a:p>
+          <a:p>
+            <a:pPr marL="457200" indent="-457200">
+              <a:lnSpc>
+                <a:spcPct val="140013"/>
+              </a:lnSpc>
+              <a:buSzPct val="115000"/>
+              <a:buFont typeface="+mj-lt"/>
+              <a:buAutoNum type="arabicPeriod"/>
+            </a:pPr>
+            <a:endParaRPr sz="2006" dirty="0">
+              <a:solidFill>
+                <a:srgbClr val="12312B"/>
+              </a:solidFill>
+              <a:latin typeface="Arial"/>
+              <a:ea typeface="Arial"/>
+              <a:cs typeface="Arial"/>
+              <a:sym typeface="Arial"/>
+            </a:endParaRPr>
+          </a:p>
+        </p:txBody>
+      </p:sp>
+    </p:spTree>
+  </p:cSld>
+  <p:clrMapOvr>
+    <a:masterClrMapping/>
+  </p:clrMapOvr>
+</p:sld>
+</file>
+
+<file path=ppt/slides/slide15.xml><?xml version="1.0" encoding="utf-8"?>
+<p:sld xmlns:a="http://schemas.openxmlformats.org/drawingml/2006/main" xmlns:r="http://schemas.openxmlformats.org/officeDocument/2006/relationships" xmlns:p="http://schemas.openxmlformats.org/presentationml/2006/main">
+  <p:cSld>
+    <p:spTree>
+      <p:nvGrpSpPr>
+        <p:cNvPr id="1" name="Shape 176">
+          <a:extLst>
+            <a:ext uri="{FF2B5EF4-FFF2-40B4-BE49-F238E27FC236}">
+              <a16:creationId xmlns:a16="http://schemas.microsoft.com/office/drawing/2014/main" id="{292B1FE7-2414-4B31-9D90-0A225C26503A}"/>
+            </a:ext>
+          </a:extLst>
+        </p:cNvPr>
+        <p:cNvGrpSpPr/>
+        <p:nvPr/>
+      </p:nvGrpSpPr>
+      <p:grpSpPr>
+        <a:xfrm>
+          <a:off x="0" y="0"/>
+          <a:ext cx="0" cy="0"/>
+          <a:chOff x="0" y="0"/>
+          <a:chExt cx="0" cy="0"/>
+        </a:xfrm>
+      </p:grpSpPr>
+      <p:sp>
+        <p:nvSpPr>
+          <p:cNvPr id="178" name="Google Shape;178;p31">
+            <a:extLst>
+              <a:ext uri="{FF2B5EF4-FFF2-40B4-BE49-F238E27FC236}">
+                <a16:creationId xmlns:a16="http://schemas.microsoft.com/office/drawing/2014/main" id="{0D64DAFA-ECFB-0E4F-AA57-77458AE2FDEF}"/>
+              </a:ext>
+            </a:extLst>
+          </p:cNvPr>
+          <p:cNvSpPr txBox="1"/>
+          <p:nvPr/>
+        </p:nvSpPr>
+        <p:spPr>
+          <a:xfrm>
+            <a:off x="922202" y="1157695"/>
+            <a:ext cx="6097800" cy="742383"/>
+          </a:xfrm>
+          <a:prstGeom prst="rect">
+            <a:avLst/>
+          </a:prstGeom>
+          <a:noFill/>
+          <a:ln>
+            <a:noFill/>
+          </a:ln>
+        </p:spPr>
+        <p:txBody>
+          <a:bodyPr spcFirstLastPara="1" wrap="square" lIns="0" tIns="0" rIns="0" bIns="0" anchor="t" anchorCtr="0">
+            <a:spAutoFit/>
+          </a:bodyPr>
+          <a:lstStyle/>
+          <a:p>
+            <a:pPr>
+              <a:lnSpc>
+                <a:spcPct val="140007"/>
+              </a:lnSpc>
+            </a:pPr>
+            <a:r>
+              <a:rPr lang="en-US" sz="3446" dirty="0">
+                <a:solidFill>
+                  <a:srgbClr val="00693D"/>
+                </a:solidFill>
+                <a:latin typeface="Anton"/>
+                <a:ea typeface="Anton"/>
+                <a:cs typeface="Anton"/>
+                <a:sym typeface="Anton"/>
+              </a:rPr>
+              <a:t>FAIREST + CARE</a:t>
+            </a:r>
+            <a:endParaRPr sz="1200" dirty="0">
+              <a:latin typeface="Anton"/>
+              <a:ea typeface="Anton"/>
+              <a:cs typeface="Anton"/>
+              <a:sym typeface="Anton"/>
+            </a:endParaRPr>
+          </a:p>
+        </p:txBody>
+      </p:sp>
+      <p:sp>
+        <p:nvSpPr>
+          <p:cNvPr id="179" name="Google Shape;179;p31">
+            <a:extLst>
+              <a:ext uri="{FF2B5EF4-FFF2-40B4-BE49-F238E27FC236}">
+                <a16:creationId xmlns:a16="http://schemas.microsoft.com/office/drawing/2014/main" id="{FBD40D03-E1B3-8DD1-8B71-A57A24B43F49}"/>
+              </a:ext>
+            </a:extLst>
+          </p:cNvPr>
+          <p:cNvSpPr txBox="1"/>
+          <p:nvPr/>
+        </p:nvSpPr>
+        <p:spPr>
+          <a:xfrm>
+            <a:off x="922202" y="1736904"/>
+            <a:ext cx="2497273" cy="4465325"/>
+          </a:xfrm>
+          <a:prstGeom prst="rect">
+            <a:avLst/>
+          </a:prstGeom>
+          <a:noFill/>
+          <a:ln>
+            <a:noFill/>
+          </a:ln>
+        </p:spPr>
+        <p:txBody>
+          <a:bodyPr spcFirstLastPara="1" wrap="square" lIns="0" tIns="0" rIns="0" bIns="0" anchor="t" anchorCtr="0">
+            <a:spAutoFit/>
+          </a:bodyPr>
+          <a:lstStyle/>
+          <a:p>
+            <a:pPr marL="433260" lvl="1" indent="-216630">
+              <a:lnSpc>
+                <a:spcPct val="140013"/>
+              </a:lnSpc>
+              <a:buClr>
+                <a:srgbClr val="12312B"/>
+              </a:buClr>
+              <a:buSzPts val="3009"/>
+              <a:buFont typeface="Archivo Medium"/>
+              <a:buChar char="•"/>
+            </a:pPr>
+            <a:endParaRPr lang="en-US" sz="2006" dirty="0">
+              <a:solidFill>
+                <a:srgbClr val="12312B"/>
+              </a:solidFill>
+              <a:latin typeface="Archivo Medium"/>
+              <a:ea typeface="Archivo Medium"/>
+              <a:cs typeface="Archivo Medium"/>
+              <a:sym typeface="Archivo Medium"/>
+            </a:endParaRPr>
+          </a:p>
+          <a:p>
+            <a:pPr lvl="0" fontAlgn="base"/>
+            <a:r>
+              <a:rPr lang="en-US" b="1" dirty="0"/>
+              <a:t>F</a:t>
+            </a:r>
+            <a:r>
+              <a:rPr lang="en-US" dirty="0"/>
+              <a:t>indable</a:t>
+            </a:r>
+            <a:endParaRPr lang="en-US" b="1" dirty="0"/>
+          </a:p>
+          <a:p>
+            <a:pPr lvl="0" fontAlgn="base"/>
+            <a:r>
+              <a:rPr lang="en-US" b="1" dirty="0"/>
+              <a:t>A</a:t>
+            </a:r>
+            <a:r>
+              <a:rPr lang="en-US" dirty="0"/>
+              <a:t>ccessible</a:t>
+            </a:r>
+            <a:endParaRPr lang="en-US" b="1" dirty="0"/>
+          </a:p>
+          <a:p>
+            <a:pPr lvl="0" fontAlgn="base"/>
+            <a:r>
+              <a:rPr lang="en-US" b="1" dirty="0"/>
+              <a:t>I</a:t>
+            </a:r>
+            <a:r>
+              <a:rPr lang="en-US" dirty="0"/>
+              <a:t>nteroperable</a:t>
+            </a:r>
+            <a:endParaRPr lang="en-US" b="1" dirty="0"/>
+          </a:p>
+          <a:p>
+            <a:pPr lvl="0" fontAlgn="base"/>
+            <a:r>
+              <a:rPr lang="en-US" b="1" dirty="0"/>
+              <a:t>R</a:t>
+            </a:r>
+            <a:r>
+              <a:rPr lang="en-US" dirty="0"/>
+              <a:t>eusable</a:t>
+            </a:r>
+            <a:endParaRPr lang="en-US" b="1" dirty="0"/>
+          </a:p>
+          <a:p>
+            <a:pPr lvl="0" fontAlgn="base"/>
+            <a:r>
+              <a:rPr lang="en-US" b="1" dirty="0"/>
+              <a:t>E</a:t>
+            </a:r>
+            <a:r>
+              <a:rPr lang="en-US" dirty="0"/>
+              <a:t>thics</a:t>
+            </a:r>
+            <a:endParaRPr lang="en-US" b="1" dirty="0"/>
+          </a:p>
+          <a:p>
+            <a:pPr lvl="0" fontAlgn="base"/>
+            <a:r>
+              <a:rPr lang="en-US" b="1" dirty="0"/>
+              <a:t>S</a:t>
+            </a:r>
+            <a:r>
+              <a:rPr lang="en-US" dirty="0"/>
+              <a:t>ource</a:t>
+            </a:r>
+            <a:endParaRPr lang="en-US" b="1" dirty="0"/>
+          </a:p>
+          <a:p>
+            <a:pPr lvl="0" fontAlgn="base"/>
+            <a:r>
+              <a:rPr lang="en-US" b="1" dirty="0"/>
+              <a:t>T</a:t>
+            </a:r>
+            <a:r>
+              <a:rPr lang="en-US" dirty="0"/>
+              <a:t>rust</a:t>
+            </a:r>
+            <a:endParaRPr lang="en-US" b="1" dirty="0"/>
+          </a:p>
+          <a:p>
+            <a:pPr lvl="0" fontAlgn="base"/>
+            <a:br>
+              <a:rPr lang="en-US" dirty="0"/>
+            </a:br>
+            <a:endParaRPr lang="en-US" b="1" dirty="0"/>
+          </a:p>
+          <a:p>
+            <a:pPr lvl="0" fontAlgn="base"/>
+            <a:r>
+              <a:rPr lang="en-US" b="1" dirty="0"/>
+              <a:t>C</a:t>
+            </a:r>
+            <a:r>
+              <a:rPr lang="en-US" dirty="0"/>
+              <a:t>ollective Benefit</a:t>
+            </a:r>
+            <a:endParaRPr lang="en-US" b="1" dirty="0"/>
+          </a:p>
+          <a:p>
+            <a:pPr lvl="0" fontAlgn="base"/>
+            <a:r>
+              <a:rPr lang="en-US" b="1" dirty="0"/>
+              <a:t>A</a:t>
+            </a:r>
+            <a:r>
+              <a:rPr lang="en-US" dirty="0"/>
+              <a:t>uthority to Control</a:t>
+            </a:r>
+            <a:endParaRPr lang="en-US" b="1" dirty="0"/>
+          </a:p>
+          <a:p>
+            <a:pPr lvl="0" fontAlgn="base"/>
+            <a:r>
+              <a:rPr lang="en-US" b="1" dirty="0"/>
+              <a:t>R</a:t>
+            </a:r>
+            <a:r>
+              <a:rPr lang="en-US" dirty="0"/>
+              <a:t>esponsibility</a:t>
+            </a:r>
+            <a:endParaRPr lang="en-US" b="1" dirty="0"/>
+          </a:p>
+          <a:p>
+            <a:pPr lvl="0" fontAlgn="base"/>
+            <a:r>
+              <a:rPr lang="en-US" b="1" dirty="0"/>
+              <a:t>E</a:t>
+            </a:r>
+            <a:r>
+              <a:rPr lang="en-US" dirty="0"/>
+              <a:t>thics</a:t>
+            </a:r>
+            <a:endParaRPr lang="en-US" b="1" dirty="0"/>
+          </a:p>
+          <a:p>
+            <a:pPr marL="433260" lvl="1" indent="-216630">
+              <a:lnSpc>
+                <a:spcPct val="140013"/>
+              </a:lnSpc>
+              <a:buClr>
+                <a:srgbClr val="12312B"/>
+              </a:buClr>
+              <a:buSzPts val="3009"/>
+              <a:buFont typeface="Archivo Medium"/>
+              <a:buChar char="•"/>
+            </a:pPr>
+            <a:endParaRPr lang="en-US" sz="2006" dirty="0">
+              <a:solidFill>
+                <a:srgbClr val="12312B"/>
+              </a:solidFill>
+              <a:latin typeface="Archivo Medium"/>
+              <a:sym typeface="Archivo Medium"/>
+            </a:endParaRPr>
+          </a:p>
+        </p:txBody>
+      </p:sp>
+      <p:sp>
+        <p:nvSpPr>
+          <p:cNvPr id="3" name="TextBox 2">
+            <a:extLst>
+              <a:ext uri="{FF2B5EF4-FFF2-40B4-BE49-F238E27FC236}">
+                <a16:creationId xmlns:a16="http://schemas.microsoft.com/office/drawing/2014/main" id="{51C71B20-46FE-0564-1C9C-1435490547DD}"/>
+              </a:ext>
+            </a:extLst>
+          </p:cNvPr>
+          <p:cNvSpPr txBox="1"/>
+          <p:nvPr/>
+        </p:nvSpPr>
+        <p:spPr>
+          <a:xfrm>
+            <a:off x="5524500" y="1381125"/>
+            <a:ext cx="5200650" cy="1477328"/>
+          </a:xfrm>
+          <a:prstGeom prst="rect">
+            <a:avLst/>
+          </a:prstGeom>
+          <a:noFill/>
+        </p:spPr>
+        <p:txBody>
+          <a:bodyPr wrap="square" rtlCol="0">
+            <a:spAutoFit/>
+          </a:bodyPr>
+          <a:lstStyle/>
+          <a:p>
+            <a:r>
+              <a:rPr lang="en-US" b="1" dirty="0"/>
+              <a:t>BRAINSTORM</a:t>
+            </a:r>
+          </a:p>
+          <a:p>
+            <a:r>
+              <a:rPr lang="en-US" dirty="0"/>
+              <a:t>Take a few minutes to map these data principles to your research workflow diagram. Jot down specific and feasible ways you could better accomplish these objectives.</a:t>
+            </a:r>
+          </a:p>
+        </p:txBody>
+      </p:sp>
+    </p:spTree>
+    <p:extLst>
+      <p:ext uri="{BB962C8B-B14F-4D97-AF65-F5344CB8AC3E}">
+        <p14:creationId xmlns:p14="http://schemas.microsoft.com/office/powerpoint/2010/main" val="3996846082"/>
+      </p:ext>
+    </p:extLst>
+  </p:cSld>
+  <p:clrMapOvr>
+    <a:masterClrMapping/>
+  </p:clrMapOvr>
+  <p:extLst>
+    <p:ext uri="{6950BFC3-D8DA-4A85-94F7-54DA5524770B}">
+      <p188:commentRel xmlns:p188="http://schemas.microsoft.com/office/powerpoint/2018/8/main" r:id="rId3"/>
+    </p:ext>
+  </p:extLst>
+</p:sld>
+</file>
+
+<file path=ppt/slides/slide16.xml><?xml version="1.0" encoding="utf-8"?>
+<p:sld xmlns:a="http://schemas.openxmlformats.org/drawingml/2006/main" xmlns:r="http://schemas.openxmlformats.org/officeDocument/2006/relationships" xmlns:p="http://schemas.openxmlformats.org/presentationml/2006/main">
+  <p:cSld>
+    <p:spTree>
+      <p:nvGrpSpPr>
         <p:cNvPr id="1" name="Shape 176">
           <a:extLst>
             <a:ext uri="{FF2B5EF4-FFF2-40B4-BE49-F238E27FC236}">
@@ -14160,7 +15894,7 @@
 </p:sld>
 </file>
 
-<file path=ppt/slides/slide11.xml><?xml version="1.0" encoding="utf-8"?>
+<file path=ppt/slides/slide17.xml><?xml version="1.0" encoding="utf-8"?>
 <p:sld xmlns:a="http://schemas.openxmlformats.org/drawingml/2006/main" xmlns:r="http://schemas.openxmlformats.org/officeDocument/2006/relationships" xmlns:p="http://schemas.openxmlformats.org/presentationml/2006/main">
   <p:cSld>
     <p:spTree>
@@ -14247,7 +15981,94 @@
 </p:sld>
 </file>
 
-<file path=ppt/slides/slide12.xml><?xml version="1.0" encoding="utf-8"?>
+<file path=ppt/slides/slide18.xml><?xml version="1.0" encoding="utf-8"?>
+<p:sld xmlns:a="http://schemas.openxmlformats.org/drawingml/2006/main" xmlns:r="http://schemas.openxmlformats.org/officeDocument/2006/relationships" xmlns:p="http://schemas.openxmlformats.org/presentationml/2006/main">
+  <p:cSld>
+    <p:spTree>
+      <p:nvGrpSpPr>
+        <p:cNvPr id="1" name="Shape 176">
+          <a:extLst>
+            <a:ext uri="{FF2B5EF4-FFF2-40B4-BE49-F238E27FC236}">
+              <a16:creationId xmlns:a16="http://schemas.microsoft.com/office/drawing/2014/main" id="{6BCE619E-87C8-FB7D-3570-35FD954E2CA5}"/>
+            </a:ext>
+          </a:extLst>
+        </p:cNvPr>
+        <p:cNvGrpSpPr/>
+        <p:nvPr/>
+      </p:nvGrpSpPr>
+      <p:grpSpPr>
+        <a:xfrm>
+          <a:off x="0" y="0"/>
+          <a:ext cx="0" cy="0"/>
+          <a:chOff x="0" y="0"/>
+          <a:chExt cx="0" cy="0"/>
+        </a:xfrm>
+      </p:grpSpPr>
+      <p:sp>
+        <p:nvSpPr>
+          <p:cNvPr id="178" name="Google Shape;178;p31">
+            <a:extLst>
+              <a:ext uri="{FF2B5EF4-FFF2-40B4-BE49-F238E27FC236}">
+                <a16:creationId xmlns:a16="http://schemas.microsoft.com/office/drawing/2014/main" id="{DACC6461-A2B8-2677-D64B-86EA301EB140}"/>
+              </a:ext>
+            </a:extLst>
+          </p:cNvPr>
+          <p:cNvSpPr txBox="1"/>
+          <p:nvPr/>
+        </p:nvSpPr>
+        <p:spPr>
+          <a:xfrm>
+            <a:off x="922202" y="1157695"/>
+            <a:ext cx="6097800" cy="742383"/>
+          </a:xfrm>
+          <a:prstGeom prst="rect">
+            <a:avLst/>
+          </a:prstGeom>
+          <a:noFill/>
+          <a:ln>
+            <a:noFill/>
+          </a:ln>
+        </p:spPr>
+        <p:txBody>
+          <a:bodyPr spcFirstLastPara="1" wrap="square" lIns="0" tIns="0" rIns="0" bIns="0" anchor="t" anchorCtr="0">
+            <a:spAutoFit/>
+          </a:bodyPr>
+          <a:lstStyle/>
+          <a:p>
+            <a:pPr>
+              <a:lnSpc>
+                <a:spcPct val="140007"/>
+              </a:lnSpc>
+            </a:pPr>
+            <a:r>
+              <a:rPr lang="en-US" sz="3446" dirty="0">
+                <a:solidFill>
+                  <a:srgbClr val="00693D"/>
+                </a:solidFill>
+                <a:latin typeface="Anton"/>
+                <a:ea typeface="Anton"/>
+                <a:cs typeface="Anton"/>
+                <a:sym typeface="Anton"/>
+              </a:rPr>
+              <a:t>2027 Dartmouth OSCARRs!</a:t>
+            </a:r>
+          </a:p>
+        </p:txBody>
+      </p:sp>
+    </p:spTree>
+    <p:extLst>
+      <p:ext uri="{BB962C8B-B14F-4D97-AF65-F5344CB8AC3E}">
+        <p14:creationId xmlns:p14="http://schemas.microsoft.com/office/powerpoint/2010/main" val="478136561"/>
+      </p:ext>
+    </p:extLst>
+  </p:cSld>
+  <p:clrMapOvr>
+    <a:masterClrMapping/>
+  </p:clrMapOvr>
+</p:sld>
+</file>
+
+<file path=ppt/slides/slide19.xml><?xml version="1.0" encoding="utf-8"?>
 <p:sld xmlns:a="http://schemas.openxmlformats.org/drawingml/2006/main" xmlns:r="http://schemas.openxmlformats.org/officeDocument/2006/relationships" xmlns:p="http://schemas.openxmlformats.org/presentationml/2006/main">
   <p:cSld>
     <p:spTree>
@@ -14410,409 +16231,6 @@
     <p:extLst>
       <p:ext uri="{BB962C8B-B14F-4D97-AF65-F5344CB8AC3E}">
         <p14:creationId xmlns:p14="http://schemas.microsoft.com/office/powerpoint/2010/main" val="362328610"/>
-      </p:ext>
-    </p:extLst>
-  </p:cSld>
-  <p:clrMapOvr>
-    <a:masterClrMapping/>
-  </p:clrMapOvr>
-</p:sld>
-</file>
-
-<file path=ppt/slides/slide13.xml><?xml version="1.0" encoding="utf-8"?>
-<p:sld xmlns:a="http://schemas.openxmlformats.org/drawingml/2006/main" xmlns:r="http://schemas.openxmlformats.org/officeDocument/2006/relationships" xmlns:p="http://schemas.openxmlformats.org/presentationml/2006/main">
-  <p:cSld>
-    <p:spTree>
-      <p:nvGrpSpPr>
-        <p:cNvPr id="1" name="Shape 176">
-          <a:extLst>
-            <a:ext uri="{FF2B5EF4-FFF2-40B4-BE49-F238E27FC236}">
-              <a16:creationId xmlns:a16="http://schemas.microsoft.com/office/drawing/2014/main" id="{A349D701-D1D3-DA90-F00E-1EA792F21622}"/>
-            </a:ext>
-          </a:extLst>
-        </p:cNvPr>
-        <p:cNvGrpSpPr/>
-        <p:nvPr/>
-      </p:nvGrpSpPr>
-      <p:grpSpPr>
-        <a:xfrm>
-          <a:off x="0" y="0"/>
-          <a:ext cx="0" cy="0"/>
-          <a:chOff x="0" y="0"/>
-          <a:chExt cx="0" cy="0"/>
-        </a:xfrm>
-      </p:grpSpPr>
-      <p:sp>
-        <p:nvSpPr>
-          <p:cNvPr id="178" name="Google Shape;178;p31">
-            <a:extLst>
-              <a:ext uri="{FF2B5EF4-FFF2-40B4-BE49-F238E27FC236}">
-                <a16:creationId xmlns:a16="http://schemas.microsoft.com/office/drawing/2014/main" id="{AD6CAA9C-342B-838B-B8F1-3287EFE32134}"/>
-              </a:ext>
-            </a:extLst>
-          </p:cNvPr>
-          <p:cNvSpPr txBox="1"/>
-          <p:nvPr/>
-        </p:nvSpPr>
-        <p:spPr>
-          <a:xfrm>
-            <a:off x="922202" y="1157695"/>
-            <a:ext cx="6097800" cy="742383"/>
-          </a:xfrm>
-          <a:prstGeom prst="rect">
-            <a:avLst/>
-          </a:prstGeom>
-          <a:noFill/>
-          <a:ln>
-            <a:noFill/>
-          </a:ln>
-        </p:spPr>
-        <p:txBody>
-          <a:bodyPr spcFirstLastPara="1" wrap="square" lIns="0" tIns="0" rIns="0" bIns="0" anchor="t" anchorCtr="0">
-            <a:spAutoFit/>
-          </a:bodyPr>
-          <a:lstStyle/>
-          <a:p>
-            <a:pPr>
-              <a:lnSpc>
-                <a:spcPct val="140007"/>
-              </a:lnSpc>
-            </a:pPr>
-            <a:r>
-              <a:rPr lang="en-US" sz="3446" dirty="0">
-                <a:solidFill>
-                  <a:srgbClr val="00693D"/>
-                </a:solidFill>
-                <a:latin typeface="Anton"/>
-                <a:ea typeface="Anton"/>
-                <a:cs typeface="Anton"/>
-                <a:sym typeface="Anton"/>
-              </a:rPr>
-              <a:t>Best Practices – Groups??</a:t>
-            </a:r>
-          </a:p>
-        </p:txBody>
-      </p:sp>
-    </p:spTree>
-    <p:extLst>
-      <p:ext uri="{BB962C8B-B14F-4D97-AF65-F5344CB8AC3E}">
-        <p14:creationId xmlns:p14="http://schemas.microsoft.com/office/powerpoint/2010/main" val="2047668571"/>
-      </p:ext>
-    </p:extLst>
-  </p:cSld>
-  <p:clrMapOvr>
-    <a:masterClrMapping/>
-  </p:clrMapOvr>
-</p:sld>
-</file>
-
-<file path=ppt/slides/slide14.xml><?xml version="1.0" encoding="utf-8"?>
-<p:sld xmlns:a="http://schemas.openxmlformats.org/drawingml/2006/main" xmlns:r="http://schemas.openxmlformats.org/officeDocument/2006/relationships" xmlns:p="http://schemas.openxmlformats.org/presentationml/2006/main">
-  <p:cSld>
-    <p:spTree>
-      <p:nvGrpSpPr>
-        <p:cNvPr id="1" name="Shape 157">
-          <a:extLst>
-            <a:ext uri="{FF2B5EF4-FFF2-40B4-BE49-F238E27FC236}">
-              <a16:creationId xmlns:a16="http://schemas.microsoft.com/office/drawing/2014/main" id="{28155999-9215-61E9-8400-F7DAEA4CB35D}"/>
-            </a:ext>
-          </a:extLst>
-        </p:cNvPr>
-        <p:cNvGrpSpPr/>
-        <p:nvPr/>
-      </p:nvGrpSpPr>
-      <p:grpSpPr>
-        <a:xfrm>
-          <a:off x="0" y="0"/>
-          <a:ext cx="0" cy="0"/>
-          <a:chOff x="0" y="0"/>
-          <a:chExt cx="0" cy="0"/>
-        </a:xfrm>
-      </p:grpSpPr>
-      <p:sp>
-        <p:nvSpPr>
-          <p:cNvPr id="158" name="Google Shape;158;p19">
-            <a:extLst>
-              <a:ext uri="{FF2B5EF4-FFF2-40B4-BE49-F238E27FC236}">
-                <a16:creationId xmlns:a16="http://schemas.microsoft.com/office/drawing/2014/main" id="{13F6EAB8-9A12-C939-FE86-D9C6BDEE87DC}"/>
-              </a:ext>
-            </a:extLst>
-          </p:cNvPr>
-          <p:cNvSpPr txBox="1">
-            <a:spLocks noGrp="1"/>
-          </p:cNvSpPr>
-          <p:nvPr>
-            <p:ph type="title"/>
-          </p:nvPr>
-        </p:nvSpPr>
-        <p:spPr>
-          <a:xfrm>
-            <a:off x="2329800" y="1709750"/>
-            <a:ext cx="9017400" cy="2852700"/>
-          </a:xfrm>
-          <a:prstGeom prst="rect">
-            <a:avLst/>
-          </a:prstGeom>
-          <a:noFill/>
-          <a:ln>
-            <a:noFill/>
-          </a:ln>
-        </p:spPr>
-        <p:txBody>
-          <a:bodyPr spcFirstLastPara="1" wrap="square" lIns="91425" tIns="45700" rIns="91425" bIns="45700" anchor="b" anchorCtr="0">
-            <a:noAutofit/>
-          </a:bodyPr>
-          <a:lstStyle/>
-          <a:p>
-            <a:pPr marL="0" lvl="0" indent="0" algn="l" rtl="0">
-              <a:lnSpc>
-                <a:spcPct val="90000"/>
-              </a:lnSpc>
-              <a:spcBef>
-                <a:spcPts val="0"/>
-              </a:spcBef>
-              <a:spcAft>
-                <a:spcPts val="0"/>
-              </a:spcAft>
-              <a:buClr>
-                <a:schemeClr val="dk1"/>
-              </a:buClr>
-              <a:buSzPts val="6000"/>
-              <a:buFont typeface="Arial"/>
-              <a:buNone/>
-            </a:pPr>
-            <a:endParaRPr b="0" dirty="0"/>
-          </a:p>
-        </p:txBody>
-      </p:sp>
-      <p:sp>
-        <p:nvSpPr>
-          <p:cNvPr id="3" name="Rounded Rectangle 2">
-            <a:extLst>
-              <a:ext uri="{FF2B5EF4-FFF2-40B4-BE49-F238E27FC236}">
-                <a16:creationId xmlns:a16="http://schemas.microsoft.com/office/drawing/2014/main" id="{D45C2A0D-F3E9-1B01-9DF7-3C7D4261B6CC}"/>
-              </a:ext>
-            </a:extLst>
-          </p:cNvPr>
-          <p:cNvSpPr/>
-          <p:nvPr/>
-        </p:nvSpPr>
-        <p:spPr>
-          <a:xfrm>
-            <a:off x="2329800" y="1059666"/>
-            <a:ext cx="9369897" cy="4354036"/>
-          </a:xfrm>
-          <a:prstGeom prst="roundRect">
-            <a:avLst/>
-          </a:prstGeom>
-          <a:solidFill>
-            <a:schemeClr val="accent2"/>
-          </a:solidFill>
-        </p:spPr>
-        <p:style>
-          <a:lnRef idx="2">
-            <a:schemeClr val="accent1">
-              <a:shade val="15000"/>
-            </a:schemeClr>
-          </a:lnRef>
-          <a:fillRef idx="1">
-            <a:schemeClr val="accent1"/>
-          </a:fillRef>
-          <a:effectRef idx="0">
-            <a:schemeClr val="accent1"/>
-          </a:effectRef>
-          <a:fontRef idx="minor">
-            <a:schemeClr val="lt1"/>
-          </a:fontRef>
-        </p:style>
-        <p:txBody>
-          <a:bodyPr rtlCol="0" anchor="ctr"/>
-          <a:lstStyle/>
-          <a:p>
-            <a:pPr algn="ctr"/>
-            <a:r>
-              <a:rPr lang="en-US" sz="4000" dirty="0"/>
-              <a:t>How can you adapt the lessons of this workshop to your own field &amp; research?</a:t>
-            </a:r>
-          </a:p>
-        </p:txBody>
-      </p:sp>
-    </p:spTree>
-    <p:extLst>
-      <p:ext uri="{BB962C8B-B14F-4D97-AF65-F5344CB8AC3E}">
-        <p14:creationId xmlns:p14="http://schemas.microsoft.com/office/powerpoint/2010/main" val="620379946"/>
-      </p:ext>
-    </p:extLst>
-  </p:cSld>
-  <p:clrMapOvr>
-    <a:masterClrMapping/>
-  </p:clrMapOvr>
-</p:sld>
-</file>
-
-<file path=ppt/slides/slide15.xml><?xml version="1.0" encoding="utf-8"?>
-<p:sld xmlns:a="http://schemas.openxmlformats.org/drawingml/2006/main" xmlns:r="http://schemas.openxmlformats.org/officeDocument/2006/relationships" xmlns:p="http://schemas.openxmlformats.org/presentationml/2006/main">
-  <p:cSld>
-    <p:spTree>
-      <p:nvGrpSpPr>
-        <p:cNvPr id="1" name="Shape 133">
-          <a:extLst>
-            <a:ext uri="{FF2B5EF4-FFF2-40B4-BE49-F238E27FC236}">
-              <a16:creationId xmlns:a16="http://schemas.microsoft.com/office/drawing/2014/main" id="{0B04A349-5D61-5BDE-E6A0-EB092C811CA7}"/>
-            </a:ext>
-          </a:extLst>
-        </p:cNvPr>
-        <p:cNvGrpSpPr/>
-        <p:nvPr/>
-      </p:nvGrpSpPr>
-      <p:grpSpPr>
-        <a:xfrm>
-          <a:off x="0" y="0"/>
-          <a:ext cx="0" cy="0"/>
-          <a:chOff x="0" y="0"/>
-          <a:chExt cx="0" cy="0"/>
-        </a:xfrm>
-      </p:grpSpPr>
-      <p:sp>
-        <p:nvSpPr>
-          <p:cNvPr id="134" name="Google Shape;134;p25">
-            <a:extLst>
-              <a:ext uri="{FF2B5EF4-FFF2-40B4-BE49-F238E27FC236}">
-                <a16:creationId xmlns:a16="http://schemas.microsoft.com/office/drawing/2014/main" id="{85B25A89-F346-D398-0060-52FFCD5F0EFF}"/>
-              </a:ext>
-            </a:extLst>
-          </p:cNvPr>
-          <p:cNvSpPr txBox="1"/>
-          <p:nvPr/>
-        </p:nvSpPr>
-        <p:spPr>
-          <a:xfrm>
-            <a:off x="1417320" y="2148841"/>
-            <a:ext cx="9930384" cy="738664"/>
-          </a:xfrm>
-          <a:prstGeom prst="rect">
-            <a:avLst/>
-          </a:prstGeom>
-          <a:noFill/>
-          <a:ln>
-            <a:noFill/>
-          </a:ln>
-        </p:spPr>
-        <p:txBody>
-          <a:bodyPr spcFirstLastPara="1" wrap="square" lIns="0" tIns="0" rIns="0" bIns="0" anchor="t" anchorCtr="0">
-            <a:spAutoFit/>
-          </a:bodyPr>
-          <a:lstStyle/>
-          <a:p>
-            <a:pPr defTabSz="609630">
-              <a:buClr>
-                <a:srgbClr val="000000"/>
-              </a:buClr>
-            </a:pPr>
-            <a:r>
-              <a:rPr lang="en-US" sz="4800" kern="0" dirty="0">
-                <a:solidFill>
-                  <a:srgbClr val="A5D75F"/>
-                </a:solidFill>
-                <a:latin typeface="Anton"/>
-                <a:ea typeface="Anton"/>
-                <a:cs typeface="Anton"/>
-                <a:sym typeface="Anton"/>
-              </a:rPr>
-              <a:t>Computational Research Help</a:t>
-            </a:r>
-            <a:endParaRPr lang="en-US" sz="100" kern="0" dirty="0">
-              <a:solidFill>
-                <a:srgbClr val="A5D75F"/>
-              </a:solidFill>
-              <a:latin typeface="Anton"/>
-              <a:ea typeface="Anton"/>
-              <a:cs typeface="Anton"/>
-              <a:sym typeface="Anton"/>
-            </a:endParaRPr>
-          </a:p>
-        </p:txBody>
-      </p:sp>
-      <p:sp>
-        <p:nvSpPr>
-          <p:cNvPr id="135" name="Google Shape;135;p25">
-            <a:extLst>
-              <a:ext uri="{FF2B5EF4-FFF2-40B4-BE49-F238E27FC236}">
-                <a16:creationId xmlns:a16="http://schemas.microsoft.com/office/drawing/2014/main" id="{AC5C7CE0-5597-3ED7-365F-71AE9C960DA4}"/>
-              </a:ext>
-            </a:extLst>
-          </p:cNvPr>
-          <p:cNvSpPr/>
-          <p:nvPr/>
-        </p:nvSpPr>
-        <p:spPr>
-          <a:xfrm>
-            <a:off x="892384" y="3571208"/>
-            <a:ext cx="9618983" cy="780393"/>
-          </a:xfrm>
-          <a:custGeom>
-            <a:avLst/>
-            <a:gdLst/>
-            <a:ahLst/>
-            <a:cxnLst/>
-            <a:rect l="l" t="t" r="r" b="b"/>
-            <a:pathLst>
-              <a:path w="6287497" h="938348" extrusionOk="0">
-                <a:moveTo>
-                  <a:pt x="0" y="0"/>
-                </a:moveTo>
-                <a:lnTo>
-                  <a:pt x="6287496" y="0"/>
-                </a:lnTo>
-                <a:lnTo>
-                  <a:pt x="6287496" y="938349"/>
-                </a:lnTo>
-                <a:lnTo>
-                  <a:pt x="0" y="938349"/>
-                </a:lnTo>
-                <a:lnTo>
-                  <a:pt x="0" y="0"/>
-                </a:lnTo>
-                <a:close/>
-              </a:path>
-            </a:pathLst>
-          </a:custGeom>
-          <a:blipFill rotWithShape="1">
-            <a:blip r:embed="rId3">
-              <a:alphaModFix/>
-            </a:blip>
-            <a:stretch>
-              <a:fillRect/>
-            </a:stretch>
-          </a:blipFill>
-          <a:ln>
-            <a:noFill/>
-          </a:ln>
-        </p:spPr>
-        <p:txBody>
-          <a:bodyPr/>
-          <a:lstStyle/>
-          <a:p>
-            <a:pPr defTabSz="609630">
-              <a:buClr>
-                <a:srgbClr val="000000"/>
-              </a:buClr>
-            </a:pPr>
-            <a:endParaRPr lang="en-US" sz="933" kern="0" dirty="0">
-              <a:solidFill>
-                <a:srgbClr val="000000"/>
-              </a:solidFill>
-              <a:latin typeface="Arial"/>
-              <a:cs typeface="Arial"/>
-              <a:sym typeface="Arial"/>
-            </a:endParaRPr>
-          </a:p>
-        </p:txBody>
-      </p:sp>
-    </p:spTree>
-    <p:extLst>
-      <p:ext uri="{BB962C8B-B14F-4D97-AF65-F5344CB8AC3E}">
-        <p14:creationId xmlns:p14="http://schemas.microsoft.com/office/powerpoint/2010/main" val="677043658"/>
       </p:ext>
     </p:extLst>
   </p:cSld>
@@ -15102,15 +16520,15 @@
 </p:sld>
 </file>
 
-<file path=ppt/slides/slide3.xml><?xml version="1.0" encoding="utf-8"?>
+<file path=ppt/slides/slide20.xml><?xml version="1.0" encoding="utf-8"?>
 <p:sld xmlns:a="http://schemas.openxmlformats.org/drawingml/2006/main" xmlns:r="http://schemas.openxmlformats.org/officeDocument/2006/relationships" xmlns:p="http://schemas.openxmlformats.org/presentationml/2006/main">
   <p:cSld>
     <p:spTree>
       <p:nvGrpSpPr>
-        <p:cNvPr id="1" name="Shape 133">
+        <p:cNvPr id="1" name="Shape 176">
           <a:extLst>
             <a:ext uri="{FF2B5EF4-FFF2-40B4-BE49-F238E27FC236}">
-              <a16:creationId xmlns:a16="http://schemas.microsoft.com/office/drawing/2014/main" id="{B1F212BE-D56F-A8CF-808B-08CB869D9C20}"/>
+              <a16:creationId xmlns:a16="http://schemas.microsoft.com/office/drawing/2014/main" id="{A349D701-D1D3-DA90-F00E-1EA792F21622}"/>
             </a:ext>
           </a:extLst>
         </p:cNvPr>
@@ -15127,10 +16545,10 @@
       </p:grpSpPr>
       <p:sp>
         <p:nvSpPr>
-          <p:cNvPr id="134" name="Google Shape;134;p25">
+          <p:cNvPr id="178" name="Google Shape;178;p31">
             <a:extLst>
               <a:ext uri="{FF2B5EF4-FFF2-40B4-BE49-F238E27FC236}">
-                <a16:creationId xmlns:a16="http://schemas.microsoft.com/office/drawing/2014/main" id="{FE5081CA-880C-3DEA-FB7C-E5D132381299}"/>
+                <a16:creationId xmlns:a16="http://schemas.microsoft.com/office/drawing/2014/main" id="{AD6CAA9C-342B-838B-B8F1-3287EFE32134}"/>
               </a:ext>
             </a:extLst>
           </p:cNvPr>
@@ -15139,8 +16557,8 @@
         </p:nvSpPr>
         <p:spPr>
           <a:xfrm>
-            <a:off x="1417320" y="2148841"/>
-            <a:ext cx="9930384" cy="738664"/>
+            <a:off x="922202" y="1157695"/>
+            <a:ext cx="6097800" cy="742383"/>
           </a:xfrm>
           <a:prstGeom prst="rect">
             <a:avLst/>
@@ -15156,115 +16574,30 @@
           </a:bodyPr>
           <a:lstStyle/>
           <a:p>
-            <a:pPr defTabSz="609630">
-              <a:buClr>
-                <a:srgbClr val="000000"/>
-              </a:buClr>
+            <a:pPr>
+              <a:lnSpc>
+                <a:spcPct val="140007"/>
+              </a:lnSpc>
             </a:pPr>
             <a:r>
-              <a:rPr lang="en-US" sz="4800" kern="0" dirty="0">
+              <a:rPr lang="en-US" sz="3446" dirty="0">
                 <a:solidFill>
-                  <a:srgbClr val="A5D75F"/>
+                  <a:srgbClr val="00693D"/>
                 </a:solidFill>
                 <a:latin typeface="Anton"/>
                 <a:ea typeface="Anton"/>
                 <a:cs typeface="Anton"/>
                 <a:sym typeface="Anton"/>
               </a:rPr>
-              <a:t>Academic Crises Galore</a:t>
+              <a:t>Best Practices – Groups??</a:t>
             </a:r>
-            <a:endParaRPr sz="100" kern="0" dirty="0">
-              <a:solidFill>
-                <a:srgbClr val="A5D75F"/>
-              </a:solidFill>
-              <a:latin typeface="Anton"/>
-              <a:ea typeface="Anton"/>
-              <a:cs typeface="Anton"/>
-              <a:sym typeface="Anton"/>
-            </a:endParaRPr>
-          </a:p>
-        </p:txBody>
-      </p:sp>
-      <p:sp>
-        <p:nvSpPr>
-          <p:cNvPr id="135" name="Google Shape;135;p25">
-            <a:extLst>
-              <a:ext uri="{FF2B5EF4-FFF2-40B4-BE49-F238E27FC236}">
-                <a16:creationId xmlns:a16="http://schemas.microsoft.com/office/drawing/2014/main" id="{893EBE21-86A7-3B8F-79D9-C4B20E1B96ED}"/>
-              </a:ext>
-            </a:extLst>
-          </p:cNvPr>
-          <p:cNvSpPr/>
-          <p:nvPr/>
-        </p:nvSpPr>
-        <p:spPr>
-          <a:xfrm>
-            <a:off x="980469" y="3626169"/>
-            <a:ext cx="9761634" cy="780393"/>
-          </a:xfrm>
-          <a:custGeom>
-            <a:avLst/>
-            <a:gdLst/>
-            <a:ahLst/>
-            <a:cxnLst/>
-            <a:rect l="l" t="t" r="r" b="b"/>
-            <a:pathLst>
-              <a:path w="6287497" h="938348" extrusionOk="0">
-                <a:moveTo>
-                  <a:pt x="0" y="0"/>
-                </a:moveTo>
-                <a:lnTo>
-                  <a:pt x="6287496" y="0"/>
-                </a:lnTo>
-                <a:lnTo>
-                  <a:pt x="6287496" y="938349"/>
-                </a:lnTo>
-                <a:lnTo>
-                  <a:pt x="0" y="938349"/>
-                </a:lnTo>
-                <a:lnTo>
-                  <a:pt x="0" y="0"/>
-                </a:lnTo>
-                <a:close/>
-              </a:path>
-            </a:pathLst>
-          </a:custGeom>
-          <a:blipFill rotWithShape="1">
-            <a:blip r:embed="rId3">
-              <a:alphaModFix/>
-            </a:blip>
-            <a:stretch>
-              <a:fillRect/>
-            </a:stretch>
-          </a:blipFill>
-          <a:ln>
-            <a:noFill/>
-          </a:ln>
-        </p:spPr>
-        <p:txBody>
-          <a:bodyPr/>
-          <a:lstStyle/>
-          <a:p>
-            <a:pPr defTabSz="609630">
-              <a:buClr>
-                <a:srgbClr val="000000"/>
-              </a:buClr>
-            </a:pPr>
-            <a:endParaRPr lang="en-US" sz="933" kern="0">
-              <a:solidFill>
-                <a:srgbClr val="000000"/>
-              </a:solidFill>
-              <a:latin typeface="Arial"/>
-              <a:cs typeface="Arial"/>
-              <a:sym typeface="Arial"/>
-            </a:endParaRPr>
           </a:p>
         </p:txBody>
       </p:sp>
     </p:spTree>
     <p:extLst>
       <p:ext uri="{BB962C8B-B14F-4D97-AF65-F5344CB8AC3E}">
-        <p14:creationId xmlns:p14="http://schemas.microsoft.com/office/powerpoint/2010/main" val="268256856"/>
+        <p14:creationId xmlns:p14="http://schemas.microsoft.com/office/powerpoint/2010/main" val="2047668571"/>
       </p:ext>
     </p:extLst>
   </p:cSld>
@@ -15274,7 +16607,7 @@
 </p:sld>
 </file>
 
-<file path=ppt/slides/slide4.xml><?xml version="1.0" encoding="utf-8"?>
+<file path=ppt/slides/slide21.xml><?xml version="1.0" encoding="utf-8"?>
 <p:sld xmlns:a="http://schemas.openxmlformats.org/drawingml/2006/main" xmlns:r="http://schemas.openxmlformats.org/officeDocument/2006/relationships" xmlns:p="http://schemas.openxmlformats.org/presentationml/2006/main">
   <p:cSld>
     <p:spTree>
@@ -15282,7 +16615,7 @@
         <p:cNvPr id="1" name="Shape 157">
           <a:extLst>
             <a:ext uri="{FF2B5EF4-FFF2-40B4-BE49-F238E27FC236}">
-              <a16:creationId xmlns:a16="http://schemas.microsoft.com/office/drawing/2014/main" id="{7C58060A-F6DA-3DCC-F13C-67B61CFA2F9D}"/>
+              <a16:creationId xmlns:a16="http://schemas.microsoft.com/office/drawing/2014/main" id="{28155999-9215-61E9-8400-F7DAEA4CB35D}"/>
             </a:ext>
           </a:extLst>
         </p:cNvPr>
@@ -15302,7 +16635,7 @@
           <p:cNvPr id="158" name="Google Shape;158;p19">
             <a:extLst>
               <a:ext uri="{FF2B5EF4-FFF2-40B4-BE49-F238E27FC236}">
-                <a16:creationId xmlns:a16="http://schemas.microsoft.com/office/drawing/2014/main" id="{E7F78F23-2156-218C-004C-FA59EF101D1E}"/>
+                <a16:creationId xmlns:a16="http://schemas.microsoft.com/office/drawing/2014/main" id="{13F6EAB8-9A12-C939-FE86-D9C6BDEE87DC}"/>
               </a:ext>
             </a:extLst>
           </p:cNvPr>
@@ -15358,7 +16691,7 @@
           <p:cNvPr id="3" name="Rounded Rectangle 2">
             <a:extLst>
               <a:ext uri="{FF2B5EF4-FFF2-40B4-BE49-F238E27FC236}">
-                <a16:creationId xmlns:a16="http://schemas.microsoft.com/office/drawing/2014/main" id="{8BC43CAA-DBBD-4817-942C-2B1F39423C86}"/>
+                <a16:creationId xmlns:a16="http://schemas.microsoft.com/office/drawing/2014/main" id="{D45C2A0D-F3E9-1B01-9DF7-3C7D4261B6CC}"/>
               </a:ext>
             </a:extLst>
           </p:cNvPr>
@@ -15400,6 +16733,927 @@
             <a:pPr algn="ctr"/>
             <a:r>
               <a:rPr lang="en-US" sz="4000" dirty="0"/>
+              <a:t>How can you adapt the lessons of this workshop to your own field &amp; research?</a:t>
+            </a:r>
+          </a:p>
+        </p:txBody>
+      </p:sp>
+    </p:spTree>
+    <p:extLst>
+      <p:ext uri="{BB962C8B-B14F-4D97-AF65-F5344CB8AC3E}">
+        <p14:creationId xmlns:p14="http://schemas.microsoft.com/office/powerpoint/2010/main" val="620379946"/>
+      </p:ext>
+    </p:extLst>
+  </p:cSld>
+  <p:clrMapOvr>
+    <a:masterClrMapping/>
+  </p:clrMapOvr>
+</p:sld>
+</file>
+
+<file path=ppt/slides/slide22.xml><?xml version="1.0" encoding="utf-8"?>
+<p:sld xmlns:a="http://schemas.openxmlformats.org/drawingml/2006/main" xmlns:r="http://schemas.openxmlformats.org/officeDocument/2006/relationships" xmlns:p="http://schemas.openxmlformats.org/presentationml/2006/main">
+  <p:cSld>
+    <p:spTree>
+      <p:nvGrpSpPr>
+        <p:cNvPr id="1" name="Shape 133">
+          <a:extLst>
+            <a:ext uri="{FF2B5EF4-FFF2-40B4-BE49-F238E27FC236}">
+              <a16:creationId xmlns:a16="http://schemas.microsoft.com/office/drawing/2014/main" id="{0B04A349-5D61-5BDE-E6A0-EB092C811CA7}"/>
+            </a:ext>
+          </a:extLst>
+        </p:cNvPr>
+        <p:cNvGrpSpPr/>
+        <p:nvPr/>
+      </p:nvGrpSpPr>
+      <p:grpSpPr>
+        <a:xfrm>
+          <a:off x="0" y="0"/>
+          <a:ext cx="0" cy="0"/>
+          <a:chOff x="0" y="0"/>
+          <a:chExt cx="0" cy="0"/>
+        </a:xfrm>
+      </p:grpSpPr>
+      <p:sp>
+        <p:nvSpPr>
+          <p:cNvPr id="134" name="Google Shape;134;p25">
+            <a:extLst>
+              <a:ext uri="{FF2B5EF4-FFF2-40B4-BE49-F238E27FC236}">
+                <a16:creationId xmlns:a16="http://schemas.microsoft.com/office/drawing/2014/main" id="{85B25A89-F346-D398-0060-52FFCD5F0EFF}"/>
+              </a:ext>
+            </a:extLst>
+          </p:cNvPr>
+          <p:cNvSpPr txBox="1"/>
+          <p:nvPr/>
+        </p:nvSpPr>
+        <p:spPr>
+          <a:xfrm>
+            <a:off x="1417320" y="2148841"/>
+            <a:ext cx="9930384" cy="738664"/>
+          </a:xfrm>
+          <a:prstGeom prst="rect">
+            <a:avLst/>
+          </a:prstGeom>
+          <a:noFill/>
+          <a:ln>
+            <a:noFill/>
+          </a:ln>
+        </p:spPr>
+        <p:txBody>
+          <a:bodyPr spcFirstLastPara="1" wrap="square" lIns="0" tIns="0" rIns="0" bIns="0" anchor="t" anchorCtr="0">
+            <a:spAutoFit/>
+          </a:bodyPr>
+          <a:lstStyle/>
+          <a:p>
+            <a:pPr defTabSz="609630">
+              <a:buClr>
+                <a:srgbClr val="000000"/>
+              </a:buClr>
+            </a:pPr>
+            <a:r>
+              <a:rPr lang="en-US" sz="4800" kern="0" dirty="0">
+                <a:solidFill>
+                  <a:srgbClr val="A5D75F"/>
+                </a:solidFill>
+                <a:latin typeface="Anton"/>
+                <a:ea typeface="Anton"/>
+                <a:cs typeface="Anton"/>
+                <a:sym typeface="Anton"/>
+              </a:rPr>
+              <a:t>Computational Research Help</a:t>
+            </a:r>
+            <a:endParaRPr lang="en-US" sz="100" kern="0" dirty="0">
+              <a:solidFill>
+                <a:srgbClr val="A5D75F"/>
+              </a:solidFill>
+              <a:latin typeface="Anton"/>
+              <a:ea typeface="Anton"/>
+              <a:cs typeface="Anton"/>
+              <a:sym typeface="Anton"/>
+            </a:endParaRPr>
+          </a:p>
+        </p:txBody>
+      </p:sp>
+      <p:sp>
+        <p:nvSpPr>
+          <p:cNvPr id="135" name="Google Shape;135;p25">
+            <a:extLst>
+              <a:ext uri="{FF2B5EF4-FFF2-40B4-BE49-F238E27FC236}">
+                <a16:creationId xmlns:a16="http://schemas.microsoft.com/office/drawing/2014/main" id="{AC5C7CE0-5597-3ED7-365F-71AE9C960DA4}"/>
+              </a:ext>
+            </a:extLst>
+          </p:cNvPr>
+          <p:cNvSpPr/>
+          <p:nvPr/>
+        </p:nvSpPr>
+        <p:spPr>
+          <a:xfrm>
+            <a:off x="892384" y="3571208"/>
+            <a:ext cx="9618983" cy="780393"/>
+          </a:xfrm>
+          <a:custGeom>
+            <a:avLst/>
+            <a:gdLst/>
+            <a:ahLst/>
+            <a:cxnLst/>
+            <a:rect l="l" t="t" r="r" b="b"/>
+            <a:pathLst>
+              <a:path w="6287497" h="938348" extrusionOk="0">
+                <a:moveTo>
+                  <a:pt x="0" y="0"/>
+                </a:moveTo>
+                <a:lnTo>
+                  <a:pt x="6287496" y="0"/>
+                </a:lnTo>
+                <a:lnTo>
+                  <a:pt x="6287496" y="938349"/>
+                </a:lnTo>
+                <a:lnTo>
+                  <a:pt x="0" y="938349"/>
+                </a:lnTo>
+                <a:lnTo>
+                  <a:pt x="0" y="0"/>
+                </a:lnTo>
+                <a:close/>
+              </a:path>
+            </a:pathLst>
+          </a:custGeom>
+          <a:blipFill rotWithShape="1">
+            <a:blip r:embed="rId3">
+              <a:alphaModFix/>
+            </a:blip>
+            <a:stretch>
+              <a:fillRect/>
+            </a:stretch>
+          </a:blipFill>
+          <a:ln>
+            <a:noFill/>
+          </a:ln>
+        </p:spPr>
+        <p:txBody>
+          <a:bodyPr/>
+          <a:lstStyle/>
+          <a:p>
+            <a:pPr defTabSz="609630">
+              <a:buClr>
+                <a:srgbClr val="000000"/>
+              </a:buClr>
+            </a:pPr>
+            <a:endParaRPr lang="en-US" sz="933" kern="0" dirty="0">
+              <a:solidFill>
+                <a:srgbClr val="000000"/>
+              </a:solidFill>
+              <a:latin typeface="Arial"/>
+              <a:cs typeface="Arial"/>
+              <a:sym typeface="Arial"/>
+            </a:endParaRPr>
+          </a:p>
+        </p:txBody>
+      </p:sp>
+    </p:spTree>
+    <p:extLst>
+      <p:ext uri="{BB962C8B-B14F-4D97-AF65-F5344CB8AC3E}">
+        <p14:creationId xmlns:p14="http://schemas.microsoft.com/office/powerpoint/2010/main" val="677043658"/>
+      </p:ext>
+    </p:extLst>
+  </p:cSld>
+  <p:clrMapOvr>
+    <a:masterClrMapping/>
+  </p:clrMapOvr>
+</p:sld>
+</file>
+
+<file path=ppt/slides/slide3.xml><?xml version="1.0" encoding="utf-8"?>
+<p:sld xmlns:a="http://schemas.openxmlformats.org/drawingml/2006/main" xmlns:r="http://schemas.openxmlformats.org/officeDocument/2006/relationships" xmlns:p="http://schemas.openxmlformats.org/presentationml/2006/main">
+  <p:cSld>
+    <p:spTree>
+      <p:nvGrpSpPr>
+        <p:cNvPr id="1" name="Shape 133">
+          <a:extLst>
+            <a:ext uri="{FF2B5EF4-FFF2-40B4-BE49-F238E27FC236}">
+              <a16:creationId xmlns:a16="http://schemas.microsoft.com/office/drawing/2014/main" id="{B1F212BE-D56F-A8CF-808B-08CB869D9C20}"/>
+            </a:ext>
+          </a:extLst>
+        </p:cNvPr>
+        <p:cNvGrpSpPr/>
+        <p:nvPr/>
+      </p:nvGrpSpPr>
+      <p:grpSpPr>
+        <a:xfrm>
+          <a:off x="0" y="0"/>
+          <a:ext cx="0" cy="0"/>
+          <a:chOff x="0" y="0"/>
+          <a:chExt cx="0" cy="0"/>
+        </a:xfrm>
+      </p:grpSpPr>
+      <p:sp>
+        <p:nvSpPr>
+          <p:cNvPr id="134" name="Google Shape;134;p25">
+            <a:extLst>
+              <a:ext uri="{FF2B5EF4-FFF2-40B4-BE49-F238E27FC236}">
+                <a16:creationId xmlns:a16="http://schemas.microsoft.com/office/drawing/2014/main" id="{FE5081CA-880C-3DEA-FB7C-E5D132381299}"/>
+              </a:ext>
+            </a:extLst>
+          </p:cNvPr>
+          <p:cNvSpPr txBox="1"/>
+          <p:nvPr/>
+        </p:nvSpPr>
+        <p:spPr>
+          <a:xfrm>
+            <a:off x="1417320" y="2148841"/>
+            <a:ext cx="9930384" cy="738664"/>
+          </a:xfrm>
+          <a:prstGeom prst="rect">
+            <a:avLst/>
+          </a:prstGeom>
+          <a:noFill/>
+          <a:ln>
+            <a:noFill/>
+          </a:ln>
+        </p:spPr>
+        <p:txBody>
+          <a:bodyPr spcFirstLastPara="1" wrap="square" lIns="0" tIns="0" rIns="0" bIns="0" anchor="t" anchorCtr="0">
+            <a:spAutoFit/>
+          </a:bodyPr>
+          <a:lstStyle/>
+          <a:p>
+            <a:pPr defTabSz="609630">
+              <a:buClr>
+                <a:srgbClr val="000000"/>
+              </a:buClr>
+            </a:pPr>
+            <a:r>
+              <a:rPr lang="en-US" sz="4800" kern="0" dirty="0">
+                <a:solidFill>
+                  <a:srgbClr val="A5D75F"/>
+                </a:solidFill>
+                <a:latin typeface="Anton"/>
+                <a:ea typeface="Anton"/>
+                <a:cs typeface="Anton"/>
+                <a:sym typeface="Anton"/>
+              </a:rPr>
+              <a:t>Academic Crises Galore</a:t>
+            </a:r>
+            <a:endParaRPr sz="100" kern="0" dirty="0">
+              <a:solidFill>
+                <a:srgbClr val="A5D75F"/>
+              </a:solidFill>
+              <a:latin typeface="Anton"/>
+              <a:ea typeface="Anton"/>
+              <a:cs typeface="Anton"/>
+              <a:sym typeface="Anton"/>
+            </a:endParaRPr>
+          </a:p>
+        </p:txBody>
+      </p:sp>
+      <p:sp>
+        <p:nvSpPr>
+          <p:cNvPr id="135" name="Google Shape;135;p25">
+            <a:extLst>
+              <a:ext uri="{FF2B5EF4-FFF2-40B4-BE49-F238E27FC236}">
+                <a16:creationId xmlns:a16="http://schemas.microsoft.com/office/drawing/2014/main" id="{893EBE21-86A7-3B8F-79D9-C4B20E1B96ED}"/>
+              </a:ext>
+            </a:extLst>
+          </p:cNvPr>
+          <p:cNvSpPr/>
+          <p:nvPr/>
+        </p:nvSpPr>
+        <p:spPr>
+          <a:xfrm>
+            <a:off x="980469" y="3626169"/>
+            <a:ext cx="9761634" cy="780393"/>
+          </a:xfrm>
+          <a:custGeom>
+            <a:avLst/>
+            <a:gdLst/>
+            <a:ahLst/>
+            <a:cxnLst/>
+            <a:rect l="l" t="t" r="r" b="b"/>
+            <a:pathLst>
+              <a:path w="6287497" h="938348" extrusionOk="0">
+                <a:moveTo>
+                  <a:pt x="0" y="0"/>
+                </a:moveTo>
+                <a:lnTo>
+                  <a:pt x="6287496" y="0"/>
+                </a:lnTo>
+                <a:lnTo>
+                  <a:pt x="6287496" y="938349"/>
+                </a:lnTo>
+                <a:lnTo>
+                  <a:pt x="0" y="938349"/>
+                </a:lnTo>
+                <a:lnTo>
+                  <a:pt x="0" y="0"/>
+                </a:lnTo>
+                <a:close/>
+              </a:path>
+            </a:pathLst>
+          </a:custGeom>
+          <a:blipFill rotWithShape="1">
+            <a:blip r:embed="rId3">
+              <a:alphaModFix/>
+            </a:blip>
+            <a:stretch>
+              <a:fillRect/>
+            </a:stretch>
+          </a:blipFill>
+          <a:ln>
+            <a:noFill/>
+          </a:ln>
+        </p:spPr>
+        <p:txBody>
+          <a:bodyPr/>
+          <a:lstStyle/>
+          <a:p>
+            <a:pPr defTabSz="609630">
+              <a:buClr>
+                <a:srgbClr val="000000"/>
+              </a:buClr>
+            </a:pPr>
+            <a:endParaRPr lang="en-US" sz="933" kern="0">
+              <a:solidFill>
+                <a:srgbClr val="000000"/>
+              </a:solidFill>
+              <a:latin typeface="Arial"/>
+              <a:cs typeface="Arial"/>
+              <a:sym typeface="Arial"/>
+            </a:endParaRPr>
+          </a:p>
+        </p:txBody>
+      </p:sp>
+    </p:spTree>
+    <p:extLst>
+      <p:ext uri="{BB962C8B-B14F-4D97-AF65-F5344CB8AC3E}">
+        <p14:creationId xmlns:p14="http://schemas.microsoft.com/office/powerpoint/2010/main" val="268256856"/>
+      </p:ext>
+    </p:extLst>
+  </p:cSld>
+  <p:clrMapOvr>
+    <a:masterClrMapping/>
+  </p:clrMapOvr>
+</p:sld>
+</file>
+
+<file path=ppt/slides/slide4.xml><?xml version="1.0" encoding="utf-8"?>
+<p:sld xmlns:a="http://schemas.openxmlformats.org/drawingml/2006/main" xmlns:r="http://schemas.openxmlformats.org/officeDocument/2006/relationships" xmlns:p="http://schemas.openxmlformats.org/presentationml/2006/main">
+  <p:cSld>
+    <p:spTree>
+      <p:nvGrpSpPr>
+        <p:cNvPr id="1" name="Shape 139">
+          <a:extLst>
+            <a:ext uri="{FF2B5EF4-FFF2-40B4-BE49-F238E27FC236}">
+              <a16:creationId xmlns:a16="http://schemas.microsoft.com/office/drawing/2014/main" id="{513ECFFA-4B46-5790-C0BE-F3DD37B5FE18}"/>
+            </a:ext>
+          </a:extLst>
+        </p:cNvPr>
+        <p:cNvGrpSpPr/>
+        <p:nvPr/>
+      </p:nvGrpSpPr>
+      <p:grpSpPr>
+        <a:xfrm>
+          <a:off x="0" y="0"/>
+          <a:ext cx="0" cy="0"/>
+          <a:chOff x="0" y="0"/>
+          <a:chExt cx="0" cy="0"/>
+        </a:xfrm>
+      </p:grpSpPr>
+      <p:sp>
+        <p:nvSpPr>
+          <p:cNvPr id="141" name="Google Shape;141;p26">
+            <a:extLst>
+              <a:ext uri="{FF2B5EF4-FFF2-40B4-BE49-F238E27FC236}">
+                <a16:creationId xmlns:a16="http://schemas.microsoft.com/office/drawing/2014/main" id="{3B5DB79D-5246-5F19-6A6F-0BB09C41774E}"/>
+              </a:ext>
+            </a:extLst>
+          </p:cNvPr>
+          <p:cNvSpPr txBox="1"/>
+          <p:nvPr/>
+        </p:nvSpPr>
+        <p:spPr>
+          <a:xfrm>
+            <a:off x="922202" y="1157695"/>
+            <a:ext cx="10498654" cy="492443"/>
+          </a:xfrm>
+          <a:prstGeom prst="rect">
+            <a:avLst/>
+          </a:prstGeom>
+          <a:noFill/>
+          <a:ln>
+            <a:noFill/>
+          </a:ln>
+        </p:spPr>
+        <p:txBody>
+          <a:bodyPr spcFirstLastPara="1" wrap="square" lIns="0" tIns="0" rIns="0" bIns="0" anchor="t" anchorCtr="0">
+            <a:spAutoFit/>
+          </a:bodyPr>
+          <a:lstStyle/>
+          <a:p>
+            <a:pPr defTabSz="609630">
+              <a:lnSpc>
+                <a:spcPct val="100000"/>
+              </a:lnSpc>
+              <a:buClr>
+                <a:srgbClr val="000000"/>
+              </a:buClr>
+            </a:pPr>
+            <a:r>
+              <a:rPr lang="en-US" sz="3200" b="1" dirty="0"/>
+              <a:t>Why should we care about RR / OS? and why now?</a:t>
+            </a:r>
+            <a:endParaRPr sz="3200" kern="0" dirty="0">
+              <a:solidFill>
+                <a:srgbClr val="000000"/>
+              </a:solidFill>
+              <a:latin typeface="Anton"/>
+              <a:ea typeface="Anton"/>
+              <a:cs typeface="Anton"/>
+              <a:sym typeface="Anton"/>
+            </a:endParaRPr>
+          </a:p>
+        </p:txBody>
+      </p:sp>
+      <p:pic>
+        <p:nvPicPr>
+          <p:cNvPr id="2" name="Picture 1">
+            <a:extLst>
+              <a:ext uri="{FF2B5EF4-FFF2-40B4-BE49-F238E27FC236}">
+                <a16:creationId xmlns:a16="http://schemas.microsoft.com/office/drawing/2014/main" id="{719C951D-72DD-235C-9E5F-CCFD2F09DE7B}"/>
+              </a:ext>
+            </a:extLst>
+          </p:cNvPr>
+          <p:cNvPicPr>
+            <a:picLocks noChangeAspect="1"/>
+          </p:cNvPicPr>
+          <p:nvPr/>
+        </p:nvPicPr>
+        <p:blipFill>
+          <a:blip r:embed="rId3"/>
+          <a:stretch>
+            <a:fillRect/>
+          </a:stretch>
+        </p:blipFill>
+        <p:spPr>
+          <a:xfrm>
+            <a:off x="346465" y="2417143"/>
+            <a:ext cx="5071682" cy="1926336"/>
+          </a:xfrm>
+          <a:prstGeom prst="rect">
+            <a:avLst/>
+          </a:prstGeom>
+        </p:spPr>
+      </p:pic>
+      <p:pic>
+        <p:nvPicPr>
+          <p:cNvPr id="3" name="Picture 2">
+            <a:extLst>
+              <a:ext uri="{FF2B5EF4-FFF2-40B4-BE49-F238E27FC236}">
+                <a16:creationId xmlns:a16="http://schemas.microsoft.com/office/drawing/2014/main" id="{AD8890F0-13B7-0F52-C998-0E897EF68362}"/>
+              </a:ext>
+            </a:extLst>
+          </p:cNvPr>
+          <p:cNvPicPr>
+            <a:picLocks noChangeAspect="1"/>
+          </p:cNvPicPr>
+          <p:nvPr/>
+        </p:nvPicPr>
+        <p:blipFill>
+          <a:blip r:embed="rId4"/>
+          <a:stretch>
+            <a:fillRect/>
+          </a:stretch>
+        </p:blipFill>
+        <p:spPr>
+          <a:xfrm>
+            <a:off x="6292595" y="1764030"/>
+            <a:ext cx="5454329" cy="4682490"/>
+          </a:xfrm>
+          <a:prstGeom prst="rect">
+            <a:avLst/>
+          </a:prstGeom>
+        </p:spPr>
+      </p:pic>
+      <p:sp>
+        <p:nvSpPr>
+          <p:cNvPr id="4" name="TextBox 3">
+            <a:extLst>
+              <a:ext uri="{FF2B5EF4-FFF2-40B4-BE49-F238E27FC236}">
+                <a16:creationId xmlns:a16="http://schemas.microsoft.com/office/drawing/2014/main" id="{E3749EFB-20BA-629B-727F-49FDE1B741EF}"/>
+              </a:ext>
+            </a:extLst>
+          </p:cNvPr>
+          <p:cNvSpPr txBox="1"/>
+          <p:nvPr/>
+        </p:nvSpPr>
+        <p:spPr>
+          <a:xfrm>
+            <a:off x="521208" y="6329579"/>
+            <a:ext cx="11225716" cy="461665"/>
+          </a:xfrm>
+          <a:prstGeom prst="rect">
+            <a:avLst/>
+          </a:prstGeom>
+          <a:noFill/>
+        </p:spPr>
+        <p:txBody>
+          <a:bodyPr wrap="square" rtlCol="0">
+            <a:spAutoFit/>
+          </a:bodyPr>
+          <a:lstStyle/>
+          <a:p>
+            <a:r>
+              <a:rPr lang="en-US" sz="1200" dirty="0"/>
+              <a:t>https://www.nature.com/articles/d41586-025-00011-8?utm_source=Live+Audience&amp;utm_campaign=721ef416a7-nature-briefing-weekly-20250110&amp;utm_medium=email&amp;utm_term=0_b27a691814-721ef416a7-51739536</a:t>
+            </a:r>
+          </a:p>
+        </p:txBody>
+      </p:sp>
+    </p:spTree>
+    <p:extLst>
+      <p:ext uri="{BB962C8B-B14F-4D97-AF65-F5344CB8AC3E}">
+        <p14:creationId xmlns:p14="http://schemas.microsoft.com/office/powerpoint/2010/main" val="2523071363"/>
+      </p:ext>
+    </p:extLst>
+  </p:cSld>
+  <p:clrMapOvr>
+    <a:masterClrMapping/>
+  </p:clrMapOvr>
+</p:sld>
+</file>
+
+<file path=ppt/slides/slide5.xml><?xml version="1.0" encoding="utf-8"?>
+<p:sld xmlns:a="http://schemas.openxmlformats.org/drawingml/2006/main" xmlns:r="http://schemas.openxmlformats.org/officeDocument/2006/relationships" xmlns:p="http://schemas.openxmlformats.org/presentationml/2006/main">
+  <p:cSld>
+    <p:spTree>
+      <p:nvGrpSpPr>
+        <p:cNvPr id="1" name=""/>
+        <p:cNvGrpSpPr/>
+        <p:nvPr/>
+      </p:nvGrpSpPr>
+      <p:grpSpPr>
+        <a:xfrm>
+          <a:off x="0" y="0"/>
+          <a:ext cx="0" cy="0"/>
+          <a:chOff x="0" y="0"/>
+          <a:chExt cx="0" cy="0"/>
+        </a:xfrm>
+      </p:grpSpPr>
+      <p:pic>
+        <p:nvPicPr>
+          <p:cNvPr id="2" name="Picture 1">
+            <a:extLst>
+              <a:ext uri="{FF2B5EF4-FFF2-40B4-BE49-F238E27FC236}">
+                <a16:creationId xmlns:a16="http://schemas.microsoft.com/office/drawing/2014/main" id="{9EF5CDDF-2733-1F65-B3C2-CA41CBB291C3}"/>
+              </a:ext>
+            </a:extLst>
+          </p:cNvPr>
+          <p:cNvPicPr>
+            <a:picLocks noChangeAspect="1"/>
+          </p:cNvPicPr>
+          <p:nvPr/>
+        </p:nvPicPr>
+        <p:blipFill>
+          <a:blip r:embed="rId2"/>
+          <a:stretch>
+            <a:fillRect/>
+          </a:stretch>
+        </p:blipFill>
+        <p:spPr>
+          <a:xfrm>
+            <a:off x="627697" y="1422463"/>
+            <a:ext cx="4505325" cy="1114425"/>
+          </a:xfrm>
+          <a:prstGeom prst="rect">
+            <a:avLst/>
+          </a:prstGeom>
+        </p:spPr>
+      </p:pic>
+      <p:pic>
+        <p:nvPicPr>
+          <p:cNvPr id="3" name="Picture 2">
+            <a:extLst>
+              <a:ext uri="{FF2B5EF4-FFF2-40B4-BE49-F238E27FC236}">
+                <a16:creationId xmlns:a16="http://schemas.microsoft.com/office/drawing/2014/main" id="{2AE3FB67-C674-277D-BC44-6CD0D3CA2BD7}"/>
+              </a:ext>
+            </a:extLst>
+          </p:cNvPr>
+          <p:cNvPicPr>
+            <a:picLocks noChangeAspect="1"/>
+          </p:cNvPicPr>
+          <p:nvPr/>
+        </p:nvPicPr>
+        <p:blipFill>
+          <a:blip r:embed="rId3"/>
+          <a:stretch>
+            <a:fillRect/>
+          </a:stretch>
+        </p:blipFill>
+        <p:spPr>
+          <a:xfrm>
+            <a:off x="6504241" y="1398650"/>
+            <a:ext cx="4200525" cy="1162050"/>
+          </a:xfrm>
+          <a:prstGeom prst="rect">
+            <a:avLst/>
+          </a:prstGeom>
+        </p:spPr>
+      </p:pic>
+      <p:pic>
+        <p:nvPicPr>
+          <p:cNvPr id="4" name="Picture 3">
+            <a:extLst>
+              <a:ext uri="{FF2B5EF4-FFF2-40B4-BE49-F238E27FC236}">
+                <a16:creationId xmlns:a16="http://schemas.microsoft.com/office/drawing/2014/main" id="{3C1840F1-8889-5A31-766C-37727B593D15}"/>
+              </a:ext>
+            </a:extLst>
+          </p:cNvPr>
+          <p:cNvPicPr>
+            <a:picLocks noChangeAspect="1"/>
+          </p:cNvPicPr>
+          <p:nvPr/>
+        </p:nvPicPr>
+        <p:blipFill>
+          <a:blip r:embed="rId4"/>
+          <a:stretch>
+            <a:fillRect/>
+          </a:stretch>
+        </p:blipFill>
+        <p:spPr>
+          <a:xfrm>
+            <a:off x="694753" y="3530538"/>
+            <a:ext cx="3438525" cy="1581150"/>
+          </a:xfrm>
+          <a:prstGeom prst="rect">
+            <a:avLst/>
+          </a:prstGeom>
+        </p:spPr>
+      </p:pic>
+      <p:pic>
+        <p:nvPicPr>
+          <p:cNvPr id="5" name="Picture 4">
+            <a:extLst>
+              <a:ext uri="{FF2B5EF4-FFF2-40B4-BE49-F238E27FC236}">
+                <a16:creationId xmlns:a16="http://schemas.microsoft.com/office/drawing/2014/main" id="{3FAF8DF0-E5F6-8CAE-9F93-E5F85BC9B823}"/>
+              </a:ext>
+            </a:extLst>
+          </p:cNvPr>
+          <p:cNvPicPr>
+            <a:picLocks noChangeAspect="1"/>
+          </p:cNvPicPr>
+          <p:nvPr/>
+        </p:nvPicPr>
+        <p:blipFill>
+          <a:blip r:embed="rId5"/>
+          <a:stretch>
+            <a:fillRect/>
+          </a:stretch>
+        </p:blipFill>
+        <p:spPr>
+          <a:xfrm>
+            <a:off x="7232332" y="3122104"/>
+            <a:ext cx="3000375" cy="1628775"/>
+          </a:xfrm>
+          <a:prstGeom prst="rect">
+            <a:avLst/>
+          </a:prstGeom>
+        </p:spPr>
+      </p:pic>
+      <p:sp>
+        <p:nvSpPr>
+          <p:cNvPr id="6" name="TextBox 5">
+            <a:extLst>
+              <a:ext uri="{FF2B5EF4-FFF2-40B4-BE49-F238E27FC236}">
+                <a16:creationId xmlns:a16="http://schemas.microsoft.com/office/drawing/2014/main" id="{3F0D8D3F-9457-5A1B-74B3-03B3DDE3D7C6}"/>
+              </a:ext>
+            </a:extLst>
+          </p:cNvPr>
+          <p:cNvSpPr txBox="1"/>
+          <p:nvPr/>
+        </p:nvSpPr>
+        <p:spPr>
+          <a:xfrm>
+            <a:off x="1179576" y="5513832"/>
+            <a:ext cx="9381744" cy="1200329"/>
+          </a:xfrm>
+          <a:prstGeom prst="rect">
+            <a:avLst/>
+          </a:prstGeom>
+          <a:noFill/>
+        </p:spPr>
+        <p:txBody>
+          <a:bodyPr wrap="square" rtlCol="0">
+            <a:spAutoFit/>
+          </a:bodyPr>
+          <a:lstStyle/>
+          <a:p>
+            <a:pPr marL="285750" indent="-285750">
+              <a:buFont typeface="Arial" panose="020B0604020202020204" pitchFamily="34" charset="0"/>
+              <a:buChar char="•"/>
+            </a:pPr>
+            <a:r>
+              <a:rPr lang="en-US" sz="1200" u="sng" dirty="0">
+                <a:hlinkClick r:id="rId6"/>
+              </a:rPr>
+              <a:t>https://www.washingtonpost.com/outlook/2022/04/15/humanities-sciences-credibility-crisis-public-trust/</a:t>
+            </a:r>
+            <a:endParaRPr lang="en-US" sz="1200" u="sng" dirty="0"/>
+          </a:p>
+          <a:p>
+            <a:pPr marL="285750" indent="-285750">
+              <a:buFont typeface="Arial" panose="020B0604020202020204" pitchFamily="34" charset="0"/>
+              <a:buChar char="•"/>
+            </a:pPr>
+            <a:r>
+              <a:rPr lang="en-US" sz="1200" u="sng" dirty="0">
+                <a:hlinkClick r:id="rId7"/>
+              </a:rPr>
+              <a:t>https://www.insidehighered.com/advice/2023/03/09/thoughts-dealing-despair-over-state-humanities-opinion</a:t>
+            </a:r>
+            <a:r>
+              <a:rPr lang="en-US" sz="1200" dirty="0"/>
+              <a:t> </a:t>
+            </a:r>
+          </a:p>
+          <a:p>
+            <a:pPr marL="285750" indent="-285750">
+              <a:buFont typeface="Arial" panose="020B0604020202020204" pitchFamily="34" charset="0"/>
+              <a:buChar char="•"/>
+            </a:pPr>
+            <a:r>
+              <a:rPr lang="en-US" sz="1200" u="sng" dirty="0">
+                <a:hlinkClick r:id="rId8"/>
+              </a:rPr>
+              <a:t>https://news.berkeley.edu/2024/10/14/world-humanities-report-directed-by-uc-berkeleys-sara-guyer-warns-of-extinction-risk-to-human-knowledge/</a:t>
+            </a:r>
+            <a:r>
+              <a:rPr lang="en-US" sz="1200" dirty="0"/>
+              <a:t> </a:t>
+            </a:r>
+          </a:p>
+          <a:p>
+            <a:pPr marL="285750" indent="-285750">
+              <a:buFont typeface="Arial" panose="020B0604020202020204" pitchFamily="34" charset="0"/>
+              <a:buChar char="•"/>
+            </a:pPr>
+            <a:r>
+              <a:rPr lang="en-US" sz="1200" u="sng" dirty="0">
+                <a:hlinkClick r:id="rId9"/>
+              </a:rPr>
+              <a:t>https://www.theatlantic.com/ideas/archive/2018/08/the-humanities-face-a-crisisof-confidence/567565/</a:t>
+            </a:r>
+            <a:r>
+              <a:rPr lang="en-US" sz="1200" dirty="0"/>
+              <a:t> </a:t>
+            </a:r>
+          </a:p>
+          <a:p>
+            <a:pPr marL="285750" indent="-285750">
+              <a:buFont typeface="Arial" panose="020B0604020202020204" pitchFamily="34" charset="0"/>
+              <a:buChar char="•"/>
+            </a:pPr>
+            <a:endParaRPr lang="en-US" sz="1200" dirty="0"/>
+          </a:p>
+        </p:txBody>
+      </p:sp>
+    </p:spTree>
+    <p:extLst>
+      <p:ext uri="{BB962C8B-B14F-4D97-AF65-F5344CB8AC3E}">
+        <p14:creationId xmlns:p14="http://schemas.microsoft.com/office/powerpoint/2010/main" val="1163684539"/>
+      </p:ext>
+    </p:extLst>
+  </p:cSld>
+  <p:clrMapOvr>
+    <a:masterClrMapping/>
+  </p:clrMapOvr>
+</p:sld>
+</file>
+
+<file path=ppt/slides/slide6.xml><?xml version="1.0" encoding="utf-8"?>
+<p:sld xmlns:a="http://schemas.openxmlformats.org/drawingml/2006/main" xmlns:r="http://schemas.openxmlformats.org/officeDocument/2006/relationships" xmlns:p="http://schemas.openxmlformats.org/presentationml/2006/main">
+  <p:cSld>
+    <p:spTree>
+      <p:nvGrpSpPr>
+        <p:cNvPr id="1" name="Shape 157">
+          <a:extLst>
+            <a:ext uri="{FF2B5EF4-FFF2-40B4-BE49-F238E27FC236}">
+              <a16:creationId xmlns:a16="http://schemas.microsoft.com/office/drawing/2014/main" id="{7C58060A-F6DA-3DCC-F13C-67B61CFA2F9D}"/>
+            </a:ext>
+          </a:extLst>
+        </p:cNvPr>
+        <p:cNvGrpSpPr/>
+        <p:nvPr/>
+      </p:nvGrpSpPr>
+      <p:grpSpPr>
+        <a:xfrm>
+          <a:off x="0" y="0"/>
+          <a:ext cx="0" cy="0"/>
+          <a:chOff x="0" y="0"/>
+          <a:chExt cx="0" cy="0"/>
+        </a:xfrm>
+      </p:grpSpPr>
+      <p:sp>
+        <p:nvSpPr>
+          <p:cNvPr id="158" name="Google Shape;158;p19">
+            <a:extLst>
+              <a:ext uri="{FF2B5EF4-FFF2-40B4-BE49-F238E27FC236}">
+                <a16:creationId xmlns:a16="http://schemas.microsoft.com/office/drawing/2014/main" id="{E7F78F23-2156-218C-004C-FA59EF101D1E}"/>
+              </a:ext>
+            </a:extLst>
+          </p:cNvPr>
+          <p:cNvSpPr txBox="1">
+            <a:spLocks noGrp="1"/>
+          </p:cNvSpPr>
+          <p:nvPr>
+            <p:ph type="title"/>
+          </p:nvPr>
+        </p:nvSpPr>
+        <p:spPr>
+          <a:xfrm>
+            <a:off x="2329800" y="1709750"/>
+            <a:ext cx="9017400" cy="2852700"/>
+          </a:xfrm>
+          <a:prstGeom prst="rect">
+            <a:avLst/>
+          </a:prstGeom>
+          <a:noFill/>
+          <a:ln>
+            <a:noFill/>
+          </a:ln>
+        </p:spPr>
+        <p:txBody>
+          <a:bodyPr spcFirstLastPara="1" wrap="square" lIns="91425" tIns="45700" rIns="91425" bIns="45700" anchor="b" anchorCtr="0">
+            <a:noAutofit/>
+          </a:bodyPr>
+          <a:lstStyle/>
+          <a:p>
+            <a:pPr marL="0" lvl="0" indent="0" algn="l" rtl="0">
+              <a:lnSpc>
+                <a:spcPct val="90000"/>
+              </a:lnSpc>
+              <a:spcBef>
+                <a:spcPts val="0"/>
+              </a:spcBef>
+              <a:spcAft>
+                <a:spcPts val="0"/>
+              </a:spcAft>
+              <a:buClr>
+                <a:schemeClr val="dk1"/>
+              </a:buClr>
+              <a:buSzPts val="6000"/>
+              <a:buFont typeface="Arial"/>
+              <a:buNone/>
+            </a:pPr>
+            <a:endParaRPr b="0" dirty="0"/>
+          </a:p>
+        </p:txBody>
+      </p:sp>
+      <p:sp>
+        <p:nvSpPr>
+          <p:cNvPr id="3" name="Rounded Rectangle 2">
+            <a:extLst>
+              <a:ext uri="{FF2B5EF4-FFF2-40B4-BE49-F238E27FC236}">
+                <a16:creationId xmlns:a16="http://schemas.microsoft.com/office/drawing/2014/main" id="{8BC43CAA-DBBD-4817-942C-2B1F39423C86}"/>
+              </a:ext>
+            </a:extLst>
+          </p:cNvPr>
+          <p:cNvSpPr/>
+          <p:nvPr/>
+        </p:nvSpPr>
+        <p:spPr>
+          <a:xfrm>
+            <a:off x="2329800" y="1059666"/>
+            <a:ext cx="9369897" cy="4354036"/>
+          </a:xfrm>
+          <a:prstGeom prst="roundRect">
+            <a:avLst/>
+          </a:prstGeom>
+          <a:solidFill>
+            <a:schemeClr val="accent2"/>
+          </a:solidFill>
+        </p:spPr>
+        <p:style>
+          <a:lnRef idx="2">
+            <a:schemeClr val="accent1">
+              <a:shade val="15000"/>
+            </a:schemeClr>
+          </a:lnRef>
+          <a:fillRef idx="1">
+            <a:schemeClr val="accent1"/>
+          </a:fillRef>
+          <a:effectRef idx="0">
+            <a:schemeClr val="accent1"/>
+          </a:effectRef>
+          <a:fontRef idx="minor">
+            <a:schemeClr val="lt1"/>
+          </a:fontRef>
+        </p:style>
+        <p:txBody>
+          <a:bodyPr rtlCol="0" anchor="ctr"/>
+          <a:lstStyle/>
+          <a:p>
+            <a:pPr algn="ctr"/>
+            <a:r>
+              <a:rPr lang="en-US" sz="4000" dirty="0"/>
               <a:t>What does good open / reproducible research look like in your discipline?</a:t>
             </a:r>
           </a:p>
@@ -15437,7 +17691,7 @@
 </p:sld>
 </file>
 
-<file path=ppt/slides/slide5.xml><?xml version="1.0" encoding="utf-8"?>
+<file path=ppt/slides/slide7.xml><?xml version="1.0" encoding="utf-8"?>
 <p:sld xmlns:a="http://schemas.openxmlformats.org/drawingml/2006/main" xmlns:r="http://schemas.openxmlformats.org/officeDocument/2006/relationships" xmlns:p="http://schemas.openxmlformats.org/presentationml/2006/main">
   <p:cSld>
     <p:spTree>
@@ -15609,7 +17863,37 @@
 </p:sld>
 </file>
 
-<file path=ppt/slides/slide6.xml><?xml version="1.0" encoding="utf-8"?>
+<file path=ppt/slides/slide8.xml><?xml version="1.0" encoding="utf-8"?>
+<p:sld xmlns:a="http://schemas.openxmlformats.org/drawingml/2006/main" xmlns:r="http://schemas.openxmlformats.org/officeDocument/2006/relationships" xmlns:p="http://schemas.openxmlformats.org/presentationml/2006/main">
+  <p:cSld>
+    <p:spTree>
+      <p:nvGrpSpPr>
+        <p:cNvPr id="1" name=""/>
+        <p:cNvGrpSpPr/>
+        <p:nvPr/>
+      </p:nvGrpSpPr>
+      <p:grpSpPr>
+        <a:xfrm>
+          <a:off x="0" y="0"/>
+          <a:ext cx="0" cy="0"/>
+          <a:chOff x="0" y="0"/>
+          <a:chExt cx="0" cy="0"/>
+        </a:xfrm>
+      </p:grpSpPr>
+    </p:spTree>
+    <p:extLst>
+      <p:ext uri="{BB962C8B-B14F-4D97-AF65-F5344CB8AC3E}">
+        <p14:creationId xmlns:p14="http://schemas.microsoft.com/office/powerpoint/2010/main" val="747715104"/>
+      </p:ext>
+    </p:extLst>
+  </p:cSld>
+  <p:clrMapOvr>
+    <a:masterClrMapping/>
+  </p:clrMapOvr>
+</p:sld>
+</file>
+
+<file path=ppt/slides/slide9.xml><?xml version="1.0" encoding="utf-8"?>
 <p:sld xmlns:a="http://schemas.openxmlformats.org/drawingml/2006/main" xmlns:r="http://schemas.openxmlformats.org/officeDocument/2006/relationships" xmlns:p="http://schemas.openxmlformats.org/presentationml/2006/main">
   <p:cSld>
     <p:spTree>
@@ -15617,7 +17901,7 @@
         <p:cNvPr id="1" name="Shape 139">
           <a:extLst>
             <a:ext uri="{FF2B5EF4-FFF2-40B4-BE49-F238E27FC236}">
-              <a16:creationId xmlns:a16="http://schemas.microsoft.com/office/drawing/2014/main" id="{15879BB2-F066-F75E-A8DB-0F7CD248D8F7}"/>
+              <a16:creationId xmlns:a16="http://schemas.microsoft.com/office/drawing/2014/main" id="{9D08716B-E435-BFFC-1B82-7F291BB09BAE}"/>
             </a:ext>
           </a:extLst>
         </p:cNvPr>
@@ -15637,7 +17921,7 @@
           <p:cNvPr id="141" name="Google Shape;141;p26">
             <a:extLst>
               <a:ext uri="{FF2B5EF4-FFF2-40B4-BE49-F238E27FC236}">
-                <a16:creationId xmlns:a16="http://schemas.microsoft.com/office/drawing/2014/main" id="{0C5E1074-6BF4-21EF-64AF-3358BF019D54}"/>
+                <a16:creationId xmlns:a16="http://schemas.microsoft.com/office/drawing/2014/main" id="{78E586CE-EAB9-478A-905E-310D986723F8}"/>
               </a:ext>
             </a:extLst>
           </p:cNvPr>
@@ -15695,737 +17979,16 @@
           </a:p>
         </p:txBody>
       </p:sp>
-      <p:sp>
-        <p:nvSpPr>
-          <p:cNvPr id="142" name="Google Shape;142;p26">
-            <a:extLst>
-              <a:ext uri="{FF2B5EF4-FFF2-40B4-BE49-F238E27FC236}">
-                <a16:creationId xmlns:a16="http://schemas.microsoft.com/office/drawing/2014/main" id="{2F69E860-2826-C663-75C7-D65490E0A9CA}"/>
-              </a:ext>
-            </a:extLst>
-          </p:cNvPr>
-          <p:cNvSpPr txBox="1"/>
-          <p:nvPr/>
-        </p:nvSpPr>
-        <p:spPr>
-          <a:xfrm>
-            <a:off x="922202" y="2187594"/>
-            <a:ext cx="10059742" cy="1684307"/>
-          </a:xfrm>
-          <a:prstGeom prst="rect">
-            <a:avLst/>
-          </a:prstGeom>
-          <a:noFill/>
-          <a:ln>
-            <a:noFill/>
-          </a:ln>
-        </p:spPr>
-        <p:txBody>
-          <a:bodyPr spcFirstLastPara="1" wrap="square" lIns="0" tIns="0" rIns="0" bIns="0" anchor="t" anchorCtr="0">
-            <a:spAutoFit/>
-          </a:bodyPr>
-          <a:lstStyle/>
-          <a:p>
-            <a:pPr marL="433260" lvl="1" indent="-216630" defTabSz="609630">
-              <a:lnSpc>
-                <a:spcPct val="140013"/>
-              </a:lnSpc>
-              <a:buClr>
-                <a:srgbClr val="12312B"/>
-              </a:buClr>
-              <a:buSzPts val="3009"/>
-              <a:buFont typeface="Archivo Medium"/>
-              <a:buChar char="•"/>
-            </a:pPr>
-            <a:endParaRPr lang="en-US" sz="2006" b="1" kern="0" dirty="0">
-              <a:solidFill>
-                <a:srgbClr val="12312B"/>
-              </a:solidFill>
-              <a:latin typeface="Archivo Medium"/>
-              <a:ea typeface="Archivo Medium"/>
-              <a:cs typeface="Archivo Medium"/>
-              <a:sym typeface="Archivo Medium"/>
-            </a:endParaRPr>
-          </a:p>
-          <a:p>
-            <a:pPr marL="433260" lvl="1" indent="-216630" defTabSz="609630">
-              <a:lnSpc>
-                <a:spcPct val="140013"/>
-              </a:lnSpc>
-              <a:buClr>
-                <a:srgbClr val="12312B"/>
-              </a:buClr>
-              <a:buSzPts val="3009"/>
-              <a:buFont typeface="Archivo Medium"/>
-              <a:buChar char="•"/>
-            </a:pPr>
-            <a:endParaRPr lang="en-US" sz="2006" b="1" kern="0" dirty="0">
-              <a:solidFill>
-                <a:srgbClr val="12312B"/>
-              </a:solidFill>
-              <a:latin typeface="Archivo Medium"/>
-              <a:ea typeface="Archivo Medium"/>
-              <a:cs typeface="Archivo Medium"/>
-              <a:sym typeface="Archivo Medium"/>
-            </a:endParaRPr>
-          </a:p>
-          <a:p>
-            <a:pPr marL="216630" lvl="1" defTabSz="609630">
-              <a:lnSpc>
-                <a:spcPct val="140013"/>
-              </a:lnSpc>
-              <a:buClr>
-                <a:srgbClr val="12312B"/>
-              </a:buClr>
-              <a:buSzPts val="3009"/>
-            </a:pPr>
-            <a:endParaRPr lang="en-US" dirty="0">
-              <a:solidFill>
-                <a:srgbClr val="12312B"/>
-              </a:solidFill>
-              <a:latin typeface="Archivo Medium"/>
-              <a:sym typeface="Archivo Medium"/>
-            </a:endParaRPr>
-          </a:p>
-          <a:p>
-            <a:pPr defTabSz="609630">
-              <a:lnSpc>
-                <a:spcPct val="140013"/>
-              </a:lnSpc>
-              <a:buClr>
-                <a:srgbClr val="000000"/>
-              </a:buClr>
-            </a:pPr>
-            <a:endParaRPr sz="2006" kern="0" dirty="0">
-              <a:solidFill>
-                <a:srgbClr val="12312B"/>
-              </a:solidFill>
-              <a:latin typeface="Arial"/>
-              <a:ea typeface="Arial"/>
-              <a:cs typeface="Arial"/>
-              <a:sym typeface="Arial"/>
-            </a:endParaRPr>
-          </a:p>
-        </p:txBody>
-      </p:sp>
     </p:spTree>
     <p:extLst>
       <p:ext uri="{BB962C8B-B14F-4D97-AF65-F5344CB8AC3E}">
-        <p14:creationId xmlns:p14="http://schemas.microsoft.com/office/powerpoint/2010/main" val="2061279562"/>
+        <p14:creationId xmlns:p14="http://schemas.microsoft.com/office/powerpoint/2010/main" val="2405714910"/>
       </p:ext>
     </p:extLst>
   </p:cSld>
   <p:clrMapOvr>
     <a:masterClrMapping/>
   </p:clrMapOvr>
-</p:sld>
-</file>
-
-<file path=ppt/slides/slide7.xml><?xml version="1.0" encoding="utf-8"?>
-<p:sld xmlns:a="http://schemas.openxmlformats.org/drawingml/2006/main" xmlns:r="http://schemas.openxmlformats.org/officeDocument/2006/relationships" xmlns:p="http://schemas.openxmlformats.org/presentationml/2006/main">
-  <p:cSld>
-    <p:spTree>
-      <p:nvGrpSpPr>
-        <p:cNvPr id="1" name="Shape 139">
-          <a:extLst>
-            <a:ext uri="{FF2B5EF4-FFF2-40B4-BE49-F238E27FC236}">
-              <a16:creationId xmlns:a16="http://schemas.microsoft.com/office/drawing/2014/main" id="{5A824A73-D159-B559-745F-F169B325320B}"/>
-            </a:ext>
-          </a:extLst>
-        </p:cNvPr>
-        <p:cNvGrpSpPr/>
-        <p:nvPr/>
-      </p:nvGrpSpPr>
-      <p:grpSpPr>
-        <a:xfrm>
-          <a:off x="0" y="0"/>
-          <a:ext cx="0" cy="0"/>
-          <a:chOff x="0" y="0"/>
-          <a:chExt cx="0" cy="0"/>
-        </a:xfrm>
-      </p:grpSpPr>
-      <p:sp>
-        <p:nvSpPr>
-          <p:cNvPr id="141" name="Google Shape;141;p26">
-            <a:extLst>
-              <a:ext uri="{FF2B5EF4-FFF2-40B4-BE49-F238E27FC236}">
-                <a16:creationId xmlns:a16="http://schemas.microsoft.com/office/drawing/2014/main" id="{522A27CE-7B2A-AA9A-4111-B886DB809C23}"/>
-              </a:ext>
-            </a:extLst>
-          </p:cNvPr>
-          <p:cNvSpPr txBox="1"/>
-          <p:nvPr/>
-        </p:nvSpPr>
-        <p:spPr>
-          <a:xfrm>
-            <a:off x="922202" y="1157695"/>
-            <a:ext cx="8511218" cy="742383"/>
-          </a:xfrm>
-          <a:prstGeom prst="rect">
-            <a:avLst/>
-          </a:prstGeom>
-          <a:noFill/>
-          <a:ln>
-            <a:noFill/>
-          </a:ln>
-        </p:spPr>
-        <p:txBody>
-          <a:bodyPr spcFirstLastPara="1" wrap="square" lIns="0" tIns="0" rIns="0" bIns="0" anchor="t" anchorCtr="0">
-            <a:spAutoFit/>
-          </a:bodyPr>
-          <a:lstStyle/>
-          <a:p>
-            <a:pPr defTabSz="609630">
-              <a:lnSpc>
-                <a:spcPct val="140007"/>
-              </a:lnSpc>
-              <a:buClr>
-                <a:srgbClr val="000000"/>
-              </a:buClr>
-            </a:pPr>
-            <a:r>
-              <a:rPr lang="en-US" sz="3446" kern="0" dirty="0">
-                <a:solidFill>
-                  <a:srgbClr val="00693D"/>
-                </a:solidFill>
-                <a:latin typeface="Anton"/>
-                <a:ea typeface="Anton"/>
-                <a:cs typeface="Anton"/>
-                <a:sym typeface="Anton"/>
-              </a:rPr>
-              <a:t>Open Scholarship</a:t>
-            </a:r>
-            <a:endParaRPr sz="933" kern="0" dirty="0">
-              <a:solidFill>
-                <a:srgbClr val="000000"/>
-              </a:solidFill>
-              <a:latin typeface="Anton"/>
-              <a:ea typeface="Anton"/>
-              <a:cs typeface="Anton"/>
-              <a:sym typeface="Anton"/>
-            </a:endParaRPr>
-          </a:p>
-        </p:txBody>
-      </p:sp>
-      <p:sp>
-        <p:nvSpPr>
-          <p:cNvPr id="142" name="Google Shape;142;p26">
-            <a:extLst>
-              <a:ext uri="{FF2B5EF4-FFF2-40B4-BE49-F238E27FC236}">
-                <a16:creationId xmlns:a16="http://schemas.microsoft.com/office/drawing/2014/main" id="{081DCE9E-3302-2CF3-85E6-5163A6FB583D}"/>
-              </a:ext>
-            </a:extLst>
-          </p:cNvPr>
-          <p:cNvSpPr txBox="1"/>
-          <p:nvPr/>
-        </p:nvSpPr>
-        <p:spPr>
-          <a:xfrm>
-            <a:off x="922202" y="2187594"/>
-            <a:ext cx="10059742" cy="1684307"/>
-          </a:xfrm>
-          <a:prstGeom prst="rect">
-            <a:avLst/>
-          </a:prstGeom>
-          <a:noFill/>
-          <a:ln>
-            <a:noFill/>
-          </a:ln>
-        </p:spPr>
-        <p:txBody>
-          <a:bodyPr spcFirstLastPara="1" wrap="square" lIns="0" tIns="0" rIns="0" bIns="0" anchor="t" anchorCtr="0">
-            <a:spAutoFit/>
-          </a:bodyPr>
-          <a:lstStyle/>
-          <a:p>
-            <a:pPr marL="433260" lvl="1" indent="-216630" defTabSz="609630">
-              <a:lnSpc>
-                <a:spcPct val="140013"/>
-              </a:lnSpc>
-              <a:buClr>
-                <a:srgbClr val="12312B"/>
-              </a:buClr>
-              <a:buSzPts val="3009"/>
-              <a:buFont typeface="Archivo Medium"/>
-              <a:buChar char="•"/>
-            </a:pPr>
-            <a:endParaRPr lang="en-US" sz="2006" b="1" kern="0" dirty="0">
-              <a:solidFill>
-                <a:srgbClr val="12312B"/>
-              </a:solidFill>
-              <a:latin typeface="Archivo Medium"/>
-              <a:ea typeface="Archivo Medium"/>
-              <a:cs typeface="Archivo Medium"/>
-              <a:sym typeface="Archivo Medium"/>
-            </a:endParaRPr>
-          </a:p>
-          <a:p>
-            <a:pPr marL="433260" lvl="1" indent="-216630" defTabSz="609630">
-              <a:lnSpc>
-                <a:spcPct val="140013"/>
-              </a:lnSpc>
-              <a:buClr>
-                <a:srgbClr val="12312B"/>
-              </a:buClr>
-              <a:buSzPts val="3009"/>
-              <a:buFont typeface="Archivo Medium"/>
-              <a:buChar char="•"/>
-            </a:pPr>
-            <a:endParaRPr lang="en-US" sz="2006" b="1" kern="0" dirty="0">
-              <a:solidFill>
-                <a:srgbClr val="12312B"/>
-              </a:solidFill>
-              <a:latin typeface="Archivo Medium"/>
-              <a:ea typeface="Archivo Medium"/>
-              <a:cs typeface="Archivo Medium"/>
-              <a:sym typeface="Archivo Medium"/>
-            </a:endParaRPr>
-          </a:p>
-          <a:p>
-            <a:pPr marL="216630" lvl="1" defTabSz="609630">
-              <a:lnSpc>
-                <a:spcPct val="140013"/>
-              </a:lnSpc>
-              <a:buClr>
-                <a:srgbClr val="12312B"/>
-              </a:buClr>
-              <a:buSzPts val="3009"/>
-            </a:pPr>
-            <a:endParaRPr lang="en-US" dirty="0">
-              <a:solidFill>
-                <a:srgbClr val="12312B"/>
-              </a:solidFill>
-              <a:latin typeface="Archivo Medium"/>
-              <a:sym typeface="Archivo Medium"/>
-            </a:endParaRPr>
-          </a:p>
-          <a:p>
-            <a:pPr defTabSz="609630">
-              <a:lnSpc>
-                <a:spcPct val="140013"/>
-              </a:lnSpc>
-              <a:buClr>
-                <a:srgbClr val="000000"/>
-              </a:buClr>
-            </a:pPr>
-            <a:endParaRPr sz="2006" kern="0" dirty="0">
-              <a:solidFill>
-                <a:srgbClr val="12312B"/>
-              </a:solidFill>
-              <a:latin typeface="Arial"/>
-              <a:ea typeface="Arial"/>
-              <a:cs typeface="Arial"/>
-              <a:sym typeface="Arial"/>
-            </a:endParaRPr>
-          </a:p>
-        </p:txBody>
-      </p:sp>
-    </p:spTree>
-    <p:extLst>
-      <p:ext uri="{BB962C8B-B14F-4D97-AF65-F5344CB8AC3E}">
-        <p14:creationId xmlns:p14="http://schemas.microsoft.com/office/powerpoint/2010/main" val="3512906071"/>
-      </p:ext>
-    </p:extLst>
-  </p:cSld>
-  <p:clrMapOvr>
-    <a:masterClrMapping/>
-  </p:clrMapOvr>
-</p:sld>
-</file>
-
-<file path=ppt/slides/slide8.xml><?xml version="1.0" encoding="utf-8"?>
-<p:sld xmlns:a="http://schemas.openxmlformats.org/drawingml/2006/main" xmlns:r="http://schemas.openxmlformats.org/officeDocument/2006/relationships" xmlns:p="http://schemas.openxmlformats.org/presentationml/2006/main">
-  <p:cSld>
-    <p:spTree>
-      <p:nvGrpSpPr>
-        <p:cNvPr id="1" name="Shape 176"/>
-        <p:cNvGrpSpPr/>
-        <p:nvPr/>
-      </p:nvGrpSpPr>
-      <p:grpSpPr>
-        <a:xfrm>
-          <a:off x="0" y="0"/>
-          <a:ext cx="0" cy="0"/>
-          <a:chOff x="0" y="0"/>
-          <a:chExt cx="0" cy="0"/>
-        </a:xfrm>
-      </p:grpSpPr>
-      <p:sp>
-        <p:nvSpPr>
-          <p:cNvPr id="178" name="Google Shape;178;p31"/>
-          <p:cNvSpPr txBox="1"/>
-          <p:nvPr/>
-        </p:nvSpPr>
-        <p:spPr>
-          <a:xfrm>
-            <a:off x="922202" y="1157695"/>
-            <a:ext cx="6097800" cy="742383"/>
-          </a:xfrm>
-          <a:prstGeom prst="rect">
-            <a:avLst/>
-          </a:prstGeom>
-          <a:noFill/>
-          <a:ln>
-            <a:noFill/>
-          </a:ln>
-        </p:spPr>
-        <p:txBody>
-          <a:bodyPr spcFirstLastPara="1" wrap="square" lIns="0" tIns="0" rIns="0" bIns="0" anchor="t" anchorCtr="0">
-            <a:spAutoFit/>
-          </a:bodyPr>
-          <a:lstStyle/>
-          <a:p>
-            <a:pPr>
-              <a:lnSpc>
-                <a:spcPct val="140007"/>
-              </a:lnSpc>
-            </a:pPr>
-            <a:r>
-              <a:rPr lang="en-US" sz="3446" dirty="0">
-                <a:solidFill>
-                  <a:srgbClr val="00693D"/>
-                </a:solidFill>
-                <a:latin typeface="Anton"/>
-                <a:ea typeface="Anton"/>
-                <a:cs typeface="Anton"/>
-                <a:sym typeface="Anton"/>
-              </a:rPr>
-              <a:t>DATA Principles</a:t>
-            </a:r>
-            <a:endParaRPr sz="1200" dirty="0">
-              <a:latin typeface="Anton"/>
-              <a:ea typeface="Anton"/>
-              <a:cs typeface="Anton"/>
-              <a:sym typeface="Anton"/>
-            </a:endParaRPr>
-          </a:p>
-        </p:txBody>
-      </p:sp>
-      <p:sp>
-        <p:nvSpPr>
-          <p:cNvPr id="179" name="Google Shape;179;p31"/>
-          <p:cNvSpPr txBox="1"/>
-          <p:nvPr/>
-        </p:nvSpPr>
-        <p:spPr>
-          <a:xfrm>
-            <a:off x="922202" y="1736904"/>
-            <a:ext cx="9776400" cy="2160848"/>
-          </a:xfrm>
-          <a:prstGeom prst="rect">
-            <a:avLst/>
-          </a:prstGeom>
-          <a:noFill/>
-          <a:ln>
-            <a:noFill/>
-          </a:ln>
-        </p:spPr>
-        <p:txBody>
-          <a:bodyPr spcFirstLastPara="1" wrap="square" lIns="0" tIns="0" rIns="0" bIns="0" anchor="t" anchorCtr="0">
-            <a:spAutoFit/>
-          </a:bodyPr>
-          <a:lstStyle/>
-          <a:p>
-            <a:pPr marL="673830" lvl="1" indent="-457200">
-              <a:lnSpc>
-                <a:spcPct val="140013"/>
-              </a:lnSpc>
-              <a:buClr>
-                <a:srgbClr val="12312B"/>
-              </a:buClr>
-              <a:buSzPct val="115000"/>
-              <a:buFont typeface="+mj-lt"/>
-              <a:buAutoNum type="arabicPeriod"/>
-            </a:pPr>
-            <a:endParaRPr lang="en-US" sz="2006" dirty="0">
-              <a:solidFill>
-                <a:srgbClr val="12312B"/>
-              </a:solidFill>
-              <a:latin typeface="Archivo Medium"/>
-              <a:ea typeface="Archivo Medium"/>
-              <a:cs typeface="Archivo Medium"/>
-              <a:sym typeface="Archivo Medium"/>
-            </a:endParaRPr>
-          </a:p>
-          <a:p>
-            <a:pPr marL="673830" lvl="1" indent="-457200">
-              <a:lnSpc>
-                <a:spcPct val="140013"/>
-              </a:lnSpc>
-              <a:buClr>
-                <a:srgbClr val="12312B"/>
-              </a:buClr>
-              <a:buSzPct val="115000"/>
-              <a:buFont typeface="+mj-lt"/>
-              <a:buAutoNum type="arabicPeriod"/>
-            </a:pPr>
-            <a:r>
-              <a:rPr lang="en-US" sz="2006" dirty="0">
-                <a:solidFill>
-                  <a:srgbClr val="12312B"/>
-                </a:solidFill>
-                <a:latin typeface="Archivo Medium"/>
-                <a:ea typeface="Archivo Medium"/>
-                <a:cs typeface="Archivo Medium"/>
-                <a:sym typeface="Archivo Medium"/>
-              </a:rPr>
-              <a:t>F.A.I.R.</a:t>
-            </a:r>
-          </a:p>
-          <a:p>
-            <a:pPr marL="673830" lvl="1" indent="-457200">
-              <a:lnSpc>
-                <a:spcPct val="140013"/>
-              </a:lnSpc>
-              <a:buClr>
-                <a:srgbClr val="12312B"/>
-              </a:buClr>
-              <a:buSzPct val="115000"/>
-              <a:buFont typeface="+mj-lt"/>
-              <a:buAutoNum type="arabicPeriod"/>
-            </a:pPr>
-            <a:r>
-              <a:rPr lang="en-US" sz="2006" dirty="0">
-                <a:solidFill>
-                  <a:srgbClr val="12312B"/>
-                </a:solidFill>
-                <a:latin typeface="Archivo Medium"/>
-                <a:ea typeface="Archivo Medium"/>
-                <a:cs typeface="Archivo Medium"/>
-                <a:sym typeface="Archivo Medium"/>
-              </a:rPr>
-              <a:t>C.A.R.E.</a:t>
-            </a:r>
-          </a:p>
-          <a:p>
-            <a:pPr marL="673830" lvl="1" indent="-457200">
-              <a:lnSpc>
-                <a:spcPct val="140013"/>
-              </a:lnSpc>
-              <a:buClr>
-                <a:srgbClr val="12312B"/>
-              </a:buClr>
-              <a:buSzPct val="115000"/>
-              <a:buFont typeface="+mj-lt"/>
-              <a:buAutoNum type="arabicPeriod"/>
-            </a:pPr>
-            <a:r>
-              <a:rPr lang="en-US" sz="2006" dirty="0">
-                <a:solidFill>
-                  <a:srgbClr val="12312B"/>
-                </a:solidFill>
-                <a:latin typeface="Archivo Medium"/>
-                <a:ea typeface="Archivo Medium"/>
-                <a:cs typeface="Archivo Medium"/>
-                <a:sym typeface="Archivo Medium"/>
-              </a:rPr>
-              <a:t>F.A.I.R.E.S.T.</a:t>
-            </a:r>
-            <a:endParaRPr sz="1200" dirty="0">
-              <a:latin typeface="Archivo Medium"/>
-              <a:ea typeface="Archivo Medium"/>
-              <a:cs typeface="Archivo Medium"/>
-              <a:sym typeface="Archivo Medium"/>
-            </a:endParaRPr>
-          </a:p>
-          <a:p>
-            <a:pPr marL="457200" indent="-457200">
-              <a:lnSpc>
-                <a:spcPct val="140013"/>
-              </a:lnSpc>
-              <a:buSzPct val="115000"/>
-              <a:buFont typeface="+mj-lt"/>
-              <a:buAutoNum type="arabicPeriod"/>
-            </a:pPr>
-            <a:endParaRPr sz="2006" dirty="0">
-              <a:solidFill>
-                <a:srgbClr val="12312B"/>
-              </a:solidFill>
-              <a:latin typeface="Arial"/>
-              <a:ea typeface="Arial"/>
-              <a:cs typeface="Arial"/>
-              <a:sym typeface="Arial"/>
-            </a:endParaRPr>
-          </a:p>
-        </p:txBody>
-      </p:sp>
-    </p:spTree>
-  </p:cSld>
-  <p:clrMapOvr>
-    <a:masterClrMapping/>
-  </p:clrMapOvr>
-</p:sld>
-</file>
-
-<file path=ppt/slides/slide9.xml><?xml version="1.0" encoding="utf-8"?>
-<p:sld xmlns:a="http://schemas.openxmlformats.org/drawingml/2006/main" xmlns:r="http://schemas.openxmlformats.org/officeDocument/2006/relationships" xmlns:p="http://schemas.openxmlformats.org/presentationml/2006/main">
-  <p:cSld>
-    <p:spTree>
-      <p:nvGrpSpPr>
-        <p:cNvPr id="1" name="Shape 176">
-          <a:extLst>
-            <a:ext uri="{FF2B5EF4-FFF2-40B4-BE49-F238E27FC236}">
-              <a16:creationId xmlns:a16="http://schemas.microsoft.com/office/drawing/2014/main" id="{292B1FE7-2414-4B31-9D90-0A225C26503A}"/>
-            </a:ext>
-          </a:extLst>
-        </p:cNvPr>
-        <p:cNvGrpSpPr/>
-        <p:nvPr/>
-      </p:nvGrpSpPr>
-      <p:grpSpPr>
-        <a:xfrm>
-          <a:off x="0" y="0"/>
-          <a:ext cx="0" cy="0"/>
-          <a:chOff x="0" y="0"/>
-          <a:chExt cx="0" cy="0"/>
-        </a:xfrm>
-      </p:grpSpPr>
-      <p:sp>
-        <p:nvSpPr>
-          <p:cNvPr id="178" name="Google Shape;178;p31">
-            <a:extLst>
-              <a:ext uri="{FF2B5EF4-FFF2-40B4-BE49-F238E27FC236}">
-                <a16:creationId xmlns:a16="http://schemas.microsoft.com/office/drawing/2014/main" id="{0D64DAFA-ECFB-0E4F-AA57-77458AE2FDEF}"/>
-              </a:ext>
-            </a:extLst>
-          </p:cNvPr>
-          <p:cNvSpPr txBox="1"/>
-          <p:nvPr/>
-        </p:nvSpPr>
-        <p:spPr>
-          <a:xfrm>
-            <a:off x="922202" y="1157695"/>
-            <a:ext cx="6097800" cy="742383"/>
-          </a:xfrm>
-          <a:prstGeom prst="rect">
-            <a:avLst/>
-          </a:prstGeom>
-          <a:noFill/>
-          <a:ln>
-            <a:noFill/>
-          </a:ln>
-        </p:spPr>
-        <p:txBody>
-          <a:bodyPr spcFirstLastPara="1" wrap="square" lIns="0" tIns="0" rIns="0" bIns="0" anchor="t" anchorCtr="0">
-            <a:spAutoFit/>
-          </a:bodyPr>
-          <a:lstStyle/>
-          <a:p>
-            <a:pPr>
-              <a:lnSpc>
-                <a:spcPct val="140007"/>
-              </a:lnSpc>
-            </a:pPr>
-            <a:r>
-              <a:rPr lang="en-US" sz="3446" dirty="0">
-                <a:solidFill>
-                  <a:srgbClr val="00693D"/>
-                </a:solidFill>
-                <a:latin typeface="Anton"/>
-                <a:ea typeface="Anton"/>
-                <a:cs typeface="Anton"/>
-                <a:sym typeface="Anton"/>
-              </a:rPr>
-              <a:t>1. F.A.I.R.</a:t>
-            </a:r>
-            <a:endParaRPr sz="1200" dirty="0">
-              <a:latin typeface="Anton"/>
-              <a:ea typeface="Anton"/>
-              <a:cs typeface="Anton"/>
-              <a:sym typeface="Anton"/>
-            </a:endParaRPr>
-          </a:p>
-        </p:txBody>
-      </p:sp>
-      <p:sp>
-        <p:nvSpPr>
-          <p:cNvPr id="179" name="Google Shape;179;p31">
-            <a:extLst>
-              <a:ext uri="{FF2B5EF4-FFF2-40B4-BE49-F238E27FC236}">
-                <a16:creationId xmlns:a16="http://schemas.microsoft.com/office/drawing/2014/main" id="{FBD40D03-E1B3-8DD1-8B71-A57A24B43F49}"/>
-              </a:ext>
-            </a:extLst>
-          </p:cNvPr>
-          <p:cNvSpPr txBox="1"/>
-          <p:nvPr/>
-        </p:nvSpPr>
-        <p:spPr>
-          <a:xfrm>
-            <a:off x="922202" y="1736904"/>
-            <a:ext cx="9776400" cy="864339"/>
-          </a:xfrm>
-          <a:prstGeom prst="rect">
-            <a:avLst/>
-          </a:prstGeom>
-          <a:noFill/>
-          <a:ln>
-            <a:noFill/>
-          </a:ln>
-        </p:spPr>
-        <p:txBody>
-          <a:bodyPr spcFirstLastPara="1" wrap="square" lIns="0" tIns="0" rIns="0" bIns="0" anchor="t" anchorCtr="0">
-            <a:spAutoFit/>
-          </a:bodyPr>
-          <a:lstStyle/>
-          <a:p>
-            <a:pPr marL="433260" lvl="1" indent="-216630">
-              <a:lnSpc>
-                <a:spcPct val="140013"/>
-              </a:lnSpc>
-              <a:buClr>
-                <a:srgbClr val="12312B"/>
-              </a:buClr>
-              <a:buSzPts val="3009"/>
-              <a:buFont typeface="Archivo Medium"/>
-              <a:buChar char="•"/>
-            </a:pPr>
-            <a:endParaRPr lang="en-US" sz="2006" dirty="0">
-              <a:solidFill>
-                <a:srgbClr val="12312B"/>
-              </a:solidFill>
-              <a:latin typeface="Archivo Medium"/>
-              <a:ea typeface="Archivo Medium"/>
-              <a:cs typeface="Archivo Medium"/>
-              <a:sym typeface="Archivo Medium"/>
-            </a:endParaRPr>
-          </a:p>
-          <a:p>
-            <a:pPr marL="433260" lvl="1" indent="-216630">
-              <a:lnSpc>
-                <a:spcPct val="140013"/>
-              </a:lnSpc>
-              <a:buClr>
-                <a:srgbClr val="12312B"/>
-              </a:buClr>
-              <a:buSzPts val="3009"/>
-              <a:buFont typeface="Archivo Medium"/>
-              <a:buChar char="•"/>
-            </a:pPr>
-            <a:endParaRPr lang="en-US" sz="2006" dirty="0">
-              <a:solidFill>
-                <a:srgbClr val="12312B"/>
-              </a:solidFill>
-              <a:latin typeface="Archivo Medium"/>
-              <a:sym typeface="Archivo Medium"/>
-            </a:endParaRPr>
-          </a:p>
-        </p:txBody>
-      </p:sp>
-    </p:spTree>
-    <p:extLst>
-      <p:ext uri="{BB962C8B-B14F-4D97-AF65-F5344CB8AC3E}">
-        <p14:creationId xmlns:p14="http://schemas.microsoft.com/office/powerpoint/2010/main" val="3996846082"/>
-      </p:ext>
-    </p:extLst>
-  </p:cSld>
-  <p:clrMapOvr>
-    <a:masterClrMapping/>
-  </p:clrMapOvr>
-  <p:extLst>
-    <p:ext uri="{6950BFC3-D8DA-4A85-94F7-54DA5524770B}">
-      <p188:commentRel xmlns:p188="http://schemas.microsoft.com/office/powerpoint/2018/8/main" r:id="rId3"/>
-    </p:ext>
-  </p:extLst>
 </p:sld>
 </file>
 

--- a/slides/04a_Computation-Research_Best-Practices.pptx
+++ b/slides/04a_Computation-Research_Best-Practices.pptx
@@ -6,31 +6,33 @@
     <p:sldMasterId id="2147483661" r:id="rId2"/>
   </p:sldMasterIdLst>
   <p:notesMasterIdLst>
-    <p:notesMasterId r:id="rId25"/>
+    <p:notesMasterId r:id="rId27"/>
   </p:notesMasterIdLst>
   <p:sldIdLst>
     <p:sldId id="299" r:id="rId3"/>
     <p:sldId id="272" r:id="rId4"/>
-    <p:sldId id="313" r:id="rId5"/>
-    <p:sldId id="359" r:id="rId6"/>
-    <p:sldId id="360" r:id="rId7"/>
-    <p:sldId id="343" r:id="rId8"/>
-    <p:sldId id="314" r:id="rId9"/>
-    <p:sldId id="354" r:id="rId10"/>
-    <p:sldId id="355" r:id="rId11"/>
-    <p:sldId id="267" r:id="rId12"/>
-    <p:sldId id="357" r:id="rId13"/>
-    <p:sldId id="356" r:id="rId14"/>
-    <p:sldId id="351" r:id="rId15"/>
-    <p:sldId id="265" r:id="rId16"/>
-    <p:sldId id="346" r:id="rId17"/>
-    <p:sldId id="348" r:id="rId18"/>
-    <p:sldId id="347" r:id="rId19"/>
-    <p:sldId id="358" r:id="rId20"/>
-    <p:sldId id="341" r:id="rId21"/>
-    <p:sldId id="352" r:id="rId22"/>
-    <p:sldId id="353" r:id="rId23"/>
-    <p:sldId id="331" r:id="rId24"/>
+    <p:sldId id="361" r:id="rId5"/>
+    <p:sldId id="313" r:id="rId6"/>
+    <p:sldId id="359" r:id="rId7"/>
+    <p:sldId id="360" r:id="rId8"/>
+    <p:sldId id="343" r:id="rId9"/>
+    <p:sldId id="314" r:id="rId10"/>
+    <p:sldId id="354" r:id="rId11"/>
+    <p:sldId id="355" r:id="rId12"/>
+    <p:sldId id="267" r:id="rId13"/>
+    <p:sldId id="357" r:id="rId14"/>
+    <p:sldId id="265" r:id="rId15"/>
+    <p:sldId id="346" r:id="rId16"/>
+    <p:sldId id="362" r:id="rId17"/>
+    <p:sldId id="341" r:id="rId18"/>
+    <p:sldId id="363" r:id="rId19"/>
+    <p:sldId id="367" r:id="rId20"/>
+    <p:sldId id="368" r:id="rId21"/>
+    <p:sldId id="364" r:id="rId22"/>
+    <p:sldId id="365" r:id="rId23"/>
+    <p:sldId id="366" r:id="rId24"/>
+    <p:sldId id="353" r:id="rId25"/>
+    <p:sldId id="331" r:id="rId26"/>
   </p:sldIdLst>
   <p:sldSz cx="12192000" cy="6858000"/>
   <p:notesSz cx="6858000" cy="9144000"/>
@@ -247,7 +249,7 @@
           <a:p>
             <a:fld id="{F19BCB6A-05C9-45C4-8C56-4DA0982723A6}" type="datetimeFigureOut">
               <a:rPr lang="en-US" smtClean="0"/>
-              <a:t>8/26/2026</a:t>
+              <a:t>9/1/2026</a:t>
             </a:fld>
             <a:endParaRPr lang="en-US"/>
           </a:p>
@@ -631,13 +633,7 @@
   <p:cSld>
     <p:spTree>
       <p:nvGrpSpPr>
-        <p:cNvPr id="1" name="Shape 136">
-          <a:extLst>
-            <a:ext uri="{FF2B5EF4-FFF2-40B4-BE49-F238E27FC236}">
-              <a16:creationId xmlns:a16="http://schemas.microsoft.com/office/drawing/2014/main" id="{6CF7347D-0F55-2BC1-9CD0-DD305D890973}"/>
-            </a:ext>
-          </a:extLst>
-        </p:cNvPr>
+        <p:cNvPr id="1" name="Shape 173"/>
         <p:cNvGrpSpPr/>
         <p:nvPr/>
       </p:nvGrpSpPr>
@@ -651,13 +647,7 @@
       </p:grpSpPr>
       <p:sp>
         <p:nvSpPr>
-          <p:cNvPr id="137" name="Google Shape;137;p5:notes">
-            <a:extLst>
-              <a:ext uri="{FF2B5EF4-FFF2-40B4-BE49-F238E27FC236}">
-                <a16:creationId xmlns:a16="http://schemas.microsoft.com/office/drawing/2014/main" id="{88B4B820-B4C5-F926-0845-D3B4542B3DEC}"/>
-              </a:ext>
-            </a:extLst>
-          </p:cNvPr>
+          <p:cNvPr id="174" name="Google Shape;174;p5:notes"/>
           <p:cNvSpPr txBox="1">
             <a:spLocks noGrp="1"/>
           </p:cNvSpPr>
@@ -695,13 +685,7 @@
       </p:sp>
       <p:sp>
         <p:nvSpPr>
-          <p:cNvPr id="138" name="Google Shape;138;p5:notes">
-            <a:extLst>
-              <a:ext uri="{FF2B5EF4-FFF2-40B4-BE49-F238E27FC236}">
-                <a16:creationId xmlns:a16="http://schemas.microsoft.com/office/drawing/2014/main" id="{B6ACE105-95C4-0BE1-41F3-D403429153AD}"/>
-              </a:ext>
-            </a:extLst>
-          </p:cNvPr>
+          <p:cNvPr id="175" name="Google Shape;175;p5:notes"/>
           <p:cNvSpPr>
             <a:spLocks noGrp="1" noRot="1" noChangeAspect="1"/>
           </p:cNvSpPr>
@@ -741,11 +725,6 @@
         </p:spPr>
       </p:sp>
     </p:spTree>
-    <p:extLst>
-      <p:ext uri="{BB962C8B-B14F-4D97-AF65-F5344CB8AC3E}">
-        <p14:creationId xmlns:p14="http://schemas.microsoft.com/office/powerpoint/2010/main" val="3283765547"/>
-      </p:ext>
-    </p:extLst>
   </p:cSld>
   <p:clrMapOvr>
     <a:masterClrMapping/>
@@ -758,7 +737,13 @@
   <p:cSld>
     <p:spTree>
       <p:nvGrpSpPr>
-        <p:cNvPr id="1" name="Shape 173"/>
+        <p:cNvPr id="1" name="Shape 173">
+          <a:extLst>
+            <a:ext uri="{FF2B5EF4-FFF2-40B4-BE49-F238E27FC236}">
+              <a16:creationId xmlns:a16="http://schemas.microsoft.com/office/drawing/2014/main" id="{96582AB9-6D74-E616-F6B6-750882790D39}"/>
+            </a:ext>
+          </a:extLst>
+        </p:cNvPr>
         <p:cNvGrpSpPr/>
         <p:nvPr/>
       </p:nvGrpSpPr>
@@ -772,7 +757,13 @@
       </p:grpSpPr>
       <p:sp>
         <p:nvSpPr>
-          <p:cNvPr id="174" name="Google Shape;174;p5:notes"/>
+          <p:cNvPr id="174" name="Google Shape;174;p5:notes">
+            <a:extLst>
+              <a:ext uri="{FF2B5EF4-FFF2-40B4-BE49-F238E27FC236}">
+                <a16:creationId xmlns:a16="http://schemas.microsoft.com/office/drawing/2014/main" id="{A93988E6-F327-97EC-48C9-5E62981832C9}"/>
+              </a:ext>
+            </a:extLst>
+          </p:cNvPr>
           <p:cNvSpPr txBox="1">
             <a:spLocks noGrp="1"/>
           </p:cNvSpPr>
@@ -810,7 +801,13 @@
       </p:sp>
       <p:sp>
         <p:nvSpPr>
-          <p:cNvPr id="175" name="Google Shape;175;p5:notes"/>
+          <p:cNvPr id="175" name="Google Shape;175;p5:notes">
+            <a:extLst>
+              <a:ext uri="{FF2B5EF4-FFF2-40B4-BE49-F238E27FC236}">
+                <a16:creationId xmlns:a16="http://schemas.microsoft.com/office/drawing/2014/main" id="{3A5A555C-26E8-45EA-3959-84B856D24166}"/>
+              </a:ext>
+            </a:extLst>
+          </p:cNvPr>
           <p:cNvSpPr>
             <a:spLocks noGrp="1" noRot="1" noChangeAspect="1"/>
           </p:cNvSpPr>
@@ -850,6 +847,11 @@
         </p:spPr>
       </p:sp>
     </p:spTree>
+    <p:extLst>
+      <p:ext uri="{BB962C8B-B14F-4D97-AF65-F5344CB8AC3E}">
+        <p14:creationId xmlns:p14="http://schemas.microsoft.com/office/powerpoint/2010/main" val="872193006"/>
+      </p:ext>
+    </p:extLst>
   </p:cSld>
   <p:clrMapOvr>
     <a:masterClrMapping/>
@@ -862,10 +864,10 @@
   <p:cSld>
     <p:spTree>
       <p:nvGrpSpPr>
-        <p:cNvPr id="1" name="Shape 173">
+        <p:cNvPr id="1" name="Shape 130">
           <a:extLst>
             <a:ext uri="{FF2B5EF4-FFF2-40B4-BE49-F238E27FC236}">
-              <a16:creationId xmlns:a16="http://schemas.microsoft.com/office/drawing/2014/main" id="{96582AB9-6D74-E616-F6B6-750882790D39}"/>
+              <a16:creationId xmlns:a16="http://schemas.microsoft.com/office/drawing/2014/main" id="{621DFD82-9AC2-3BF4-2ACC-FA71DB014FC7}"/>
             </a:ext>
           </a:extLst>
         </p:cNvPr>
@@ -882,10 +884,10 @@
       </p:grpSpPr>
       <p:sp>
         <p:nvSpPr>
-          <p:cNvPr id="174" name="Google Shape;174;p5:notes">
+          <p:cNvPr id="131" name="Google Shape;131;p4:notes">
             <a:extLst>
               <a:ext uri="{FF2B5EF4-FFF2-40B4-BE49-F238E27FC236}">
-                <a16:creationId xmlns:a16="http://schemas.microsoft.com/office/drawing/2014/main" id="{A93988E6-F327-97EC-48C9-5E62981832C9}"/>
+                <a16:creationId xmlns:a16="http://schemas.microsoft.com/office/drawing/2014/main" id="{F24D16EC-63C3-CC25-7D17-27A56DD43FCC}"/>
               </a:ext>
             </a:extLst>
           </p:cNvPr>
@@ -926,10 +928,10 @@
       </p:sp>
       <p:sp>
         <p:nvSpPr>
-          <p:cNvPr id="175" name="Google Shape;175;p5:notes">
+          <p:cNvPr id="132" name="Google Shape;132;p4:notes">
             <a:extLst>
               <a:ext uri="{FF2B5EF4-FFF2-40B4-BE49-F238E27FC236}">
-                <a16:creationId xmlns:a16="http://schemas.microsoft.com/office/drawing/2014/main" id="{3A5A555C-26E8-45EA-3959-84B856D24166}"/>
+                <a16:creationId xmlns:a16="http://schemas.microsoft.com/office/drawing/2014/main" id="{CB582732-8FEA-478F-CF52-C286AE8DA537}"/>
               </a:ext>
             </a:extLst>
           </p:cNvPr>
@@ -974,7 +976,7 @@
     </p:spTree>
     <p:extLst>
       <p:ext uri="{BB962C8B-B14F-4D97-AF65-F5344CB8AC3E}">
-        <p14:creationId xmlns:p14="http://schemas.microsoft.com/office/powerpoint/2010/main" val="872193006"/>
+        <p14:creationId xmlns:p14="http://schemas.microsoft.com/office/powerpoint/2010/main" val="3311670603"/>
       </p:ext>
     </p:extLst>
   </p:cSld>
@@ -992,7 +994,7 @@
         <p:cNvPr id="1" name="Shape 173">
           <a:extLst>
             <a:ext uri="{FF2B5EF4-FFF2-40B4-BE49-F238E27FC236}">
-              <a16:creationId xmlns:a16="http://schemas.microsoft.com/office/drawing/2014/main" id="{BE605C52-DE78-342E-B9BD-85303DD9DB72}"/>
+              <a16:creationId xmlns:a16="http://schemas.microsoft.com/office/drawing/2014/main" id="{78A521C9-4FEF-6D47-7A76-815C9B185BDD}"/>
             </a:ext>
           </a:extLst>
         </p:cNvPr>
@@ -1012,7 +1014,7 @@
           <p:cNvPr id="174" name="Google Shape;174;p5:notes">
             <a:extLst>
               <a:ext uri="{FF2B5EF4-FFF2-40B4-BE49-F238E27FC236}">
-                <a16:creationId xmlns:a16="http://schemas.microsoft.com/office/drawing/2014/main" id="{C9660C08-CF41-1F7C-4CDF-C8071F1FE18D}"/>
+                <a16:creationId xmlns:a16="http://schemas.microsoft.com/office/drawing/2014/main" id="{31D5F23E-7A20-05DD-950A-4D2BBAE9ECA6}"/>
               </a:ext>
             </a:extLst>
           </p:cNvPr>
@@ -1056,7 +1058,7 @@
           <p:cNvPr id="175" name="Google Shape;175;p5:notes">
             <a:extLst>
               <a:ext uri="{FF2B5EF4-FFF2-40B4-BE49-F238E27FC236}">
-                <a16:creationId xmlns:a16="http://schemas.microsoft.com/office/drawing/2014/main" id="{A727A34D-974D-47FE-9435-248C8EAE2BE9}"/>
+                <a16:creationId xmlns:a16="http://schemas.microsoft.com/office/drawing/2014/main" id="{F00F553F-8223-9780-5B5C-F6A45ECA18F0}"/>
               </a:ext>
             </a:extLst>
           </p:cNvPr>
@@ -1101,7 +1103,7 @@
     </p:spTree>
     <p:extLst>
       <p:ext uri="{BB962C8B-B14F-4D97-AF65-F5344CB8AC3E}">
-        <p14:creationId xmlns:p14="http://schemas.microsoft.com/office/powerpoint/2010/main" val="101882029"/>
+        <p14:creationId xmlns:p14="http://schemas.microsoft.com/office/powerpoint/2010/main" val="158507060"/>
       </p:ext>
     </p:extLst>
   </p:cSld>
@@ -1119,7 +1121,7 @@
         <p:cNvPr id="1" name="Shape 173">
           <a:extLst>
             <a:ext uri="{FF2B5EF4-FFF2-40B4-BE49-F238E27FC236}">
-              <a16:creationId xmlns:a16="http://schemas.microsoft.com/office/drawing/2014/main" id="{B607FA2D-7421-1FA1-9823-6A7C880151C5}"/>
+              <a16:creationId xmlns:a16="http://schemas.microsoft.com/office/drawing/2014/main" id="{132A7ACB-4A4B-27D3-2EC3-4F34CF60C7D8}"/>
             </a:ext>
           </a:extLst>
         </p:cNvPr>
@@ -1139,7 +1141,7 @@
           <p:cNvPr id="174" name="Google Shape;174;p5:notes">
             <a:extLst>
               <a:ext uri="{FF2B5EF4-FFF2-40B4-BE49-F238E27FC236}">
-                <a16:creationId xmlns:a16="http://schemas.microsoft.com/office/drawing/2014/main" id="{3FD08A97-9F89-9C9E-7796-E294276AF891}"/>
+                <a16:creationId xmlns:a16="http://schemas.microsoft.com/office/drawing/2014/main" id="{74D524DA-CC89-6FE4-BF1B-21F79524364A}"/>
               </a:ext>
             </a:extLst>
           </p:cNvPr>
@@ -1183,7 +1185,7 @@
           <p:cNvPr id="175" name="Google Shape;175;p5:notes">
             <a:extLst>
               <a:ext uri="{FF2B5EF4-FFF2-40B4-BE49-F238E27FC236}">
-                <a16:creationId xmlns:a16="http://schemas.microsoft.com/office/drawing/2014/main" id="{A737919C-6988-46E7-AE01-79DC1CF24B53}"/>
+                <a16:creationId xmlns:a16="http://schemas.microsoft.com/office/drawing/2014/main" id="{AC0F01C3-282F-DEC0-B120-8F23E954904F}"/>
               </a:ext>
             </a:extLst>
           </p:cNvPr>
@@ -1228,7 +1230,7 @@
     </p:spTree>
     <p:extLst>
       <p:ext uri="{BB962C8B-B14F-4D97-AF65-F5344CB8AC3E}">
-        <p14:creationId xmlns:p14="http://schemas.microsoft.com/office/powerpoint/2010/main" val="3080400478"/>
+        <p14:creationId xmlns:p14="http://schemas.microsoft.com/office/powerpoint/2010/main" val="3663713324"/>
       </p:ext>
     </p:extLst>
   </p:cSld>
@@ -1246,7 +1248,7 @@
         <p:cNvPr id="1" name="Shape 173">
           <a:extLst>
             <a:ext uri="{FF2B5EF4-FFF2-40B4-BE49-F238E27FC236}">
-              <a16:creationId xmlns:a16="http://schemas.microsoft.com/office/drawing/2014/main" id="{A9DAC043-5502-EBF1-CDBF-73A0BA343EF1}"/>
+              <a16:creationId xmlns:a16="http://schemas.microsoft.com/office/drawing/2014/main" id="{3B9A9A4A-CB99-AC78-5EF0-C6B31A803BC3}"/>
             </a:ext>
           </a:extLst>
         </p:cNvPr>
@@ -1266,7 +1268,7 @@
           <p:cNvPr id="174" name="Google Shape;174;p5:notes">
             <a:extLst>
               <a:ext uri="{FF2B5EF4-FFF2-40B4-BE49-F238E27FC236}">
-                <a16:creationId xmlns:a16="http://schemas.microsoft.com/office/drawing/2014/main" id="{ADAE93BD-3798-00DE-5E34-F2A267E92E73}"/>
+                <a16:creationId xmlns:a16="http://schemas.microsoft.com/office/drawing/2014/main" id="{1C573846-3AC6-F09A-FE94-0FC5101CC662}"/>
               </a:ext>
             </a:extLst>
           </p:cNvPr>
@@ -1310,7 +1312,7 @@
           <p:cNvPr id="175" name="Google Shape;175;p5:notes">
             <a:extLst>
               <a:ext uri="{FF2B5EF4-FFF2-40B4-BE49-F238E27FC236}">
-                <a16:creationId xmlns:a16="http://schemas.microsoft.com/office/drawing/2014/main" id="{33DDE30F-A250-9521-0E57-17C5A6217142}"/>
+                <a16:creationId xmlns:a16="http://schemas.microsoft.com/office/drawing/2014/main" id="{36ACA648-B187-D02F-D9B9-B8E0BCE153BB}"/>
               </a:ext>
             </a:extLst>
           </p:cNvPr>
@@ -1355,7 +1357,7 @@
     </p:spTree>
     <p:extLst>
       <p:ext uri="{BB962C8B-B14F-4D97-AF65-F5344CB8AC3E}">
-        <p14:creationId xmlns:p14="http://schemas.microsoft.com/office/powerpoint/2010/main" val="1011132538"/>
+        <p14:creationId xmlns:p14="http://schemas.microsoft.com/office/powerpoint/2010/main" val="3978712400"/>
       </p:ext>
     </p:extLst>
   </p:cSld>
@@ -1366,260 +1368,6 @@
 </file>
 
 <file path=ppt/notesSlides/notesSlide16.xml><?xml version="1.0" encoding="utf-8"?>
-<p:notes xmlns:a="http://schemas.openxmlformats.org/drawingml/2006/main" xmlns:r="http://schemas.openxmlformats.org/officeDocument/2006/relationships" xmlns:p="http://schemas.openxmlformats.org/presentationml/2006/main" showMasterSp="0" showMasterPhAnim="0">
-  <p:cSld>
-    <p:spTree>
-      <p:nvGrpSpPr>
-        <p:cNvPr id="1" name="Shape 130">
-          <a:extLst>
-            <a:ext uri="{FF2B5EF4-FFF2-40B4-BE49-F238E27FC236}">
-              <a16:creationId xmlns:a16="http://schemas.microsoft.com/office/drawing/2014/main" id="{621DFD82-9AC2-3BF4-2ACC-FA71DB014FC7}"/>
-            </a:ext>
-          </a:extLst>
-        </p:cNvPr>
-        <p:cNvGrpSpPr/>
-        <p:nvPr/>
-      </p:nvGrpSpPr>
-      <p:grpSpPr>
-        <a:xfrm>
-          <a:off x="0" y="0"/>
-          <a:ext cx="0" cy="0"/>
-          <a:chOff x="0" y="0"/>
-          <a:chExt cx="0" cy="0"/>
-        </a:xfrm>
-      </p:grpSpPr>
-      <p:sp>
-        <p:nvSpPr>
-          <p:cNvPr id="131" name="Google Shape;131;p4:notes">
-            <a:extLst>
-              <a:ext uri="{FF2B5EF4-FFF2-40B4-BE49-F238E27FC236}">
-                <a16:creationId xmlns:a16="http://schemas.microsoft.com/office/drawing/2014/main" id="{F24D16EC-63C3-CC25-7D17-27A56DD43FCC}"/>
-              </a:ext>
-            </a:extLst>
-          </p:cNvPr>
-          <p:cNvSpPr txBox="1">
-            <a:spLocks noGrp="1"/>
-          </p:cNvSpPr>
-          <p:nvPr>
-            <p:ph type="body" idx="1"/>
-          </p:nvPr>
-        </p:nvSpPr>
-        <p:spPr>
-          <a:xfrm>
-            <a:off x="685800" y="4343400"/>
-            <a:ext cx="5486400" cy="4114800"/>
-          </a:xfrm>
-          <a:prstGeom prst="rect">
-            <a:avLst/>
-          </a:prstGeom>
-        </p:spPr>
-        <p:txBody>
-          <a:bodyPr spcFirstLastPara="1" wrap="square" lIns="91425" tIns="91425" rIns="91425" bIns="91425" anchor="t" anchorCtr="0">
-            <a:noAutofit/>
-          </a:bodyPr>
-          <a:lstStyle/>
-          <a:p>
-            <a:pPr marL="0" lvl="0" indent="0" algn="l" rtl="0">
-              <a:spcBef>
-                <a:spcPts val="0"/>
-              </a:spcBef>
-              <a:spcAft>
-                <a:spcPts val="0"/>
-              </a:spcAft>
-              <a:buNone/>
-            </a:pPr>
-            <a:endParaRPr/>
-          </a:p>
-        </p:txBody>
-      </p:sp>
-      <p:sp>
-        <p:nvSpPr>
-          <p:cNvPr id="132" name="Google Shape;132;p4:notes">
-            <a:extLst>
-              <a:ext uri="{FF2B5EF4-FFF2-40B4-BE49-F238E27FC236}">
-                <a16:creationId xmlns:a16="http://schemas.microsoft.com/office/drawing/2014/main" id="{CB582732-8FEA-478F-CF52-C286AE8DA537}"/>
-              </a:ext>
-            </a:extLst>
-          </p:cNvPr>
-          <p:cNvSpPr>
-            <a:spLocks noGrp="1" noRot="1" noChangeAspect="1"/>
-          </p:cNvSpPr>
-          <p:nvPr>
-            <p:ph type="sldImg" idx="2"/>
-          </p:nvPr>
-        </p:nvSpPr>
-        <p:spPr>
-          <a:xfrm>
-            <a:off x="381000" y="685800"/>
-            <a:ext cx="6096000" cy="3429000"/>
-          </a:xfrm>
-          <a:custGeom>
-            <a:avLst/>
-            <a:gdLst/>
-            <a:ahLst/>
-            <a:cxnLst/>
-            <a:rect l="l" t="t" r="r" b="b"/>
-            <a:pathLst>
-              <a:path w="120000" h="120000" extrusionOk="0">
-                <a:moveTo>
-                  <a:pt x="0" y="0"/>
-                </a:moveTo>
-                <a:lnTo>
-                  <a:pt x="120000" y="0"/>
-                </a:lnTo>
-                <a:lnTo>
-                  <a:pt x="120000" y="120000"/>
-                </a:lnTo>
-                <a:lnTo>
-                  <a:pt x="0" y="120000"/>
-                </a:lnTo>
-                <a:close/>
-              </a:path>
-            </a:pathLst>
-          </a:custGeom>
-        </p:spPr>
-      </p:sp>
-    </p:spTree>
-    <p:extLst>
-      <p:ext uri="{BB962C8B-B14F-4D97-AF65-F5344CB8AC3E}">
-        <p14:creationId xmlns:p14="http://schemas.microsoft.com/office/powerpoint/2010/main" val="3311670603"/>
-      </p:ext>
-    </p:extLst>
-  </p:cSld>
-  <p:clrMapOvr>
-    <a:masterClrMapping/>
-  </p:clrMapOvr>
-</p:notes>
-</file>
-
-<file path=ppt/notesSlides/notesSlide17.xml><?xml version="1.0" encoding="utf-8"?>
-<p:notes xmlns:a="http://schemas.openxmlformats.org/drawingml/2006/main" xmlns:r="http://schemas.openxmlformats.org/officeDocument/2006/relationships" xmlns:p="http://schemas.openxmlformats.org/presentationml/2006/main" showMasterSp="0" showMasterPhAnim="0">
-  <p:cSld>
-    <p:spTree>
-      <p:nvGrpSpPr>
-        <p:cNvPr id="1" name="Shape 173">
-          <a:extLst>
-            <a:ext uri="{FF2B5EF4-FFF2-40B4-BE49-F238E27FC236}">
-              <a16:creationId xmlns:a16="http://schemas.microsoft.com/office/drawing/2014/main" id="{A3645F7F-0F34-3745-5AB4-B928D5325E00}"/>
-            </a:ext>
-          </a:extLst>
-        </p:cNvPr>
-        <p:cNvGrpSpPr/>
-        <p:nvPr/>
-      </p:nvGrpSpPr>
-      <p:grpSpPr>
-        <a:xfrm>
-          <a:off x="0" y="0"/>
-          <a:ext cx="0" cy="0"/>
-          <a:chOff x="0" y="0"/>
-          <a:chExt cx="0" cy="0"/>
-        </a:xfrm>
-      </p:grpSpPr>
-      <p:sp>
-        <p:nvSpPr>
-          <p:cNvPr id="174" name="Google Shape;174;p5:notes">
-            <a:extLst>
-              <a:ext uri="{FF2B5EF4-FFF2-40B4-BE49-F238E27FC236}">
-                <a16:creationId xmlns:a16="http://schemas.microsoft.com/office/drawing/2014/main" id="{91164055-3E46-0C40-ED09-A8419F0A62AC}"/>
-              </a:ext>
-            </a:extLst>
-          </p:cNvPr>
-          <p:cNvSpPr txBox="1">
-            <a:spLocks noGrp="1"/>
-          </p:cNvSpPr>
-          <p:nvPr>
-            <p:ph type="body" idx="1"/>
-          </p:nvPr>
-        </p:nvSpPr>
-        <p:spPr>
-          <a:xfrm>
-            <a:off x="685800" y="4343400"/>
-            <a:ext cx="5486400" cy="4114800"/>
-          </a:xfrm>
-          <a:prstGeom prst="rect">
-            <a:avLst/>
-          </a:prstGeom>
-        </p:spPr>
-        <p:txBody>
-          <a:bodyPr spcFirstLastPara="1" wrap="square" lIns="91425" tIns="91425" rIns="91425" bIns="91425" anchor="t" anchorCtr="0">
-            <a:noAutofit/>
-          </a:bodyPr>
-          <a:lstStyle/>
-          <a:p>
-            <a:pPr marL="0" lvl="0" indent="0" algn="l" rtl="0">
-              <a:spcBef>
-                <a:spcPts val="0"/>
-              </a:spcBef>
-              <a:spcAft>
-                <a:spcPts val="0"/>
-              </a:spcAft>
-              <a:buNone/>
-            </a:pPr>
-            <a:endParaRPr/>
-          </a:p>
-        </p:txBody>
-      </p:sp>
-      <p:sp>
-        <p:nvSpPr>
-          <p:cNvPr id="175" name="Google Shape;175;p5:notes">
-            <a:extLst>
-              <a:ext uri="{FF2B5EF4-FFF2-40B4-BE49-F238E27FC236}">
-                <a16:creationId xmlns:a16="http://schemas.microsoft.com/office/drawing/2014/main" id="{FF728EBC-5A55-84D9-0164-7B3EC5EEC5FB}"/>
-              </a:ext>
-            </a:extLst>
-          </p:cNvPr>
-          <p:cNvSpPr>
-            <a:spLocks noGrp="1" noRot="1" noChangeAspect="1"/>
-          </p:cNvSpPr>
-          <p:nvPr>
-            <p:ph type="sldImg" idx="2"/>
-          </p:nvPr>
-        </p:nvSpPr>
-        <p:spPr>
-          <a:xfrm>
-            <a:off x="381000" y="685800"/>
-            <a:ext cx="6096000" cy="3429000"/>
-          </a:xfrm>
-          <a:custGeom>
-            <a:avLst/>
-            <a:gdLst/>
-            <a:ahLst/>
-            <a:cxnLst/>
-            <a:rect l="l" t="t" r="r" b="b"/>
-            <a:pathLst>
-              <a:path w="120000" h="120000" extrusionOk="0">
-                <a:moveTo>
-                  <a:pt x="0" y="0"/>
-                </a:moveTo>
-                <a:lnTo>
-                  <a:pt x="120000" y="0"/>
-                </a:lnTo>
-                <a:lnTo>
-                  <a:pt x="120000" y="120000"/>
-                </a:lnTo>
-                <a:lnTo>
-                  <a:pt x="0" y="120000"/>
-                </a:lnTo>
-                <a:close/>
-              </a:path>
-            </a:pathLst>
-          </a:custGeom>
-        </p:spPr>
-      </p:sp>
-    </p:spTree>
-    <p:extLst>
-      <p:ext uri="{BB962C8B-B14F-4D97-AF65-F5344CB8AC3E}">
-        <p14:creationId xmlns:p14="http://schemas.microsoft.com/office/powerpoint/2010/main" val="2096284028"/>
-      </p:ext>
-    </p:extLst>
-  </p:cSld>
-  <p:clrMapOvr>
-    <a:masterClrMapping/>
-  </p:clrMapOvr>
-</p:notes>
-</file>
-
-<file path=ppt/notesSlides/notesSlide18.xml><?xml version="1.0" encoding="utf-8"?>
 <p:notes xmlns:a="http://schemas.openxmlformats.org/drawingml/2006/main" xmlns:r="http://schemas.openxmlformats.org/officeDocument/2006/relationships" xmlns:p="http://schemas.openxmlformats.org/presentationml/2006/main" showMasterSp="0" showMasterPhAnim="0">
   <p:cSld>
     <p:spTree>
@@ -1746,7 +1494,7 @@
 </p:notes>
 </file>
 
-<file path=ppt/notesSlides/notesSlide19.xml><?xml version="1.0" encoding="utf-8"?>
+<file path=ppt/notesSlides/notesSlide17.xml><?xml version="1.0" encoding="utf-8"?>
 <p:notes xmlns:a="http://schemas.openxmlformats.org/drawingml/2006/main" xmlns:r="http://schemas.openxmlformats.org/officeDocument/2006/relationships" xmlns:p="http://schemas.openxmlformats.org/presentationml/2006/main" showMasterSp="0" showMasterPhAnim="0">
   <p:cSld>
     <p:spTree>
@@ -14471,6 +14219,105 @@
         <p:cNvPr id="1" name="Shape 139">
           <a:extLst>
             <a:ext uri="{FF2B5EF4-FFF2-40B4-BE49-F238E27FC236}">
+              <a16:creationId xmlns:a16="http://schemas.microsoft.com/office/drawing/2014/main" id="{9D08716B-E435-BFFC-1B82-7F291BB09BAE}"/>
+            </a:ext>
+          </a:extLst>
+        </p:cNvPr>
+        <p:cNvGrpSpPr/>
+        <p:nvPr/>
+      </p:nvGrpSpPr>
+      <p:grpSpPr>
+        <a:xfrm>
+          <a:off x="0" y="0"/>
+          <a:ext cx="0" cy="0"/>
+          <a:chOff x="0" y="0"/>
+          <a:chExt cx="0" cy="0"/>
+        </a:xfrm>
+      </p:grpSpPr>
+      <p:sp>
+        <p:nvSpPr>
+          <p:cNvPr id="141" name="Google Shape;141;p26">
+            <a:extLst>
+              <a:ext uri="{FF2B5EF4-FFF2-40B4-BE49-F238E27FC236}">
+                <a16:creationId xmlns:a16="http://schemas.microsoft.com/office/drawing/2014/main" id="{78E586CE-EAB9-478A-905E-310D986723F8}"/>
+              </a:ext>
+            </a:extLst>
+          </p:cNvPr>
+          <p:cNvSpPr txBox="1"/>
+          <p:nvPr/>
+        </p:nvSpPr>
+        <p:spPr>
+          <a:xfrm>
+            <a:off x="922202" y="1157695"/>
+            <a:ext cx="8511218" cy="742383"/>
+          </a:xfrm>
+          <a:prstGeom prst="rect">
+            <a:avLst/>
+          </a:prstGeom>
+          <a:noFill/>
+          <a:ln>
+            <a:noFill/>
+          </a:ln>
+        </p:spPr>
+        <p:txBody>
+          <a:bodyPr spcFirstLastPara="1" wrap="square" lIns="0" tIns="0" rIns="0" bIns="0" anchor="t" anchorCtr="0">
+            <a:spAutoFit/>
+          </a:bodyPr>
+          <a:lstStyle/>
+          <a:p>
+            <a:pPr defTabSz="609630">
+              <a:lnSpc>
+                <a:spcPct val="140007"/>
+              </a:lnSpc>
+              <a:buClr>
+                <a:srgbClr val="000000"/>
+              </a:buClr>
+            </a:pPr>
+            <a:r>
+              <a:rPr lang="en-US" sz="3446" kern="0" dirty="0">
+                <a:solidFill>
+                  <a:srgbClr val="00693D"/>
+                </a:solidFill>
+                <a:latin typeface="Anton"/>
+                <a:ea typeface="Anton"/>
+                <a:cs typeface="Anton"/>
+                <a:sym typeface="Anton"/>
+              </a:rPr>
+              <a:t>Different Disciplines, different needs</a:t>
+            </a:r>
+            <a:endParaRPr sz="933" kern="0" dirty="0">
+              <a:solidFill>
+                <a:srgbClr val="000000"/>
+              </a:solidFill>
+              <a:latin typeface="Anton"/>
+              <a:ea typeface="Anton"/>
+              <a:cs typeface="Anton"/>
+              <a:sym typeface="Anton"/>
+            </a:endParaRPr>
+          </a:p>
+        </p:txBody>
+      </p:sp>
+    </p:spTree>
+    <p:extLst>
+      <p:ext uri="{BB962C8B-B14F-4D97-AF65-F5344CB8AC3E}">
+        <p14:creationId xmlns:p14="http://schemas.microsoft.com/office/powerpoint/2010/main" val="2405714910"/>
+      </p:ext>
+    </p:extLst>
+  </p:cSld>
+  <p:clrMapOvr>
+    <a:masterClrMapping/>
+  </p:clrMapOvr>
+</p:sld>
+</file>
+
+<file path=ppt/slides/slide11.xml><?xml version="1.0" encoding="utf-8"?>
+<p:sld xmlns:a="http://schemas.openxmlformats.org/drawingml/2006/main" xmlns:r="http://schemas.openxmlformats.org/officeDocument/2006/relationships" xmlns:p="http://schemas.openxmlformats.org/presentationml/2006/main">
+  <p:cSld>
+    <p:spTree>
+      <p:nvGrpSpPr>
+        <p:cNvPr id="1" name="Shape 139">
+          <a:extLst>
+            <a:ext uri="{FF2B5EF4-FFF2-40B4-BE49-F238E27FC236}">
               <a16:creationId xmlns:a16="http://schemas.microsoft.com/office/drawing/2014/main" id="{15879BB2-F066-F75E-A8DB-0F7CD248D8F7}"/>
             </a:ext>
           </a:extLst>
@@ -14676,7 +14523,7 @@
 </p:sld>
 </file>
 
-<file path=ppt/slides/slide11.xml><?xml version="1.0" encoding="utf-8"?>
+<file path=ppt/slides/slide12.xml><?xml version="1.0" encoding="utf-8"?>
 <p:sld xmlns:a="http://schemas.openxmlformats.org/drawingml/2006/main" xmlns:r="http://schemas.openxmlformats.org/officeDocument/2006/relationships" xmlns:p="http://schemas.openxmlformats.org/presentationml/2006/main">
   <p:cSld>
     <p:spTree>
@@ -14864,249 +14711,7 @@
 </p:sld>
 </file>
 
-<file path=ppt/slides/slide12.xml><?xml version="1.0" encoding="utf-8"?>
-<p:sld xmlns:a="http://schemas.openxmlformats.org/drawingml/2006/main" xmlns:r="http://schemas.openxmlformats.org/officeDocument/2006/relationships" xmlns:p="http://schemas.openxmlformats.org/presentationml/2006/main">
-  <p:cSld>
-    <p:spTree>
-      <p:nvGrpSpPr>
-        <p:cNvPr id="1" name=""/>
-        <p:cNvGrpSpPr/>
-        <p:nvPr/>
-      </p:nvGrpSpPr>
-      <p:grpSpPr>
-        <a:xfrm>
-          <a:off x="0" y="0"/>
-          <a:ext cx="0" cy="0"/>
-          <a:chOff x="0" y="0"/>
-          <a:chExt cx="0" cy="0"/>
-        </a:xfrm>
-      </p:grpSpPr>
-    </p:spTree>
-    <p:extLst>
-      <p:ext uri="{BB962C8B-B14F-4D97-AF65-F5344CB8AC3E}">
-        <p14:creationId xmlns:p14="http://schemas.microsoft.com/office/powerpoint/2010/main" val="1163242308"/>
-      </p:ext>
-    </p:extLst>
-  </p:cSld>
-  <p:clrMapOvr>
-    <a:masterClrMapping/>
-  </p:clrMapOvr>
-</p:sld>
-</file>
-
 <file path=ppt/slides/slide13.xml><?xml version="1.0" encoding="utf-8"?>
-<p:sld xmlns:a="http://schemas.openxmlformats.org/drawingml/2006/main" xmlns:r="http://schemas.openxmlformats.org/officeDocument/2006/relationships" xmlns:p="http://schemas.openxmlformats.org/presentationml/2006/main">
-  <p:cSld>
-    <p:spTree>
-      <p:nvGrpSpPr>
-        <p:cNvPr id="1" name="Shape 139">
-          <a:extLst>
-            <a:ext uri="{FF2B5EF4-FFF2-40B4-BE49-F238E27FC236}">
-              <a16:creationId xmlns:a16="http://schemas.microsoft.com/office/drawing/2014/main" id="{5A824A73-D159-B559-745F-F169B325320B}"/>
-            </a:ext>
-          </a:extLst>
-        </p:cNvPr>
-        <p:cNvGrpSpPr/>
-        <p:nvPr/>
-      </p:nvGrpSpPr>
-      <p:grpSpPr>
-        <a:xfrm>
-          <a:off x="0" y="0"/>
-          <a:ext cx="0" cy="0"/>
-          <a:chOff x="0" y="0"/>
-          <a:chExt cx="0" cy="0"/>
-        </a:xfrm>
-      </p:grpSpPr>
-      <p:sp>
-        <p:nvSpPr>
-          <p:cNvPr id="141" name="Google Shape;141;p26">
-            <a:extLst>
-              <a:ext uri="{FF2B5EF4-FFF2-40B4-BE49-F238E27FC236}">
-                <a16:creationId xmlns:a16="http://schemas.microsoft.com/office/drawing/2014/main" id="{522A27CE-7B2A-AA9A-4111-B886DB809C23}"/>
-              </a:ext>
-            </a:extLst>
-          </p:cNvPr>
-          <p:cNvSpPr txBox="1"/>
-          <p:nvPr/>
-        </p:nvSpPr>
-        <p:spPr>
-          <a:xfrm>
-            <a:off x="922202" y="1157695"/>
-            <a:ext cx="8511218" cy="742383"/>
-          </a:xfrm>
-          <a:prstGeom prst="rect">
-            <a:avLst/>
-          </a:prstGeom>
-          <a:noFill/>
-          <a:ln>
-            <a:noFill/>
-          </a:ln>
-        </p:spPr>
-        <p:txBody>
-          <a:bodyPr spcFirstLastPara="1" wrap="square" lIns="0" tIns="0" rIns="0" bIns="0" anchor="t" anchorCtr="0">
-            <a:spAutoFit/>
-          </a:bodyPr>
-          <a:lstStyle/>
-          <a:p>
-            <a:pPr defTabSz="609630">
-              <a:lnSpc>
-                <a:spcPct val="140007"/>
-              </a:lnSpc>
-              <a:buClr>
-                <a:srgbClr val="000000"/>
-              </a:buClr>
-            </a:pPr>
-            <a:r>
-              <a:rPr lang="en-US" sz="3446" kern="0" dirty="0">
-                <a:solidFill>
-                  <a:srgbClr val="00693D"/>
-                </a:solidFill>
-                <a:latin typeface="Anton"/>
-                <a:ea typeface="Anton"/>
-                <a:cs typeface="Anton"/>
-                <a:sym typeface="Anton"/>
-              </a:rPr>
-              <a:t>Open Scholarship</a:t>
-            </a:r>
-            <a:endParaRPr sz="933" kern="0" dirty="0">
-              <a:solidFill>
-                <a:srgbClr val="000000"/>
-              </a:solidFill>
-              <a:latin typeface="Anton"/>
-              <a:ea typeface="Anton"/>
-              <a:cs typeface="Anton"/>
-              <a:sym typeface="Anton"/>
-            </a:endParaRPr>
-          </a:p>
-        </p:txBody>
-      </p:sp>
-      <p:sp>
-        <p:nvSpPr>
-          <p:cNvPr id="142" name="Google Shape;142;p26">
-            <a:extLst>
-              <a:ext uri="{FF2B5EF4-FFF2-40B4-BE49-F238E27FC236}">
-                <a16:creationId xmlns:a16="http://schemas.microsoft.com/office/drawing/2014/main" id="{081DCE9E-3302-2CF3-85E6-5163A6FB583D}"/>
-              </a:ext>
-            </a:extLst>
-          </p:cNvPr>
-          <p:cNvSpPr txBox="1"/>
-          <p:nvPr/>
-        </p:nvSpPr>
-        <p:spPr>
-          <a:xfrm>
-            <a:off x="922202" y="2187594"/>
-            <a:ext cx="10059742" cy="1684307"/>
-          </a:xfrm>
-          <a:prstGeom prst="rect">
-            <a:avLst/>
-          </a:prstGeom>
-          <a:noFill/>
-          <a:ln>
-            <a:noFill/>
-          </a:ln>
-        </p:spPr>
-        <p:txBody>
-          <a:bodyPr spcFirstLastPara="1" wrap="square" lIns="0" tIns="0" rIns="0" bIns="0" anchor="t" anchorCtr="0">
-            <a:spAutoFit/>
-          </a:bodyPr>
-          <a:lstStyle/>
-          <a:p>
-            <a:pPr marL="433260" lvl="1" indent="-216630" defTabSz="609630">
-              <a:lnSpc>
-                <a:spcPct val="140013"/>
-              </a:lnSpc>
-              <a:buClr>
-                <a:srgbClr val="12312B"/>
-              </a:buClr>
-              <a:buSzPts val="3009"/>
-              <a:buFont typeface="Archivo Medium"/>
-              <a:buChar char="•"/>
-            </a:pPr>
-            <a:endParaRPr lang="en-US" sz="2006" b="1" kern="0" dirty="0">
-              <a:solidFill>
-                <a:srgbClr val="12312B"/>
-              </a:solidFill>
-              <a:latin typeface="Archivo Medium"/>
-              <a:ea typeface="Archivo Medium"/>
-              <a:cs typeface="Archivo Medium"/>
-              <a:sym typeface="Archivo Medium"/>
-            </a:endParaRPr>
-          </a:p>
-          <a:p>
-            <a:pPr marL="433260" lvl="1" indent="-216630" defTabSz="609630">
-              <a:lnSpc>
-                <a:spcPct val="140013"/>
-              </a:lnSpc>
-              <a:buClr>
-                <a:srgbClr val="12312B"/>
-              </a:buClr>
-              <a:buSzPts val="3009"/>
-              <a:buFont typeface="Archivo Medium"/>
-              <a:buChar char="•"/>
-            </a:pPr>
-            <a:endParaRPr lang="en-US" sz="2006" b="1" kern="0" dirty="0">
-              <a:solidFill>
-                <a:srgbClr val="12312B"/>
-              </a:solidFill>
-              <a:latin typeface="Archivo Medium"/>
-              <a:ea typeface="Archivo Medium"/>
-              <a:cs typeface="Archivo Medium"/>
-              <a:sym typeface="Archivo Medium"/>
-            </a:endParaRPr>
-          </a:p>
-          <a:p>
-            <a:pPr marL="216630" lvl="1" defTabSz="609630">
-              <a:lnSpc>
-                <a:spcPct val="140013"/>
-              </a:lnSpc>
-              <a:buClr>
-                <a:srgbClr val="12312B"/>
-              </a:buClr>
-              <a:buSzPts val="3009"/>
-            </a:pPr>
-            <a:endParaRPr lang="en-US" dirty="0">
-              <a:solidFill>
-                <a:srgbClr val="12312B"/>
-              </a:solidFill>
-              <a:latin typeface="Archivo Medium"/>
-              <a:sym typeface="Archivo Medium"/>
-            </a:endParaRPr>
-          </a:p>
-          <a:p>
-            <a:pPr defTabSz="609630">
-              <a:lnSpc>
-                <a:spcPct val="140013"/>
-              </a:lnSpc>
-              <a:buClr>
-                <a:srgbClr val="000000"/>
-              </a:buClr>
-            </a:pPr>
-            <a:endParaRPr sz="2006" kern="0" dirty="0">
-              <a:solidFill>
-                <a:srgbClr val="12312B"/>
-              </a:solidFill>
-              <a:latin typeface="Arial"/>
-              <a:ea typeface="Arial"/>
-              <a:cs typeface="Arial"/>
-              <a:sym typeface="Arial"/>
-            </a:endParaRPr>
-          </a:p>
-        </p:txBody>
-      </p:sp>
-    </p:spTree>
-    <p:extLst>
-      <p:ext uri="{BB962C8B-B14F-4D97-AF65-F5344CB8AC3E}">
-        <p14:creationId xmlns:p14="http://schemas.microsoft.com/office/powerpoint/2010/main" val="3512906071"/>
-      </p:ext>
-    </p:extLst>
-  </p:cSld>
-  <p:clrMapOvr>
-    <a:masterClrMapping/>
-  </p:clrMapOvr>
-</p:sld>
-</file>
-
-<file path=ppt/slides/slide14.xml><?xml version="1.0" encoding="utf-8"?>
 <p:sld xmlns:a="http://schemas.openxmlformats.org/drawingml/2006/main" xmlns:r="http://schemas.openxmlformats.org/officeDocument/2006/relationships" xmlns:p="http://schemas.openxmlformats.org/presentationml/2006/main">
   <p:cSld>
     <p:spTree>
@@ -15242,7 +14847,7 @@
                 <a:cs typeface="Archivo Medium"/>
                 <a:sym typeface="Archivo Medium"/>
               </a:rPr>
-              <a:t>F.A.I.R.</a:t>
+              <a:t>F.A.I.R. </a:t>
             </a:r>
           </a:p>
           <a:p>
@@ -15330,7 +14935,7 @@
 </p:sld>
 </file>
 
-<file path=ppt/slides/slide15.xml><?xml version="1.0" encoding="utf-8"?>
+<file path=ppt/slides/slide14.xml><?xml version="1.0" encoding="utf-8"?>
 <p:sld xmlns:a="http://schemas.openxmlformats.org/drawingml/2006/main" xmlns:r="http://schemas.openxmlformats.org/officeDocument/2006/relationships" xmlns:p="http://schemas.openxmlformats.org/presentationml/2006/main">
   <p:cSld>
     <p:spTree>
@@ -15398,6 +15003,7 @@
                 <a:ea typeface="Anton"/>
                 <a:cs typeface="Anton"/>
                 <a:sym typeface="Anton"/>
+                <a:hlinkClick r:id="rId4"/>
               </a:rPr>
               <a:t>FAIREST + CARE</a:t>
             </a:r>
@@ -15424,8 +15030,8 @@
         </p:nvSpPr>
         <p:spPr>
           <a:xfrm>
-            <a:off x="922202" y="1736904"/>
-            <a:ext cx="2497273" cy="4465325"/>
+            <a:off x="922202" y="1900078"/>
+            <a:ext cx="2497273" cy="3386825"/>
           </a:xfrm>
           <a:prstGeom prst="rect">
             <a:avLst/>
@@ -15441,165 +15047,91 @@
           </a:bodyPr>
           <a:lstStyle/>
           <a:p>
-            <a:pPr marL="433260" lvl="1" indent="-216630">
-              <a:lnSpc>
-                <a:spcPct val="140013"/>
-              </a:lnSpc>
-              <a:buClr>
-                <a:srgbClr val="12312B"/>
-              </a:buClr>
-              <a:buSzPts val="3009"/>
-              <a:buFont typeface="Archivo Medium"/>
-              <a:buChar char="•"/>
-            </a:pPr>
-            <a:endParaRPr lang="en-US" sz="2006" dirty="0">
-              <a:solidFill>
-                <a:srgbClr val="12312B"/>
-              </a:solidFill>
-              <a:latin typeface="Archivo Medium"/>
-              <a:ea typeface="Archivo Medium"/>
-              <a:cs typeface="Archivo Medium"/>
-              <a:sym typeface="Archivo Medium"/>
-            </a:endParaRPr>
-          </a:p>
-          <a:p>
             <a:pPr lvl="0" fontAlgn="base"/>
             <a:r>
-              <a:rPr lang="en-US" b="1" dirty="0"/>
+              <a:rPr lang="en-US" sz="2400" b="1" dirty="0"/>
               <a:t>F</a:t>
             </a:r>
             <a:r>
-              <a:rPr lang="en-US" dirty="0"/>
+              <a:rPr lang="en-US" sz="2400" dirty="0"/>
               <a:t>indable</a:t>
             </a:r>
-            <a:endParaRPr lang="en-US" b="1" dirty="0"/>
+            <a:endParaRPr lang="en-US" sz="2400" b="1" dirty="0"/>
           </a:p>
           <a:p>
             <a:pPr lvl="0" fontAlgn="base"/>
             <a:r>
-              <a:rPr lang="en-US" b="1" dirty="0"/>
+              <a:rPr lang="en-US" sz="2400" b="1" dirty="0"/>
               <a:t>A</a:t>
             </a:r>
             <a:r>
-              <a:rPr lang="en-US" dirty="0"/>
+              <a:rPr lang="en-US" sz="2400" dirty="0"/>
               <a:t>ccessible</a:t>
             </a:r>
-            <a:endParaRPr lang="en-US" b="1" dirty="0"/>
+            <a:endParaRPr lang="en-US" sz="2400" b="1" dirty="0"/>
           </a:p>
           <a:p>
             <a:pPr lvl="0" fontAlgn="base"/>
             <a:r>
-              <a:rPr lang="en-US" b="1" dirty="0"/>
+              <a:rPr lang="en-US" sz="2400" b="1" dirty="0"/>
               <a:t>I</a:t>
             </a:r>
             <a:r>
-              <a:rPr lang="en-US" dirty="0"/>
+              <a:rPr lang="en-US" sz="2400" dirty="0"/>
               <a:t>nteroperable</a:t>
             </a:r>
-            <a:endParaRPr lang="en-US" b="1" dirty="0"/>
+            <a:endParaRPr lang="en-US" sz="2400" b="1" dirty="0"/>
           </a:p>
           <a:p>
             <a:pPr lvl="0" fontAlgn="base"/>
             <a:r>
-              <a:rPr lang="en-US" b="1" dirty="0"/>
+              <a:rPr lang="en-US" sz="2400" b="1" dirty="0"/>
               <a:t>R</a:t>
             </a:r>
             <a:r>
-              <a:rPr lang="en-US" dirty="0"/>
+              <a:rPr lang="en-US" sz="2400" dirty="0"/>
               <a:t>eusable</a:t>
             </a:r>
-            <a:endParaRPr lang="en-US" b="1" dirty="0"/>
+            <a:endParaRPr lang="en-US" sz="2400" b="1" dirty="0"/>
           </a:p>
           <a:p>
             <a:pPr lvl="0" fontAlgn="base"/>
             <a:r>
-              <a:rPr lang="en-US" b="1" dirty="0"/>
+              <a:rPr lang="en-US" sz="2400" b="1" dirty="0"/>
               <a:t>E</a:t>
             </a:r>
             <a:r>
-              <a:rPr lang="en-US" dirty="0"/>
+              <a:rPr lang="en-US" sz="2400" dirty="0"/>
               <a:t>thics</a:t>
             </a:r>
-            <a:endParaRPr lang="en-US" b="1" dirty="0"/>
+            <a:endParaRPr lang="en-US" sz="2400" b="1" dirty="0"/>
           </a:p>
           <a:p>
             <a:pPr lvl="0" fontAlgn="base"/>
             <a:r>
-              <a:rPr lang="en-US" b="1" dirty="0"/>
+              <a:rPr lang="en-US" sz="2400" b="1" dirty="0"/>
               <a:t>S</a:t>
             </a:r>
             <a:r>
-              <a:rPr lang="en-US" dirty="0"/>
+              <a:rPr lang="en-US" sz="2400" dirty="0"/>
               <a:t>ource</a:t>
             </a:r>
-            <a:endParaRPr lang="en-US" b="1" dirty="0"/>
+            <a:endParaRPr lang="en-US" sz="2400" b="1" dirty="0"/>
           </a:p>
           <a:p>
             <a:pPr lvl="0" fontAlgn="base"/>
             <a:r>
-              <a:rPr lang="en-US" b="1" dirty="0"/>
+              <a:rPr lang="en-US" sz="2400" b="1" dirty="0"/>
               <a:t>T</a:t>
             </a:r>
             <a:r>
-              <a:rPr lang="en-US" dirty="0"/>
+              <a:rPr lang="en-US" sz="2400" dirty="0"/>
               <a:t>rust</a:t>
             </a:r>
-            <a:endParaRPr lang="en-US" b="1" dirty="0"/>
-          </a:p>
-          <a:p>
-            <a:pPr lvl="0" fontAlgn="base"/>
             <a:br>
-              <a:rPr lang="en-US" dirty="0"/>
+              <a:rPr lang="en-US" sz="2400" dirty="0"/>
             </a:br>
-            <a:endParaRPr lang="en-US" b="1" dirty="0"/>
-          </a:p>
-          <a:p>
-            <a:pPr lvl="0" fontAlgn="base"/>
-            <a:r>
-              <a:rPr lang="en-US" b="1" dirty="0"/>
-              <a:t>C</a:t>
-            </a:r>
-            <a:r>
-              <a:rPr lang="en-US" dirty="0"/>
-              <a:t>ollective Benefit</a:t>
-            </a:r>
-            <a:endParaRPr lang="en-US" b="1" dirty="0"/>
-          </a:p>
-          <a:p>
-            <a:pPr lvl="0" fontAlgn="base"/>
-            <a:r>
-              <a:rPr lang="en-US" b="1" dirty="0"/>
-              <a:t>A</a:t>
-            </a:r>
-            <a:r>
-              <a:rPr lang="en-US" dirty="0"/>
-              <a:t>uthority to Control</a:t>
-            </a:r>
-            <a:endParaRPr lang="en-US" b="1" dirty="0"/>
-          </a:p>
-          <a:p>
-            <a:pPr lvl="0" fontAlgn="base"/>
-            <a:r>
-              <a:rPr lang="en-US" b="1" dirty="0"/>
-              <a:t>R</a:t>
-            </a:r>
-            <a:r>
-              <a:rPr lang="en-US" dirty="0"/>
-              <a:t>esponsibility</a:t>
-            </a:r>
-            <a:endParaRPr lang="en-US" b="1" dirty="0"/>
-          </a:p>
-          <a:p>
-            <a:pPr lvl="0" fontAlgn="base"/>
-            <a:r>
-              <a:rPr lang="en-US" b="1" dirty="0"/>
-              <a:t>E</a:t>
-            </a:r>
-            <a:r>
-              <a:rPr lang="en-US" dirty="0"/>
-              <a:t>thics</a:t>
-            </a:r>
-            <a:endParaRPr lang="en-US" b="1" dirty="0"/>
+            <a:endParaRPr lang="en-US" sz="2400" b="1" dirty="0"/>
           </a:p>
           <a:p>
             <a:pPr marL="433260" lvl="1" indent="-216630">
@@ -15638,7 +15170,7 @@
         <p:spPr>
           <a:xfrm>
             <a:off x="5524500" y="1381125"/>
-            <a:ext cx="5200650" cy="1477328"/>
+            <a:ext cx="5200650" cy="3785652"/>
           </a:xfrm>
           <a:prstGeom prst="rect">
             <a:avLst/>
@@ -15652,14 +15184,70 @@
           <a:lstStyle/>
           <a:p>
             <a:r>
-              <a:rPr lang="en-US" b="1" dirty="0"/>
+              <a:rPr lang="en-US" sz="2400" b="1" dirty="0">
+                <a:solidFill>
+                  <a:schemeClr val="accent6"/>
+                </a:solidFill>
+              </a:rPr>
               <a:t>BRAINSTORM</a:t>
             </a:r>
           </a:p>
           <a:p>
+            <a:pPr lvl="0" fontAlgn="base"/>
             <a:r>
-              <a:rPr lang="en-US" dirty="0"/>
-              <a:t>Take a few minutes to map these data principles to your research workflow diagram. Jot down specific and feasible ways you could better accomplish these objectives.</a:t>
+              <a:rPr lang="en-US" sz="2400" b="1" dirty="0"/>
+              <a:t>C</a:t>
+            </a:r>
+            <a:r>
+              <a:rPr lang="en-US" sz="2400" dirty="0"/>
+              <a:t>ollective Benefit</a:t>
+            </a:r>
+            <a:endParaRPr lang="en-US" sz="2400" b="1" dirty="0"/>
+          </a:p>
+          <a:p>
+            <a:pPr lvl="0" fontAlgn="base"/>
+            <a:r>
+              <a:rPr lang="en-US" sz="2400" b="1" dirty="0"/>
+              <a:t>A</a:t>
+            </a:r>
+            <a:r>
+              <a:rPr lang="en-US" sz="2400" dirty="0"/>
+              <a:t>uthority to Control</a:t>
+            </a:r>
+            <a:endParaRPr lang="en-US" sz="2400" b="1" dirty="0"/>
+          </a:p>
+          <a:p>
+            <a:pPr lvl="0" fontAlgn="base"/>
+            <a:r>
+              <a:rPr lang="en-US" sz="2400" b="1" dirty="0"/>
+              <a:t>R</a:t>
+            </a:r>
+            <a:r>
+              <a:rPr lang="en-US" sz="2400" dirty="0"/>
+              <a:t>esponsibility</a:t>
+            </a:r>
+            <a:endParaRPr lang="en-US" sz="2400" b="1" dirty="0"/>
+          </a:p>
+          <a:p>
+            <a:pPr lvl="0" fontAlgn="base"/>
+            <a:r>
+              <a:rPr lang="en-US" sz="2400" b="1" dirty="0"/>
+              <a:t>E</a:t>
+            </a:r>
+            <a:r>
+              <a:rPr lang="en-US" sz="2400" dirty="0"/>
+              <a:t>thics</a:t>
+            </a:r>
+            <a:endParaRPr lang="en-US" sz="2400" b="1" dirty="0"/>
+          </a:p>
+          <a:p>
+            <a:r>
+              <a:rPr lang="en-US" sz="2400" dirty="0">
+                <a:solidFill>
+                  <a:schemeClr val="accent6"/>
+                </a:solidFill>
+              </a:rPr>
+              <a:t>e a few minutes to map these data principles to your research workflow diagram. Jot down specific and feasible ways you could better accomplish these objectives.</a:t>
             </a:r>
           </a:p>
         </p:txBody>
@@ -15674,6 +15262,1186 @@
   <p:clrMapOvr>
     <a:masterClrMapping/>
   </p:clrMapOvr>
+  <p:timing>
+    <p:tnLst>
+      <p:par>
+        <p:cTn id="1" dur="indefinite" restart="never" nodeType="tmRoot">
+          <p:childTnLst>
+            <p:seq concurrent="1" nextAc="seek">
+              <p:cTn id="2" dur="indefinite" nodeType="mainSeq">
+                <p:childTnLst>
+                  <p:par>
+                    <p:cTn id="3" fill="hold">
+                      <p:stCondLst>
+                        <p:cond delay="indefinite"/>
+                      </p:stCondLst>
+                      <p:childTnLst>
+                        <p:par>
+                          <p:cTn id="4" fill="hold">
+                            <p:stCondLst>
+                              <p:cond delay="0"/>
+                            </p:stCondLst>
+                            <p:childTnLst>
+                              <p:par>
+                                <p:cTn id="5" presetID="42" presetClass="entr" presetSubtype="0" fill="hold" nodeType="clickEffect">
+                                  <p:stCondLst>
+                                    <p:cond delay="0"/>
+                                  </p:stCondLst>
+                                  <p:childTnLst>
+                                    <p:set>
+                                      <p:cBhvr>
+                                        <p:cTn id="6" dur="1" fill="hold">
+                                          <p:stCondLst>
+                                            <p:cond delay="0"/>
+                                          </p:stCondLst>
+                                        </p:cTn>
+                                        <p:tgtEl>
+                                          <p:spTgt spid="179">
+                                            <p:txEl>
+                                              <p:pRg st="1" end="1"/>
+                                            </p:txEl>
+                                          </p:spTgt>
+                                        </p:tgtEl>
+                                        <p:attrNameLst>
+                                          <p:attrName>style.visibility</p:attrName>
+                                        </p:attrNameLst>
+                                      </p:cBhvr>
+                                      <p:to>
+                                        <p:strVal val="visible"/>
+                                      </p:to>
+                                    </p:set>
+                                    <p:animEffect transition="in" filter="fade">
+                                      <p:cBhvr>
+                                        <p:cTn id="7" dur="1000"/>
+                                        <p:tgtEl>
+                                          <p:spTgt spid="179">
+                                            <p:txEl>
+                                              <p:pRg st="1" end="1"/>
+                                            </p:txEl>
+                                          </p:spTgt>
+                                        </p:tgtEl>
+                                      </p:cBhvr>
+                                    </p:animEffect>
+                                    <p:anim calcmode="lin" valueType="num">
+                                      <p:cBhvr>
+                                        <p:cTn id="8" dur="1000" fill="hold"/>
+                                        <p:tgtEl>
+                                          <p:spTgt spid="179">
+                                            <p:txEl>
+                                              <p:pRg st="1" end="1"/>
+                                            </p:txEl>
+                                          </p:spTgt>
+                                        </p:tgtEl>
+                                        <p:attrNameLst>
+                                          <p:attrName>ppt_x</p:attrName>
+                                        </p:attrNameLst>
+                                      </p:cBhvr>
+                                      <p:tavLst>
+                                        <p:tav tm="0">
+                                          <p:val>
+                                            <p:strVal val="#ppt_x"/>
+                                          </p:val>
+                                        </p:tav>
+                                        <p:tav tm="100000">
+                                          <p:val>
+                                            <p:strVal val="#ppt_x"/>
+                                          </p:val>
+                                        </p:tav>
+                                      </p:tavLst>
+                                    </p:anim>
+                                    <p:anim calcmode="lin" valueType="num">
+                                      <p:cBhvr>
+                                        <p:cTn id="9" dur="1000" fill="hold"/>
+                                        <p:tgtEl>
+                                          <p:spTgt spid="179">
+                                            <p:txEl>
+                                              <p:pRg st="1" end="1"/>
+                                            </p:txEl>
+                                          </p:spTgt>
+                                        </p:tgtEl>
+                                        <p:attrNameLst>
+                                          <p:attrName>ppt_y</p:attrName>
+                                        </p:attrNameLst>
+                                      </p:cBhvr>
+                                      <p:tavLst>
+                                        <p:tav tm="0">
+                                          <p:val>
+                                            <p:strVal val="#ppt_y+.1"/>
+                                          </p:val>
+                                        </p:tav>
+                                        <p:tav tm="100000">
+                                          <p:val>
+                                            <p:strVal val="#ppt_y"/>
+                                          </p:val>
+                                        </p:tav>
+                                      </p:tavLst>
+                                    </p:anim>
+                                  </p:childTnLst>
+                                </p:cTn>
+                              </p:par>
+                            </p:childTnLst>
+                          </p:cTn>
+                        </p:par>
+                      </p:childTnLst>
+                    </p:cTn>
+                  </p:par>
+                  <p:par>
+                    <p:cTn id="10" fill="hold">
+                      <p:stCondLst>
+                        <p:cond delay="indefinite"/>
+                      </p:stCondLst>
+                      <p:childTnLst>
+                        <p:par>
+                          <p:cTn id="11" fill="hold">
+                            <p:stCondLst>
+                              <p:cond delay="0"/>
+                            </p:stCondLst>
+                            <p:childTnLst>
+                              <p:par>
+                                <p:cTn id="12" presetID="42" presetClass="entr" presetSubtype="0" fill="hold" nodeType="clickEffect">
+                                  <p:stCondLst>
+                                    <p:cond delay="0"/>
+                                  </p:stCondLst>
+                                  <p:childTnLst>
+                                    <p:set>
+                                      <p:cBhvr>
+                                        <p:cTn id="13" dur="1" fill="hold">
+                                          <p:stCondLst>
+                                            <p:cond delay="0"/>
+                                          </p:stCondLst>
+                                        </p:cTn>
+                                        <p:tgtEl>
+                                          <p:spTgt spid="179">
+                                            <p:txEl>
+                                              <p:pRg st="2" end="2"/>
+                                            </p:txEl>
+                                          </p:spTgt>
+                                        </p:tgtEl>
+                                        <p:attrNameLst>
+                                          <p:attrName>style.visibility</p:attrName>
+                                        </p:attrNameLst>
+                                      </p:cBhvr>
+                                      <p:to>
+                                        <p:strVal val="visible"/>
+                                      </p:to>
+                                    </p:set>
+                                    <p:animEffect transition="in" filter="fade">
+                                      <p:cBhvr>
+                                        <p:cTn id="14" dur="1000"/>
+                                        <p:tgtEl>
+                                          <p:spTgt spid="179">
+                                            <p:txEl>
+                                              <p:pRg st="2" end="2"/>
+                                            </p:txEl>
+                                          </p:spTgt>
+                                        </p:tgtEl>
+                                      </p:cBhvr>
+                                    </p:animEffect>
+                                    <p:anim calcmode="lin" valueType="num">
+                                      <p:cBhvr>
+                                        <p:cTn id="15" dur="1000" fill="hold"/>
+                                        <p:tgtEl>
+                                          <p:spTgt spid="179">
+                                            <p:txEl>
+                                              <p:pRg st="2" end="2"/>
+                                            </p:txEl>
+                                          </p:spTgt>
+                                        </p:tgtEl>
+                                        <p:attrNameLst>
+                                          <p:attrName>ppt_x</p:attrName>
+                                        </p:attrNameLst>
+                                      </p:cBhvr>
+                                      <p:tavLst>
+                                        <p:tav tm="0">
+                                          <p:val>
+                                            <p:strVal val="#ppt_x"/>
+                                          </p:val>
+                                        </p:tav>
+                                        <p:tav tm="100000">
+                                          <p:val>
+                                            <p:strVal val="#ppt_x"/>
+                                          </p:val>
+                                        </p:tav>
+                                      </p:tavLst>
+                                    </p:anim>
+                                    <p:anim calcmode="lin" valueType="num">
+                                      <p:cBhvr>
+                                        <p:cTn id="16" dur="1000" fill="hold"/>
+                                        <p:tgtEl>
+                                          <p:spTgt spid="179">
+                                            <p:txEl>
+                                              <p:pRg st="2" end="2"/>
+                                            </p:txEl>
+                                          </p:spTgt>
+                                        </p:tgtEl>
+                                        <p:attrNameLst>
+                                          <p:attrName>ppt_y</p:attrName>
+                                        </p:attrNameLst>
+                                      </p:cBhvr>
+                                      <p:tavLst>
+                                        <p:tav tm="0">
+                                          <p:val>
+                                            <p:strVal val="#ppt_y+.1"/>
+                                          </p:val>
+                                        </p:tav>
+                                        <p:tav tm="100000">
+                                          <p:val>
+                                            <p:strVal val="#ppt_y"/>
+                                          </p:val>
+                                        </p:tav>
+                                      </p:tavLst>
+                                    </p:anim>
+                                  </p:childTnLst>
+                                </p:cTn>
+                              </p:par>
+                            </p:childTnLst>
+                          </p:cTn>
+                        </p:par>
+                      </p:childTnLst>
+                    </p:cTn>
+                  </p:par>
+                  <p:par>
+                    <p:cTn id="17" fill="hold">
+                      <p:stCondLst>
+                        <p:cond delay="indefinite"/>
+                      </p:stCondLst>
+                      <p:childTnLst>
+                        <p:par>
+                          <p:cTn id="18" fill="hold">
+                            <p:stCondLst>
+                              <p:cond delay="0"/>
+                            </p:stCondLst>
+                            <p:childTnLst>
+                              <p:par>
+                                <p:cTn id="19" presetID="42" presetClass="entr" presetSubtype="0" fill="hold" nodeType="clickEffect">
+                                  <p:stCondLst>
+                                    <p:cond delay="0"/>
+                                  </p:stCondLst>
+                                  <p:childTnLst>
+                                    <p:set>
+                                      <p:cBhvr>
+                                        <p:cTn id="20" dur="1" fill="hold">
+                                          <p:stCondLst>
+                                            <p:cond delay="0"/>
+                                          </p:stCondLst>
+                                        </p:cTn>
+                                        <p:tgtEl>
+                                          <p:spTgt spid="179">
+                                            <p:txEl>
+                                              <p:pRg st="3" end="3"/>
+                                            </p:txEl>
+                                          </p:spTgt>
+                                        </p:tgtEl>
+                                        <p:attrNameLst>
+                                          <p:attrName>style.visibility</p:attrName>
+                                        </p:attrNameLst>
+                                      </p:cBhvr>
+                                      <p:to>
+                                        <p:strVal val="visible"/>
+                                      </p:to>
+                                    </p:set>
+                                    <p:animEffect transition="in" filter="fade">
+                                      <p:cBhvr>
+                                        <p:cTn id="21" dur="1000"/>
+                                        <p:tgtEl>
+                                          <p:spTgt spid="179">
+                                            <p:txEl>
+                                              <p:pRg st="3" end="3"/>
+                                            </p:txEl>
+                                          </p:spTgt>
+                                        </p:tgtEl>
+                                      </p:cBhvr>
+                                    </p:animEffect>
+                                    <p:anim calcmode="lin" valueType="num">
+                                      <p:cBhvr>
+                                        <p:cTn id="22" dur="1000" fill="hold"/>
+                                        <p:tgtEl>
+                                          <p:spTgt spid="179">
+                                            <p:txEl>
+                                              <p:pRg st="3" end="3"/>
+                                            </p:txEl>
+                                          </p:spTgt>
+                                        </p:tgtEl>
+                                        <p:attrNameLst>
+                                          <p:attrName>ppt_x</p:attrName>
+                                        </p:attrNameLst>
+                                      </p:cBhvr>
+                                      <p:tavLst>
+                                        <p:tav tm="0">
+                                          <p:val>
+                                            <p:strVal val="#ppt_x"/>
+                                          </p:val>
+                                        </p:tav>
+                                        <p:tav tm="100000">
+                                          <p:val>
+                                            <p:strVal val="#ppt_x"/>
+                                          </p:val>
+                                        </p:tav>
+                                      </p:tavLst>
+                                    </p:anim>
+                                    <p:anim calcmode="lin" valueType="num">
+                                      <p:cBhvr>
+                                        <p:cTn id="23" dur="1000" fill="hold"/>
+                                        <p:tgtEl>
+                                          <p:spTgt spid="179">
+                                            <p:txEl>
+                                              <p:pRg st="3" end="3"/>
+                                            </p:txEl>
+                                          </p:spTgt>
+                                        </p:tgtEl>
+                                        <p:attrNameLst>
+                                          <p:attrName>ppt_y</p:attrName>
+                                        </p:attrNameLst>
+                                      </p:cBhvr>
+                                      <p:tavLst>
+                                        <p:tav tm="0">
+                                          <p:val>
+                                            <p:strVal val="#ppt_y+.1"/>
+                                          </p:val>
+                                        </p:tav>
+                                        <p:tav tm="100000">
+                                          <p:val>
+                                            <p:strVal val="#ppt_y"/>
+                                          </p:val>
+                                        </p:tav>
+                                      </p:tavLst>
+                                    </p:anim>
+                                  </p:childTnLst>
+                                </p:cTn>
+                              </p:par>
+                            </p:childTnLst>
+                          </p:cTn>
+                        </p:par>
+                      </p:childTnLst>
+                    </p:cTn>
+                  </p:par>
+                  <p:par>
+                    <p:cTn id="24" fill="hold">
+                      <p:stCondLst>
+                        <p:cond delay="indefinite"/>
+                      </p:stCondLst>
+                      <p:childTnLst>
+                        <p:par>
+                          <p:cTn id="25" fill="hold">
+                            <p:stCondLst>
+                              <p:cond delay="0"/>
+                            </p:stCondLst>
+                            <p:childTnLst>
+                              <p:par>
+                                <p:cTn id="26" presetID="42" presetClass="entr" presetSubtype="0" fill="hold" nodeType="clickEffect">
+                                  <p:stCondLst>
+                                    <p:cond delay="0"/>
+                                  </p:stCondLst>
+                                  <p:childTnLst>
+                                    <p:set>
+                                      <p:cBhvr>
+                                        <p:cTn id="27" dur="1" fill="hold">
+                                          <p:stCondLst>
+                                            <p:cond delay="0"/>
+                                          </p:stCondLst>
+                                        </p:cTn>
+                                        <p:tgtEl>
+                                          <p:spTgt spid="3">
+                                            <p:txEl>
+                                              <p:pRg st="1" end="1"/>
+                                            </p:txEl>
+                                          </p:spTgt>
+                                        </p:tgtEl>
+                                        <p:attrNameLst>
+                                          <p:attrName>style.visibility</p:attrName>
+                                        </p:attrNameLst>
+                                      </p:cBhvr>
+                                      <p:to>
+                                        <p:strVal val="visible"/>
+                                      </p:to>
+                                    </p:set>
+                                    <p:animEffect transition="in" filter="fade">
+                                      <p:cBhvr>
+                                        <p:cTn id="28" dur="1000"/>
+                                        <p:tgtEl>
+                                          <p:spTgt spid="3">
+                                            <p:txEl>
+                                              <p:pRg st="1" end="1"/>
+                                            </p:txEl>
+                                          </p:spTgt>
+                                        </p:tgtEl>
+                                      </p:cBhvr>
+                                    </p:animEffect>
+                                    <p:anim calcmode="lin" valueType="num">
+                                      <p:cBhvr>
+                                        <p:cTn id="29" dur="1000" fill="hold"/>
+                                        <p:tgtEl>
+                                          <p:spTgt spid="3">
+                                            <p:txEl>
+                                              <p:pRg st="1" end="1"/>
+                                            </p:txEl>
+                                          </p:spTgt>
+                                        </p:tgtEl>
+                                        <p:attrNameLst>
+                                          <p:attrName>ppt_x</p:attrName>
+                                        </p:attrNameLst>
+                                      </p:cBhvr>
+                                      <p:tavLst>
+                                        <p:tav tm="0">
+                                          <p:val>
+                                            <p:strVal val="#ppt_x"/>
+                                          </p:val>
+                                        </p:tav>
+                                        <p:tav tm="100000">
+                                          <p:val>
+                                            <p:strVal val="#ppt_x"/>
+                                          </p:val>
+                                        </p:tav>
+                                      </p:tavLst>
+                                    </p:anim>
+                                    <p:anim calcmode="lin" valueType="num">
+                                      <p:cBhvr>
+                                        <p:cTn id="30" dur="1000" fill="hold"/>
+                                        <p:tgtEl>
+                                          <p:spTgt spid="3">
+                                            <p:txEl>
+                                              <p:pRg st="1" end="1"/>
+                                            </p:txEl>
+                                          </p:spTgt>
+                                        </p:tgtEl>
+                                        <p:attrNameLst>
+                                          <p:attrName>ppt_y</p:attrName>
+                                        </p:attrNameLst>
+                                      </p:cBhvr>
+                                      <p:tavLst>
+                                        <p:tav tm="0">
+                                          <p:val>
+                                            <p:strVal val="#ppt_y+.1"/>
+                                          </p:val>
+                                        </p:tav>
+                                        <p:tav tm="100000">
+                                          <p:val>
+                                            <p:strVal val="#ppt_y"/>
+                                          </p:val>
+                                        </p:tav>
+                                      </p:tavLst>
+                                    </p:anim>
+                                  </p:childTnLst>
+                                </p:cTn>
+                              </p:par>
+                            </p:childTnLst>
+                          </p:cTn>
+                        </p:par>
+                      </p:childTnLst>
+                    </p:cTn>
+                  </p:par>
+                  <p:par>
+                    <p:cTn id="31" fill="hold">
+                      <p:stCondLst>
+                        <p:cond delay="indefinite"/>
+                      </p:stCondLst>
+                      <p:childTnLst>
+                        <p:par>
+                          <p:cTn id="32" fill="hold">
+                            <p:stCondLst>
+                              <p:cond delay="0"/>
+                            </p:stCondLst>
+                            <p:childTnLst>
+                              <p:par>
+                                <p:cTn id="33" presetID="42" presetClass="entr" presetSubtype="0" fill="hold" nodeType="clickEffect">
+                                  <p:stCondLst>
+                                    <p:cond delay="0"/>
+                                  </p:stCondLst>
+                                  <p:childTnLst>
+                                    <p:set>
+                                      <p:cBhvr>
+                                        <p:cTn id="34" dur="1" fill="hold">
+                                          <p:stCondLst>
+                                            <p:cond delay="0"/>
+                                          </p:stCondLst>
+                                        </p:cTn>
+                                        <p:tgtEl>
+                                          <p:spTgt spid="3">
+                                            <p:txEl>
+                                              <p:pRg st="2" end="2"/>
+                                            </p:txEl>
+                                          </p:spTgt>
+                                        </p:tgtEl>
+                                        <p:attrNameLst>
+                                          <p:attrName>style.visibility</p:attrName>
+                                        </p:attrNameLst>
+                                      </p:cBhvr>
+                                      <p:to>
+                                        <p:strVal val="visible"/>
+                                      </p:to>
+                                    </p:set>
+                                    <p:animEffect transition="in" filter="fade">
+                                      <p:cBhvr>
+                                        <p:cTn id="35" dur="1000"/>
+                                        <p:tgtEl>
+                                          <p:spTgt spid="3">
+                                            <p:txEl>
+                                              <p:pRg st="2" end="2"/>
+                                            </p:txEl>
+                                          </p:spTgt>
+                                        </p:tgtEl>
+                                      </p:cBhvr>
+                                    </p:animEffect>
+                                    <p:anim calcmode="lin" valueType="num">
+                                      <p:cBhvr>
+                                        <p:cTn id="36" dur="1000" fill="hold"/>
+                                        <p:tgtEl>
+                                          <p:spTgt spid="3">
+                                            <p:txEl>
+                                              <p:pRg st="2" end="2"/>
+                                            </p:txEl>
+                                          </p:spTgt>
+                                        </p:tgtEl>
+                                        <p:attrNameLst>
+                                          <p:attrName>ppt_x</p:attrName>
+                                        </p:attrNameLst>
+                                      </p:cBhvr>
+                                      <p:tavLst>
+                                        <p:tav tm="0">
+                                          <p:val>
+                                            <p:strVal val="#ppt_x"/>
+                                          </p:val>
+                                        </p:tav>
+                                        <p:tav tm="100000">
+                                          <p:val>
+                                            <p:strVal val="#ppt_x"/>
+                                          </p:val>
+                                        </p:tav>
+                                      </p:tavLst>
+                                    </p:anim>
+                                    <p:anim calcmode="lin" valueType="num">
+                                      <p:cBhvr>
+                                        <p:cTn id="37" dur="1000" fill="hold"/>
+                                        <p:tgtEl>
+                                          <p:spTgt spid="3">
+                                            <p:txEl>
+                                              <p:pRg st="2" end="2"/>
+                                            </p:txEl>
+                                          </p:spTgt>
+                                        </p:tgtEl>
+                                        <p:attrNameLst>
+                                          <p:attrName>ppt_y</p:attrName>
+                                        </p:attrNameLst>
+                                      </p:cBhvr>
+                                      <p:tavLst>
+                                        <p:tav tm="0">
+                                          <p:val>
+                                            <p:strVal val="#ppt_y+.1"/>
+                                          </p:val>
+                                        </p:tav>
+                                        <p:tav tm="100000">
+                                          <p:val>
+                                            <p:strVal val="#ppt_y"/>
+                                          </p:val>
+                                        </p:tav>
+                                      </p:tavLst>
+                                    </p:anim>
+                                  </p:childTnLst>
+                                </p:cTn>
+                              </p:par>
+                            </p:childTnLst>
+                          </p:cTn>
+                        </p:par>
+                      </p:childTnLst>
+                    </p:cTn>
+                  </p:par>
+                  <p:par>
+                    <p:cTn id="38" fill="hold">
+                      <p:stCondLst>
+                        <p:cond delay="indefinite"/>
+                      </p:stCondLst>
+                      <p:childTnLst>
+                        <p:par>
+                          <p:cTn id="39" fill="hold">
+                            <p:stCondLst>
+                              <p:cond delay="0"/>
+                            </p:stCondLst>
+                            <p:childTnLst>
+                              <p:par>
+                                <p:cTn id="40" presetID="42" presetClass="entr" presetSubtype="0" fill="hold" nodeType="clickEffect">
+                                  <p:stCondLst>
+                                    <p:cond delay="0"/>
+                                  </p:stCondLst>
+                                  <p:childTnLst>
+                                    <p:set>
+                                      <p:cBhvr>
+                                        <p:cTn id="41" dur="1" fill="hold">
+                                          <p:stCondLst>
+                                            <p:cond delay="0"/>
+                                          </p:stCondLst>
+                                        </p:cTn>
+                                        <p:tgtEl>
+                                          <p:spTgt spid="3">
+                                            <p:txEl>
+                                              <p:pRg st="3" end="3"/>
+                                            </p:txEl>
+                                          </p:spTgt>
+                                        </p:tgtEl>
+                                        <p:attrNameLst>
+                                          <p:attrName>style.visibility</p:attrName>
+                                        </p:attrNameLst>
+                                      </p:cBhvr>
+                                      <p:to>
+                                        <p:strVal val="visible"/>
+                                      </p:to>
+                                    </p:set>
+                                    <p:animEffect transition="in" filter="fade">
+                                      <p:cBhvr>
+                                        <p:cTn id="42" dur="1000"/>
+                                        <p:tgtEl>
+                                          <p:spTgt spid="3">
+                                            <p:txEl>
+                                              <p:pRg st="3" end="3"/>
+                                            </p:txEl>
+                                          </p:spTgt>
+                                        </p:tgtEl>
+                                      </p:cBhvr>
+                                    </p:animEffect>
+                                    <p:anim calcmode="lin" valueType="num">
+                                      <p:cBhvr>
+                                        <p:cTn id="43" dur="1000" fill="hold"/>
+                                        <p:tgtEl>
+                                          <p:spTgt spid="3">
+                                            <p:txEl>
+                                              <p:pRg st="3" end="3"/>
+                                            </p:txEl>
+                                          </p:spTgt>
+                                        </p:tgtEl>
+                                        <p:attrNameLst>
+                                          <p:attrName>ppt_x</p:attrName>
+                                        </p:attrNameLst>
+                                      </p:cBhvr>
+                                      <p:tavLst>
+                                        <p:tav tm="0">
+                                          <p:val>
+                                            <p:strVal val="#ppt_x"/>
+                                          </p:val>
+                                        </p:tav>
+                                        <p:tav tm="100000">
+                                          <p:val>
+                                            <p:strVal val="#ppt_x"/>
+                                          </p:val>
+                                        </p:tav>
+                                      </p:tavLst>
+                                    </p:anim>
+                                    <p:anim calcmode="lin" valueType="num">
+                                      <p:cBhvr>
+                                        <p:cTn id="44" dur="1000" fill="hold"/>
+                                        <p:tgtEl>
+                                          <p:spTgt spid="3">
+                                            <p:txEl>
+                                              <p:pRg st="3" end="3"/>
+                                            </p:txEl>
+                                          </p:spTgt>
+                                        </p:tgtEl>
+                                        <p:attrNameLst>
+                                          <p:attrName>ppt_y</p:attrName>
+                                        </p:attrNameLst>
+                                      </p:cBhvr>
+                                      <p:tavLst>
+                                        <p:tav tm="0">
+                                          <p:val>
+                                            <p:strVal val="#ppt_y+.1"/>
+                                          </p:val>
+                                        </p:tav>
+                                        <p:tav tm="100000">
+                                          <p:val>
+                                            <p:strVal val="#ppt_y"/>
+                                          </p:val>
+                                        </p:tav>
+                                      </p:tavLst>
+                                    </p:anim>
+                                  </p:childTnLst>
+                                </p:cTn>
+                              </p:par>
+                            </p:childTnLst>
+                          </p:cTn>
+                        </p:par>
+                      </p:childTnLst>
+                    </p:cTn>
+                  </p:par>
+                  <p:par>
+                    <p:cTn id="45" fill="hold">
+                      <p:stCondLst>
+                        <p:cond delay="indefinite"/>
+                      </p:stCondLst>
+                      <p:childTnLst>
+                        <p:par>
+                          <p:cTn id="46" fill="hold">
+                            <p:stCondLst>
+                              <p:cond delay="0"/>
+                            </p:stCondLst>
+                            <p:childTnLst>
+                              <p:par>
+                                <p:cTn id="47" presetID="42" presetClass="entr" presetSubtype="0" fill="hold" nodeType="clickEffect">
+                                  <p:stCondLst>
+                                    <p:cond delay="0"/>
+                                  </p:stCondLst>
+                                  <p:childTnLst>
+                                    <p:set>
+                                      <p:cBhvr>
+                                        <p:cTn id="48" dur="1" fill="hold">
+                                          <p:stCondLst>
+                                            <p:cond delay="0"/>
+                                          </p:stCondLst>
+                                        </p:cTn>
+                                        <p:tgtEl>
+                                          <p:spTgt spid="3">
+                                            <p:txEl>
+                                              <p:pRg st="4" end="4"/>
+                                            </p:txEl>
+                                          </p:spTgt>
+                                        </p:tgtEl>
+                                        <p:attrNameLst>
+                                          <p:attrName>style.visibility</p:attrName>
+                                        </p:attrNameLst>
+                                      </p:cBhvr>
+                                      <p:to>
+                                        <p:strVal val="visible"/>
+                                      </p:to>
+                                    </p:set>
+                                    <p:animEffect transition="in" filter="fade">
+                                      <p:cBhvr>
+                                        <p:cTn id="49" dur="1000"/>
+                                        <p:tgtEl>
+                                          <p:spTgt spid="3">
+                                            <p:txEl>
+                                              <p:pRg st="4" end="4"/>
+                                            </p:txEl>
+                                          </p:spTgt>
+                                        </p:tgtEl>
+                                      </p:cBhvr>
+                                    </p:animEffect>
+                                    <p:anim calcmode="lin" valueType="num">
+                                      <p:cBhvr>
+                                        <p:cTn id="50" dur="1000" fill="hold"/>
+                                        <p:tgtEl>
+                                          <p:spTgt spid="3">
+                                            <p:txEl>
+                                              <p:pRg st="4" end="4"/>
+                                            </p:txEl>
+                                          </p:spTgt>
+                                        </p:tgtEl>
+                                        <p:attrNameLst>
+                                          <p:attrName>ppt_x</p:attrName>
+                                        </p:attrNameLst>
+                                      </p:cBhvr>
+                                      <p:tavLst>
+                                        <p:tav tm="0">
+                                          <p:val>
+                                            <p:strVal val="#ppt_x"/>
+                                          </p:val>
+                                        </p:tav>
+                                        <p:tav tm="100000">
+                                          <p:val>
+                                            <p:strVal val="#ppt_x"/>
+                                          </p:val>
+                                        </p:tav>
+                                      </p:tavLst>
+                                    </p:anim>
+                                    <p:anim calcmode="lin" valueType="num">
+                                      <p:cBhvr>
+                                        <p:cTn id="51" dur="1000" fill="hold"/>
+                                        <p:tgtEl>
+                                          <p:spTgt spid="3">
+                                            <p:txEl>
+                                              <p:pRg st="4" end="4"/>
+                                            </p:txEl>
+                                          </p:spTgt>
+                                        </p:tgtEl>
+                                        <p:attrNameLst>
+                                          <p:attrName>ppt_y</p:attrName>
+                                        </p:attrNameLst>
+                                      </p:cBhvr>
+                                      <p:tavLst>
+                                        <p:tav tm="0">
+                                          <p:val>
+                                            <p:strVal val="#ppt_y+.1"/>
+                                          </p:val>
+                                        </p:tav>
+                                        <p:tav tm="100000">
+                                          <p:val>
+                                            <p:strVal val="#ppt_y"/>
+                                          </p:val>
+                                        </p:tav>
+                                      </p:tavLst>
+                                    </p:anim>
+                                  </p:childTnLst>
+                                </p:cTn>
+                              </p:par>
+                            </p:childTnLst>
+                          </p:cTn>
+                        </p:par>
+                      </p:childTnLst>
+                    </p:cTn>
+                  </p:par>
+                  <p:par>
+                    <p:cTn id="52" fill="hold">
+                      <p:stCondLst>
+                        <p:cond delay="indefinite"/>
+                      </p:stCondLst>
+                      <p:childTnLst>
+                        <p:par>
+                          <p:cTn id="53" fill="hold">
+                            <p:stCondLst>
+                              <p:cond delay="0"/>
+                            </p:stCondLst>
+                            <p:childTnLst>
+                              <p:par>
+                                <p:cTn id="54" presetID="42" presetClass="entr" presetSubtype="0" fill="hold" nodeType="clickEffect">
+                                  <p:stCondLst>
+                                    <p:cond delay="0"/>
+                                  </p:stCondLst>
+                                  <p:childTnLst>
+                                    <p:set>
+                                      <p:cBhvr>
+                                        <p:cTn id="55" dur="1" fill="hold">
+                                          <p:stCondLst>
+                                            <p:cond delay="0"/>
+                                          </p:stCondLst>
+                                        </p:cTn>
+                                        <p:tgtEl>
+                                          <p:spTgt spid="179">
+                                            <p:txEl>
+                                              <p:pRg st="4" end="4"/>
+                                            </p:txEl>
+                                          </p:spTgt>
+                                        </p:tgtEl>
+                                        <p:attrNameLst>
+                                          <p:attrName>style.visibility</p:attrName>
+                                        </p:attrNameLst>
+                                      </p:cBhvr>
+                                      <p:to>
+                                        <p:strVal val="visible"/>
+                                      </p:to>
+                                    </p:set>
+                                    <p:animEffect transition="in" filter="fade">
+                                      <p:cBhvr>
+                                        <p:cTn id="56" dur="1000"/>
+                                        <p:tgtEl>
+                                          <p:spTgt spid="179">
+                                            <p:txEl>
+                                              <p:pRg st="4" end="4"/>
+                                            </p:txEl>
+                                          </p:spTgt>
+                                        </p:tgtEl>
+                                      </p:cBhvr>
+                                    </p:animEffect>
+                                    <p:anim calcmode="lin" valueType="num">
+                                      <p:cBhvr>
+                                        <p:cTn id="57" dur="1000" fill="hold"/>
+                                        <p:tgtEl>
+                                          <p:spTgt spid="179">
+                                            <p:txEl>
+                                              <p:pRg st="4" end="4"/>
+                                            </p:txEl>
+                                          </p:spTgt>
+                                        </p:tgtEl>
+                                        <p:attrNameLst>
+                                          <p:attrName>ppt_x</p:attrName>
+                                        </p:attrNameLst>
+                                      </p:cBhvr>
+                                      <p:tavLst>
+                                        <p:tav tm="0">
+                                          <p:val>
+                                            <p:strVal val="#ppt_x"/>
+                                          </p:val>
+                                        </p:tav>
+                                        <p:tav tm="100000">
+                                          <p:val>
+                                            <p:strVal val="#ppt_x"/>
+                                          </p:val>
+                                        </p:tav>
+                                      </p:tavLst>
+                                    </p:anim>
+                                    <p:anim calcmode="lin" valueType="num">
+                                      <p:cBhvr>
+                                        <p:cTn id="58" dur="1000" fill="hold"/>
+                                        <p:tgtEl>
+                                          <p:spTgt spid="179">
+                                            <p:txEl>
+                                              <p:pRg st="4" end="4"/>
+                                            </p:txEl>
+                                          </p:spTgt>
+                                        </p:tgtEl>
+                                        <p:attrNameLst>
+                                          <p:attrName>ppt_y</p:attrName>
+                                        </p:attrNameLst>
+                                      </p:cBhvr>
+                                      <p:tavLst>
+                                        <p:tav tm="0">
+                                          <p:val>
+                                            <p:strVal val="#ppt_y+.1"/>
+                                          </p:val>
+                                        </p:tav>
+                                        <p:tav tm="100000">
+                                          <p:val>
+                                            <p:strVal val="#ppt_y"/>
+                                          </p:val>
+                                        </p:tav>
+                                      </p:tavLst>
+                                    </p:anim>
+                                  </p:childTnLst>
+                                </p:cTn>
+                              </p:par>
+                            </p:childTnLst>
+                          </p:cTn>
+                        </p:par>
+                      </p:childTnLst>
+                    </p:cTn>
+                  </p:par>
+                  <p:par>
+                    <p:cTn id="59" fill="hold">
+                      <p:stCondLst>
+                        <p:cond delay="indefinite"/>
+                      </p:stCondLst>
+                      <p:childTnLst>
+                        <p:par>
+                          <p:cTn id="60" fill="hold">
+                            <p:stCondLst>
+                              <p:cond delay="0"/>
+                            </p:stCondLst>
+                            <p:childTnLst>
+                              <p:par>
+                                <p:cTn id="61" presetID="42" presetClass="entr" presetSubtype="0" fill="hold" nodeType="clickEffect">
+                                  <p:stCondLst>
+                                    <p:cond delay="0"/>
+                                  </p:stCondLst>
+                                  <p:childTnLst>
+                                    <p:set>
+                                      <p:cBhvr>
+                                        <p:cTn id="62" dur="1" fill="hold">
+                                          <p:stCondLst>
+                                            <p:cond delay="0"/>
+                                          </p:stCondLst>
+                                        </p:cTn>
+                                        <p:tgtEl>
+                                          <p:spTgt spid="179">
+                                            <p:txEl>
+                                              <p:pRg st="5" end="5"/>
+                                            </p:txEl>
+                                          </p:spTgt>
+                                        </p:tgtEl>
+                                        <p:attrNameLst>
+                                          <p:attrName>style.visibility</p:attrName>
+                                        </p:attrNameLst>
+                                      </p:cBhvr>
+                                      <p:to>
+                                        <p:strVal val="visible"/>
+                                      </p:to>
+                                    </p:set>
+                                    <p:animEffect transition="in" filter="fade">
+                                      <p:cBhvr>
+                                        <p:cTn id="63" dur="1000"/>
+                                        <p:tgtEl>
+                                          <p:spTgt spid="179">
+                                            <p:txEl>
+                                              <p:pRg st="5" end="5"/>
+                                            </p:txEl>
+                                          </p:spTgt>
+                                        </p:tgtEl>
+                                      </p:cBhvr>
+                                    </p:animEffect>
+                                    <p:anim calcmode="lin" valueType="num">
+                                      <p:cBhvr>
+                                        <p:cTn id="64" dur="1000" fill="hold"/>
+                                        <p:tgtEl>
+                                          <p:spTgt spid="179">
+                                            <p:txEl>
+                                              <p:pRg st="5" end="5"/>
+                                            </p:txEl>
+                                          </p:spTgt>
+                                        </p:tgtEl>
+                                        <p:attrNameLst>
+                                          <p:attrName>ppt_x</p:attrName>
+                                        </p:attrNameLst>
+                                      </p:cBhvr>
+                                      <p:tavLst>
+                                        <p:tav tm="0">
+                                          <p:val>
+                                            <p:strVal val="#ppt_x"/>
+                                          </p:val>
+                                        </p:tav>
+                                        <p:tav tm="100000">
+                                          <p:val>
+                                            <p:strVal val="#ppt_x"/>
+                                          </p:val>
+                                        </p:tav>
+                                      </p:tavLst>
+                                    </p:anim>
+                                    <p:anim calcmode="lin" valueType="num">
+                                      <p:cBhvr>
+                                        <p:cTn id="65" dur="1000" fill="hold"/>
+                                        <p:tgtEl>
+                                          <p:spTgt spid="179">
+                                            <p:txEl>
+                                              <p:pRg st="5" end="5"/>
+                                            </p:txEl>
+                                          </p:spTgt>
+                                        </p:tgtEl>
+                                        <p:attrNameLst>
+                                          <p:attrName>ppt_y</p:attrName>
+                                        </p:attrNameLst>
+                                      </p:cBhvr>
+                                      <p:tavLst>
+                                        <p:tav tm="0">
+                                          <p:val>
+                                            <p:strVal val="#ppt_y+.1"/>
+                                          </p:val>
+                                        </p:tav>
+                                        <p:tav tm="100000">
+                                          <p:val>
+                                            <p:strVal val="#ppt_y"/>
+                                          </p:val>
+                                        </p:tav>
+                                      </p:tavLst>
+                                    </p:anim>
+                                  </p:childTnLst>
+                                </p:cTn>
+                              </p:par>
+                            </p:childTnLst>
+                          </p:cTn>
+                        </p:par>
+                      </p:childTnLst>
+                    </p:cTn>
+                  </p:par>
+                  <p:par>
+                    <p:cTn id="66" fill="hold">
+                      <p:stCondLst>
+                        <p:cond delay="indefinite"/>
+                      </p:stCondLst>
+                      <p:childTnLst>
+                        <p:par>
+                          <p:cTn id="67" fill="hold">
+                            <p:stCondLst>
+                              <p:cond delay="0"/>
+                            </p:stCondLst>
+                            <p:childTnLst>
+                              <p:par>
+                                <p:cTn id="68" presetID="42" presetClass="entr" presetSubtype="0" fill="hold" nodeType="clickEffect">
+                                  <p:stCondLst>
+                                    <p:cond delay="0"/>
+                                  </p:stCondLst>
+                                  <p:childTnLst>
+                                    <p:set>
+                                      <p:cBhvr>
+                                        <p:cTn id="69" dur="1" fill="hold">
+                                          <p:stCondLst>
+                                            <p:cond delay="0"/>
+                                          </p:stCondLst>
+                                        </p:cTn>
+                                        <p:tgtEl>
+                                          <p:spTgt spid="179">
+                                            <p:txEl>
+                                              <p:pRg st="6" end="6"/>
+                                            </p:txEl>
+                                          </p:spTgt>
+                                        </p:tgtEl>
+                                        <p:attrNameLst>
+                                          <p:attrName>style.visibility</p:attrName>
+                                        </p:attrNameLst>
+                                      </p:cBhvr>
+                                      <p:to>
+                                        <p:strVal val="visible"/>
+                                      </p:to>
+                                    </p:set>
+                                    <p:animEffect transition="in" filter="fade">
+                                      <p:cBhvr>
+                                        <p:cTn id="70" dur="1000"/>
+                                        <p:tgtEl>
+                                          <p:spTgt spid="179">
+                                            <p:txEl>
+                                              <p:pRg st="6" end="6"/>
+                                            </p:txEl>
+                                          </p:spTgt>
+                                        </p:tgtEl>
+                                      </p:cBhvr>
+                                    </p:animEffect>
+                                    <p:anim calcmode="lin" valueType="num">
+                                      <p:cBhvr>
+                                        <p:cTn id="71" dur="1000" fill="hold"/>
+                                        <p:tgtEl>
+                                          <p:spTgt spid="179">
+                                            <p:txEl>
+                                              <p:pRg st="6" end="6"/>
+                                            </p:txEl>
+                                          </p:spTgt>
+                                        </p:tgtEl>
+                                        <p:attrNameLst>
+                                          <p:attrName>ppt_x</p:attrName>
+                                        </p:attrNameLst>
+                                      </p:cBhvr>
+                                      <p:tavLst>
+                                        <p:tav tm="0">
+                                          <p:val>
+                                            <p:strVal val="#ppt_x"/>
+                                          </p:val>
+                                        </p:tav>
+                                        <p:tav tm="100000">
+                                          <p:val>
+                                            <p:strVal val="#ppt_x"/>
+                                          </p:val>
+                                        </p:tav>
+                                      </p:tavLst>
+                                    </p:anim>
+                                    <p:anim calcmode="lin" valueType="num">
+                                      <p:cBhvr>
+                                        <p:cTn id="72" dur="1000" fill="hold"/>
+                                        <p:tgtEl>
+                                          <p:spTgt spid="179">
+                                            <p:txEl>
+                                              <p:pRg st="6" end="6"/>
+                                            </p:txEl>
+                                          </p:spTgt>
+                                        </p:tgtEl>
+                                        <p:attrNameLst>
+                                          <p:attrName>ppt_y</p:attrName>
+                                        </p:attrNameLst>
+                                      </p:cBhvr>
+                                      <p:tavLst>
+                                        <p:tav tm="0">
+                                          <p:val>
+                                            <p:strVal val="#ppt_y+.1"/>
+                                          </p:val>
+                                        </p:tav>
+                                        <p:tav tm="100000">
+                                          <p:val>
+                                            <p:strVal val="#ppt_y"/>
+                                          </p:val>
+                                        </p:tav>
+                                      </p:tavLst>
+                                    </p:anim>
+                                  </p:childTnLst>
+                                </p:cTn>
+                              </p:par>
+                            </p:childTnLst>
+                          </p:cTn>
+                        </p:par>
+                      </p:childTnLst>
+                    </p:cTn>
+                  </p:par>
+                </p:childTnLst>
+              </p:cTn>
+              <p:prevCondLst>
+                <p:cond evt="onPrev" delay="0">
+                  <p:tgtEl>
+                    <p:sldTgt/>
+                  </p:tgtEl>
+                </p:cond>
+              </p:prevCondLst>
+              <p:nextCondLst>
+                <p:cond evt="onNext" delay="0">
+                  <p:tgtEl>
+                    <p:sldTgt/>
+                  </p:tgtEl>
+                </p:cond>
+              </p:nextCondLst>
+            </p:seq>
+          </p:childTnLst>
+        </p:cTn>
+      </p:par>
+    </p:tnLst>
+  </p:timing>
   <p:extLst>
     <p:ext uri="{6950BFC3-D8DA-4A85-94F7-54DA5524770B}">
       <p188:commentRel xmlns:p188="http://schemas.microsoft.com/office/powerpoint/2018/8/main" r:id="rId3"/>
@@ -15682,18 +16450,12 @@
 </p:sld>
 </file>
 
-<file path=ppt/slides/slide16.xml><?xml version="1.0" encoding="utf-8"?>
+<file path=ppt/slides/slide15.xml><?xml version="1.0" encoding="utf-8"?>
 <p:sld xmlns:a="http://schemas.openxmlformats.org/drawingml/2006/main" xmlns:r="http://schemas.openxmlformats.org/officeDocument/2006/relationships" xmlns:p="http://schemas.openxmlformats.org/presentationml/2006/main">
   <p:cSld>
     <p:spTree>
       <p:nvGrpSpPr>
-        <p:cNvPr id="1" name="Shape 176">
-          <a:extLst>
-            <a:ext uri="{FF2B5EF4-FFF2-40B4-BE49-F238E27FC236}">
-              <a16:creationId xmlns:a16="http://schemas.microsoft.com/office/drawing/2014/main" id="{480EE501-37B6-51E9-0CA4-E6C5DA5D9F08}"/>
-            </a:ext>
-          </a:extLst>
-        </p:cNvPr>
+        <p:cNvPr id="1" name=""/>
         <p:cNvGrpSpPr/>
         <p:nvPr/>
       </p:nvGrpSpPr>
@@ -15707,184 +16469,141 @@
       </p:grpSpPr>
       <p:sp>
         <p:nvSpPr>
-          <p:cNvPr id="178" name="Google Shape;178;p31">
+          <p:cNvPr id="2" name="Title 1">
             <a:extLst>
               <a:ext uri="{FF2B5EF4-FFF2-40B4-BE49-F238E27FC236}">
-                <a16:creationId xmlns:a16="http://schemas.microsoft.com/office/drawing/2014/main" id="{03F20B95-E846-06B9-CE49-7798FC43D69F}"/>
+                <a16:creationId xmlns:a16="http://schemas.microsoft.com/office/drawing/2014/main" id="{37AC0612-6DFB-A04A-053D-4C03635F6F7B}"/>
               </a:ext>
             </a:extLst>
           </p:cNvPr>
-          <p:cNvSpPr txBox="1"/>
+          <p:cNvSpPr>
+            <a:spLocks noGrp="1"/>
+          </p:cNvSpPr>
+          <p:nvPr>
+            <p:ph type="title"/>
+          </p:nvPr>
+        </p:nvSpPr>
+        <p:spPr/>
+        <p:txBody>
+          <a:bodyPr>
+            <a:normAutofit fontScale="90000"/>
+          </a:bodyPr>
+          <a:lstStyle/>
+          <a:p>
+            <a:r>
+              <a:rPr lang="en-US" dirty="0"/>
+              <a:t>Dartmouth OSCARRs (Feb/Mar ‘27)</a:t>
+            </a:r>
+          </a:p>
+        </p:txBody>
+      </p:sp>
+      <p:pic>
+        <p:nvPicPr>
+          <p:cNvPr id="4" name="Picture 3" descr="Oscars red carpet ">
+            <a:extLst>
+              <a:ext uri="{FF2B5EF4-FFF2-40B4-BE49-F238E27FC236}">
+                <a16:creationId xmlns:a16="http://schemas.microsoft.com/office/drawing/2014/main" id="{14CF5A78-75AF-2816-ABA2-C73AAA417CFA}"/>
+              </a:ext>
+            </a:extLst>
+          </p:cNvPr>
+          <p:cNvPicPr>
+            <a:picLocks noChangeAspect="1"/>
+          </p:cNvPicPr>
           <p:nvPr/>
-        </p:nvSpPr>
+        </p:nvPicPr>
+        <p:blipFill>
+          <a:blip r:embed="rId2"/>
+          <a:stretch>
+            <a:fillRect/>
+          </a:stretch>
+        </p:blipFill>
         <p:spPr>
           <a:xfrm>
-            <a:off x="922201" y="1157695"/>
-            <a:ext cx="9711602" cy="742383"/>
+            <a:off x="6850912" y="2834640"/>
+            <a:ext cx="4437888" cy="3328416"/>
           </a:xfrm>
           <a:prstGeom prst="rect">
             <a:avLst/>
           </a:prstGeom>
-          <a:noFill/>
-          <a:ln>
-            <a:noFill/>
-          </a:ln>
         </p:spPr>
-        <p:txBody>
-          <a:bodyPr spcFirstLastPara="1" wrap="square" lIns="0" tIns="0" rIns="0" bIns="0" anchor="t" anchorCtr="0">
-            <a:spAutoFit/>
-          </a:bodyPr>
-          <a:lstStyle/>
-          <a:p>
-            <a:pPr>
-              <a:lnSpc>
-                <a:spcPct val="140007"/>
-              </a:lnSpc>
-            </a:pPr>
-            <a:r>
-              <a:rPr lang="en-US" sz="3446" dirty="0">
-                <a:solidFill>
-                  <a:srgbClr val="00693D"/>
-                </a:solidFill>
-                <a:latin typeface="Anton"/>
-                <a:ea typeface="Anton"/>
-                <a:cs typeface="Anton"/>
-                <a:sym typeface="Anton"/>
-              </a:rPr>
-              <a:t>2. C.A.R.E.</a:t>
-            </a:r>
-            <a:endParaRPr lang="en-US" sz="1200" dirty="0">
-              <a:latin typeface="Anton"/>
-              <a:ea typeface="Anton"/>
-              <a:cs typeface="Anton"/>
-              <a:sym typeface="Anton"/>
-            </a:endParaRPr>
-          </a:p>
-        </p:txBody>
-      </p:sp>
-      <p:sp>
-        <p:nvSpPr>
-          <p:cNvPr id="179" name="Google Shape;179;p31">
+      </p:pic>
+      <p:sp>
+        <p:nvSpPr>
+          <p:cNvPr id="3" name="Text Placeholder 2">
             <a:extLst>
               <a:ext uri="{FF2B5EF4-FFF2-40B4-BE49-F238E27FC236}">
-                <a16:creationId xmlns:a16="http://schemas.microsoft.com/office/drawing/2014/main" id="{A8636ECF-77C7-33A1-B230-7AE454C3B34B}"/>
+                <a16:creationId xmlns:a16="http://schemas.microsoft.com/office/drawing/2014/main" id="{6DE1E87F-3019-DB52-AD5F-CE9D7B84505B}"/>
               </a:ext>
             </a:extLst>
           </p:cNvPr>
-          <p:cNvSpPr txBox="1"/>
-          <p:nvPr/>
+          <p:cNvSpPr>
+            <a:spLocks noGrp="1"/>
+          </p:cNvSpPr>
+          <p:nvPr>
+            <p:ph type="body" idx="1"/>
+          </p:nvPr>
         </p:nvSpPr>
         <p:spPr>
           <a:xfrm>
-            <a:off x="922202" y="1736904"/>
-            <a:ext cx="9776400" cy="1728678"/>
+            <a:off x="903200" y="3066817"/>
+            <a:ext cx="5500753" cy="3726200"/>
           </a:xfrm>
-          <a:prstGeom prst="rect">
-            <a:avLst/>
-          </a:prstGeom>
-          <a:noFill/>
-          <a:ln>
-            <a:noFill/>
-          </a:ln>
         </p:spPr>
         <p:txBody>
-          <a:bodyPr spcFirstLastPara="1" wrap="square" lIns="0" tIns="0" rIns="0" bIns="0" anchor="t" anchorCtr="0">
-            <a:spAutoFit/>
+          <a:bodyPr>
+            <a:normAutofit/>
           </a:bodyPr>
           <a:lstStyle/>
           <a:p>
-            <a:pPr marL="433260" lvl="1" indent="-216630">
-              <a:lnSpc>
-                <a:spcPct val="140013"/>
-              </a:lnSpc>
-              <a:buClr>
-                <a:srgbClr val="12312B"/>
-              </a:buClr>
-              <a:buSzPts val="3009"/>
-              <a:buFont typeface="Archivo Medium"/>
-              <a:buChar char="•"/>
+            <a:pPr marL="0" indent="0">
+              <a:buNone/>
             </a:pPr>
-            <a:endParaRPr lang="en-US" sz="2006" dirty="0">
-              <a:solidFill>
-                <a:srgbClr val="12312B"/>
-              </a:solidFill>
-              <a:latin typeface="Archivo Medium"/>
-              <a:ea typeface="Archivo Medium"/>
-              <a:cs typeface="Archivo Medium"/>
-              <a:sym typeface="Archivo Medium"/>
-            </a:endParaRPr>
-          </a:p>
-          <a:p>
-            <a:pPr marL="433260" lvl="1" indent="-216630">
-              <a:lnSpc>
-                <a:spcPct val="140013"/>
-              </a:lnSpc>
-              <a:buClr>
-                <a:srgbClr val="12312B"/>
-              </a:buClr>
-              <a:buSzPts val="3009"/>
-              <a:buFont typeface="Archivo Medium"/>
-              <a:buChar char="•"/>
+            <a:r>
+              <a:rPr lang="en-US" sz="2400" b="0" dirty="0"/>
+              <a:t>Annual awards recognizing Open Scholarship &amp; Reproducible Research on campus</a:t>
+            </a:r>
+          </a:p>
+          <a:p>
+            <a:pPr marL="0" indent="0">
+              <a:buNone/>
             </a:pPr>
-            <a:endParaRPr lang="en-US" sz="2006" dirty="0">
-              <a:solidFill>
-                <a:srgbClr val="12312B"/>
-              </a:solidFill>
-              <a:latin typeface="Archivo Medium"/>
-              <a:ea typeface="Archivo Medium"/>
-              <a:cs typeface="Archivo Medium"/>
-              <a:sym typeface="Archivo Medium"/>
-            </a:endParaRPr>
-          </a:p>
-          <a:p>
-            <a:pPr marL="433260" lvl="1" indent="-216630">
-              <a:lnSpc>
-                <a:spcPct val="140013"/>
-              </a:lnSpc>
-              <a:buClr>
-                <a:srgbClr val="12312B"/>
-              </a:buClr>
-              <a:buSzPts val="3009"/>
-              <a:buFont typeface="Archivo Medium"/>
-              <a:buChar char="•"/>
+            <a:endParaRPr lang="en-US" sz="2400" b="0" dirty="0"/>
+          </a:p>
+          <a:p>
+            <a:pPr marL="0" indent="0">
+              <a:buNone/>
             </a:pPr>
-            <a:endParaRPr lang="en-US" sz="2006" dirty="0">
-              <a:solidFill>
-                <a:srgbClr val="12312B"/>
-              </a:solidFill>
-              <a:highlight>
-                <a:srgbClr val="FFFF00"/>
-              </a:highlight>
-              <a:latin typeface="Archivo Medium"/>
-              <a:sym typeface="Archivo Medium"/>
-            </a:endParaRPr>
-          </a:p>
-          <a:p>
-            <a:pPr marL="433260" lvl="1" indent="-216630">
-              <a:lnSpc>
-                <a:spcPct val="140013"/>
-              </a:lnSpc>
-              <a:buClr>
-                <a:srgbClr val="12312B"/>
-              </a:buClr>
-              <a:buSzPts val="3009"/>
-              <a:buFont typeface="Archivo Medium"/>
-              <a:buChar char="•"/>
-            </a:pPr>
-            <a:endParaRPr lang="en-US" sz="2006" dirty="0">
-              <a:solidFill>
-                <a:srgbClr val="12312B"/>
-              </a:solidFill>
-              <a:latin typeface="Archivo Medium"/>
-              <a:sym typeface="Archivo Medium"/>
-            </a:endParaRPr>
+            <a:r>
+              <a:rPr lang="en-US" sz="2400" b="0" dirty="0"/>
+              <a:t>Learn more at the </a:t>
+            </a:r>
+            <a:r>
+              <a:rPr lang="en-US" sz="2400" b="0" dirty="0">
+                <a:hlinkClick r:id="rId3"/>
+              </a:rPr>
+              <a:t>Dartmouth OSCARRs website</a:t>
+            </a:r>
+            <a:r>
+              <a:rPr lang="en-US" sz="2400" b="0" dirty="0"/>
+              <a:t>, including </a:t>
+            </a:r>
+            <a:r>
+              <a:rPr lang="en-US" sz="2400" b="0" dirty="0">
+                <a:hlinkClick r:id="rId4"/>
+              </a:rPr>
+              <a:t>more explanation of the FAIR(EST) / CARE principles</a:t>
+            </a:r>
+            <a:r>
+              <a:rPr lang="en-US" sz="2400" b="0" dirty="0"/>
+              <a:t>.</a:t>
+            </a:r>
           </a:p>
         </p:txBody>
       </p:sp>
     </p:spTree>
     <p:extLst>
       <p:ext uri="{BB962C8B-B14F-4D97-AF65-F5344CB8AC3E}">
-        <p14:creationId xmlns:p14="http://schemas.microsoft.com/office/powerpoint/2010/main" val="1821526939"/>
+        <p14:creationId xmlns:p14="http://schemas.microsoft.com/office/powerpoint/2010/main" val="2654935933"/>
       </p:ext>
     </p:extLst>
   </p:cSld>
@@ -15894,181 +16613,7 @@
 </p:sld>
 </file>
 
-<file path=ppt/slides/slide17.xml><?xml version="1.0" encoding="utf-8"?>
-<p:sld xmlns:a="http://schemas.openxmlformats.org/drawingml/2006/main" xmlns:r="http://schemas.openxmlformats.org/officeDocument/2006/relationships" xmlns:p="http://schemas.openxmlformats.org/presentationml/2006/main">
-  <p:cSld>
-    <p:spTree>
-      <p:nvGrpSpPr>
-        <p:cNvPr id="1" name="Shape 176">
-          <a:extLst>
-            <a:ext uri="{FF2B5EF4-FFF2-40B4-BE49-F238E27FC236}">
-              <a16:creationId xmlns:a16="http://schemas.microsoft.com/office/drawing/2014/main" id="{6F6C0FD7-DD6A-0675-5276-83D16F13BCBF}"/>
-            </a:ext>
-          </a:extLst>
-        </p:cNvPr>
-        <p:cNvGrpSpPr/>
-        <p:nvPr/>
-      </p:nvGrpSpPr>
-      <p:grpSpPr>
-        <a:xfrm>
-          <a:off x="0" y="0"/>
-          <a:ext cx="0" cy="0"/>
-          <a:chOff x="0" y="0"/>
-          <a:chExt cx="0" cy="0"/>
-        </a:xfrm>
-      </p:grpSpPr>
-      <p:sp>
-        <p:nvSpPr>
-          <p:cNvPr id="178" name="Google Shape;178;p31">
-            <a:extLst>
-              <a:ext uri="{FF2B5EF4-FFF2-40B4-BE49-F238E27FC236}">
-                <a16:creationId xmlns:a16="http://schemas.microsoft.com/office/drawing/2014/main" id="{2D2DC38A-F4DF-63C7-2018-3ECA79192E7E}"/>
-              </a:ext>
-            </a:extLst>
-          </p:cNvPr>
-          <p:cNvSpPr txBox="1"/>
-          <p:nvPr/>
-        </p:nvSpPr>
-        <p:spPr>
-          <a:xfrm>
-            <a:off x="922202" y="1157695"/>
-            <a:ext cx="6097800" cy="742383"/>
-          </a:xfrm>
-          <a:prstGeom prst="rect">
-            <a:avLst/>
-          </a:prstGeom>
-          <a:noFill/>
-          <a:ln>
-            <a:noFill/>
-          </a:ln>
-        </p:spPr>
-        <p:txBody>
-          <a:bodyPr spcFirstLastPara="1" wrap="square" lIns="0" tIns="0" rIns="0" bIns="0" anchor="t" anchorCtr="0">
-            <a:spAutoFit/>
-          </a:bodyPr>
-          <a:lstStyle/>
-          <a:p>
-            <a:pPr>
-              <a:lnSpc>
-                <a:spcPct val="140007"/>
-              </a:lnSpc>
-            </a:pPr>
-            <a:r>
-              <a:rPr lang="en-US" sz="3446" dirty="0">
-                <a:solidFill>
-                  <a:srgbClr val="00693D"/>
-                </a:solidFill>
-                <a:latin typeface="Anton"/>
-                <a:ea typeface="Anton"/>
-                <a:cs typeface="Anton"/>
-                <a:sym typeface="Anton"/>
-              </a:rPr>
-              <a:t>3. F.A.I.R.E.S.T.</a:t>
-            </a:r>
-          </a:p>
-        </p:txBody>
-      </p:sp>
-    </p:spTree>
-    <p:extLst>
-      <p:ext uri="{BB962C8B-B14F-4D97-AF65-F5344CB8AC3E}">
-        <p14:creationId xmlns:p14="http://schemas.microsoft.com/office/powerpoint/2010/main" val="2401893447"/>
-      </p:ext>
-    </p:extLst>
-  </p:cSld>
-  <p:clrMapOvr>
-    <a:masterClrMapping/>
-  </p:clrMapOvr>
-</p:sld>
-</file>
-
-<file path=ppt/slides/slide18.xml><?xml version="1.0" encoding="utf-8"?>
-<p:sld xmlns:a="http://schemas.openxmlformats.org/drawingml/2006/main" xmlns:r="http://schemas.openxmlformats.org/officeDocument/2006/relationships" xmlns:p="http://schemas.openxmlformats.org/presentationml/2006/main">
-  <p:cSld>
-    <p:spTree>
-      <p:nvGrpSpPr>
-        <p:cNvPr id="1" name="Shape 176">
-          <a:extLst>
-            <a:ext uri="{FF2B5EF4-FFF2-40B4-BE49-F238E27FC236}">
-              <a16:creationId xmlns:a16="http://schemas.microsoft.com/office/drawing/2014/main" id="{6BCE619E-87C8-FB7D-3570-35FD954E2CA5}"/>
-            </a:ext>
-          </a:extLst>
-        </p:cNvPr>
-        <p:cNvGrpSpPr/>
-        <p:nvPr/>
-      </p:nvGrpSpPr>
-      <p:grpSpPr>
-        <a:xfrm>
-          <a:off x="0" y="0"/>
-          <a:ext cx="0" cy="0"/>
-          <a:chOff x="0" y="0"/>
-          <a:chExt cx="0" cy="0"/>
-        </a:xfrm>
-      </p:grpSpPr>
-      <p:sp>
-        <p:nvSpPr>
-          <p:cNvPr id="178" name="Google Shape;178;p31">
-            <a:extLst>
-              <a:ext uri="{FF2B5EF4-FFF2-40B4-BE49-F238E27FC236}">
-                <a16:creationId xmlns:a16="http://schemas.microsoft.com/office/drawing/2014/main" id="{DACC6461-A2B8-2677-D64B-86EA301EB140}"/>
-              </a:ext>
-            </a:extLst>
-          </p:cNvPr>
-          <p:cNvSpPr txBox="1"/>
-          <p:nvPr/>
-        </p:nvSpPr>
-        <p:spPr>
-          <a:xfrm>
-            <a:off x="922202" y="1157695"/>
-            <a:ext cx="6097800" cy="742383"/>
-          </a:xfrm>
-          <a:prstGeom prst="rect">
-            <a:avLst/>
-          </a:prstGeom>
-          <a:noFill/>
-          <a:ln>
-            <a:noFill/>
-          </a:ln>
-        </p:spPr>
-        <p:txBody>
-          <a:bodyPr spcFirstLastPara="1" wrap="square" lIns="0" tIns="0" rIns="0" bIns="0" anchor="t" anchorCtr="0">
-            <a:spAutoFit/>
-          </a:bodyPr>
-          <a:lstStyle/>
-          <a:p>
-            <a:pPr>
-              <a:lnSpc>
-                <a:spcPct val="140007"/>
-              </a:lnSpc>
-            </a:pPr>
-            <a:r>
-              <a:rPr lang="en-US" sz="3446" dirty="0">
-                <a:solidFill>
-                  <a:srgbClr val="00693D"/>
-                </a:solidFill>
-                <a:latin typeface="Anton"/>
-                <a:ea typeface="Anton"/>
-                <a:cs typeface="Anton"/>
-                <a:sym typeface="Anton"/>
-              </a:rPr>
-              <a:t>2027 Dartmouth OSCARRs!</a:t>
-            </a:r>
-          </a:p>
-        </p:txBody>
-      </p:sp>
-    </p:spTree>
-    <p:extLst>
-      <p:ext uri="{BB962C8B-B14F-4D97-AF65-F5344CB8AC3E}">
-        <p14:creationId xmlns:p14="http://schemas.microsoft.com/office/powerpoint/2010/main" val="478136561"/>
-      </p:ext>
-    </p:extLst>
-  </p:cSld>
-  <p:clrMapOvr>
-    <a:masterClrMapping/>
-  </p:clrMapOvr>
-</p:sld>
-</file>
-
-<file path=ppt/slides/slide19.xml><?xml version="1.0" encoding="utf-8"?>
+<file path=ppt/slides/slide16.xml><?xml version="1.0" encoding="utf-8"?>
 <p:sld xmlns:a="http://schemas.openxmlformats.org/drawingml/2006/main" xmlns:r="http://schemas.openxmlformats.org/officeDocument/2006/relationships" xmlns:p="http://schemas.openxmlformats.org/presentationml/2006/main">
   <p:cSld>
     <p:spTree>
@@ -16240,6 +16785,991 @@
 </p:sld>
 </file>
 
+<file path=ppt/slides/slide17.xml><?xml version="1.0" encoding="utf-8"?>
+<p:sld xmlns:a="http://schemas.openxmlformats.org/drawingml/2006/main" xmlns:r="http://schemas.openxmlformats.org/officeDocument/2006/relationships" xmlns:p="http://schemas.openxmlformats.org/presentationml/2006/main">
+  <p:cSld>
+    <p:spTree>
+      <p:nvGrpSpPr>
+        <p:cNvPr id="1" name="Shape 176">
+          <a:extLst>
+            <a:ext uri="{FF2B5EF4-FFF2-40B4-BE49-F238E27FC236}">
+              <a16:creationId xmlns:a16="http://schemas.microsoft.com/office/drawing/2014/main" id="{52527720-AFCC-C1A0-4B67-3DC74702CBAF}"/>
+            </a:ext>
+          </a:extLst>
+        </p:cNvPr>
+        <p:cNvGrpSpPr/>
+        <p:nvPr/>
+      </p:nvGrpSpPr>
+      <p:grpSpPr>
+        <a:xfrm>
+          <a:off x="0" y="0"/>
+          <a:ext cx="0" cy="0"/>
+          <a:chOff x="0" y="0"/>
+          <a:chExt cx="0" cy="0"/>
+        </a:xfrm>
+      </p:grpSpPr>
+      <p:sp>
+        <p:nvSpPr>
+          <p:cNvPr id="178" name="Google Shape;178;p31">
+            <a:extLst>
+              <a:ext uri="{FF2B5EF4-FFF2-40B4-BE49-F238E27FC236}">
+                <a16:creationId xmlns:a16="http://schemas.microsoft.com/office/drawing/2014/main" id="{6027D5FF-A01F-A804-3E22-7A62A805B365}"/>
+              </a:ext>
+            </a:extLst>
+          </p:cNvPr>
+          <p:cNvSpPr txBox="1"/>
+          <p:nvPr/>
+        </p:nvSpPr>
+        <p:spPr>
+          <a:xfrm>
+            <a:off x="922201" y="1157695"/>
+            <a:ext cx="9718705" cy="742383"/>
+          </a:xfrm>
+          <a:prstGeom prst="rect">
+            <a:avLst/>
+          </a:prstGeom>
+          <a:noFill/>
+          <a:ln>
+            <a:noFill/>
+          </a:ln>
+        </p:spPr>
+        <p:txBody>
+          <a:bodyPr spcFirstLastPara="1" wrap="square" lIns="0" tIns="0" rIns="0" bIns="0" anchor="t" anchorCtr="0">
+            <a:spAutoFit/>
+          </a:bodyPr>
+          <a:lstStyle/>
+          <a:p>
+            <a:pPr>
+              <a:lnSpc>
+                <a:spcPct val="140007"/>
+              </a:lnSpc>
+            </a:pPr>
+            <a:r>
+              <a:rPr lang="en-US" sz="3446" dirty="0">
+                <a:solidFill>
+                  <a:srgbClr val="00693D"/>
+                </a:solidFill>
+                <a:latin typeface="Anton"/>
+                <a:ea typeface="Anton"/>
+                <a:cs typeface="Anton"/>
+                <a:sym typeface="Anton"/>
+              </a:rPr>
+              <a:t>Computation Research Best Practices</a:t>
+            </a:r>
+            <a:endParaRPr sz="1200" dirty="0">
+              <a:latin typeface="Anton"/>
+              <a:ea typeface="Anton"/>
+              <a:cs typeface="Anton"/>
+              <a:sym typeface="Anton"/>
+            </a:endParaRPr>
+          </a:p>
+        </p:txBody>
+      </p:sp>
+      <p:sp>
+        <p:nvSpPr>
+          <p:cNvPr id="179" name="Google Shape;179;p31">
+            <a:extLst>
+              <a:ext uri="{FF2B5EF4-FFF2-40B4-BE49-F238E27FC236}">
+                <a16:creationId xmlns:a16="http://schemas.microsoft.com/office/drawing/2014/main" id="{BB8F7F0D-D29A-B4CA-591F-688EAC84C4A1}"/>
+              </a:ext>
+            </a:extLst>
+          </p:cNvPr>
+          <p:cNvSpPr txBox="1"/>
+          <p:nvPr/>
+        </p:nvSpPr>
+        <p:spPr>
+          <a:xfrm>
+            <a:off x="922202" y="1736904"/>
+            <a:ext cx="9776400" cy="4321696"/>
+          </a:xfrm>
+          <a:prstGeom prst="rect">
+            <a:avLst/>
+          </a:prstGeom>
+          <a:noFill/>
+          <a:ln>
+            <a:noFill/>
+          </a:ln>
+        </p:spPr>
+        <p:txBody>
+          <a:bodyPr spcFirstLastPara="1" wrap="square" lIns="0" tIns="0" rIns="0" bIns="0" anchor="t" anchorCtr="0">
+            <a:spAutoFit/>
+          </a:bodyPr>
+          <a:lstStyle/>
+          <a:p>
+            <a:pPr marL="673830" lvl="1" indent="-457200">
+              <a:lnSpc>
+                <a:spcPct val="140013"/>
+              </a:lnSpc>
+              <a:buClr>
+                <a:srgbClr val="12312B"/>
+              </a:buClr>
+              <a:buSzPct val="115000"/>
+              <a:buFont typeface="+mj-lt"/>
+              <a:buAutoNum type="arabicPeriod"/>
+            </a:pPr>
+            <a:endParaRPr lang="en-US" sz="2006" dirty="0">
+              <a:solidFill>
+                <a:srgbClr val="12312B"/>
+              </a:solidFill>
+              <a:latin typeface="Archivo Medium"/>
+              <a:ea typeface="Archivo Medium"/>
+              <a:cs typeface="Archivo Medium"/>
+              <a:sym typeface="Archivo Medium"/>
+            </a:endParaRPr>
+          </a:p>
+          <a:p>
+            <a:pPr marL="673830" lvl="1" indent="-457200">
+              <a:lnSpc>
+                <a:spcPct val="140013"/>
+              </a:lnSpc>
+              <a:buClr>
+                <a:srgbClr val="12312B"/>
+              </a:buClr>
+              <a:buSzPct val="115000"/>
+              <a:buFont typeface="+mj-lt"/>
+              <a:buAutoNum type="arabicPeriod"/>
+            </a:pPr>
+            <a:r>
+              <a:rPr lang="en-US" sz="2006" dirty="0">
+                <a:solidFill>
+                  <a:srgbClr val="12312B"/>
+                </a:solidFill>
+                <a:latin typeface="Archivo Medium"/>
+                <a:ea typeface="Archivo Medium"/>
+                <a:cs typeface="Archivo Medium"/>
+                <a:sym typeface="Archivo Medium"/>
+              </a:rPr>
+              <a:t>Organization</a:t>
+            </a:r>
+          </a:p>
+          <a:p>
+            <a:pPr marL="673830" lvl="1" indent="-457200">
+              <a:lnSpc>
+                <a:spcPct val="140013"/>
+              </a:lnSpc>
+              <a:buClr>
+                <a:srgbClr val="12312B"/>
+              </a:buClr>
+              <a:buSzPct val="115000"/>
+              <a:buFont typeface="+mj-lt"/>
+              <a:buAutoNum type="arabicPeriod"/>
+            </a:pPr>
+            <a:r>
+              <a:rPr lang="en-US" sz="2006" dirty="0">
+                <a:solidFill>
+                  <a:srgbClr val="12312B"/>
+                </a:solidFill>
+                <a:latin typeface="Archivo Medium"/>
+                <a:ea typeface="Archivo Medium"/>
+                <a:cs typeface="Archivo Medium"/>
+                <a:sym typeface="Archivo Medium"/>
+              </a:rPr>
+              <a:t>Documentation</a:t>
+            </a:r>
+          </a:p>
+          <a:p>
+            <a:pPr marL="673830" lvl="1" indent="-457200">
+              <a:lnSpc>
+                <a:spcPct val="140013"/>
+              </a:lnSpc>
+              <a:buClr>
+                <a:srgbClr val="12312B"/>
+              </a:buClr>
+              <a:buSzPct val="115000"/>
+              <a:buFont typeface="+mj-lt"/>
+              <a:buAutoNum type="arabicPeriod"/>
+            </a:pPr>
+            <a:r>
+              <a:rPr lang="en-US" sz="2006" dirty="0">
+                <a:solidFill>
+                  <a:srgbClr val="12312B"/>
+                </a:solidFill>
+                <a:latin typeface="Archivo Medium"/>
+                <a:ea typeface="Archivo Medium"/>
+                <a:cs typeface="Archivo Medium"/>
+                <a:sym typeface="Archivo Medium"/>
+              </a:rPr>
+              <a:t>Data Management</a:t>
+            </a:r>
+          </a:p>
+          <a:p>
+            <a:pPr marL="673830" lvl="1" indent="-457200">
+              <a:lnSpc>
+                <a:spcPct val="140013"/>
+              </a:lnSpc>
+              <a:buClr>
+                <a:srgbClr val="12312B"/>
+              </a:buClr>
+              <a:buSzPct val="115000"/>
+              <a:buFont typeface="+mj-lt"/>
+              <a:buAutoNum type="arabicPeriod"/>
+            </a:pPr>
+            <a:r>
+              <a:rPr lang="en-US" sz="2006" dirty="0">
+                <a:solidFill>
+                  <a:srgbClr val="12312B"/>
+                </a:solidFill>
+                <a:latin typeface="Archivo Medium"/>
+                <a:ea typeface="Archivo Medium"/>
+                <a:cs typeface="Archivo Medium"/>
+                <a:sym typeface="Archivo Medium"/>
+              </a:rPr>
+              <a:t>Coding Practices</a:t>
+            </a:r>
+          </a:p>
+          <a:p>
+            <a:pPr marL="673830" lvl="1" indent="-457200">
+              <a:lnSpc>
+                <a:spcPct val="140013"/>
+              </a:lnSpc>
+              <a:buClr>
+                <a:srgbClr val="12312B"/>
+              </a:buClr>
+              <a:buSzPct val="115000"/>
+              <a:buFont typeface="+mj-lt"/>
+              <a:buAutoNum type="arabicPeriod"/>
+            </a:pPr>
+            <a:r>
+              <a:rPr lang="en-US" sz="2006" dirty="0">
+                <a:solidFill>
+                  <a:srgbClr val="12312B"/>
+                </a:solidFill>
+                <a:latin typeface="Archivo Medium"/>
+                <a:ea typeface="Archivo Medium"/>
+                <a:cs typeface="Archivo Medium"/>
+                <a:sym typeface="Archivo Medium"/>
+              </a:rPr>
+              <a:t>Workflow Automation</a:t>
+            </a:r>
+          </a:p>
+          <a:p>
+            <a:pPr marL="673830" lvl="1" indent="-457200">
+              <a:lnSpc>
+                <a:spcPct val="140013"/>
+              </a:lnSpc>
+              <a:buClr>
+                <a:srgbClr val="12312B"/>
+              </a:buClr>
+              <a:buSzPct val="115000"/>
+              <a:buFont typeface="+mj-lt"/>
+              <a:buAutoNum type="arabicPeriod"/>
+            </a:pPr>
+            <a:r>
+              <a:rPr lang="en-US" sz="2006" dirty="0">
+                <a:solidFill>
+                  <a:srgbClr val="12312B"/>
+                </a:solidFill>
+                <a:latin typeface="Archivo Medium"/>
+                <a:ea typeface="Archivo Medium"/>
+                <a:cs typeface="Archivo Medium"/>
+                <a:sym typeface="Archivo Medium"/>
+              </a:rPr>
+              <a:t>Sharing &amp; Openness</a:t>
+            </a:r>
+          </a:p>
+          <a:p>
+            <a:pPr marL="673830" lvl="1" indent="-457200">
+              <a:lnSpc>
+                <a:spcPct val="140013"/>
+              </a:lnSpc>
+              <a:buClr>
+                <a:srgbClr val="12312B"/>
+              </a:buClr>
+              <a:buSzPct val="115000"/>
+              <a:buFont typeface="+mj-lt"/>
+              <a:buAutoNum type="arabicPeriod"/>
+            </a:pPr>
+            <a:r>
+              <a:rPr lang="en-US" sz="2006" dirty="0">
+                <a:solidFill>
+                  <a:srgbClr val="12312B"/>
+                </a:solidFill>
+                <a:latin typeface="Archivo Medium"/>
+                <a:ea typeface="Archivo Medium"/>
+                <a:cs typeface="Archivo Medium"/>
+                <a:sym typeface="Archivo Medium"/>
+              </a:rPr>
+              <a:t>Containerization</a:t>
+            </a:r>
+          </a:p>
+          <a:p>
+            <a:pPr marL="673830" lvl="1" indent="-457200">
+              <a:lnSpc>
+                <a:spcPct val="140013"/>
+              </a:lnSpc>
+              <a:buClr>
+                <a:srgbClr val="12312B"/>
+              </a:buClr>
+              <a:buSzPct val="115000"/>
+              <a:buFont typeface="+mj-lt"/>
+              <a:buAutoNum type="arabicPeriod"/>
+            </a:pPr>
+            <a:r>
+              <a:rPr lang="en-US" sz="2006" dirty="0">
+                <a:solidFill>
+                  <a:srgbClr val="12312B"/>
+                </a:solidFill>
+                <a:latin typeface="Archivo Medium"/>
+                <a:ea typeface="Archivo Medium"/>
+                <a:cs typeface="Archivo Medium"/>
+                <a:sym typeface="Archivo Medium"/>
+              </a:rPr>
+              <a:t>Version Control</a:t>
+            </a:r>
+            <a:endParaRPr sz="1200" dirty="0">
+              <a:latin typeface="Archivo Medium"/>
+              <a:ea typeface="Archivo Medium"/>
+              <a:cs typeface="Archivo Medium"/>
+              <a:sym typeface="Archivo Medium"/>
+            </a:endParaRPr>
+          </a:p>
+          <a:p>
+            <a:pPr marL="457200" indent="-457200">
+              <a:lnSpc>
+                <a:spcPct val="140013"/>
+              </a:lnSpc>
+              <a:buSzPct val="115000"/>
+              <a:buFont typeface="+mj-lt"/>
+              <a:buAutoNum type="arabicPeriod"/>
+            </a:pPr>
+            <a:endParaRPr sz="2006" dirty="0">
+              <a:solidFill>
+                <a:srgbClr val="12312B"/>
+              </a:solidFill>
+              <a:latin typeface="Arial"/>
+              <a:ea typeface="Arial"/>
+              <a:cs typeface="Arial"/>
+              <a:sym typeface="Arial"/>
+            </a:endParaRPr>
+          </a:p>
+        </p:txBody>
+      </p:sp>
+    </p:spTree>
+    <p:extLst>
+      <p:ext uri="{BB962C8B-B14F-4D97-AF65-F5344CB8AC3E}">
+        <p14:creationId xmlns:p14="http://schemas.microsoft.com/office/powerpoint/2010/main" val="543465387"/>
+      </p:ext>
+    </p:extLst>
+  </p:cSld>
+  <p:clrMapOvr>
+    <a:masterClrMapping/>
+  </p:clrMapOvr>
+</p:sld>
+</file>
+
+<file path=ppt/slides/slide18.xml><?xml version="1.0" encoding="utf-8"?>
+<p:sld xmlns:a="http://schemas.openxmlformats.org/drawingml/2006/main" xmlns:r="http://schemas.openxmlformats.org/officeDocument/2006/relationships" xmlns:p="http://schemas.openxmlformats.org/presentationml/2006/main">
+  <p:cSld>
+    <p:spTree>
+      <p:nvGrpSpPr>
+        <p:cNvPr id="1" name="Shape 176">
+          <a:extLst>
+            <a:ext uri="{FF2B5EF4-FFF2-40B4-BE49-F238E27FC236}">
+              <a16:creationId xmlns:a16="http://schemas.microsoft.com/office/drawing/2014/main" id="{7F00D7DF-B09C-0AFF-E519-569E4FAE3D31}"/>
+            </a:ext>
+          </a:extLst>
+        </p:cNvPr>
+        <p:cNvGrpSpPr/>
+        <p:nvPr/>
+      </p:nvGrpSpPr>
+      <p:grpSpPr>
+        <a:xfrm>
+          <a:off x="0" y="0"/>
+          <a:ext cx="0" cy="0"/>
+          <a:chOff x="0" y="0"/>
+          <a:chExt cx="0" cy="0"/>
+        </a:xfrm>
+      </p:grpSpPr>
+      <p:sp>
+        <p:nvSpPr>
+          <p:cNvPr id="178" name="Google Shape;178;p31">
+            <a:extLst>
+              <a:ext uri="{FF2B5EF4-FFF2-40B4-BE49-F238E27FC236}">
+                <a16:creationId xmlns:a16="http://schemas.microsoft.com/office/drawing/2014/main" id="{1A959E2E-1625-924D-375F-83AC88BB4391}"/>
+              </a:ext>
+            </a:extLst>
+          </p:cNvPr>
+          <p:cNvSpPr txBox="1"/>
+          <p:nvPr/>
+        </p:nvSpPr>
+        <p:spPr>
+          <a:xfrm>
+            <a:off x="922201" y="1157695"/>
+            <a:ext cx="9718705" cy="742383"/>
+          </a:xfrm>
+          <a:prstGeom prst="rect">
+            <a:avLst/>
+          </a:prstGeom>
+          <a:noFill/>
+          <a:ln>
+            <a:noFill/>
+          </a:ln>
+        </p:spPr>
+        <p:txBody>
+          <a:bodyPr spcFirstLastPara="1" wrap="square" lIns="0" tIns="0" rIns="0" bIns="0" anchor="t" anchorCtr="0">
+            <a:spAutoFit/>
+          </a:bodyPr>
+          <a:lstStyle/>
+          <a:p>
+            <a:pPr>
+              <a:lnSpc>
+                <a:spcPct val="140007"/>
+              </a:lnSpc>
+            </a:pPr>
+            <a:r>
+              <a:rPr lang="en-US" sz="3446" dirty="0">
+                <a:solidFill>
+                  <a:srgbClr val="00693D"/>
+                </a:solidFill>
+                <a:latin typeface="Anton"/>
+                <a:ea typeface="Anton"/>
+                <a:cs typeface="Anton"/>
+                <a:sym typeface="Anton"/>
+              </a:rPr>
+              <a:t>Organization</a:t>
+            </a:r>
+            <a:endParaRPr sz="1200" dirty="0">
+              <a:latin typeface="Anton"/>
+              <a:ea typeface="Anton"/>
+              <a:cs typeface="Anton"/>
+              <a:sym typeface="Anton"/>
+            </a:endParaRPr>
+          </a:p>
+        </p:txBody>
+      </p:sp>
+      <p:sp>
+        <p:nvSpPr>
+          <p:cNvPr id="179" name="Google Shape;179;p31">
+            <a:extLst>
+              <a:ext uri="{FF2B5EF4-FFF2-40B4-BE49-F238E27FC236}">
+                <a16:creationId xmlns:a16="http://schemas.microsoft.com/office/drawing/2014/main" id="{966F53A7-7738-3262-8902-0D41B2FC1319}"/>
+              </a:ext>
+            </a:extLst>
+          </p:cNvPr>
+          <p:cNvSpPr txBox="1"/>
+          <p:nvPr/>
+        </p:nvSpPr>
+        <p:spPr>
+          <a:xfrm>
+            <a:off x="922202" y="1736904"/>
+            <a:ext cx="9776400" cy="3837461"/>
+          </a:xfrm>
+          <a:prstGeom prst="rect">
+            <a:avLst/>
+          </a:prstGeom>
+          <a:noFill/>
+          <a:ln>
+            <a:noFill/>
+          </a:ln>
+        </p:spPr>
+        <p:txBody>
+          <a:bodyPr spcFirstLastPara="1" wrap="square" lIns="0" tIns="0" rIns="0" bIns="0" anchor="t" anchorCtr="0">
+            <a:spAutoFit/>
+          </a:bodyPr>
+          <a:lstStyle/>
+          <a:p>
+            <a:pPr marL="673830" lvl="1" indent="-457200">
+              <a:lnSpc>
+                <a:spcPct val="140013"/>
+              </a:lnSpc>
+              <a:buClr>
+                <a:srgbClr val="12312B"/>
+              </a:buClr>
+              <a:buSzPct val="115000"/>
+              <a:buFont typeface="+mj-lt"/>
+              <a:buAutoNum type="arabicPeriod"/>
+            </a:pPr>
+            <a:endParaRPr lang="en-US" sz="2006" dirty="0">
+              <a:solidFill>
+                <a:srgbClr val="12312B"/>
+              </a:solidFill>
+              <a:latin typeface="Archivo Medium"/>
+              <a:ea typeface="Archivo Medium"/>
+              <a:cs typeface="Archivo Medium"/>
+              <a:sym typeface="Archivo Medium"/>
+            </a:endParaRPr>
+          </a:p>
+          <a:p>
+            <a:pPr marL="673830" lvl="1" indent="-457200">
+              <a:lnSpc>
+                <a:spcPct val="140013"/>
+              </a:lnSpc>
+              <a:buClr>
+                <a:srgbClr val="12312B"/>
+              </a:buClr>
+              <a:buSzPct val="115000"/>
+              <a:buFont typeface="+mj-lt"/>
+              <a:buAutoNum type="arabicPeriod"/>
+            </a:pPr>
+            <a:r>
+              <a:rPr lang="en-US" dirty="0">
+                <a:solidFill>
+                  <a:srgbClr val="12312B"/>
+                </a:solidFill>
+                <a:latin typeface="Archivo Medium"/>
+                <a:ea typeface="Archivo Medium"/>
+                <a:cs typeface="Archivo Medium"/>
+                <a:sym typeface="Archivo Medium"/>
+              </a:rPr>
+              <a:t>One project / one folder</a:t>
+            </a:r>
+          </a:p>
+          <a:p>
+            <a:pPr marL="673830" lvl="1" indent="-457200">
+              <a:lnSpc>
+                <a:spcPct val="140013"/>
+              </a:lnSpc>
+              <a:buClr>
+                <a:srgbClr val="12312B"/>
+              </a:buClr>
+              <a:buSzPct val="115000"/>
+              <a:buFont typeface="+mj-lt"/>
+              <a:buAutoNum type="arabicPeriod"/>
+            </a:pPr>
+            <a:r>
+              <a:rPr lang="en-US" dirty="0">
+                <a:solidFill>
+                  <a:srgbClr val="12312B"/>
+                </a:solidFill>
+                <a:latin typeface="Archivo Medium"/>
+                <a:ea typeface="Archivo Medium"/>
+                <a:cs typeface="Archivo Medium"/>
+                <a:sym typeface="Archivo Medium"/>
+              </a:rPr>
+              <a:t>Consistent project structure (i.e. folders: code, data, docs)</a:t>
+            </a:r>
+          </a:p>
+          <a:p>
+            <a:pPr marL="673830" lvl="1" indent="-457200">
+              <a:lnSpc>
+                <a:spcPct val="140013"/>
+              </a:lnSpc>
+              <a:buClr>
+                <a:srgbClr val="12312B"/>
+              </a:buClr>
+              <a:buSzPct val="115000"/>
+              <a:buFont typeface="+mj-lt"/>
+              <a:buAutoNum type="arabicPeriod"/>
+            </a:pPr>
+            <a:r>
+              <a:rPr lang="en-US" dirty="0">
+                <a:solidFill>
+                  <a:srgbClr val="12312B"/>
+                </a:solidFill>
+                <a:latin typeface="Archivo Medium"/>
+                <a:ea typeface="Archivo Medium"/>
+                <a:cs typeface="Archivo Medium"/>
+                <a:sym typeface="Archivo Medium"/>
+              </a:rPr>
+              <a:t>Descriptive but interoperable file names</a:t>
+            </a:r>
+          </a:p>
+          <a:p>
+            <a:pPr marL="1131030" lvl="2" indent="-457200">
+              <a:lnSpc>
+                <a:spcPct val="140013"/>
+              </a:lnSpc>
+              <a:buClr>
+                <a:srgbClr val="12312B"/>
+              </a:buClr>
+              <a:buSzPct val="115000"/>
+              <a:buFont typeface="+mj-lt"/>
+              <a:buAutoNum type="arabicPeriod"/>
+            </a:pPr>
+            <a:r>
+              <a:rPr lang="en-US" dirty="0">
+                <a:solidFill>
+                  <a:srgbClr val="12312B"/>
+                </a:solidFill>
+                <a:latin typeface="Archivo Medium"/>
+                <a:ea typeface="Archivo Medium"/>
+                <a:cs typeface="Archivo Medium"/>
+                <a:sym typeface="Archivo Medium"/>
+              </a:rPr>
+              <a:t>No white space; avoid special characters besides “_” and “-”; lowercase often easier:</a:t>
+            </a:r>
+          </a:p>
+          <a:p>
+            <a:pPr marL="1588230" lvl="3" indent="-457200">
+              <a:lnSpc>
+                <a:spcPct val="140013"/>
+              </a:lnSpc>
+              <a:buClr>
+                <a:srgbClr val="12312B"/>
+              </a:buClr>
+              <a:buSzPct val="115000"/>
+              <a:buFont typeface="+mj-lt"/>
+              <a:buAutoNum type="arabicPeriod"/>
+            </a:pPr>
+            <a:r>
+              <a:rPr lang="en-US" dirty="0">
+                <a:solidFill>
+                  <a:srgbClr val="12312B"/>
+                </a:solidFill>
+                <a:latin typeface="Archivo Medium"/>
+                <a:ea typeface="Archivo Medium"/>
+                <a:cs typeface="Archivo Medium"/>
+                <a:sym typeface="Archivo Medium"/>
+              </a:rPr>
+              <a:t>“Research Plan.docx” </a:t>
+            </a:r>
+            <a:r>
+              <a:rPr lang="en-US" dirty="0">
+                <a:solidFill>
+                  <a:srgbClr val="12312B"/>
+                </a:solidFill>
+                <a:latin typeface="Archivo Medium"/>
+                <a:ea typeface="Archivo Medium"/>
+                <a:cs typeface="Archivo Medium"/>
+                <a:sym typeface="Wingdings" panose="05000000000000000000" pitchFamily="2" charset="2"/>
+              </a:rPr>
+              <a:t> “research_plan_2026-09.docx”</a:t>
+            </a:r>
+            <a:endParaRPr lang="en-US" dirty="0">
+              <a:solidFill>
+                <a:srgbClr val="12312B"/>
+              </a:solidFill>
+              <a:latin typeface="Archivo Medium"/>
+              <a:ea typeface="Archivo Medium"/>
+              <a:cs typeface="Archivo Medium"/>
+              <a:sym typeface="Archivo Medium"/>
+            </a:endParaRPr>
+          </a:p>
+          <a:p>
+            <a:pPr marL="1131030" lvl="2" indent="-457200">
+              <a:lnSpc>
+                <a:spcPct val="140013"/>
+              </a:lnSpc>
+              <a:buClr>
+                <a:srgbClr val="12312B"/>
+              </a:buClr>
+              <a:buSzPct val="115000"/>
+              <a:buFont typeface="+mj-lt"/>
+              <a:buAutoNum type="arabicPeriod"/>
+            </a:pPr>
+            <a:r>
+              <a:rPr lang="en-US" dirty="0">
+                <a:solidFill>
+                  <a:srgbClr val="12312B"/>
+                </a:solidFill>
+                <a:latin typeface="Archivo Medium"/>
+                <a:ea typeface="Archivo Medium"/>
+                <a:cs typeface="Archivo Medium"/>
+                <a:sym typeface="Archivo Medium"/>
+              </a:rPr>
+              <a:t>Think about sorting when naming files</a:t>
+            </a:r>
+          </a:p>
+          <a:p>
+            <a:pPr marL="1131030" lvl="2" indent="-457200">
+              <a:lnSpc>
+                <a:spcPct val="140013"/>
+              </a:lnSpc>
+              <a:buClr>
+                <a:srgbClr val="12312B"/>
+              </a:buClr>
+              <a:buSzPct val="115000"/>
+              <a:buFont typeface="+mj-lt"/>
+              <a:buAutoNum type="arabicPeriod"/>
+            </a:pPr>
+            <a:endParaRPr sz="1200" dirty="0">
+              <a:latin typeface="Archivo Medium"/>
+              <a:ea typeface="Archivo Medium"/>
+              <a:cs typeface="Archivo Medium"/>
+              <a:sym typeface="Archivo Medium"/>
+            </a:endParaRPr>
+          </a:p>
+          <a:p>
+            <a:pPr marL="457200" indent="-457200">
+              <a:lnSpc>
+                <a:spcPct val="140013"/>
+              </a:lnSpc>
+              <a:buSzPct val="115000"/>
+              <a:buFont typeface="+mj-lt"/>
+              <a:buAutoNum type="arabicPeriod"/>
+            </a:pPr>
+            <a:endParaRPr sz="2006" dirty="0">
+              <a:solidFill>
+                <a:srgbClr val="12312B"/>
+              </a:solidFill>
+              <a:latin typeface="Arial"/>
+              <a:ea typeface="Arial"/>
+              <a:cs typeface="Arial"/>
+              <a:sym typeface="Arial"/>
+            </a:endParaRPr>
+          </a:p>
+        </p:txBody>
+      </p:sp>
+    </p:spTree>
+    <p:extLst>
+      <p:ext uri="{BB962C8B-B14F-4D97-AF65-F5344CB8AC3E}">
+        <p14:creationId xmlns:p14="http://schemas.microsoft.com/office/powerpoint/2010/main" val="3362611186"/>
+      </p:ext>
+    </p:extLst>
+  </p:cSld>
+  <p:clrMapOvr>
+    <a:masterClrMapping/>
+  </p:clrMapOvr>
+</p:sld>
+</file>
+
+<file path=ppt/slides/slide19.xml><?xml version="1.0" encoding="utf-8"?>
+<p:sld xmlns:a="http://schemas.openxmlformats.org/drawingml/2006/main" xmlns:r="http://schemas.openxmlformats.org/officeDocument/2006/relationships" xmlns:p="http://schemas.openxmlformats.org/presentationml/2006/main">
+  <p:cSld>
+    <p:spTree>
+      <p:nvGrpSpPr>
+        <p:cNvPr id="1" name="Shape 176">
+          <a:extLst>
+            <a:ext uri="{FF2B5EF4-FFF2-40B4-BE49-F238E27FC236}">
+              <a16:creationId xmlns:a16="http://schemas.microsoft.com/office/drawing/2014/main" id="{748A5FD3-DBE0-EB5D-32F8-7B091E0E9B92}"/>
+            </a:ext>
+          </a:extLst>
+        </p:cNvPr>
+        <p:cNvGrpSpPr/>
+        <p:nvPr/>
+      </p:nvGrpSpPr>
+      <p:grpSpPr>
+        <a:xfrm>
+          <a:off x="0" y="0"/>
+          <a:ext cx="0" cy="0"/>
+          <a:chOff x="0" y="0"/>
+          <a:chExt cx="0" cy="0"/>
+        </a:xfrm>
+      </p:grpSpPr>
+      <p:sp>
+        <p:nvSpPr>
+          <p:cNvPr id="178" name="Google Shape;178;p31">
+            <a:extLst>
+              <a:ext uri="{FF2B5EF4-FFF2-40B4-BE49-F238E27FC236}">
+                <a16:creationId xmlns:a16="http://schemas.microsoft.com/office/drawing/2014/main" id="{62DEDC8E-A93E-6DFC-EFEE-5C88C738872A}"/>
+              </a:ext>
+            </a:extLst>
+          </p:cNvPr>
+          <p:cNvSpPr txBox="1"/>
+          <p:nvPr/>
+        </p:nvSpPr>
+        <p:spPr>
+          <a:xfrm>
+            <a:off x="922201" y="1157695"/>
+            <a:ext cx="9718705" cy="742383"/>
+          </a:xfrm>
+          <a:prstGeom prst="rect">
+            <a:avLst/>
+          </a:prstGeom>
+          <a:noFill/>
+          <a:ln>
+            <a:noFill/>
+          </a:ln>
+        </p:spPr>
+        <p:txBody>
+          <a:bodyPr spcFirstLastPara="1" wrap="square" lIns="0" tIns="0" rIns="0" bIns="0" anchor="t" anchorCtr="0">
+            <a:spAutoFit/>
+          </a:bodyPr>
+          <a:lstStyle/>
+          <a:p>
+            <a:pPr>
+              <a:lnSpc>
+                <a:spcPct val="140007"/>
+              </a:lnSpc>
+            </a:pPr>
+            <a:r>
+              <a:rPr lang="en-US" sz="3446" dirty="0">
+                <a:solidFill>
+                  <a:srgbClr val="00693D"/>
+                </a:solidFill>
+                <a:latin typeface="Anton"/>
+                <a:ea typeface="Anton"/>
+                <a:cs typeface="Anton"/>
+                <a:sym typeface="Anton"/>
+              </a:rPr>
+              <a:t>Documentation</a:t>
+            </a:r>
+            <a:endParaRPr sz="1200" dirty="0">
+              <a:latin typeface="Anton"/>
+              <a:ea typeface="Anton"/>
+              <a:cs typeface="Anton"/>
+              <a:sym typeface="Anton"/>
+            </a:endParaRPr>
+          </a:p>
+        </p:txBody>
+      </p:sp>
+      <p:sp>
+        <p:nvSpPr>
+          <p:cNvPr id="179" name="Google Shape;179;p31">
+            <a:extLst>
+              <a:ext uri="{FF2B5EF4-FFF2-40B4-BE49-F238E27FC236}">
+                <a16:creationId xmlns:a16="http://schemas.microsoft.com/office/drawing/2014/main" id="{47C05426-EA44-0A47-0CE9-CC3A165CC279}"/>
+              </a:ext>
+            </a:extLst>
+          </p:cNvPr>
+          <p:cNvSpPr txBox="1"/>
+          <p:nvPr/>
+        </p:nvSpPr>
+        <p:spPr>
+          <a:xfrm>
+            <a:off x="922202" y="1736904"/>
+            <a:ext cx="9776400" cy="3449662"/>
+          </a:xfrm>
+          <a:prstGeom prst="rect">
+            <a:avLst/>
+          </a:prstGeom>
+          <a:noFill/>
+          <a:ln>
+            <a:noFill/>
+          </a:ln>
+        </p:spPr>
+        <p:txBody>
+          <a:bodyPr spcFirstLastPara="1" wrap="square" lIns="0" tIns="0" rIns="0" bIns="0" anchor="t" anchorCtr="0">
+            <a:spAutoFit/>
+          </a:bodyPr>
+          <a:lstStyle/>
+          <a:p>
+            <a:pPr marL="673830" lvl="1" indent="-457200">
+              <a:lnSpc>
+                <a:spcPct val="140013"/>
+              </a:lnSpc>
+              <a:buClr>
+                <a:srgbClr val="12312B"/>
+              </a:buClr>
+              <a:buSzPct val="115000"/>
+              <a:buFont typeface="+mj-lt"/>
+              <a:buAutoNum type="arabicPeriod"/>
+            </a:pPr>
+            <a:endParaRPr lang="en-US" sz="2006" dirty="0">
+              <a:solidFill>
+                <a:srgbClr val="12312B"/>
+              </a:solidFill>
+              <a:latin typeface="Archivo Medium"/>
+              <a:ea typeface="Archivo Medium"/>
+              <a:cs typeface="Archivo Medium"/>
+              <a:sym typeface="Archivo Medium"/>
+            </a:endParaRPr>
+          </a:p>
+          <a:p>
+            <a:pPr marL="673830" lvl="1" indent="-457200">
+              <a:lnSpc>
+                <a:spcPct val="140013"/>
+              </a:lnSpc>
+              <a:buClr>
+                <a:srgbClr val="12312B"/>
+              </a:buClr>
+              <a:buSzPct val="115000"/>
+              <a:buFont typeface="+mj-lt"/>
+              <a:buAutoNum type="arabicPeriod"/>
+            </a:pPr>
+            <a:r>
+              <a:rPr lang="en-US" dirty="0">
+                <a:solidFill>
+                  <a:srgbClr val="12312B"/>
+                </a:solidFill>
+                <a:latin typeface="Archivo Medium"/>
+                <a:ea typeface="Archivo Medium"/>
+                <a:cs typeface="Archivo Medium"/>
+                <a:sym typeface="Archivo Medium"/>
+              </a:rPr>
+              <a:t>Include a README file in each project folder. This should include: a project overview, principal team members, an overview of project files, an explanation of what your code does, an explanation of your data’s provenance, a data dictionary (what each variable means and how each was recorded / measured / modified), [license].</a:t>
+            </a:r>
+          </a:p>
+          <a:p>
+            <a:pPr marL="1131030" lvl="2" indent="-457200">
+              <a:lnSpc>
+                <a:spcPct val="140013"/>
+              </a:lnSpc>
+              <a:buClr>
+                <a:srgbClr val="12312B"/>
+              </a:buClr>
+              <a:buSzPct val="115000"/>
+              <a:buFont typeface="+mj-lt"/>
+              <a:buAutoNum type="arabicPeriod"/>
+            </a:pPr>
+            <a:r>
+              <a:rPr lang="en-US" dirty="0">
+                <a:solidFill>
+                  <a:srgbClr val="12312B"/>
+                </a:solidFill>
+                <a:latin typeface="Archivo Medium"/>
+                <a:ea typeface="Archivo Medium"/>
+                <a:cs typeface="Archivo Medium"/>
+                <a:sym typeface="Archivo Medium"/>
+              </a:rPr>
+              <a:t>Purpose: your project is interpretable by others without you present</a:t>
+            </a:r>
+          </a:p>
+          <a:p>
+            <a:pPr marL="673830" lvl="1" indent="-457200">
+              <a:lnSpc>
+                <a:spcPct val="140013"/>
+              </a:lnSpc>
+              <a:buClr>
+                <a:srgbClr val="12312B"/>
+              </a:buClr>
+              <a:buSzPct val="115000"/>
+              <a:buFont typeface="+mj-lt"/>
+              <a:buAutoNum type="arabicPeriod"/>
+            </a:pPr>
+            <a:endParaRPr lang="en-US" dirty="0">
+              <a:solidFill>
+                <a:srgbClr val="12312B"/>
+              </a:solidFill>
+              <a:latin typeface="Archivo Medium"/>
+              <a:ea typeface="Archivo Medium"/>
+              <a:cs typeface="Archivo Medium"/>
+              <a:sym typeface="Archivo Medium"/>
+            </a:endParaRPr>
+          </a:p>
+          <a:p>
+            <a:pPr marL="1131030" lvl="2" indent="-457200">
+              <a:lnSpc>
+                <a:spcPct val="140013"/>
+              </a:lnSpc>
+              <a:buClr>
+                <a:srgbClr val="12312B"/>
+              </a:buClr>
+              <a:buSzPct val="115000"/>
+              <a:buFont typeface="+mj-lt"/>
+              <a:buAutoNum type="arabicPeriod"/>
+            </a:pPr>
+            <a:endParaRPr sz="1200" dirty="0">
+              <a:latin typeface="Archivo Medium"/>
+              <a:ea typeface="Archivo Medium"/>
+              <a:cs typeface="Archivo Medium"/>
+              <a:sym typeface="Archivo Medium"/>
+            </a:endParaRPr>
+          </a:p>
+          <a:p>
+            <a:pPr marL="457200" indent="-457200">
+              <a:lnSpc>
+                <a:spcPct val="140013"/>
+              </a:lnSpc>
+              <a:buSzPct val="115000"/>
+              <a:buFont typeface="+mj-lt"/>
+              <a:buAutoNum type="arabicPeriod"/>
+            </a:pPr>
+            <a:endParaRPr sz="2006" dirty="0">
+              <a:solidFill>
+                <a:srgbClr val="12312B"/>
+              </a:solidFill>
+              <a:latin typeface="Arial"/>
+              <a:ea typeface="Arial"/>
+              <a:cs typeface="Arial"/>
+              <a:sym typeface="Arial"/>
+            </a:endParaRPr>
+          </a:p>
+        </p:txBody>
+      </p:sp>
+    </p:spTree>
+    <p:extLst>
+      <p:ext uri="{BB962C8B-B14F-4D97-AF65-F5344CB8AC3E}">
+        <p14:creationId xmlns:p14="http://schemas.microsoft.com/office/powerpoint/2010/main" val="1157079992"/>
+      </p:ext>
+    </p:extLst>
+  </p:cSld>
+  <p:clrMapOvr>
+    <a:masterClrMapping/>
+  </p:clrMapOvr>
+</p:sld>
+</file>
+
 <file path=ppt/slides/slide2.xml><?xml version="1.0" encoding="utf-8"?>
 <p:sld xmlns:a="http://schemas.openxmlformats.org/drawingml/2006/main" xmlns:r="http://schemas.openxmlformats.org/officeDocument/2006/relationships" xmlns:p="http://schemas.openxmlformats.org/presentationml/2006/main">
   <p:cSld>
@@ -16525,13 +18055,7 @@
   <p:cSld>
     <p:spTree>
       <p:nvGrpSpPr>
-        <p:cNvPr id="1" name="Shape 176">
-          <a:extLst>
-            <a:ext uri="{FF2B5EF4-FFF2-40B4-BE49-F238E27FC236}">
-              <a16:creationId xmlns:a16="http://schemas.microsoft.com/office/drawing/2014/main" id="{A349D701-D1D3-DA90-F00E-1EA792F21622}"/>
-            </a:ext>
-          </a:extLst>
-        </p:cNvPr>
+        <p:cNvPr id="1" name=""/>
         <p:cNvGrpSpPr/>
         <p:nvPr/>
       </p:nvGrpSpPr>
@@ -16543,61 +18067,10 @@
           <a:chExt cx="0" cy="0"/>
         </a:xfrm>
       </p:grpSpPr>
-      <p:sp>
-        <p:nvSpPr>
-          <p:cNvPr id="178" name="Google Shape;178;p31">
-            <a:extLst>
-              <a:ext uri="{FF2B5EF4-FFF2-40B4-BE49-F238E27FC236}">
-                <a16:creationId xmlns:a16="http://schemas.microsoft.com/office/drawing/2014/main" id="{AD6CAA9C-342B-838B-B8F1-3287EFE32134}"/>
-              </a:ext>
-            </a:extLst>
-          </p:cNvPr>
-          <p:cNvSpPr txBox="1"/>
-          <p:nvPr/>
-        </p:nvSpPr>
-        <p:spPr>
-          <a:xfrm>
-            <a:off x="922202" y="1157695"/>
-            <a:ext cx="6097800" cy="742383"/>
-          </a:xfrm>
-          <a:prstGeom prst="rect">
-            <a:avLst/>
-          </a:prstGeom>
-          <a:noFill/>
-          <a:ln>
-            <a:noFill/>
-          </a:ln>
-        </p:spPr>
-        <p:txBody>
-          <a:bodyPr spcFirstLastPara="1" wrap="square" lIns="0" tIns="0" rIns="0" bIns="0" anchor="t" anchorCtr="0">
-            <a:spAutoFit/>
-          </a:bodyPr>
-          <a:lstStyle/>
-          <a:p>
-            <a:pPr>
-              <a:lnSpc>
-                <a:spcPct val="140007"/>
-              </a:lnSpc>
-            </a:pPr>
-            <a:r>
-              <a:rPr lang="en-US" sz="3446" dirty="0">
-                <a:solidFill>
-                  <a:srgbClr val="00693D"/>
-                </a:solidFill>
-                <a:latin typeface="Anton"/>
-                <a:ea typeface="Anton"/>
-                <a:cs typeface="Anton"/>
-                <a:sym typeface="Anton"/>
-              </a:rPr>
-              <a:t>Best Practices – Groups??</a:t>
-            </a:r>
-          </a:p>
-        </p:txBody>
-      </p:sp>
     </p:spTree>
     <p:extLst>
       <p:ext uri="{BB962C8B-B14F-4D97-AF65-F5344CB8AC3E}">
-        <p14:creationId xmlns:p14="http://schemas.microsoft.com/office/powerpoint/2010/main" val="2047668571"/>
+        <p14:creationId xmlns:p14="http://schemas.microsoft.com/office/powerpoint/2010/main" val="2220577475"/>
       </p:ext>
     </p:extLst>
   </p:cSld>
@@ -16608,6 +18081,66 @@
 </file>
 
 <file path=ppt/slides/slide21.xml><?xml version="1.0" encoding="utf-8"?>
+<p:sld xmlns:a="http://schemas.openxmlformats.org/drawingml/2006/main" xmlns:r="http://schemas.openxmlformats.org/officeDocument/2006/relationships" xmlns:p="http://schemas.openxmlformats.org/presentationml/2006/main">
+  <p:cSld>
+    <p:spTree>
+      <p:nvGrpSpPr>
+        <p:cNvPr id="1" name=""/>
+        <p:cNvGrpSpPr/>
+        <p:nvPr/>
+      </p:nvGrpSpPr>
+      <p:grpSpPr>
+        <a:xfrm>
+          <a:off x="0" y="0"/>
+          <a:ext cx="0" cy="0"/>
+          <a:chOff x="0" y="0"/>
+          <a:chExt cx="0" cy="0"/>
+        </a:xfrm>
+      </p:grpSpPr>
+    </p:spTree>
+    <p:extLst>
+      <p:ext uri="{BB962C8B-B14F-4D97-AF65-F5344CB8AC3E}">
+        <p14:creationId xmlns:p14="http://schemas.microsoft.com/office/powerpoint/2010/main" val="3090111024"/>
+      </p:ext>
+    </p:extLst>
+  </p:cSld>
+  <p:clrMapOvr>
+    <a:masterClrMapping/>
+  </p:clrMapOvr>
+</p:sld>
+</file>
+
+<file path=ppt/slides/slide22.xml><?xml version="1.0" encoding="utf-8"?>
+<p:sld xmlns:a="http://schemas.openxmlformats.org/drawingml/2006/main" xmlns:r="http://schemas.openxmlformats.org/officeDocument/2006/relationships" xmlns:p="http://schemas.openxmlformats.org/presentationml/2006/main">
+  <p:cSld>
+    <p:spTree>
+      <p:nvGrpSpPr>
+        <p:cNvPr id="1" name=""/>
+        <p:cNvGrpSpPr/>
+        <p:nvPr/>
+      </p:nvGrpSpPr>
+      <p:grpSpPr>
+        <a:xfrm>
+          <a:off x="0" y="0"/>
+          <a:ext cx="0" cy="0"/>
+          <a:chOff x="0" y="0"/>
+          <a:chExt cx="0" cy="0"/>
+        </a:xfrm>
+      </p:grpSpPr>
+    </p:spTree>
+    <p:extLst>
+      <p:ext uri="{BB962C8B-B14F-4D97-AF65-F5344CB8AC3E}">
+        <p14:creationId xmlns:p14="http://schemas.microsoft.com/office/powerpoint/2010/main" val="2183807426"/>
+      </p:ext>
+    </p:extLst>
+  </p:cSld>
+  <p:clrMapOvr>
+    <a:masterClrMapping/>
+  </p:clrMapOvr>
+</p:sld>
+</file>
+
+<file path=ppt/slides/slide23.xml><?xml version="1.0" encoding="utf-8"?>
 <p:sld xmlns:a="http://schemas.openxmlformats.org/drawingml/2006/main" xmlns:r="http://schemas.openxmlformats.org/officeDocument/2006/relationships" xmlns:p="http://schemas.openxmlformats.org/presentationml/2006/main">
   <p:cSld>
     <p:spTree>
@@ -16751,7 +18284,7 @@
 </p:sld>
 </file>
 
-<file path=ppt/slides/slide22.xml><?xml version="1.0" encoding="utf-8"?>
+<file path=ppt/slides/slide24.xml><?xml version="1.0" encoding="utf-8"?>
 <p:sld xmlns:a="http://schemas.openxmlformats.org/drawingml/2006/main" xmlns:r="http://schemas.openxmlformats.org/officeDocument/2006/relationships" xmlns:p="http://schemas.openxmlformats.org/presentationml/2006/main">
   <p:cSld>
     <p:spTree>
@@ -16928,6 +18461,118 @@
   <p:cSld>
     <p:spTree>
       <p:nvGrpSpPr>
+        <p:cNvPr id="1" name=""/>
+        <p:cNvGrpSpPr/>
+        <p:nvPr/>
+      </p:nvGrpSpPr>
+      <p:grpSpPr>
+        <a:xfrm>
+          <a:off x="0" y="0"/>
+          <a:ext cx="0" cy="0"/>
+          <a:chOff x="0" y="0"/>
+          <a:chExt cx="0" cy="0"/>
+        </a:xfrm>
+      </p:grpSpPr>
+      <p:sp>
+        <p:nvSpPr>
+          <p:cNvPr id="2" name="Title 1">
+            <a:extLst>
+              <a:ext uri="{FF2B5EF4-FFF2-40B4-BE49-F238E27FC236}">
+                <a16:creationId xmlns:a16="http://schemas.microsoft.com/office/drawing/2014/main" id="{19D277AC-DA44-F83D-CF83-D8DEA3FC4A1A}"/>
+              </a:ext>
+            </a:extLst>
+          </p:cNvPr>
+          <p:cNvSpPr>
+            <a:spLocks noGrp="1"/>
+          </p:cNvSpPr>
+          <p:nvPr>
+            <p:ph type="title"/>
+          </p:nvPr>
+        </p:nvSpPr>
+        <p:spPr/>
+        <p:txBody>
+          <a:bodyPr/>
+          <a:lstStyle/>
+          <a:p>
+            <a:endParaRPr lang="en-US" dirty="0"/>
+          </a:p>
+        </p:txBody>
+      </p:sp>
+      <p:sp>
+        <p:nvSpPr>
+          <p:cNvPr id="3" name="Content Placeholder 2">
+            <a:extLst>
+              <a:ext uri="{FF2B5EF4-FFF2-40B4-BE49-F238E27FC236}">
+                <a16:creationId xmlns:a16="http://schemas.microsoft.com/office/drawing/2014/main" id="{6429D5A1-BE91-A24D-1B6A-366381FA559B}"/>
+              </a:ext>
+            </a:extLst>
+          </p:cNvPr>
+          <p:cNvSpPr>
+            <a:spLocks noGrp="1"/>
+          </p:cNvSpPr>
+          <p:nvPr>
+            <p:ph idx="1"/>
+          </p:nvPr>
+        </p:nvSpPr>
+        <p:spPr/>
+        <p:txBody>
+          <a:bodyPr>
+            <a:normAutofit fontScale="92500" lnSpcReduction="10000"/>
+          </a:bodyPr>
+          <a:lstStyle/>
+          <a:p>
+            <a:r>
+              <a:rPr lang="en-US" b="1" dirty="0"/>
+              <a:t>Reproducible Research (RR)</a:t>
+            </a:r>
+          </a:p>
+          <a:p>
+            <a:pPr lvl="1"/>
+            <a:r>
+              <a:rPr lang="en-US" dirty="0"/>
+              <a:t>Goal: conduct and document your research in a way that allows others (including future you!) to understand, verify, and rerun the analysis using the same data and methods.</a:t>
+            </a:r>
+          </a:p>
+          <a:p>
+            <a:pPr lvl="2"/>
+            <a:r>
+              <a:rPr lang="en-US" i="1" dirty="0"/>
+              <a:t>Note: depending on the discipline, this may or may not mean replicating results</a:t>
+            </a:r>
+          </a:p>
+          <a:p>
+            <a:r>
+              <a:rPr lang="en-US" b="1" dirty="0"/>
+              <a:t>Open Scholarship (OS)</a:t>
+            </a:r>
+          </a:p>
+          <a:p>
+            <a:pPr lvl="1"/>
+            <a:r>
+              <a:rPr lang="en-US" dirty="0"/>
+              <a:t>Goal: make the products of our research as accessible and reusable as possible. Products may include publications, data, code, documentation, descriptions of methods, and other materials. Open Scholarship looks different across disciplines and must balance accessibility with privacy, safety, community needs, and cultural protocols. But all open scholarship shares a common principle: reducing barriers to allowing others to engage with and benefit from your research (especially those who could be most positively affected).</a:t>
+            </a:r>
+          </a:p>
+        </p:txBody>
+      </p:sp>
+    </p:spTree>
+    <p:extLst>
+      <p:ext uri="{BB962C8B-B14F-4D97-AF65-F5344CB8AC3E}">
+        <p14:creationId xmlns:p14="http://schemas.microsoft.com/office/powerpoint/2010/main" val="2201401664"/>
+      </p:ext>
+    </p:extLst>
+  </p:cSld>
+  <p:clrMapOvr>
+    <a:masterClrMapping/>
+  </p:clrMapOvr>
+</p:sld>
+</file>
+
+<file path=ppt/slides/slide4.xml><?xml version="1.0" encoding="utf-8"?>
+<p:sld xmlns:a="http://schemas.openxmlformats.org/drawingml/2006/main" xmlns:r="http://schemas.openxmlformats.org/officeDocument/2006/relationships" xmlns:p="http://schemas.openxmlformats.org/presentationml/2006/main">
+  <p:cSld>
+    <p:spTree>
+      <p:nvGrpSpPr>
         <p:cNvPr id="1" name="Shape 133">
           <a:extLst>
             <a:ext uri="{FF2B5EF4-FFF2-40B4-BE49-F238E27FC236}">
@@ -17095,7 +18740,7 @@
 </p:sld>
 </file>
 
-<file path=ppt/slides/slide4.xml><?xml version="1.0" encoding="utf-8"?>
+<file path=ppt/slides/slide5.xml><?xml version="1.0" encoding="utf-8"?>
 <p:sld xmlns:a="http://schemas.openxmlformats.org/drawingml/2006/main" xmlns:r="http://schemas.openxmlformats.org/officeDocument/2006/relationships" xmlns:p="http://schemas.openxmlformats.org/presentationml/2006/main">
   <p:cSld>
     <p:spTree>
@@ -17281,7 +18926,7 @@
 </p:sld>
 </file>
 
-<file path=ppt/slides/slide5.xml><?xml version="1.0" encoding="utf-8"?>
+<file path=ppt/slides/slide6.xml><?xml version="1.0" encoding="utf-8"?>
 <p:sld xmlns:a="http://schemas.openxmlformats.org/drawingml/2006/main" xmlns:r="http://schemas.openxmlformats.org/officeDocument/2006/relationships" xmlns:p="http://schemas.openxmlformats.org/presentationml/2006/main">
   <p:cSld>
     <p:spTree>
@@ -17320,8 +18965,8 @@
         </p:blipFill>
         <p:spPr>
           <a:xfrm>
-            <a:off x="627697" y="1422463"/>
-            <a:ext cx="4505325" cy="1114425"/>
+            <a:off x="599122" y="1794415"/>
+            <a:ext cx="6392171" cy="1581150"/>
           </a:xfrm>
           <a:prstGeom prst="rect">
             <a:avLst/>
@@ -17350,8 +18995,8 @@
         </p:blipFill>
         <p:spPr>
           <a:xfrm>
-            <a:off x="6504241" y="1398650"/>
-            <a:ext cx="4200525" cy="1162050"/>
+            <a:off x="5196759" y="136399"/>
+            <a:ext cx="6909516" cy="1911476"/>
           </a:xfrm>
           <a:prstGeom prst="rect">
             <a:avLst/>
@@ -17380,8 +19025,8 @@
         </p:blipFill>
         <p:spPr>
           <a:xfrm>
-            <a:off x="694753" y="3530538"/>
-            <a:ext cx="3438525" cy="1581150"/>
+            <a:off x="1609153" y="3482436"/>
+            <a:ext cx="4087699" cy="1879662"/>
           </a:xfrm>
           <a:prstGeom prst="rect">
             <a:avLst/>
@@ -17411,7 +19056,7 @@
         <p:spPr>
           <a:xfrm>
             <a:off x="7232332" y="3122104"/>
-            <a:ext cx="3000375" cy="1628775"/>
+            <a:ext cx="4449679" cy="2415540"/>
           </a:xfrm>
           <a:prstGeom prst="rect">
             <a:avLst/>
@@ -17528,7 +19173,7 @@
 </p:sld>
 </file>
 
-<file path=ppt/slides/slide6.xml><?xml version="1.0" encoding="utf-8"?>
+<file path=ppt/slides/slide7.xml><?xml version="1.0" encoding="utf-8"?>
 <p:sld xmlns:a="http://schemas.openxmlformats.org/drawingml/2006/main" xmlns:r="http://schemas.openxmlformats.org/officeDocument/2006/relationships" xmlns:p="http://schemas.openxmlformats.org/presentationml/2006/main">
   <p:cSld>
     <p:spTree>
@@ -17665,15 +19310,7 @@
             <a:pPr algn="ctr"/>
             <a:r>
               <a:rPr lang="en-US" sz="4000" dirty="0"/>
-              <a:t>In what ways are </a:t>
-            </a:r>
-            <a:r>
-              <a:rPr lang="en-US" sz="4000" dirty="0" err="1"/>
-              <a:t>reseachers</a:t>
-            </a:r>
-            <a:r>
-              <a:rPr lang="en-US" sz="4000" dirty="0"/>
-              <a:t> in your discipline failing to achieve this?</a:t>
+              <a:t>In what ways are researchers in your discipline failing to achieve this?</a:t>
             </a:r>
           </a:p>
         </p:txBody>
@@ -17691,7 +19328,7 @@
 </p:sld>
 </file>
 
-<file path=ppt/slides/slide7.xml><?xml version="1.0" encoding="utf-8"?>
+<file path=ppt/slides/slide8.xml><?xml version="1.0" encoding="utf-8"?>
 <p:sld xmlns:a="http://schemas.openxmlformats.org/drawingml/2006/main" xmlns:r="http://schemas.openxmlformats.org/officeDocument/2006/relationships" xmlns:p="http://schemas.openxmlformats.org/presentationml/2006/main">
   <p:cSld>
     <p:spTree>
@@ -17863,7 +19500,7 @@
 </p:sld>
 </file>
 
-<file path=ppt/slides/slide8.xml><?xml version="1.0" encoding="utf-8"?>
+<file path=ppt/slides/slide9.xml><?xml version="1.0" encoding="utf-8"?>
 <p:sld xmlns:a="http://schemas.openxmlformats.org/drawingml/2006/main" xmlns:r="http://schemas.openxmlformats.org/officeDocument/2006/relationships" xmlns:p="http://schemas.openxmlformats.org/presentationml/2006/main">
   <p:cSld>
     <p:spTree>
@@ -17884,105 +19521,6 @@
     <p:extLst>
       <p:ext uri="{BB962C8B-B14F-4D97-AF65-F5344CB8AC3E}">
         <p14:creationId xmlns:p14="http://schemas.microsoft.com/office/powerpoint/2010/main" val="747715104"/>
-      </p:ext>
-    </p:extLst>
-  </p:cSld>
-  <p:clrMapOvr>
-    <a:masterClrMapping/>
-  </p:clrMapOvr>
-</p:sld>
-</file>
-
-<file path=ppt/slides/slide9.xml><?xml version="1.0" encoding="utf-8"?>
-<p:sld xmlns:a="http://schemas.openxmlformats.org/drawingml/2006/main" xmlns:r="http://schemas.openxmlformats.org/officeDocument/2006/relationships" xmlns:p="http://schemas.openxmlformats.org/presentationml/2006/main">
-  <p:cSld>
-    <p:spTree>
-      <p:nvGrpSpPr>
-        <p:cNvPr id="1" name="Shape 139">
-          <a:extLst>
-            <a:ext uri="{FF2B5EF4-FFF2-40B4-BE49-F238E27FC236}">
-              <a16:creationId xmlns:a16="http://schemas.microsoft.com/office/drawing/2014/main" id="{9D08716B-E435-BFFC-1B82-7F291BB09BAE}"/>
-            </a:ext>
-          </a:extLst>
-        </p:cNvPr>
-        <p:cNvGrpSpPr/>
-        <p:nvPr/>
-      </p:nvGrpSpPr>
-      <p:grpSpPr>
-        <a:xfrm>
-          <a:off x="0" y="0"/>
-          <a:ext cx="0" cy="0"/>
-          <a:chOff x="0" y="0"/>
-          <a:chExt cx="0" cy="0"/>
-        </a:xfrm>
-      </p:grpSpPr>
-      <p:sp>
-        <p:nvSpPr>
-          <p:cNvPr id="141" name="Google Shape;141;p26">
-            <a:extLst>
-              <a:ext uri="{FF2B5EF4-FFF2-40B4-BE49-F238E27FC236}">
-                <a16:creationId xmlns:a16="http://schemas.microsoft.com/office/drawing/2014/main" id="{78E586CE-EAB9-478A-905E-310D986723F8}"/>
-              </a:ext>
-            </a:extLst>
-          </p:cNvPr>
-          <p:cNvSpPr txBox="1"/>
-          <p:nvPr/>
-        </p:nvSpPr>
-        <p:spPr>
-          <a:xfrm>
-            <a:off x="922202" y="1157695"/>
-            <a:ext cx="8511218" cy="742383"/>
-          </a:xfrm>
-          <a:prstGeom prst="rect">
-            <a:avLst/>
-          </a:prstGeom>
-          <a:noFill/>
-          <a:ln>
-            <a:noFill/>
-          </a:ln>
-        </p:spPr>
-        <p:txBody>
-          <a:bodyPr spcFirstLastPara="1" wrap="square" lIns="0" tIns="0" rIns="0" bIns="0" anchor="t" anchorCtr="0">
-            <a:spAutoFit/>
-          </a:bodyPr>
-          <a:lstStyle/>
-          <a:p>
-            <a:pPr defTabSz="609630">
-              <a:lnSpc>
-                <a:spcPct val="140007"/>
-              </a:lnSpc>
-              <a:buClr>
-                <a:srgbClr val="000000"/>
-              </a:buClr>
-            </a:pPr>
-            <a:r>
-              <a:rPr lang="en-US" sz="3446" kern="0" dirty="0">
-                <a:solidFill>
-                  <a:srgbClr val="00693D"/>
-                </a:solidFill>
-                <a:latin typeface="Anton"/>
-                <a:ea typeface="Anton"/>
-                <a:cs typeface="Anton"/>
-                <a:sym typeface="Anton"/>
-              </a:rPr>
-              <a:t>Different Disciplines, different needs</a:t>
-            </a:r>
-            <a:endParaRPr sz="933" kern="0" dirty="0">
-              <a:solidFill>
-                <a:srgbClr val="000000"/>
-              </a:solidFill>
-              <a:latin typeface="Anton"/>
-              <a:ea typeface="Anton"/>
-              <a:cs typeface="Anton"/>
-              <a:sym typeface="Anton"/>
-            </a:endParaRPr>
-          </a:p>
-        </p:txBody>
-      </p:sp>
-    </p:spTree>
-    <p:extLst>
-      <p:ext uri="{BB962C8B-B14F-4D97-AF65-F5344CB8AC3E}">
-        <p14:creationId xmlns:p14="http://schemas.microsoft.com/office/powerpoint/2010/main" val="2405714910"/>
       </p:ext>
     </p:extLst>
   </p:cSld>

--- a/slides/04a_Computation-Research_Best-Practices.pptx
+++ b/slides/04a_Computation-Research_Best-Practices.pptx
@@ -6,33 +6,37 @@
     <p:sldMasterId id="2147483661" r:id="rId2"/>
   </p:sldMasterIdLst>
   <p:notesMasterIdLst>
-    <p:notesMasterId r:id="rId27"/>
+    <p:notesMasterId r:id="rId31"/>
   </p:notesMasterIdLst>
   <p:sldIdLst>
     <p:sldId id="299" r:id="rId3"/>
     <p:sldId id="272" r:id="rId4"/>
-    <p:sldId id="361" r:id="rId5"/>
-    <p:sldId id="313" r:id="rId6"/>
-    <p:sldId id="359" r:id="rId7"/>
-    <p:sldId id="360" r:id="rId8"/>
-    <p:sldId id="343" r:id="rId9"/>
-    <p:sldId id="314" r:id="rId10"/>
-    <p:sldId id="354" r:id="rId11"/>
-    <p:sldId id="355" r:id="rId12"/>
-    <p:sldId id="267" r:id="rId13"/>
-    <p:sldId id="357" r:id="rId14"/>
-    <p:sldId id="265" r:id="rId15"/>
-    <p:sldId id="346" r:id="rId16"/>
-    <p:sldId id="362" r:id="rId17"/>
-    <p:sldId id="341" r:id="rId18"/>
-    <p:sldId id="363" r:id="rId19"/>
-    <p:sldId id="367" r:id="rId20"/>
-    <p:sldId id="368" r:id="rId21"/>
-    <p:sldId id="364" r:id="rId22"/>
-    <p:sldId id="365" r:id="rId23"/>
-    <p:sldId id="366" r:id="rId24"/>
-    <p:sldId id="353" r:id="rId25"/>
-    <p:sldId id="331" r:id="rId26"/>
+    <p:sldId id="314" r:id="rId5"/>
+    <p:sldId id="361" r:id="rId6"/>
+    <p:sldId id="313" r:id="rId7"/>
+    <p:sldId id="359" r:id="rId8"/>
+    <p:sldId id="360" r:id="rId9"/>
+    <p:sldId id="343" r:id="rId10"/>
+    <p:sldId id="355" r:id="rId11"/>
+    <p:sldId id="267" r:id="rId12"/>
+    <p:sldId id="357" r:id="rId13"/>
+    <p:sldId id="265" r:id="rId14"/>
+    <p:sldId id="346" r:id="rId15"/>
+    <p:sldId id="362" r:id="rId16"/>
+    <p:sldId id="341" r:id="rId17"/>
+    <p:sldId id="363" r:id="rId18"/>
+    <p:sldId id="367" r:id="rId19"/>
+    <p:sldId id="368" r:id="rId20"/>
+    <p:sldId id="369" r:id="rId21"/>
+    <p:sldId id="370" r:id="rId22"/>
+    <p:sldId id="371" r:id="rId23"/>
+    <p:sldId id="372" r:id="rId24"/>
+    <p:sldId id="373" r:id="rId25"/>
+    <p:sldId id="353" r:id="rId26"/>
+    <p:sldId id="331" r:id="rId27"/>
+    <p:sldId id="374" r:id="rId28"/>
+    <p:sldId id="375" r:id="rId29"/>
+    <p:sldId id="376" r:id="rId30"/>
   </p:sldIdLst>
   <p:sldSz cx="12192000" cy="6858000"/>
   <p:notesSz cx="6858000" cy="9144000"/>
@@ -143,28 +147,6 @@
 <p188:authorLst xmlns:a="http://schemas.openxmlformats.org/drawingml/2006/main" xmlns:r="http://schemas.openxmlformats.org/officeDocument/2006/relationships" xmlns:p188="http://schemas.microsoft.com/office/powerpoint/2018/8/main">
   <p188:author id="{45D1CE9B-DF25-4FEC-06DE-212637DD9CB8}" name="Katie Owers Bonner" initials="KO" userId="S::f008496@dartmouth.edu::031be739-2ca3-49bb-9134-32c5274b029d" providerId="AD"/>
 </p188:authorLst>
-</file>
-
-<file path=ppt/comments/modernComment_15A_EE3B0802.xml><?xml version="1.0" encoding="utf-8"?>
-<p188:cmLst xmlns:a="http://schemas.openxmlformats.org/drawingml/2006/main" xmlns:r="http://schemas.openxmlformats.org/officeDocument/2006/relationships" xmlns:p188="http://schemas.microsoft.com/office/powerpoint/2018/8/main">
-  <p188:cm id="{FBE73A72-6E4D-4BD8-BAEC-35D98471EF5D}" authorId="{45D1CE9B-DF25-4FEC-06DE-212637DD9CB8}" created="2026-02-04T20:47:29.252">
-    <pc:sldMkLst xmlns:pc="http://schemas.microsoft.com/office/powerpoint/2013/main/command">
-      <pc:docMk/>
-      <pc:sldMk cId="3996846082" sldId="346"/>
-    </pc:sldMkLst>
-    <p188:txBody>
-      <a:bodyPr/>
-      <a:lstStyle/>
-      <a:p>
-        <a:r>
-          <a:rPr lang="en-US"/>
-          <a:t>Does all this really need to be in a data cleaning plan? Technically no, but a lot of it is the methods for your paper and you better write it up now!
-Also include some notes around actual format for a plan.</a:t>
-        </a:r>
-      </a:p>
-    </p188:txBody>
-  </p188:cm>
-</p188:cmLst>
 </file>
 
 <file path=ppt/notesMasters/notesMaster1.xml><?xml version="1.0" encoding="utf-8"?>
@@ -1303,7 +1285,15 @@
               </a:spcAft>
               <a:buNone/>
             </a:pPr>
-            <a:endParaRPr/>
+            <a:r>
+              <a:rPr lang="en-US" i="1" dirty="0"/>
+              <a:t>Disciplinary variation:</a:t>
+            </a:r>
+            <a:r>
+              <a:rPr lang="en-US" dirty="0"/>
+              <a:t> Quantitative fields often lean on data dictionaries and codebooks; qualitative researchers may need to document coding schemes and interpretive decisions; lab sciences may need protocols and instrument settings documented alongside code.</a:t>
+            </a:r>
+            <a:endParaRPr dirty="0"/>
           </a:p>
         </p:txBody>
       </p:sp>
@@ -1372,6 +1362,796 @@
   <p:cSld>
     <p:spTree>
       <p:nvGrpSpPr>
+        <p:cNvPr id="1" name="Shape 173">
+          <a:extLst>
+            <a:ext uri="{FF2B5EF4-FFF2-40B4-BE49-F238E27FC236}">
+              <a16:creationId xmlns:a16="http://schemas.microsoft.com/office/drawing/2014/main" id="{0BE2F2A6-7D70-A7CA-AB89-EE9BD513B57F}"/>
+            </a:ext>
+          </a:extLst>
+        </p:cNvPr>
+        <p:cNvGrpSpPr/>
+        <p:nvPr/>
+      </p:nvGrpSpPr>
+      <p:grpSpPr>
+        <a:xfrm>
+          <a:off x="0" y="0"/>
+          <a:ext cx="0" cy="0"/>
+          <a:chOff x="0" y="0"/>
+          <a:chExt cx="0" cy="0"/>
+        </a:xfrm>
+      </p:grpSpPr>
+      <p:sp>
+        <p:nvSpPr>
+          <p:cNvPr id="174" name="Google Shape;174;p5:notes">
+            <a:extLst>
+              <a:ext uri="{FF2B5EF4-FFF2-40B4-BE49-F238E27FC236}">
+                <a16:creationId xmlns:a16="http://schemas.microsoft.com/office/drawing/2014/main" id="{EB516821-3BE5-B596-0B7D-369998803F5E}"/>
+              </a:ext>
+            </a:extLst>
+          </p:cNvPr>
+          <p:cNvSpPr txBox="1">
+            <a:spLocks noGrp="1"/>
+          </p:cNvSpPr>
+          <p:nvPr>
+            <p:ph type="body" idx="1"/>
+          </p:nvPr>
+        </p:nvSpPr>
+        <p:spPr>
+          <a:xfrm>
+            <a:off x="685800" y="4343400"/>
+            <a:ext cx="5486400" cy="4114800"/>
+          </a:xfrm>
+          <a:prstGeom prst="rect">
+            <a:avLst/>
+          </a:prstGeom>
+        </p:spPr>
+        <p:txBody>
+          <a:bodyPr spcFirstLastPara="1" wrap="square" lIns="91425" tIns="91425" rIns="91425" bIns="91425" anchor="t" anchorCtr="0">
+            <a:noAutofit/>
+          </a:bodyPr>
+          <a:lstStyle/>
+          <a:p>
+            <a:pPr marL="0" lvl="0" indent="0" algn="l" rtl="0">
+              <a:spcBef>
+                <a:spcPts val="0"/>
+              </a:spcBef>
+              <a:spcAft>
+                <a:spcPts val="0"/>
+              </a:spcAft>
+              <a:buNone/>
+            </a:pPr>
+            <a:r>
+              <a:rPr lang="en-US" i="1" dirty="0"/>
+              <a:t>Disciplinary variation:</a:t>
+            </a:r>
+            <a:r>
+              <a:rPr lang="en-US" dirty="0"/>
+              <a:t> Clinical/human subjects research may need to document consent and de-identification steps; computational social science may need to document API pulls or web-scraping parameters and dates (since online data changes).</a:t>
+            </a:r>
+            <a:endParaRPr dirty="0"/>
+          </a:p>
+        </p:txBody>
+      </p:sp>
+      <p:sp>
+        <p:nvSpPr>
+          <p:cNvPr id="175" name="Google Shape;175;p5:notes">
+            <a:extLst>
+              <a:ext uri="{FF2B5EF4-FFF2-40B4-BE49-F238E27FC236}">
+                <a16:creationId xmlns:a16="http://schemas.microsoft.com/office/drawing/2014/main" id="{97CCC3B8-86CF-22A8-4FB0-7736535CEB94}"/>
+              </a:ext>
+            </a:extLst>
+          </p:cNvPr>
+          <p:cNvSpPr>
+            <a:spLocks noGrp="1" noRot="1" noChangeAspect="1"/>
+          </p:cNvSpPr>
+          <p:nvPr>
+            <p:ph type="sldImg" idx="2"/>
+          </p:nvPr>
+        </p:nvSpPr>
+        <p:spPr>
+          <a:xfrm>
+            <a:off x="381000" y="685800"/>
+            <a:ext cx="6096000" cy="3429000"/>
+          </a:xfrm>
+          <a:custGeom>
+            <a:avLst/>
+            <a:gdLst/>
+            <a:ahLst/>
+            <a:cxnLst/>
+            <a:rect l="l" t="t" r="r" b="b"/>
+            <a:pathLst>
+              <a:path w="120000" h="120000" extrusionOk="0">
+                <a:moveTo>
+                  <a:pt x="0" y="0"/>
+                </a:moveTo>
+                <a:lnTo>
+                  <a:pt x="120000" y="0"/>
+                </a:lnTo>
+                <a:lnTo>
+                  <a:pt x="120000" y="120000"/>
+                </a:lnTo>
+                <a:lnTo>
+                  <a:pt x="0" y="120000"/>
+                </a:lnTo>
+                <a:close/>
+              </a:path>
+            </a:pathLst>
+          </a:custGeom>
+        </p:spPr>
+      </p:sp>
+    </p:spTree>
+    <p:extLst>
+      <p:ext uri="{BB962C8B-B14F-4D97-AF65-F5344CB8AC3E}">
+        <p14:creationId xmlns:p14="http://schemas.microsoft.com/office/powerpoint/2010/main" val="3859450435"/>
+      </p:ext>
+    </p:extLst>
+  </p:cSld>
+  <p:clrMapOvr>
+    <a:masterClrMapping/>
+  </p:clrMapOvr>
+</p:notes>
+</file>
+
+<file path=ppt/notesSlides/notesSlide17.xml><?xml version="1.0" encoding="utf-8"?>
+<p:notes xmlns:a="http://schemas.openxmlformats.org/drawingml/2006/main" xmlns:r="http://schemas.openxmlformats.org/officeDocument/2006/relationships" xmlns:p="http://schemas.openxmlformats.org/presentationml/2006/main" showMasterSp="0" showMasterPhAnim="0">
+  <p:cSld>
+    <p:spTree>
+      <p:nvGrpSpPr>
+        <p:cNvPr id="1" name="Shape 173">
+          <a:extLst>
+            <a:ext uri="{FF2B5EF4-FFF2-40B4-BE49-F238E27FC236}">
+              <a16:creationId xmlns:a16="http://schemas.microsoft.com/office/drawing/2014/main" id="{D7E50EDC-068B-110B-AB3B-BF39D1159684}"/>
+            </a:ext>
+          </a:extLst>
+        </p:cNvPr>
+        <p:cNvGrpSpPr/>
+        <p:nvPr/>
+      </p:nvGrpSpPr>
+      <p:grpSpPr>
+        <a:xfrm>
+          <a:off x="0" y="0"/>
+          <a:ext cx="0" cy="0"/>
+          <a:chOff x="0" y="0"/>
+          <a:chExt cx="0" cy="0"/>
+        </a:xfrm>
+      </p:grpSpPr>
+      <p:sp>
+        <p:nvSpPr>
+          <p:cNvPr id="174" name="Google Shape;174;p5:notes">
+            <a:extLst>
+              <a:ext uri="{FF2B5EF4-FFF2-40B4-BE49-F238E27FC236}">
+                <a16:creationId xmlns:a16="http://schemas.microsoft.com/office/drawing/2014/main" id="{4AE0B88F-C1C5-264F-E061-2950E1C56993}"/>
+              </a:ext>
+            </a:extLst>
+          </p:cNvPr>
+          <p:cNvSpPr txBox="1">
+            <a:spLocks noGrp="1"/>
+          </p:cNvSpPr>
+          <p:nvPr>
+            <p:ph type="body" idx="1"/>
+          </p:nvPr>
+        </p:nvSpPr>
+        <p:spPr>
+          <a:xfrm>
+            <a:off x="685800" y="4343400"/>
+            <a:ext cx="5486400" cy="4114800"/>
+          </a:xfrm>
+          <a:prstGeom prst="rect">
+            <a:avLst/>
+          </a:prstGeom>
+        </p:spPr>
+        <p:txBody>
+          <a:bodyPr spcFirstLastPara="1" wrap="square" lIns="91425" tIns="91425" rIns="91425" bIns="91425" anchor="t" anchorCtr="0">
+            <a:noAutofit/>
+          </a:bodyPr>
+          <a:lstStyle/>
+          <a:p>
+            <a:pPr marL="0" lvl="0" indent="0" algn="l" rtl="0">
+              <a:spcBef>
+                <a:spcPts val="0"/>
+              </a:spcBef>
+              <a:spcAft>
+                <a:spcPts val="0"/>
+              </a:spcAft>
+              <a:buNone/>
+            </a:pPr>
+            <a:r>
+              <a:rPr lang="en-US" i="1" dirty="0"/>
+              <a:t>Disciplinary variation:</a:t>
+            </a:r>
+            <a:r>
+              <a:rPr lang="en-US" dirty="0"/>
+              <a:t> Especially valuable wherever similar analyses are repeated across many units — many samples in a lab, many survey waves, many texts in a corpus.</a:t>
+            </a:r>
+            <a:endParaRPr dirty="0"/>
+          </a:p>
+        </p:txBody>
+      </p:sp>
+      <p:sp>
+        <p:nvSpPr>
+          <p:cNvPr id="175" name="Google Shape;175;p5:notes">
+            <a:extLst>
+              <a:ext uri="{FF2B5EF4-FFF2-40B4-BE49-F238E27FC236}">
+                <a16:creationId xmlns:a16="http://schemas.microsoft.com/office/drawing/2014/main" id="{DF06F41B-F90C-22C9-17AA-42520F1E6C1E}"/>
+              </a:ext>
+            </a:extLst>
+          </p:cNvPr>
+          <p:cNvSpPr>
+            <a:spLocks noGrp="1" noRot="1" noChangeAspect="1"/>
+          </p:cNvSpPr>
+          <p:nvPr>
+            <p:ph type="sldImg" idx="2"/>
+          </p:nvPr>
+        </p:nvSpPr>
+        <p:spPr>
+          <a:xfrm>
+            <a:off x="381000" y="685800"/>
+            <a:ext cx="6096000" cy="3429000"/>
+          </a:xfrm>
+          <a:custGeom>
+            <a:avLst/>
+            <a:gdLst/>
+            <a:ahLst/>
+            <a:cxnLst/>
+            <a:rect l="l" t="t" r="r" b="b"/>
+            <a:pathLst>
+              <a:path w="120000" h="120000" extrusionOk="0">
+                <a:moveTo>
+                  <a:pt x="0" y="0"/>
+                </a:moveTo>
+                <a:lnTo>
+                  <a:pt x="120000" y="0"/>
+                </a:lnTo>
+                <a:lnTo>
+                  <a:pt x="120000" y="120000"/>
+                </a:lnTo>
+                <a:lnTo>
+                  <a:pt x="0" y="120000"/>
+                </a:lnTo>
+                <a:close/>
+              </a:path>
+            </a:pathLst>
+          </a:custGeom>
+        </p:spPr>
+      </p:sp>
+    </p:spTree>
+    <p:extLst>
+      <p:ext uri="{BB962C8B-B14F-4D97-AF65-F5344CB8AC3E}">
+        <p14:creationId xmlns:p14="http://schemas.microsoft.com/office/powerpoint/2010/main" val="1924842088"/>
+      </p:ext>
+    </p:extLst>
+  </p:cSld>
+  <p:clrMapOvr>
+    <a:masterClrMapping/>
+  </p:clrMapOvr>
+</p:notes>
+</file>
+
+<file path=ppt/notesSlides/notesSlide18.xml><?xml version="1.0" encoding="utf-8"?>
+<p:notes xmlns:a="http://schemas.openxmlformats.org/drawingml/2006/main" xmlns:r="http://schemas.openxmlformats.org/officeDocument/2006/relationships" xmlns:p="http://schemas.openxmlformats.org/presentationml/2006/main" showMasterSp="0" showMasterPhAnim="0">
+  <p:cSld>
+    <p:spTree>
+      <p:nvGrpSpPr>
+        <p:cNvPr id="1" name="Shape 173">
+          <a:extLst>
+            <a:ext uri="{FF2B5EF4-FFF2-40B4-BE49-F238E27FC236}">
+              <a16:creationId xmlns:a16="http://schemas.microsoft.com/office/drawing/2014/main" id="{0C654600-DDB1-25E9-8F18-C5128AC091B6}"/>
+            </a:ext>
+          </a:extLst>
+        </p:cNvPr>
+        <p:cNvGrpSpPr/>
+        <p:nvPr/>
+      </p:nvGrpSpPr>
+      <p:grpSpPr>
+        <a:xfrm>
+          <a:off x="0" y="0"/>
+          <a:ext cx="0" cy="0"/>
+          <a:chOff x="0" y="0"/>
+          <a:chExt cx="0" cy="0"/>
+        </a:xfrm>
+      </p:grpSpPr>
+      <p:sp>
+        <p:nvSpPr>
+          <p:cNvPr id="174" name="Google Shape;174;p5:notes">
+            <a:extLst>
+              <a:ext uri="{FF2B5EF4-FFF2-40B4-BE49-F238E27FC236}">
+                <a16:creationId xmlns:a16="http://schemas.microsoft.com/office/drawing/2014/main" id="{AB666168-61B6-A90C-CD12-22C6C487E2E2}"/>
+              </a:ext>
+            </a:extLst>
+          </p:cNvPr>
+          <p:cNvSpPr txBox="1">
+            <a:spLocks noGrp="1"/>
+          </p:cNvSpPr>
+          <p:nvPr>
+            <p:ph type="body" idx="1"/>
+          </p:nvPr>
+        </p:nvSpPr>
+        <p:spPr>
+          <a:xfrm>
+            <a:off x="685800" y="4343400"/>
+            <a:ext cx="5486400" cy="4114800"/>
+          </a:xfrm>
+          <a:prstGeom prst="rect">
+            <a:avLst/>
+          </a:prstGeom>
+        </p:spPr>
+        <p:txBody>
+          <a:bodyPr spcFirstLastPara="1" wrap="square" lIns="91425" tIns="91425" rIns="91425" bIns="91425" anchor="t" anchorCtr="0">
+            <a:noAutofit/>
+          </a:bodyPr>
+          <a:lstStyle/>
+          <a:p>
+            <a:pPr rtl="0"/>
+            <a:r>
+              <a:rPr lang="en-US" i="1" dirty="0"/>
+              <a:t>Disciplinary variation:</a:t>
+            </a:r>
+            <a:r>
+              <a:rPr lang="en-US" dirty="0"/>
+              <a:t> The "final output" varies widely — a manuscript, a policy brief, a map, a digital exhibit — but scripting the path to any of them improves reproducibility.</a:t>
+            </a:r>
+          </a:p>
+        </p:txBody>
+      </p:sp>
+      <p:sp>
+        <p:nvSpPr>
+          <p:cNvPr id="175" name="Google Shape;175;p5:notes">
+            <a:extLst>
+              <a:ext uri="{FF2B5EF4-FFF2-40B4-BE49-F238E27FC236}">
+                <a16:creationId xmlns:a16="http://schemas.microsoft.com/office/drawing/2014/main" id="{BCD716F5-43D5-5E03-5C28-568279C01DEC}"/>
+              </a:ext>
+            </a:extLst>
+          </p:cNvPr>
+          <p:cNvSpPr>
+            <a:spLocks noGrp="1" noRot="1" noChangeAspect="1"/>
+          </p:cNvSpPr>
+          <p:nvPr>
+            <p:ph type="sldImg" idx="2"/>
+          </p:nvPr>
+        </p:nvSpPr>
+        <p:spPr>
+          <a:xfrm>
+            <a:off x="381000" y="685800"/>
+            <a:ext cx="6096000" cy="3429000"/>
+          </a:xfrm>
+          <a:custGeom>
+            <a:avLst/>
+            <a:gdLst/>
+            <a:ahLst/>
+            <a:cxnLst/>
+            <a:rect l="l" t="t" r="r" b="b"/>
+            <a:pathLst>
+              <a:path w="120000" h="120000" extrusionOk="0">
+                <a:moveTo>
+                  <a:pt x="0" y="0"/>
+                </a:moveTo>
+                <a:lnTo>
+                  <a:pt x="120000" y="0"/>
+                </a:lnTo>
+                <a:lnTo>
+                  <a:pt x="120000" y="120000"/>
+                </a:lnTo>
+                <a:lnTo>
+                  <a:pt x="0" y="120000"/>
+                </a:lnTo>
+                <a:close/>
+              </a:path>
+            </a:pathLst>
+          </a:custGeom>
+        </p:spPr>
+      </p:sp>
+    </p:spTree>
+    <p:extLst>
+      <p:ext uri="{BB962C8B-B14F-4D97-AF65-F5344CB8AC3E}">
+        <p14:creationId xmlns:p14="http://schemas.microsoft.com/office/powerpoint/2010/main" val="4110796309"/>
+      </p:ext>
+    </p:extLst>
+  </p:cSld>
+  <p:clrMapOvr>
+    <a:masterClrMapping/>
+  </p:clrMapOvr>
+</p:notes>
+</file>
+
+<file path=ppt/notesSlides/notesSlide19.xml><?xml version="1.0" encoding="utf-8"?>
+<p:notes xmlns:a="http://schemas.openxmlformats.org/drawingml/2006/main" xmlns:r="http://schemas.openxmlformats.org/officeDocument/2006/relationships" xmlns:p="http://schemas.openxmlformats.org/presentationml/2006/main" showMasterSp="0" showMasterPhAnim="0">
+  <p:cSld>
+    <p:spTree>
+      <p:nvGrpSpPr>
+        <p:cNvPr id="1" name="Shape 173">
+          <a:extLst>
+            <a:ext uri="{FF2B5EF4-FFF2-40B4-BE49-F238E27FC236}">
+              <a16:creationId xmlns:a16="http://schemas.microsoft.com/office/drawing/2014/main" id="{CA8E1852-0479-AD5E-4377-7A2174C2DF64}"/>
+            </a:ext>
+          </a:extLst>
+        </p:cNvPr>
+        <p:cNvGrpSpPr/>
+        <p:nvPr/>
+      </p:nvGrpSpPr>
+      <p:grpSpPr>
+        <a:xfrm>
+          <a:off x="0" y="0"/>
+          <a:ext cx="0" cy="0"/>
+          <a:chOff x="0" y="0"/>
+          <a:chExt cx="0" cy="0"/>
+        </a:xfrm>
+      </p:grpSpPr>
+      <p:sp>
+        <p:nvSpPr>
+          <p:cNvPr id="174" name="Google Shape;174;p5:notes">
+            <a:extLst>
+              <a:ext uri="{FF2B5EF4-FFF2-40B4-BE49-F238E27FC236}">
+                <a16:creationId xmlns:a16="http://schemas.microsoft.com/office/drawing/2014/main" id="{90BE65AF-B2DD-9F84-132F-89AB7A3B435A}"/>
+              </a:ext>
+            </a:extLst>
+          </p:cNvPr>
+          <p:cNvSpPr txBox="1">
+            <a:spLocks noGrp="1"/>
+          </p:cNvSpPr>
+          <p:nvPr>
+            <p:ph type="body" idx="1"/>
+          </p:nvPr>
+        </p:nvSpPr>
+        <p:spPr>
+          <a:xfrm>
+            <a:off x="685800" y="4343400"/>
+            <a:ext cx="5486400" cy="4114800"/>
+          </a:xfrm>
+          <a:prstGeom prst="rect">
+            <a:avLst/>
+          </a:prstGeom>
+        </p:spPr>
+        <p:txBody>
+          <a:bodyPr spcFirstLastPara="1" wrap="square" lIns="91425" tIns="91425" rIns="91425" bIns="91425" anchor="t" anchorCtr="0">
+            <a:noAutofit/>
+          </a:bodyPr>
+          <a:lstStyle/>
+          <a:p>
+            <a:pPr rtl="0"/>
+            <a:r>
+              <a:rPr lang="en-US" dirty="0"/>
+              <a:t>Making clear what others are permitted to do with your code and data through explicit licenses, and depositing materials in appropriate repositories.</a:t>
+            </a:r>
+            <a:br>
+              <a:rPr lang="en-US" dirty="0"/>
+            </a:br>
+            <a:r>
+              <a:rPr lang="en-US" i="1" dirty="0"/>
+              <a:t>Disciplinary variation:</a:t>
+            </a:r>
+            <a:r>
+              <a:rPr lang="en-US" dirty="0"/>
+              <a:t> Norms and infrastructure differ substantially — genomics has established repositories (GenBank), social sciences often use ICPSR, some humanities fields are still developing shared norms; sensitive data (human subjects, Indigenous data sovereignty contexts) may require restricted or tiered access rather than full </a:t>
+            </a:r>
+            <a:r>
+              <a:rPr lang="en-US" dirty="0" err="1"/>
+              <a:t>openness.of</a:t>
+            </a:r>
+            <a:r>
+              <a:rPr lang="en-US" dirty="0"/>
+              <a:t> them improves reproducibility.</a:t>
+            </a:r>
+          </a:p>
+        </p:txBody>
+      </p:sp>
+      <p:sp>
+        <p:nvSpPr>
+          <p:cNvPr id="175" name="Google Shape;175;p5:notes">
+            <a:extLst>
+              <a:ext uri="{FF2B5EF4-FFF2-40B4-BE49-F238E27FC236}">
+                <a16:creationId xmlns:a16="http://schemas.microsoft.com/office/drawing/2014/main" id="{234C3F45-A928-49C1-D8F4-81A6485A1BFF}"/>
+              </a:ext>
+            </a:extLst>
+          </p:cNvPr>
+          <p:cNvSpPr>
+            <a:spLocks noGrp="1" noRot="1" noChangeAspect="1"/>
+          </p:cNvSpPr>
+          <p:nvPr>
+            <p:ph type="sldImg" idx="2"/>
+          </p:nvPr>
+        </p:nvSpPr>
+        <p:spPr>
+          <a:xfrm>
+            <a:off x="381000" y="685800"/>
+            <a:ext cx="6096000" cy="3429000"/>
+          </a:xfrm>
+          <a:custGeom>
+            <a:avLst/>
+            <a:gdLst/>
+            <a:ahLst/>
+            <a:cxnLst/>
+            <a:rect l="l" t="t" r="r" b="b"/>
+            <a:pathLst>
+              <a:path w="120000" h="120000" extrusionOk="0">
+                <a:moveTo>
+                  <a:pt x="0" y="0"/>
+                </a:moveTo>
+                <a:lnTo>
+                  <a:pt x="120000" y="0"/>
+                </a:lnTo>
+                <a:lnTo>
+                  <a:pt x="120000" y="120000"/>
+                </a:lnTo>
+                <a:lnTo>
+                  <a:pt x="0" y="120000"/>
+                </a:lnTo>
+                <a:close/>
+              </a:path>
+            </a:pathLst>
+          </a:custGeom>
+        </p:spPr>
+      </p:sp>
+    </p:spTree>
+    <p:extLst>
+      <p:ext uri="{BB962C8B-B14F-4D97-AF65-F5344CB8AC3E}">
+        <p14:creationId xmlns:p14="http://schemas.microsoft.com/office/powerpoint/2010/main" val="2799109226"/>
+      </p:ext>
+    </p:extLst>
+  </p:cSld>
+  <p:clrMapOvr>
+    <a:masterClrMapping/>
+  </p:clrMapOvr>
+</p:notes>
+</file>
+
+<file path=ppt/notesSlides/notesSlide2.xml><?xml version="1.0" encoding="utf-8"?>
+<p:notes xmlns:a="http://schemas.openxmlformats.org/drawingml/2006/main" xmlns:r="http://schemas.openxmlformats.org/officeDocument/2006/relationships" xmlns:p="http://schemas.openxmlformats.org/presentationml/2006/main" showMasterSp="0" showMasterPhAnim="0">
+  <p:cSld>
+    <p:spTree>
+      <p:nvGrpSpPr>
+        <p:cNvPr id="1" name="Shape 136">
+          <a:extLst>
+            <a:ext uri="{FF2B5EF4-FFF2-40B4-BE49-F238E27FC236}">
+              <a16:creationId xmlns:a16="http://schemas.microsoft.com/office/drawing/2014/main" id="{09DADC13-2699-00A3-93AF-6AD015788FEB}"/>
+            </a:ext>
+          </a:extLst>
+        </p:cNvPr>
+        <p:cNvGrpSpPr/>
+        <p:nvPr/>
+      </p:nvGrpSpPr>
+      <p:grpSpPr>
+        <a:xfrm>
+          <a:off x="0" y="0"/>
+          <a:ext cx="0" cy="0"/>
+          <a:chOff x="0" y="0"/>
+          <a:chExt cx="0" cy="0"/>
+        </a:xfrm>
+      </p:grpSpPr>
+      <p:sp>
+        <p:nvSpPr>
+          <p:cNvPr id="137" name="Google Shape;137;p5:notes">
+            <a:extLst>
+              <a:ext uri="{FF2B5EF4-FFF2-40B4-BE49-F238E27FC236}">
+                <a16:creationId xmlns:a16="http://schemas.microsoft.com/office/drawing/2014/main" id="{5E64E48B-396E-256A-5BCB-5142DD86422B}"/>
+              </a:ext>
+            </a:extLst>
+          </p:cNvPr>
+          <p:cNvSpPr txBox="1">
+            <a:spLocks noGrp="1"/>
+          </p:cNvSpPr>
+          <p:nvPr>
+            <p:ph type="body" idx="1"/>
+          </p:nvPr>
+        </p:nvSpPr>
+        <p:spPr>
+          <a:xfrm>
+            <a:off x="685800" y="4343400"/>
+            <a:ext cx="5486400" cy="4114800"/>
+          </a:xfrm>
+          <a:prstGeom prst="rect">
+            <a:avLst/>
+          </a:prstGeom>
+        </p:spPr>
+        <p:txBody>
+          <a:bodyPr spcFirstLastPara="1" wrap="square" lIns="91425" tIns="91425" rIns="91425" bIns="91425" anchor="t" anchorCtr="0">
+            <a:noAutofit/>
+          </a:bodyPr>
+          <a:lstStyle/>
+          <a:p>
+            <a:pPr marL="0" lvl="0" indent="0" algn="l" rtl="0">
+              <a:spcBef>
+                <a:spcPts val="0"/>
+              </a:spcBef>
+              <a:spcAft>
+                <a:spcPts val="0"/>
+              </a:spcAft>
+              <a:buNone/>
+            </a:pPr>
+            <a:endParaRPr/>
+          </a:p>
+        </p:txBody>
+      </p:sp>
+      <p:sp>
+        <p:nvSpPr>
+          <p:cNvPr id="138" name="Google Shape;138;p5:notes">
+            <a:extLst>
+              <a:ext uri="{FF2B5EF4-FFF2-40B4-BE49-F238E27FC236}">
+                <a16:creationId xmlns:a16="http://schemas.microsoft.com/office/drawing/2014/main" id="{A2869BC7-2B47-AF38-88CF-ED7B8FCE6F20}"/>
+              </a:ext>
+            </a:extLst>
+          </p:cNvPr>
+          <p:cNvSpPr>
+            <a:spLocks noGrp="1" noRot="1" noChangeAspect="1"/>
+          </p:cNvSpPr>
+          <p:nvPr>
+            <p:ph type="sldImg" idx="2"/>
+          </p:nvPr>
+        </p:nvSpPr>
+        <p:spPr>
+          <a:xfrm>
+            <a:off x="381000" y="685800"/>
+            <a:ext cx="6096000" cy="3429000"/>
+          </a:xfrm>
+          <a:custGeom>
+            <a:avLst/>
+            <a:gdLst/>
+            <a:ahLst/>
+            <a:cxnLst/>
+            <a:rect l="l" t="t" r="r" b="b"/>
+            <a:pathLst>
+              <a:path w="120000" h="120000" extrusionOk="0">
+                <a:moveTo>
+                  <a:pt x="0" y="0"/>
+                </a:moveTo>
+                <a:lnTo>
+                  <a:pt x="120000" y="0"/>
+                </a:lnTo>
+                <a:lnTo>
+                  <a:pt x="120000" y="120000"/>
+                </a:lnTo>
+                <a:lnTo>
+                  <a:pt x="0" y="120000"/>
+                </a:lnTo>
+                <a:close/>
+              </a:path>
+            </a:pathLst>
+          </a:custGeom>
+        </p:spPr>
+      </p:sp>
+    </p:spTree>
+    <p:extLst>
+      <p:ext uri="{BB962C8B-B14F-4D97-AF65-F5344CB8AC3E}">
+        <p14:creationId xmlns:p14="http://schemas.microsoft.com/office/powerpoint/2010/main" val="1730492483"/>
+      </p:ext>
+    </p:extLst>
+  </p:cSld>
+  <p:clrMapOvr>
+    <a:masterClrMapping/>
+  </p:clrMapOvr>
+</p:notes>
+</file>
+
+<file path=ppt/notesSlides/notesSlide20.xml><?xml version="1.0" encoding="utf-8"?>
+<p:notes xmlns:a="http://schemas.openxmlformats.org/drawingml/2006/main" xmlns:r="http://schemas.openxmlformats.org/officeDocument/2006/relationships" xmlns:p="http://schemas.openxmlformats.org/presentationml/2006/main" showMasterSp="0" showMasterPhAnim="0">
+  <p:cSld>
+    <p:spTree>
+      <p:nvGrpSpPr>
+        <p:cNvPr id="1" name="Shape 173">
+          <a:extLst>
+            <a:ext uri="{FF2B5EF4-FFF2-40B4-BE49-F238E27FC236}">
+              <a16:creationId xmlns:a16="http://schemas.microsoft.com/office/drawing/2014/main" id="{38433940-F431-CEDB-79DC-15CAFC6F4F06}"/>
+            </a:ext>
+          </a:extLst>
+        </p:cNvPr>
+        <p:cNvGrpSpPr/>
+        <p:nvPr/>
+      </p:nvGrpSpPr>
+      <p:grpSpPr>
+        <a:xfrm>
+          <a:off x="0" y="0"/>
+          <a:ext cx="0" cy="0"/>
+          <a:chOff x="0" y="0"/>
+          <a:chExt cx="0" cy="0"/>
+        </a:xfrm>
+      </p:grpSpPr>
+      <p:sp>
+        <p:nvSpPr>
+          <p:cNvPr id="174" name="Google Shape;174;p5:notes">
+            <a:extLst>
+              <a:ext uri="{FF2B5EF4-FFF2-40B4-BE49-F238E27FC236}">
+                <a16:creationId xmlns:a16="http://schemas.microsoft.com/office/drawing/2014/main" id="{F79B83D0-16FD-03B2-391C-0C90D29DE63E}"/>
+              </a:ext>
+            </a:extLst>
+          </p:cNvPr>
+          <p:cNvSpPr txBox="1">
+            <a:spLocks noGrp="1"/>
+          </p:cNvSpPr>
+          <p:nvPr>
+            <p:ph type="body" idx="1"/>
+          </p:nvPr>
+        </p:nvSpPr>
+        <p:spPr>
+          <a:xfrm>
+            <a:off x="685800" y="4343400"/>
+            <a:ext cx="5486400" cy="4114800"/>
+          </a:xfrm>
+          <a:prstGeom prst="rect">
+            <a:avLst/>
+          </a:prstGeom>
+        </p:spPr>
+        <p:txBody>
+          <a:bodyPr spcFirstLastPara="1" wrap="square" lIns="91425" tIns="91425" rIns="91425" bIns="91425" anchor="t" anchorCtr="0">
+            <a:noAutofit/>
+          </a:bodyPr>
+          <a:lstStyle/>
+          <a:p>
+            <a:pPr rtl="0"/>
+            <a:r>
+              <a:rPr lang="en-US" i="1" dirty="0"/>
+              <a:t>Disciplinary variation:</a:t>
+            </a:r>
+            <a:r>
+              <a:rPr lang="en-US" dirty="0"/>
+              <a:t> Some fields (bioinformatics, CS-adjacent fields) have widely adopted Git/GitHub norms; others are only beginning to, and may use version control more informally (dated file names, tracked changes in Word) — this workshop is a chance to introduce Git as a more robust alternative.</a:t>
+            </a:r>
+          </a:p>
+        </p:txBody>
+      </p:sp>
+      <p:sp>
+        <p:nvSpPr>
+          <p:cNvPr id="175" name="Google Shape;175;p5:notes">
+            <a:extLst>
+              <a:ext uri="{FF2B5EF4-FFF2-40B4-BE49-F238E27FC236}">
+                <a16:creationId xmlns:a16="http://schemas.microsoft.com/office/drawing/2014/main" id="{EFC8DF55-1DE3-F649-77B4-10171BA2D4DB}"/>
+              </a:ext>
+            </a:extLst>
+          </p:cNvPr>
+          <p:cNvSpPr>
+            <a:spLocks noGrp="1" noRot="1" noChangeAspect="1"/>
+          </p:cNvSpPr>
+          <p:nvPr>
+            <p:ph type="sldImg" idx="2"/>
+          </p:nvPr>
+        </p:nvSpPr>
+        <p:spPr>
+          <a:xfrm>
+            <a:off x="381000" y="685800"/>
+            <a:ext cx="6096000" cy="3429000"/>
+          </a:xfrm>
+          <a:custGeom>
+            <a:avLst/>
+            <a:gdLst/>
+            <a:ahLst/>
+            <a:cxnLst/>
+            <a:rect l="l" t="t" r="r" b="b"/>
+            <a:pathLst>
+              <a:path w="120000" h="120000" extrusionOk="0">
+                <a:moveTo>
+                  <a:pt x="0" y="0"/>
+                </a:moveTo>
+                <a:lnTo>
+                  <a:pt x="120000" y="0"/>
+                </a:lnTo>
+                <a:lnTo>
+                  <a:pt x="120000" y="120000"/>
+                </a:lnTo>
+                <a:lnTo>
+                  <a:pt x="0" y="120000"/>
+                </a:lnTo>
+                <a:close/>
+              </a:path>
+            </a:pathLst>
+          </a:custGeom>
+        </p:spPr>
+      </p:sp>
+    </p:spTree>
+    <p:extLst>
+      <p:ext uri="{BB962C8B-B14F-4D97-AF65-F5344CB8AC3E}">
+        <p14:creationId xmlns:p14="http://schemas.microsoft.com/office/powerpoint/2010/main" val="3685191060"/>
+      </p:ext>
+    </p:extLst>
+  </p:cSld>
+  <p:clrMapOvr>
+    <a:masterClrMapping/>
+  </p:clrMapOvr>
+</p:notes>
+</file>
+
+<file path=ppt/notesSlides/notesSlide21.xml><?xml version="1.0" encoding="utf-8"?>
+<p:notes xmlns:a="http://schemas.openxmlformats.org/drawingml/2006/main" xmlns:r="http://schemas.openxmlformats.org/officeDocument/2006/relationships" xmlns:p="http://schemas.openxmlformats.org/presentationml/2006/main" showMasterSp="0" showMasterPhAnim="0">
+  <p:cSld>
+    <p:spTree>
+      <p:nvGrpSpPr>
         <p:cNvPr id="1" name="Shape 154">
           <a:extLst>
             <a:ext uri="{FF2B5EF4-FFF2-40B4-BE49-F238E27FC236}">
@@ -1494,7 +2274,7 @@
 </p:notes>
 </file>
 
-<file path=ppt/notesSlides/notesSlide17.xml><?xml version="1.0" encoding="utf-8"?>
+<file path=ppt/notesSlides/notesSlide22.xml><?xml version="1.0" encoding="utf-8"?>
 <p:notes xmlns:a="http://schemas.openxmlformats.org/drawingml/2006/main" xmlns:r="http://schemas.openxmlformats.org/officeDocument/2006/relationships" xmlns:p="http://schemas.openxmlformats.org/presentationml/2006/main" showMasterSp="0" showMasterPhAnim="0">
   <p:cSld>
     <p:spTree>
@@ -1621,15 +2401,15 @@
 </p:notes>
 </file>
 
-<file path=ppt/notesSlides/notesSlide2.xml><?xml version="1.0" encoding="utf-8"?>
+<file path=ppt/notesSlides/notesSlide23.xml><?xml version="1.0" encoding="utf-8"?>
 <p:notes xmlns:a="http://schemas.openxmlformats.org/drawingml/2006/main" xmlns:r="http://schemas.openxmlformats.org/officeDocument/2006/relationships" xmlns:p="http://schemas.openxmlformats.org/presentationml/2006/main" showMasterSp="0" showMasterPhAnim="0">
   <p:cSld>
     <p:spTree>
       <p:nvGrpSpPr>
-        <p:cNvPr id="1" name="Shape 136">
+        <p:cNvPr id="1" name="Shape 173">
           <a:extLst>
             <a:ext uri="{FF2B5EF4-FFF2-40B4-BE49-F238E27FC236}">
-              <a16:creationId xmlns:a16="http://schemas.microsoft.com/office/drawing/2014/main" id="{09DADC13-2699-00A3-93AF-6AD015788FEB}"/>
+              <a16:creationId xmlns:a16="http://schemas.microsoft.com/office/drawing/2014/main" id="{E5FC3064-9EB7-98FB-3E45-35ADC539992B}"/>
             </a:ext>
           </a:extLst>
         </p:cNvPr>
@@ -1646,10 +2426,10 @@
       </p:grpSpPr>
       <p:sp>
         <p:nvSpPr>
-          <p:cNvPr id="137" name="Google Shape;137;p5:notes">
+          <p:cNvPr id="174" name="Google Shape;174;p5:notes">
             <a:extLst>
               <a:ext uri="{FF2B5EF4-FFF2-40B4-BE49-F238E27FC236}">
-                <a16:creationId xmlns:a16="http://schemas.microsoft.com/office/drawing/2014/main" id="{5E64E48B-396E-256A-5BCB-5142DD86422B}"/>
+                <a16:creationId xmlns:a16="http://schemas.microsoft.com/office/drawing/2014/main" id="{8B4D457C-3485-591F-843A-711AC8A15EC9}"/>
               </a:ext>
             </a:extLst>
           </p:cNvPr>
@@ -1675,25 +2455,24 @@
           </a:bodyPr>
           <a:lstStyle/>
           <a:p>
-            <a:pPr marL="0" lvl="0" indent="0" algn="l" rtl="0">
-              <a:spcBef>
-                <a:spcPts val="0"/>
-              </a:spcBef>
-              <a:spcAft>
-                <a:spcPts val="0"/>
-              </a:spcAft>
-              <a:buNone/>
-            </a:pPr>
-            <a:endParaRPr/>
+            <a:pPr rtl="0"/>
+            <a:r>
+              <a:rPr lang="en-US" i="1" dirty="0"/>
+              <a:t>Disciplinary variation:</a:t>
+            </a:r>
+            <a:r>
+              <a:rPr lang="en-US" dirty="0"/>
+              <a:t> Some fields (bioinformatics, CS-adjacent fields) have widely adopted Git/GitHub norms; others are only beginning to, and may use version control more informally (dated file names, tracked changes in Word) — this workshop is a chance to introduce Git as a more robust alternative.</a:t>
+            </a:r>
           </a:p>
         </p:txBody>
       </p:sp>
       <p:sp>
         <p:nvSpPr>
-          <p:cNvPr id="138" name="Google Shape;138;p5:notes">
+          <p:cNvPr id="175" name="Google Shape;175;p5:notes">
             <a:extLst>
               <a:ext uri="{FF2B5EF4-FFF2-40B4-BE49-F238E27FC236}">
-                <a16:creationId xmlns:a16="http://schemas.microsoft.com/office/drawing/2014/main" id="{A2869BC7-2B47-AF38-88CF-ED7B8FCE6F20}"/>
+                <a16:creationId xmlns:a16="http://schemas.microsoft.com/office/drawing/2014/main" id="{C4074EBD-E048-702A-F6E8-2F1F264138A6}"/>
               </a:ext>
             </a:extLst>
           </p:cNvPr>
@@ -1738,7 +2517,7 @@
     </p:spTree>
     <p:extLst>
       <p:ext uri="{BB962C8B-B14F-4D97-AF65-F5344CB8AC3E}">
-        <p14:creationId xmlns:p14="http://schemas.microsoft.com/office/powerpoint/2010/main" val="1730492483"/>
+        <p14:creationId xmlns:p14="http://schemas.microsoft.com/office/powerpoint/2010/main" val="1762099868"/>
       </p:ext>
     </p:extLst>
   </p:cSld>
@@ -1749,6 +2528,133 @@
 </file>
 
 <file path=ppt/notesSlides/notesSlide3.xml><?xml version="1.0" encoding="utf-8"?>
+<p:notes xmlns:a="http://schemas.openxmlformats.org/drawingml/2006/main" xmlns:r="http://schemas.openxmlformats.org/officeDocument/2006/relationships" xmlns:p="http://schemas.openxmlformats.org/presentationml/2006/main" showMasterSp="0" showMasterPhAnim="0">
+  <p:cSld>
+    <p:spTree>
+      <p:nvGrpSpPr>
+        <p:cNvPr id="1" name="Shape 130">
+          <a:extLst>
+            <a:ext uri="{FF2B5EF4-FFF2-40B4-BE49-F238E27FC236}">
+              <a16:creationId xmlns:a16="http://schemas.microsoft.com/office/drawing/2014/main" id="{7A1C29E6-2799-F118-C643-AD68C2435BCD}"/>
+            </a:ext>
+          </a:extLst>
+        </p:cNvPr>
+        <p:cNvGrpSpPr/>
+        <p:nvPr/>
+      </p:nvGrpSpPr>
+      <p:grpSpPr>
+        <a:xfrm>
+          <a:off x="0" y="0"/>
+          <a:ext cx="0" cy="0"/>
+          <a:chOff x="0" y="0"/>
+          <a:chExt cx="0" cy="0"/>
+        </a:xfrm>
+      </p:grpSpPr>
+      <p:sp>
+        <p:nvSpPr>
+          <p:cNvPr id="131" name="Google Shape;131;p4:notes">
+            <a:extLst>
+              <a:ext uri="{FF2B5EF4-FFF2-40B4-BE49-F238E27FC236}">
+                <a16:creationId xmlns:a16="http://schemas.microsoft.com/office/drawing/2014/main" id="{A8023850-606F-DF49-FB00-80D6290761C1}"/>
+              </a:ext>
+            </a:extLst>
+          </p:cNvPr>
+          <p:cNvSpPr txBox="1">
+            <a:spLocks noGrp="1"/>
+          </p:cNvSpPr>
+          <p:nvPr>
+            <p:ph type="body" idx="1"/>
+          </p:nvPr>
+        </p:nvSpPr>
+        <p:spPr>
+          <a:xfrm>
+            <a:off x="685800" y="4343400"/>
+            <a:ext cx="5486400" cy="4114800"/>
+          </a:xfrm>
+          <a:prstGeom prst="rect">
+            <a:avLst/>
+          </a:prstGeom>
+        </p:spPr>
+        <p:txBody>
+          <a:bodyPr spcFirstLastPara="1" wrap="square" lIns="91425" tIns="91425" rIns="91425" bIns="91425" anchor="t" anchorCtr="0">
+            <a:noAutofit/>
+          </a:bodyPr>
+          <a:lstStyle/>
+          <a:p>
+            <a:pPr marL="0" lvl="0" indent="0" algn="l" rtl="0">
+              <a:spcBef>
+                <a:spcPts val="0"/>
+              </a:spcBef>
+              <a:spcAft>
+                <a:spcPts val="0"/>
+              </a:spcAft>
+              <a:buNone/>
+            </a:pPr>
+            <a:endParaRPr/>
+          </a:p>
+        </p:txBody>
+      </p:sp>
+      <p:sp>
+        <p:nvSpPr>
+          <p:cNvPr id="132" name="Google Shape;132;p4:notes">
+            <a:extLst>
+              <a:ext uri="{FF2B5EF4-FFF2-40B4-BE49-F238E27FC236}">
+                <a16:creationId xmlns:a16="http://schemas.microsoft.com/office/drawing/2014/main" id="{A3546773-DC1F-37ED-290D-41039DE5758B}"/>
+              </a:ext>
+            </a:extLst>
+          </p:cNvPr>
+          <p:cNvSpPr>
+            <a:spLocks noGrp="1" noRot="1" noChangeAspect="1"/>
+          </p:cNvSpPr>
+          <p:nvPr>
+            <p:ph type="sldImg" idx="2"/>
+          </p:nvPr>
+        </p:nvSpPr>
+        <p:spPr>
+          <a:xfrm>
+            <a:off x="381000" y="685800"/>
+            <a:ext cx="6096000" cy="3429000"/>
+          </a:xfrm>
+          <a:custGeom>
+            <a:avLst/>
+            <a:gdLst/>
+            <a:ahLst/>
+            <a:cxnLst/>
+            <a:rect l="l" t="t" r="r" b="b"/>
+            <a:pathLst>
+              <a:path w="120000" h="120000" extrusionOk="0">
+                <a:moveTo>
+                  <a:pt x="0" y="0"/>
+                </a:moveTo>
+                <a:lnTo>
+                  <a:pt x="120000" y="0"/>
+                </a:lnTo>
+                <a:lnTo>
+                  <a:pt x="120000" y="120000"/>
+                </a:lnTo>
+                <a:lnTo>
+                  <a:pt x="0" y="120000"/>
+                </a:lnTo>
+                <a:close/>
+              </a:path>
+            </a:pathLst>
+          </a:custGeom>
+        </p:spPr>
+      </p:sp>
+    </p:spTree>
+    <p:extLst>
+      <p:ext uri="{BB962C8B-B14F-4D97-AF65-F5344CB8AC3E}">
+        <p14:creationId xmlns:p14="http://schemas.microsoft.com/office/powerpoint/2010/main" val="2637675597"/>
+      </p:ext>
+    </p:extLst>
+  </p:cSld>
+  <p:clrMapOvr>
+    <a:masterClrMapping/>
+  </p:clrMapOvr>
+</p:notes>
+</file>
+
+<file path=ppt/notesSlides/notesSlide4.xml><?xml version="1.0" encoding="utf-8"?>
 <p:notes xmlns:a="http://schemas.openxmlformats.org/drawingml/2006/main" xmlns:r="http://schemas.openxmlformats.org/officeDocument/2006/relationships" xmlns:p="http://schemas.openxmlformats.org/presentationml/2006/main" showMasterSp="0" showMasterPhAnim="0">
   <p:cSld>
     <p:spTree>
@@ -1875,7 +2781,7 @@
 </p:notes>
 </file>
 
-<file path=ppt/notesSlides/notesSlide4.xml><?xml version="1.0" encoding="utf-8"?>
+<file path=ppt/notesSlides/notesSlide5.xml><?xml version="1.0" encoding="utf-8"?>
 <p:notes xmlns:a="http://schemas.openxmlformats.org/drawingml/2006/main" xmlns:r="http://schemas.openxmlformats.org/officeDocument/2006/relationships" xmlns:p="http://schemas.openxmlformats.org/presentationml/2006/main" showMasterSp="0" showMasterPhAnim="0">
   <p:cSld>
     <p:spTree>
@@ -2002,7 +2908,7 @@
 </p:notes>
 </file>
 
-<file path=ppt/notesSlides/notesSlide5.xml><?xml version="1.0" encoding="utf-8"?>
+<file path=ppt/notesSlides/notesSlide6.xml><?xml version="1.0" encoding="utf-8"?>
 <p:notes xmlns:a="http://schemas.openxmlformats.org/drawingml/2006/main" xmlns:r="http://schemas.openxmlformats.org/officeDocument/2006/relationships" xmlns:p="http://schemas.openxmlformats.org/presentationml/2006/main" showMasterSp="0" showMasterPhAnim="0">
   <p:cSld>
     <p:spTree>
@@ -2120,133 +3026,6 @@
     <p:extLst>
       <p:ext uri="{BB962C8B-B14F-4D97-AF65-F5344CB8AC3E}">
         <p14:creationId xmlns:p14="http://schemas.microsoft.com/office/powerpoint/2010/main" val="3997109341"/>
-      </p:ext>
-    </p:extLst>
-  </p:cSld>
-  <p:clrMapOvr>
-    <a:masterClrMapping/>
-  </p:clrMapOvr>
-</p:notes>
-</file>
-
-<file path=ppt/notesSlides/notesSlide6.xml><?xml version="1.0" encoding="utf-8"?>
-<p:notes xmlns:a="http://schemas.openxmlformats.org/drawingml/2006/main" xmlns:r="http://schemas.openxmlformats.org/officeDocument/2006/relationships" xmlns:p="http://schemas.openxmlformats.org/presentationml/2006/main" showMasterSp="0" showMasterPhAnim="0">
-  <p:cSld>
-    <p:spTree>
-      <p:nvGrpSpPr>
-        <p:cNvPr id="1" name="Shape 130">
-          <a:extLst>
-            <a:ext uri="{FF2B5EF4-FFF2-40B4-BE49-F238E27FC236}">
-              <a16:creationId xmlns:a16="http://schemas.microsoft.com/office/drawing/2014/main" id="{7A1C29E6-2799-F118-C643-AD68C2435BCD}"/>
-            </a:ext>
-          </a:extLst>
-        </p:cNvPr>
-        <p:cNvGrpSpPr/>
-        <p:nvPr/>
-      </p:nvGrpSpPr>
-      <p:grpSpPr>
-        <a:xfrm>
-          <a:off x="0" y="0"/>
-          <a:ext cx="0" cy="0"/>
-          <a:chOff x="0" y="0"/>
-          <a:chExt cx="0" cy="0"/>
-        </a:xfrm>
-      </p:grpSpPr>
-      <p:sp>
-        <p:nvSpPr>
-          <p:cNvPr id="131" name="Google Shape;131;p4:notes">
-            <a:extLst>
-              <a:ext uri="{FF2B5EF4-FFF2-40B4-BE49-F238E27FC236}">
-                <a16:creationId xmlns:a16="http://schemas.microsoft.com/office/drawing/2014/main" id="{A8023850-606F-DF49-FB00-80D6290761C1}"/>
-              </a:ext>
-            </a:extLst>
-          </p:cNvPr>
-          <p:cNvSpPr txBox="1">
-            <a:spLocks noGrp="1"/>
-          </p:cNvSpPr>
-          <p:nvPr>
-            <p:ph type="body" idx="1"/>
-          </p:nvPr>
-        </p:nvSpPr>
-        <p:spPr>
-          <a:xfrm>
-            <a:off x="685800" y="4343400"/>
-            <a:ext cx="5486400" cy="4114800"/>
-          </a:xfrm>
-          <a:prstGeom prst="rect">
-            <a:avLst/>
-          </a:prstGeom>
-        </p:spPr>
-        <p:txBody>
-          <a:bodyPr spcFirstLastPara="1" wrap="square" lIns="91425" tIns="91425" rIns="91425" bIns="91425" anchor="t" anchorCtr="0">
-            <a:noAutofit/>
-          </a:bodyPr>
-          <a:lstStyle/>
-          <a:p>
-            <a:pPr marL="0" lvl="0" indent="0" algn="l" rtl="0">
-              <a:spcBef>
-                <a:spcPts val="0"/>
-              </a:spcBef>
-              <a:spcAft>
-                <a:spcPts val="0"/>
-              </a:spcAft>
-              <a:buNone/>
-            </a:pPr>
-            <a:endParaRPr/>
-          </a:p>
-        </p:txBody>
-      </p:sp>
-      <p:sp>
-        <p:nvSpPr>
-          <p:cNvPr id="132" name="Google Shape;132;p4:notes">
-            <a:extLst>
-              <a:ext uri="{FF2B5EF4-FFF2-40B4-BE49-F238E27FC236}">
-                <a16:creationId xmlns:a16="http://schemas.microsoft.com/office/drawing/2014/main" id="{A3546773-DC1F-37ED-290D-41039DE5758B}"/>
-              </a:ext>
-            </a:extLst>
-          </p:cNvPr>
-          <p:cNvSpPr>
-            <a:spLocks noGrp="1" noRot="1" noChangeAspect="1"/>
-          </p:cNvSpPr>
-          <p:nvPr>
-            <p:ph type="sldImg" idx="2"/>
-          </p:nvPr>
-        </p:nvSpPr>
-        <p:spPr>
-          <a:xfrm>
-            <a:off x="381000" y="685800"/>
-            <a:ext cx="6096000" cy="3429000"/>
-          </a:xfrm>
-          <a:custGeom>
-            <a:avLst/>
-            <a:gdLst/>
-            <a:ahLst/>
-            <a:cxnLst/>
-            <a:rect l="l" t="t" r="r" b="b"/>
-            <a:pathLst>
-              <a:path w="120000" h="120000" extrusionOk="0">
-                <a:moveTo>
-                  <a:pt x="0" y="0"/>
-                </a:moveTo>
-                <a:lnTo>
-                  <a:pt x="120000" y="0"/>
-                </a:lnTo>
-                <a:lnTo>
-                  <a:pt x="120000" y="120000"/>
-                </a:lnTo>
-                <a:lnTo>
-                  <a:pt x="0" y="120000"/>
-                </a:lnTo>
-                <a:close/>
-              </a:path>
-            </a:pathLst>
-          </a:custGeom>
-        </p:spPr>
-      </p:sp>
-    </p:spTree>
-    <p:extLst>
-      <p:ext uri="{BB962C8B-B14F-4D97-AF65-F5344CB8AC3E}">
-        <p14:creationId xmlns:p14="http://schemas.microsoft.com/office/powerpoint/2010/main" val="2637675597"/>
       </p:ext>
     </p:extLst>
   </p:cSld>
@@ -14219,105 +14998,6 @@
         <p:cNvPr id="1" name="Shape 139">
           <a:extLst>
             <a:ext uri="{FF2B5EF4-FFF2-40B4-BE49-F238E27FC236}">
-              <a16:creationId xmlns:a16="http://schemas.microsoft.com/office/drawing/2014/main" id="{9D08716B-E435-BFFC-1B82-7F291BB09BAE}"/>
-            </a:ext>
-          </a:extLst>
-        </p:cNvPr>
-        <p:cNvGrpSpPr/>
-        <p:nvPr/>
-      </p:nvGrpSpPr>
-      <p:grpSpPr>
-        <a:xfrm>
-          <a:off x="0" y="0"/>
-          <a:ext cx="0" cy="0"/>
-          <a:chOff x="0" y="0"/>
-          <a:chExt cx="0" cy="0"/>
-        </a:xfrm>
-      </p:grpSpPr>
-      <p:sp>
-        <p:nvSpPr>
-          <p:cNvPr id="141" name="Google Shape;141;p26">
-            <a:extLst>
-              <a:ext uri="{FF2B5EF4-FFF2-40B4-BE49-F238E27FC236}">
-                <a16:creationId xmlns:a16="http://schemas.microsoft.com/office/drawing/2014/main" id="{78E586CE-EAB9-478A-905E-310D986723F8}"/>
-              </a:ext>
-            </a:extLst>
-          </p:cNvPr>
-          <p:cNvSpPr txBox="1"/>
-          <p:nvPr/>
-        </p:nvSpPr>
-        <p:spPr>
-          <a:xfrm>
-            <a:off x="922202" y="1157695"/>
-            <a:ext cx="8511218" cy="742383"/>
-          </a:xfrm>
-          <a:prstGeom prst="rect">
-            <a:avLst/>
-          </a:prstGeom>
-          <a:noFill/>
-          <a:ln>
-            <a:noFill/>
-          </a:ln>
-        </p:spPr>
-        <p:txBody>
-          <a:bodyPr spcFirstLastPara="1" wrap="square" lIns="0" tIns="0" rIns="0" bIns="0" anchor="t" anchorCtr="0">
-            <a:spAutoFit/>
-          </a:bodyPr>
-          <a:lstStyle/>
-          <a:p>
-            <a:pPr defTabSz="609630">
-              <a:lnSpc>
-                <a:spcPct val="140007"/>
-              </a:lnSpc>
-              <a:buClr>
-                <a:srgbClr val="000000"/>
-              </a:buClr>
-            </a:pPr>
-            <a:r>
-              <a:rPr lang="en-US" sz="3446" kern="0" dirty="0">
-                <a:solidFill>
-                  <a:srgbClr val="00693D"/>
-                </a:solidFill>
-                <a:latin typeface="Anton"/>
-                <a:ea typeface="Anton"/>
-                <a:cs typeface="Anton"/>
-                <a:sym typeface="Anton"/>
-              </a:rPr>
-              <a:t>Different Disciplines, different needs</a:t>
-            </a:r>
-            <a:endParaRPr sz="933" kern="0" dirty="0">
-              <a:solidFill>
-                <a:srgbClr val="000000"/>
-              </a:solidFill>
-              <a:latin typeface="Anton"/>
-              <a:ea typeface="Anton"/>
-              <a:cs typeface="Anton"/>
-              <a:sym typeface="Anton"/>
-            </a:endParaRPr>
-          </a:p>
-        </p:txBody>
-      </p:sp>
-    </p:spTree>
-    <p:extLst>
-      <p:ext uri="{BB962C8B-B14F-4D97-AF65-F5344CB8AC3E}">
-        <p14:creationId xmlns:p14="http://schemas.microsoft.com/office/powerpoint/2010/main" val="2405714910"/>
-      </p:ext>
-    </p:extLst>
-  </p:cSld>
-  <p:clrMapOvr>
-    <a:masterClrMapping/>
-  </p:clrMapOvr>
-</p:sld>
-</file>
-
-<file path=ppt/slides/slide11.xml><?xml version="1.0" encoding="utf-8"?>
-<p:sld xmlns:a="http://schemas.openxmlformats.org/drawingml/2006/main" xmlns:r="http://schemas.openxmlformats.org/officeDocument/2006/relationships" xmlns:p="http://schemas.openxmlformats.org/presentationml/2006/main">
-  <p:cSld>
-    <p:spTree>
-      <p:nvGrpSpPr>
-        <p:cNvPr id="1" name="Shape 139">
-          <a:extLst>
-            <a:ext uri="{FF2B5EF4-FFF2-40B4-BE49-F238E27FC236}">
               <a16:creationId xmlns:a16="http://schemas.microsoft.com/office/drawing/2014/main" id="{15879BB2-F066-F75E-A8DB-0F7CD248D8F7}"/>
             </a:ext>
           </a:extLst>
@@ -14523,7 +15203,7 @@
 </p:sld>
 </file>
 
-<file path=ppt/slides/slide12.xml><?xml version="1.0" encoding="utf-8"?>
+<file path=ppt/slides/slide11.xml><?xml version="1.0" encoding="utf-8"?>
 <p:sld xmlns:a="http://schemas.openxmlformats.org/drawingml/2006/main" xmlns:r="http://schemas.openxmlformats.org/officeDocument/2006/relationships" xmlns:p="http://schemas.openxmlformats.org/presentationml/2006/main">
   <p:cSld>
     <p:spTree>
@@ -14711,7 +15391,7 @@
 </p:sld>
 </file>
 
-<file path=ppt/slides/slide13.xml><?xml version="1.0" encoding="utf-8"?>
+<file path=ppt/slides/slide12.xml><?xml version="1.0" encoding="utf-8"?>
 <p:sld xmlns:a="http://schemas.openxmlformats.org/drawingml/2006/main" xmlns:r="http://schemas.openxmlformats.org/officeDocument/2006/relationships" xmlns:p="http://schemas.openxmlformats.org/presentationml/2006/main">
   <p:cSld>
     <p:spTree>
@@ -14935,7 +15615,7 @@
 </p:sld>
 </file>
 
-<file path=ppt/slides/slide14.xml><?xml version="1.0" encoding="utf-8"?>
+<file path=ppt/slides/slide13.xml><?xml version="1.0" encoding="utf-8"?>
 <p:sld xmlns:a="http://schemas.openxmlformats.org/drawingml/2006/main" xmlns:r="http://schemas.openxmlformats.org/officeDocument/2006/relationships" xmlns:p="http://schemas.openxmlformats.org/presentationml/2006/main">
   <p:cSld>
     <p:spTree>
@@ -15003,7 +15683,7 @@
                 <a:ea typeface="Anton"/>
                 <a:cs typeface="Anton"/>
                 <a:sym typeface="Anton"/>
-                <a:hlinkClick r:id="rId4"/>
+                <a:hlinkClick r:id="rId3"/>
               </a:rPr>
               <a:t>FAIREST + CARE</a:t>
             </a:r>
@@ -16442,15 +17122,10 @@
       </p:par>
     </p:tnLst>
   </p:timing>
-  <p:extLst>
-    <p:ext uri="{6950BFC3-D8DA-4A85-94F7-54DA5524770B}">
-      <p188:commentRel xmlns:p188="http://schemas.microsoft.com/office/powerpoint/2018/8/main" r:id="rId3"/>
-    </p:ext>
-  </p:extLst>
 </p:sld>
 </file>
 
-<file path=ppt/slides/slide15.xml><?xml version="1.0" encoding="utf-8"?>
+<file path=ppt/slides/slide14.xml><?xml version="1.0" encoding="utf-8"?>
 <p:sld xmlns:a="http://schemas.openxmlformats.org/drawingml/2006/main" xmlns:r="http://schemas.openxmlformats.org/officeDocument/2006/relationships" xmlns:p="http://schemas.openxmlformats.org/presentationml/2006/main">
   <p:cSld>
     <p:spTree>
@@ -16613,7 +17288,7 @@
 </p:sld>
 </file>
 
-<file path=ppt/slides/slide16.xml><?xml version="1.0" encoding="utf-8"?>
+<file path=ppt/slides/slide15.xml><?xml version="1.0" encoding="utf-8"?>
 <p:sld xmlns:a="http://schemas.openxmlformats.org/drawingml/2006/main" xmlns:r="http://schemas.openxmlformats.org/officeDocument/2006/relationships" xmlns:p="http://schemas.openxmlformats.org/presentationml/2006/main">
   <p:cSld>
     <p:spTree>
@@ -16785,7 +17460,7 @@
 </p:sld>
 </file>
 
-<file path=ppt/slides/slide17.xml><?xml version="1.0" encoding="utf-8"?>
+<file path=ppt/slides/slide16.xml><?xml version="1.0" encoding="utf-8"?>
 <p:sld xmlns:a="http://schemas.openxmlformats.org/drawingml/2006/main" xmlns:r="http://schemas.openxmlformats.org/officeDocument/2006/relationships" xmlns:p="http://schemas.openxmlformats.org/presentationml/2006/main">
   <p:cSld>
     <p:spTree>
@@ -16880,7 +17555,7 @@
         <p:spPr>
           <a:xfrm>
             <a:off x="922202" y="1736904"/>
-            <a:ext cx="9776400" cy="4321696"/>
+            <a:ext cx="9776400" cy="3889526"/>
           </a:xfrm>
           <a:prstGeom prst="rect">
             <a:avLst/>
@@ -17089,31 +17764,6 @@
                 <a:cs typeface="Archivo Medium"/>
                 <a:sym typeface="Archivo Medium"/>
               </a:rPr>
-              <a:t>Containerization</a:t>
-            </a:r>
-          </a:p>
-          <a:p>
-            <a:pPr marL="673830" lvl="1" indent="-457200">
-              <a:lnSpc>
-                <a:spcPct val="140013"/>
-              </a:lnSpc>
-              <a:buClr>
-                <a:srgbClr val="12312B"/>
-              </a:buClr>
-              <a:buSzPct val="115000"/>
-              <a:buFont typeface="+mj-lt"/>
-              <a:buAutoNum type="arabicPeriod"/>
-            </a:pPr>
-            <a:r>
-              <a:rPr lang="en-US" sz="2006" dirty="0">
-                <a:solidFill>
-                  <a:srgbClr val="12312B"/>
-                </a:solidFill>
-                <a:latin typeface="Archivo Medium"/>
-                <a:ea typeface="Archivo Medium"/>
-                <a:cs typeface="Archivo Medium"/>
-                <a:sym typeface="Archivo Medium"/>
-              </a:rPr>
               <a:t>Version Control</a:t>
             </a:r>
             <a:endParaRPr sz="1200" dirty="0">
@@ -17157,7 +17807,7 @@
 </p:sld>
 </file>
 
-<file path=ppt/slides/slide18.xml><?xml version="1.0" encoding="utf-8"?>
+<file path=ppt/slides/slide17.xml><?xml version="1.0" encoding="utf-8"?>
 <p:sld xmlns:a="http://schemas.openxmlformats.org/drawingml/2006/main" xmlns:r="http://schemas.openxmlformats.org/officeDocument/2006/relationships" xmlns:p="http://schemas.openxmlformats.org/presentationml/2006/main">
   <p:cSld>
     <p:spTree>
@@ -17252,7 +17902,7 @@
         <p:spPr>
           <a:xfrm>
             <a:off x="922202" y="1736904"/>
-            <a:ext cx="9776400" cy="3837461"/>
+            <a:ext cx="9776400" cy="4225259"/>
           </a:xfrm>
           <a:prstGeom prst="rect">
             <a:avLst/>
@@ -17461,6 +18111,31 @@
             </a:r>
           </a:p>
           <a:p>
+            <a:pPr marL="673830" lvl="1" indent="-457200">
+              <a:lnSpc>
+                <a:spcPct val="140013"/>
+              </a:lnSpc>
+              <a:buClr>
+                <a:srgbClr val="12312B"/>
+              </a:buClr>
+              <a:buSzPct val="115000"/>
+              <a:buFont typeface="+mj-lt"/>
+              <a:buAutoNum type="arabicPeriod"/>
+            </a:pPr>
+            <a:r>
+              <a:rPr lang="en-US" dirty="0">
+                <a:solidFill>
+                  <a:srgbClr val="12312B"/>
+                </a:solidFill>
+                <a:latin typeface="Archivo Medium"/>
+                <a:ea typeface="Archivo Medium"/>
+                <a:cs typeface="Archivo Medium"/>
+                <a:sym typeface="Archivo Medium"/>
+              </a:rPr>
+              <a:t>Think about where to place your project files: local hard drive? Cloud drive? </a:t>
+            </a:r>
+          </a:p>
+          <a:p>
             <a:pPr marL="1131030" lvl="2" indent="-457200">
               <a:lnSpc>
                 <a:spcPct val="140013"/>
@@ -17513,7 +18188,7 @@
 </p:sld>
 </file>
 
-<file path=ppt/slides/slide19.xml><?xml version="1.0" encoding="utf-8"?>
+<file path=ppt/slides/slide18.xml><?xml version="1.0" encoding="utf-8"?>
 <p:sld xmlns:a="http://schemas.openxmlformats.org/drawingml/2006/main" xmlns:r="http://schemas.openxmlformats.org/officeDocument/2006/relationships" xmlns:p="http://schemas.openxmlformats.org/presentationml/2006/main">
   <p:cSld>
     <p:spTree>
@@ -17608,7 +18283,7 @@
         <p:spPr>
           <a:xfrm>
             <a:off x="922202" y="1736904"/>
-            <a:ext cx="9776400" cy="3449662"/>
+            <a:ext cx="9776400" cy="4225259"/>
           </a:xfrm>
           <a:prstGeom prst="rect">
             <a:avLst/>
@@ -17667,7 +18342,7 @@
                 <a:cs typeface="Archivo Medium"/>
                 <a:sym typeface="Archivo Medium"/>
               </a:rPr>
-              <a:t>Include a README file in each project folder. This should include: a project overview, principal team members, an overview of project files, an explanation of what your code does, an explanation of your data’s provenance, a data dictionary (what each variable means and how each was recorded / measured / modified), [license].</a:t>
+              <a:t>Include a README file in each project folder. This should include: a project overview, principal team members, an overview of project files, an explanation of what your code does, an explanation of your data’s provenance, a data dictionary (what each variable means and how each was recorded / measured / modified), license, etc.</a:t>
             </a:r>
           </a:p>
           <a:p>
@@ -17693,6 +18368,31 @@
                 <a:sym typeface="Archivo Medium"/>
               </a:rPr>
               <a:t>Purpose: your project is interpretable by others without you present</a:t>
+            </a:r>
+          </a:p>
+          <a:p>
+            <a:pPr marL="673830" lvl="1" indent="-457200">
+              <a:lnSpc>
+                <a:spcPct val="140013"/>
+              </a:lnSpc>
+              <a:buClr>
+                <a:srgbClr val="12312B"/>
+              </a:buClr>
+              <a:buSzPct val="115000"/>
+              <a:buFont typeface="+mj-lt"/>
+              <a:buAutoNum type="arabicPeriod"/>
+            </a:pPr>
+            <a:r>
+              <a:rPr lang="en-US" dirty="0">
+                <a:solidFill>
+                  <a:srgbClr val="12312B"/>
+                </a:solidFill>
+                <a:latin typeface="Archivo Medium"/>
+                <a:ea typeface="Archivo Medium"/>
+                <a:cs typeface="Archivo Medium"/>
+                <a:sym typeface="Archivo Medium"/>
+              </a:rPr>
+              <a:t>Create (or borrow) templates to create consistent documentation structure across projects.</a:t>
             </a:r>
           </a:p>
           <a:p>
@@ -17761,6 +18461,310 @@
     <p:extLst>
       <p:ext uri="{BB962C8B-B14F-4D97-AF65-F5344CB8AC3E}">
         <p14:creationId xmlns:p14="http://schemas.microsoft.com/office/powerpoint/2010/main" val="1157079992"/>
+      </p:ext>
+    </p:extLst>
+  </p:cSld>
+  <p:clrMapOvr>
+    <a:masterClrMapping/>
+  </p:clrMapOvr>
+</p:sld>
+</file>
+
+<file path=ppt/slides/slide19.xml><?xml version="1.0" encoding="utf-8"?>
+<p:sld xmlns:a="http://schemas.openxmlformats.org/drawingml/2006/main" xmlns:r="http://schemas.openxmlformats.org/officeDocument/2006/relationships" xmlns:p="http://schemas.openxmlformats.org/presentationml/2006/main">
+  <p:cSld>
+    <p:spTree>
+      <p:nvGrpSpPr>
+        <p:cNvPr id="1" name="Shape 176">
+          <a:extLst>
+            <a:ext uri="{FF2B5EF4-FFF2-40B4-BE49-F238E27FC236}">
+              <a16:creationId xmlns:a16="http://schemas.microsoft.com/office/drawing/2014/main" id="{A955993E-EDA3-B008-50CB-8B1A044B5D69}"/>
+            </a:ext>
+          </a:extLst>
+        </p:cNvPr>
+        <p:cNvGrpSpPr/>
+        <p:nvPr/>
+      </p:nvGrpSpPr>
+      <p:grpSpPr>
+        <a:xfrm>
+          <a:off x="0" y="0"/>
+          <a:ext cx="0" cy="0"/>
+          <a:chOff x="0" y="0"/>
+          <a:chExt cx="0" cy="0"/>
+        </a:xfrm>
+      </p:grpSpPr>
+      <p:sp>
+        <p:nvSpPr>
+          <p:cNvPr id="178" name="Google Shape;178;p31">
+            <a:extLst>
+              <a:ext uri="{FF2B5EF4-FFF2-40B4-BE49-F238E27FC236}">
+                <a16:creationId xmlns:a16="http://schemas.microsoft.com/office/drawing/2014/main" id="{BA9B33FB-593E-065E-C2D9-4317CB383EF0}"/>
+              </a:ext>
+            </a:extLst>
+          </p:cNvPr>
+          <p:cNvSpPr txBox="1"/>
+          <p:nvPr/>
+        </p:nvSpPr>
+        <p:spPr>
+          <a:xfrm>
+            <a:off x="922201" y="1157695"/>
+            <a:ext cx="9718705" cy="742383"/>
+          </a:xfrm>
+          <a:prstGeom prst="rect">
+            <a:avLst/>
+          </a:prstGeom>
+          <a:noFill/>
+          <a:ln>
+            <a:noFill/>
+          </a:ln>
+        </p:spPr>
+        <p:txBody>
+          <a:bodyPr spcFirstLastPara="1" wrap="square" lIns="0" tIns="0" rIns="0" bIns="0" anchor="t" anchorCtr="0">
+            <a:spAutoFit/>
+          </a:bodyPr>
+          <a:lstStyle/>
+          <a:p>
+            <a:pPr>
+              <a:lnSpc>
+                <a:spcPct val="140007"/>
+              </a:lnSpc>
+            </a:pPr>
+            <a:r>
+              <a:rPr lang="en-US" sz="3446" dirty="0">
+                <a:solidFill>
+                  <a:srgbClr val="00693D"/>
+                </a:solidFill>
+                <a:latin typeface="Anton"/>
+                <a:ea typeface="Anton"/>
+                <a:cs typeface="Anton"/>
+                <a:sym typeface="Anton"/>
+              </a:rPr>
+              <a:t>Data Management</a:t>
+            </a:r>
+            <a:endParaRPr sz="1200" dirty="0">
+              <a:latin typeface="Anton"/>
+              <a:ea typeface="Anton"/>
+              <a:cs typeface="Anton"/>
+              <a:sym typeface="Anton"/>
+            </a:endParaRPr>
+          </a:p>
+        </p:txBody>
+      </p:sp>
+      <p:sp>
+        <p:nvSpPr>
+          <p:cNvPr id="179" name="Google Shape;179;p31">
+            <a:extLst>
+              <a:ext uri="{FF2B5EF4-FFF2-40B4-BE49-F238E27FC236}">
+                <a16:creationId xmlns:a16="http://schemas.microsoft.com/office/drawing/2014/main" id="{2CED4F55-7F34-D3A5-0586-30D99FA01187}"/>
+              </a:ext>
+            </a:extLst>
+          </p:cNvPr>
+          <p:cNvSpPr txBox="1"/>
+          <p:nvPr/>
+        </p:nvSpPr>
+        <p:spPr>
+          <a:xfrm>
+            <a:off x="922202" y="1736904"/>
+            <a:ext cx="9776400" cy="3449662"/>
+          </a:xfrm>
+          <a:prstGeom prst="rect">
+            <a:avLst/>
+          </a:prstGeom>
+          <a:noFill/>
+          <a:ln>
+            <a:noFill/>
+          </a:ln>
+        </p:spPr>
+        <p:txBody>
+          <a:bodyPr spcFirstLastPara="1" wrap="square" lIns="0" tIns="0" rIns="0" bIns="0" anchor="t" anchorCtr="0">
+            <a:spAutoFit/>
+          </a:bodyPr>
+          <a:lstStyle/>
+          <a:p>
+            <a:pPr marL="673830" lvl="1" indent="-457200">
+              <a:lnSpc>
+                <a:spcPct val="140013"/>
+              </a:lnSpc>
+              <a:buClr>
+                <a:srgbClr val="12312B"/>
+              </a:buClr>
+              <a:buSzPct val="115000"/>
+              <a:buFont typeface="+mj-lt"/>
+              <a:buAutoNum type="arabicPeriod"/>
+            </a:pPr>
+            <a:endParaRPr lang="en-US" sz="2006" dirty="0">
+              <a:solidFill>
+                <a:srgbClr val="12312B"/>
+              </a:solidFill>
+              <a:latin typeface="Archivo Medium"/>
+              <a:ea typeface="Archivo Medium"/>
+              <a:cs typeface="Archivo Medium"/>
+              <a:sym typeface="Archivo Medium"/>
+            </a:endParaRPr>
+          </a:p>
+          <a:p>
+            <a:pPr marL="673830" lvl="1" indent="-457200">
+              <a:lnSpc>
+                <a:spcPct val="140013"/>
+              </a:lnSpc>
+              <a:buClr>
+                <a:srgbClr val="12312B"/>
+              </a:buClr>
+              <a:buSzPct val="115000"/>
+              <a:buFont typeface="+mj-lt"/>
+              <a:buAutoNum type="arabicPeriod"/>
+            </a:pPr>
+            <a:r>
+              <a:rPr lang="en-US" dirty="0">
+                <a:solidFill>
+                  <a:srgbClr val="12312B"/>
+                </a:solidFill>
+                <a:latin typeface="Archivo Medium"/>
+                <a:ea typeface="Archivo Medium"/>
+                <a:cs typeface="Archivo Medium"/>
+                <a:sym typeface="Archivo Medium"/>
+              </a:rPr>
+              <a:t>Non-destructive workflows</a:t>
+            </a:r>
+          </a:p>
+          <a:p>
+            <a:pPr marL="1131030" lvl="2" indent="-457200">
+              <a:lnSpc>
+                <a:spcPct val="140013"/>
+              </a:lnSpc>
+              <a:buClr>
+                <a:srgbClr val="12312B"/>
+              </a:buClr>
+              <a:buSzPct val="115000"/>
+              <a:buFont typeface="+mj-lt"/>
+              <a:buAutoNum type="arabicPeriod"/>
+            </a:pPr>
+            <a:r>
+              <a:rPr lang="en-US" dirty="0">
+                <a:solidFill>
+                  <a:srgbClr val="12312B"/>
+                </a:solidFill>
+                <a:latin typeface="Archivo Medium"/>
+                <a:ea typeface="Archivo Medium"/>
+                <a:cs typeface="Archivo Medium"/>
+                <a:sym typeface="Archivo Medium"/>
+              </a:rPr>
+              <a:t>Never edit “raw” or “original” data; place copies to be edited in a “processed” folder</a:t>
+            </a:r>
+          </a:p>
+          <a:p>
+            <a:pPr marL="673830" lvl="1" indent="-457200">
+              <a:lnSpc>
+                <a:spcPct val="140013"/>
+              </a:lnSpc>
+              <a:buClr>
+                <a:srgbClr val="12312B"/>
+              </a:buClr>
+              <a:buSzPct val="115000"/>
+              <a:buFont typeface="+mj-lt"/>
+              <a:buAutoNum type="arabicPeriod"/>
+            </a:pPr>
+            <a:r>
+              <a:rPr lang="en-US" dirty="0">
+                <a:solidFill>
+                  <a:srgbClr val="12312B"/>
+                </a:solidFill>
+                <a:latin typeface="Archivo Medium"/>
+                <a:ea typeface="Archivo Medium"/>
+                <a:cs typeface="Archivo Medium"/>
+                <a:sym typeface="Archivo Medium"/>
+              </a:rPr>
+              <a:t>Clearly document data provenance: where it came from, every transformation applied, etc.</a:t>
+            </a:r>
+          </a:p>
+          <a:p>
+            <a:pPr marL="1131030" lvl="2" indent="-457200">
+              <a:lnSpc>
+                <a:spcPct val="140013"/>
+              </a:lnSpc>
+              <a:buClr>
+                <a:srgbClr val="12312B"/>
+              </a:buClr>
+              <a:buSzPct val="115000"/>
+              <a:buFont typeface="+mj-lt"/>
+              <a:buAutoNum type="arabicPeriod"/>
+            </a:pPr>
+            <a:endParaRPr lang="en-US" dirty="0">
+              <a:solidFill>
+                <a:srgbClr val="12312B"/>
+              </a:solidFill>
+              <a:latin typeface="Archivo Medium"/>
+              <a:ea typeface="Archivo Medium"/>
+              <a:cs typeface="Archivo Medium"/>
+              <a:sym typeface="Archivo Medium"/>
+            </a:endParaRPr>
+          </a:p>
+          <a:p>
+            <a:pPr marL="673830" lvl="1" indent="-457200">
+              <a:lnSpc>
+                <a:spcPct val="140013"/>
+              </a:lnSpc>
+              <a:buClr>
+                <a:srgbClr val="12312B"/>
+              </a:buClr>
+              <a:buSzPct val="115000"/>
+              <a:buFont typeface="+mj-lt"/>
+              <a:buAutoNum type="arabicPeriod"/>
+            </a:pPr>
+            <a:endParaRPr lang="en-US" dirty="0">
+              <a:solidFill>
+                <a:srgbClr val="12312B"/>
+              </a:solidFill>
+              <a:latin typeface="Archivo Medium"/>
+              <a:ea typeface="Archivo Medium"/>
+              <a:cs typeface="Archivo Medium"/>
+              <a:sym typeface="Archivo Medium"/>
+            </a:endParaRPr>
+          </a:p>
+          <a:p>
+            <a:pPr marL="1131030" lvl="2" indent="-457200">
+              <a:lnSpc>
+                <a:spcPct val="140013"/>
+              </a:lnSpc>
+              <a:buClr>
+                <a:srgbClr val="12312B"/>
+              </a:buClr>
+              <a:buSzPct val="115000"/>
+              <a:buFont typeface="+mj-lt"/>
+              <a:buAutoNum type="arabicPeriod"/>
+            </a:pPr>
+            <a:endParaRPr sz="1200" dirty="0">
+              <a:latin typeface="Archivo Medium"/>
+              <a:ea typeface="Archivo Medium"/>
+              <a:cs typeface="Archivo Medium"/>
+              <a:sym typeface="Archivo Medium"/>
+            </a:endParaRPr>
+          </a:p>
+          <a:p>
+            <a:pPr marL="457200" indent="-457200">
+              <a:lnSpc>
+                <a:spcPct val="140013"/>
+              </a:lnSpc>
+              <a:buSzPct val="115000"/>
+              <a:buFont typeface="+mj-lt"/>
+              <a:buAutoNum type="arabicPeriod"/>
+            </a:pPr>
+            <a:endParaRPr sz="2006" dirty="0">
+              <a:solidFill>
+                <a:srgbClr val="12312B"/>
+              </a:solidFill>
+              <a:latin typeface="Arial"/>
+              <a:ea typeface="Arial"/>
+              <a:cs typeface="Arial"/>
+              <a:sym typeface="Arial"/>
+            </a:endParaRPr>
+          </a:p>
+        </p:txBody>
+      </p:sp>
+    </p:spTree>
+    <p:extLst>
+      <p:ext uri="{BB962C8B-B14F-4D97-AF65-F5344CB8AC3E}">
+        <p14:creationId xmlns:p14="http://schemas.microsoft.com/office/powerpoint/2010/main" val="4147754034"/>
       </p:ext>
     </p:extLst>
   </p:cSld>
@@ -18055,7 +19059,13 @@
   <p:cSld>
     <p:spTree>
       <p:nvGrpSpPr>
-        <p:cNvPr id="1" name=""/>
+        <p:cNvPr id="1" name="Shape 176">
+          <a:extLst>
+            <a:ext uri="{FF2B5EF4-FFF2-40B4-BE49-F238E27FC236}">
+              <a16:creationId xmlns:a16="http://schemas.microsoft.com/office/drawing/2014/main" id="{3789F928-30BA-854D-9EE4-83C42A3FFC27}"/>
+            </a:ext>
+          </a:extLst>
+        </p:cNvPr>
         <p:cNvGrpSpPr/>
         <p:nvPr/>
       </p:nvGrpSpPr>
@@ -18067,10 +19077,523 @@
           <a:chExt cx="0" cy="0"/>
         </a:xfrm>
       </p:grpSpPr>
+      <p:sp>
+        <p:nvSpPr>
+          <p:cNvPr id="178" name="Google Shape;178;p31">
+            <a:extLst>
+              <a:ext uri="{FF2B5EF4-FFF2-40B4-BE49-F238E27FC236}">
+                <a16:creationId xmlns:a16="http://schemas.microsoft.com/office/drawing/2014/main" id="{0C587E35-1CDF-6F4B-0E9C-C8F765765A74}"/>
+              </a:ext>
+            </a:extLst>
+          </p:cNvPr>
+          <p:cNvSpPr txBox="1"/>
+          <p:nvPr/>
+        </p:nvSpPr>
+        <p:spPr>
+          <a:xfrm>
+            <a:off x="1100001" y="903695"/>
+            <a:ext cx="9718705" cy="742383"/>
+          </a:xfrm>
+          <a:prstGeom prst="rect">
+            <a:avLst/>
+          </a:prstGeom>
+          <a:noFill/>
+          <a:ln>
+            <a:noFill/>
+          </a:ln>
+        </p:spPr>
+        <p:txBody>
+          <a:bodyPr spcFirstLastPara="1" wrap="square" lIns="0" tIns="0" rIns="0" bIns="0" anchor="t" anchorCtr="0">
+            <a:spAutoFit/>
+          </a:bodyPr>
+          <a:lstStyle/>
+          <a:p>
+            <a:pPr>
+              <a:lnSpc>
+                <a:spcPct val="140007"/>
+              </a:lnSpc>
+            </a:pPr>
+            <a:r>
+              <a:rPr lang="en-US" sz="3446" dirty="0">
+                <a:solidFill>
+                  <a:srgbClr val="00693D"/>
+                </a:solidFill>
+                <a:latin typeface="Anton"/>
+                <a:ea typeface="Anton"/>
+                <a:cs typeface="Anton"/>
+                <a:sym typeface="Anton"/>
+              </a:rPr>
+              <a:t>Coding Best Practices</a:t>
+            </a:r>
+            <a:endParaRPr sz="1200" dirty="0">
+              <a:latin typeface="Anton"/>
+              <a:ea typeface="Anton"/>
+              <a:cs typeface="Anton"/>
+              <a:sym typeface="Anton"/>
+            </a:endParaRPr>
+          </a:p>
+        </p:txBody>
+      </p:sp>
+      <p:sp>
+        <p:nvSpPr>
+          <p:cNvPr id="179" name="Google Shape;179;p31">
+            <a:extLst>
+              <a:ext uri="{FF2B5EF4-FFF2-40B4-BE49-F238E27FC236}">
+                <a16:creationId xmlns:a16="http://schemas.microsoft.com/office/drawing/2014/main" id="{77EBA3C0-F581-BEAB-5AD4-45AF1FB2C394}"/>
+              </a:ext>
+            </a:extLst>
+          </p:cNvPr>
+          <p:cNvSpPr txBox="1"/>
+          <p:nvPr/>
+        </p:nvSpPr>
+        <p:spPr>
+          <a:xfrm>
+            <a:off x="922202" y="1736904"/>
+            <a:ext cx="9776400" cy="6119880"/>
+          </a:xfrm>
+          <a:prstGeom prst="rect">
+            <a:avLst/>
+          </a:prstGeom>
+          <a:noFill/>
+          <a:ln>
+            <a:noFill/>
+          </a:ln>
+        </p:spPr>
+        <p:txBody>
+          <a:bodyPr spcFirstLastPara="1" wrap="square" lIns="0" tIns="0" rIns="0" bIns="0" anchor="t" anchorCtr="0">
+            <a:spAutoFit/>
+          </a:bodyPr>
+          <a:lstStyle/>
+          <a:p>
+            <a:pPr marL="673830" lvl="1" indent="-457200">
+              <a:lnSpc>
+                <a:spcPct val="140013"/>
+              </a:lnSpc>
+              <a:buClr>
+                <a:srgbClr val="12312B"/>
+              </a:buClr>
+              <a:buSzPct val="115000"/>
+              <a:buFont typeface="+mj-lt"/>
+              <a:buAutoNum type="arabicPeriod"/>
+            </a:pPr>
+            <a:r>
+              <a:rPr lang="en-US" dirty="0">
+                <a:solidFill>
+                  <a:srgbClr val="12312B"/>
+                </a:solidFill>
+                <a:latin typeface="Archivo Medium"/>
+                <a:ea typeface="Archivo Medium"/>
+                <a:cs typeface="Archivo Medium"/>
+                <a:sym typeface="Archivo Medium"/>
+              </a:rPr>
+              <a:t>Create readable, well-documented, well-organized code</a:t>
+            </a:r>
+          </a:p>
+          <a:p>
+            <a:pPr marL="1131030" lvl="2" indent="-457200">
+              <a:lnSpc>
+                <a:spcPct val="140013"/>
+              </a:lnSpc>
+              <a:buClr>
+                <a:srgbClr val="12312B"/>
+              </a:buClr>
+              <a:buSzPct val="115000"/>
+              <a:buFont typeface="+mj-lt"/>
+              <a:buAutoNum type="arabicPeriod"/>
+            </a:pPr>
+            <a:r>
+              <a:rPr lang="en-US" dirty="0">
+                <a:solidFill>
+                  <a:srgbClr val="12312B"/>
+                </a:solidFill>
+                <a:latin typeface="Archivo Medium"/>
+                <a:ea typeface="Archivo Medium"/>
+                <a:cs typeface="Archivo Medium"/>
+                <a:sym typeface="Archivo Medium"/>
+              </a:rPr>
+              <a:t>Clear structure</a:t>
+            </a:r>
+          </a:p>
+          <a:p>
+            <a:pPr marL="1131030" lvl="2" indent="-457200">
+              <a:lnSpc>
+                <a:spcPct val="140013"/>
+              </a:lnSpc>
+              <a:buClr>
+                <a:srgbClr val="12312B"/>
+              </a:buClr>
+              <a:buSzPct val="115000"/>
+              <a:buFont typeface="+mj-lt"/>
+              <a:buAutoNum type="arabicPeriod"/>
+            </a:pPr>
+            <a:r>
+              <a:rPr lang="en-US" dirty="0">
+                <a:solidFill>
+                  <a:srgbClr val="12312B"/>
+                </a:solidFill>
+                <a:latin typeface="Archivo Medium"/>
+                <a:ea typeface="Archivo Medium"/>
+                <a:cs typeface="Archivo Medium"/>
+                <a:sym typeface="Archivo Medium"/>
+              </a:rPr>
+              <a:t>Meaningful variable names, i.e. “post45_books_df” to indicate a </a:t>
+            </a:r>
+            <a:r>
+              <a:rPr lang="en-US" dirty="0" err="1">
+                <a:solidFill>
+                  <a:srgbClr val="12312B"/>
+                </a:solidFill>
+                <a:latin typeface="Archivo Medium"/>
+                <a:ea typeface="Archivo Medium"/>
+                <a:cs typeface="Archivo Medium"/>
+                <a:sym typeface="Archivo Medium"/>
+              </a:rPr>
+              <a:t>dataframe</a:t>
+            </a:r>
+            <a:r>
+              <a:rPr lang="en-US" dirty="0">
+                <a:solidFill>
+                  <a:srgbClr val="12312B"/>
+                </a:solidFill>
+                <a:latin typeface="Archivo Medium"/>
+                <a:ea typeface="Archivo Medium"/>
+                <a:cs typeface="Archivo Medium"/>
+                <a:sym typeface="Archivo Medium"/>
+              </a:rPr>
+              <a:t> built from Post45 books data.</a:t>
+            </a:r>
+          </a:p>
+          <a:p>
+            <a:pPr marL="673830" lvl="1" indent="-457200">
+              <a:lnSpc>
+                <a:spcPct val="140013"/>
+              </a:lnSpc>
+              <a:buClr>
+                <a:srgbClr val="12312B"/>
+              </a:buClr>
+              <a:buSzPct val="115000"/>
+              <a:buFont typeface="+mj-lt"/>
+              <a:buAutoNum type="arabicPeriod"/>
+            </a:pPr>
+            <a:r>
+              <a:rPr lang="en-US" dirty="0">
+                <a:solidFill>
+                  <a:srgbClr val="12312B"/>
+                </a:solidFill>
+                <a:latin typeface="Archivo Medium"/>
+                <a:ea typeface="Archivo Medium"/>
+                <a:cs typeface="Archivo Medium"/>
+                <a:sym typeface="Archivo Medium"/>
+              </a:rPr>
+              <a:t>Modular, reusable code</a:t>
+            </a:r>
+          </a:p>
+          <a:p>
+            <a:pPr marL="1131030" lvl="2" indent="-457200">
+              <a:lnSpc>
+                <a:spcPct val="140013"/>
+              </a:lnSpc>
+              <a:buClr>
+                <a:srgbClr val="12312B"/>
+              </a:buClr>
+              <a:buSzPct val="115000"/>
+              <a:buFont typeface="+mj-lt"/>
+              <a:buAutoNum type="arabicPeriod"/>
+            </a:pPr>
+            <a:r>
+              <a:rPr lang="en-US" dirty="0">
+                <a:solidFill>
+                  <a:srgbClr val="12312B"/>
+                </a:solidFill>
+                <a:latin typeface="Archivo Medium"/>
+                <a:ea typeface="Archivo Medium"/>
+                <a:cs typeface="Archivo Medium"/>
+                <a:sym typeface="Archivo Medium"/>
+              </a:rPr>
+              <a:t>Store reusable chunks of code in functions</a:t>
+            </a:r>
+          </a:p>
+          <a:p>
+            <a:pPr marL="673830" lvl="1" indent="-457200">
+              <a:lnSpc>
+                <a:spcPct val="140013"/>
+              </a:lnSpc>
+              <a:buClr>
+                <a:srgbClr val="12312B"/>
+              </a:buClr>
+              <a:buSzPct val="115000"/>
+              <a:buFont typeface="+mj-lt"/>
+              <a:buAutoNum type="arabicPeriod"/>
+            </a:pPr>
+            <a:r>
+              <a:rPr lang="en-US" dirty="0">
+                <a:solidFill>
+                  <a:srgbClr val="12312B"/>
+                </a:solidFill>
+                <a:latin typeface="Archivo Medium"/>
+                <a:ea typeface="Archivo Medium"/>
+                <a:cs typeface="Archivo Medium"/>
+                <a:sym typeface="Archivo Medium"/>
+              </a:rPr>
+              <a:t>Managing dependencies &amp; local environments</a:t>
+            </a:r>
+          </a:p>
+          <a:p>
+            <a:pPr marL="1131030" lvl="2" indent="-457200">
+              <a:lnSpc>
+                <a:spcPct val="140013"/>
+              </a:lnSpc>
+              <a:buClr>
+                <a:srgbClr val="12312B"/>
+              </a:buClr>
+              <a:buSzPct val="115000"/>
+              <a:buFont typeface="+mj-lt"/>
+              <a:buAutoNum type="arabicPeriod"/>
+            </a:pPr>
+            <a:r>
+              <a:rPr lang="en-US" dirty="0">
+                <a:solidFill>
+                  <a:srgbClr val="12312B"/>
+                </a:solidFill>
+                <a:latin typeface="Archivo Medium"/>
+                <a:ea typeface="Archivo Medium"/>
+                <a:cs typeface="Archivo Medium"/>
+                <a:sym typeface="Archivo Medium"/>
+              </a:rPr>
+              <a:t>Minimal: record software, packages, and versions used; store in README or other documentation (in R, can retrieve this with </a:t>
+            </a:r>
+            <a:r>
+              <a:rPr lang="en-US" b="1" dirty="0" err="1">
+                <a:solidFill>
+                  <a:srgbClr val="12312B"/>
+                </a:solidFill>
+                <a:latin typeface="Archivo Medium"/>
+                <a:ea typeface="Archivo Medium"/>
+                <a:cs typeface="Archivo Medium"/>
+                <a:sym typeface="Archivo Medium"/>
+              </a:rPr>
+              <a:t>sessionInfo</a:t>
+            </a:r>
+            <a:r>
+              <a:rPr lang="en-US" b="1" dirty="0">
+                <a:solidFill>
+                  <a:srgbClr val="12312B"/>
+                </a:solidFill>
+                <a:latin typeface="Archivo Medium"/>
+                <a:ea typeface="Archivo Medium"/>
+                <a:cs typeface="Archivo Medium"/>
+                <a:sym typeface="Archivo Medium"/>
+              </a:rPr>
+              <a:t>()</a:t>
+            </a:r>
+            <a:r>
+              <a:rPr lang="en-US" dirty="0">
+                <a:solidFill>
+                  <a:srgbClr val="12312B"/>
+                </a:solidFill>
+                <a:latin typeface="Archivo Medium"/>
+                <a:ea typeface="Archivo Medium"/>
+                <a:cs typeface="Archivo Medium"/>
+                <a:sym typeface="Archivo Medium"/>
+              </a:rPr>
+              <a:t>).</a:t>
+            </a:r>
+          </a:p>
+          <a:p>
+            <a:pPr marL="1131030" lvl="2" indent="-457200">
+              <a:lnSpc>
+                <a:spcPct val="140013"/>
+              </a:lnSpc>
+              <a:buClr>
+                <a:srgbClr val="12312B"/>
+              </a:buClr>
+              <a:buSzPct val="115000"/>
+              <a:buFont typeface="+mj-lt"/>
+              <a:buAutoNum type="arabicPeriod"/>
+            </a:pPr>
+            <a:r>
+              <a:rPr lang="en-US" dirty="0">
+                <a:solidFill>
+                  <a:srgbClr val="12312B"/>
+                </a:solidFill>
+                <a:latin typeface="Archivo Medium"/>
+                <a:ea typeface="Archivo Medium"/>
+                <a:cs typeface="Archivo Medium"/>
+                <a:sym typeface="Archivo Medium"/>
+              </a:rPr>
+              <a:t>Recommended: set up separate virtual environments in each project folder; for R use </a:t>
+            </a:r>
+            <a:r>
+              <a:rPr lang="en-US" b="1" dirty="0" err="1">
+                <a:solidFill>
+                  <a:srgbClr val="12312B"/>
+                </a:solidFill>
+                <a:latin typeface="Archivo Medium"/>
+                <a:ea typeface="Archivo Medium"/>
+                <a:cs typeface="Archivo Medium"/>
+                <a:sym typeface="Archivo Medium"/>
+              </a:rPr>
+              <a:t>renv</a:t>
+            </a:r>
+            <a:r>
+              <a:rPr lang="en-US" b="1" dirty="0">
+                <a:solidFill>
+                  <a:srgbClr val="12312B"/>
+                </a:solidFill>
+                <a:latin typeface="Archivo Medium"/>
+                <a:ea typeface="Archivo Medium"/>
+                <a:cs typeface="Archivo Medium"/>
+                <a:sym typeface="Archivo Medium"/>
+              </a:rPr>
+              <a:t> </a:t>
+            </a:r>
+            <a:r>
+              <a:rPr lang="en-US" dirty="0">
+                <a:solidFill>
+                  <a:srgbClr val="12312B"/>
+                </a:solidFill>
+                <a:latin typeface="Archivo Medium"/>
+                <a:ea typeface="Archivo Medium"/>
+                <a:cs typeface="Archivo Medium"/>
+                <a:sym typeface="Archivo Medium"/>
+              </a:rPr>
+              <a:t>(Python: </a:t>
+            </a:r>
+            <a:r>
+              <a:rPr lang="en-US" b="1" dirty="0" err="1">
+                <a:solidFill>
+                  <a:srgbClr val="12312B"/>
+                </a:solidFill>
+                <a:latin typeface="Archivo Medium"/>
+                <a:ea typeface="Archivo Medium"/>
+                <a:cs typeface="Archivo Medium"/>
+                <a:sym typeface="Archivo Medium"/>
+              </a:rPr>
+              <a:t>uv</a:t>
+            </a:r>
+            <a:r>
+              <a:rPr lang="en-US" dirty="0">
+                <a:solidFill>
+                  <a:srgbClr val="12312B"/>
+                </a:solidFill>
+                <a:latin typeface="Archivo Medium"/>
+                <a:ea typeface="Archivo Medium"/>
+                <a:cs typeface="Archivo Medium"/>
+                <a:sym typeface="Archivo Medium"/>
+              </a:rPr>
+              <a:t>).</a:t>
+            </a:r>
+          </a:p>
+          <a:p>
+            <a:pPr marL="1131030" lvl="2" indent="-457200">
+              <a:lnSpc>
+                <a:spcPct val="140013"/>
+              </a:lnSpc>
+              <a:buClr>
+                <a:srgbClr val="12312B"/>
+              </a:buClr>
+              <a:buSzPct val="115000"/>
+              <a:buFont typeface="+mj-lt"/>
+              <a:buAutoNum type="arabicPeriod"/>
+            </a:pPr>
+            <a:endParaRPr lang="en-US" dirty="0">
+              <a:solidFill>
+                <a:srgbClr val="12312B"/>
+              </a:solidFill>
+              <a:latin typeface="Archivo Medium"/>
+              <a:ea typeface="Archivo Medium"/>
+              <a:cs typeface="Archivo Medium"/>
+              <a:sym typeface="Archivo Medium"/>
+            </a:endParaRPr>
+          </a:p>
+          <a:p>
+            <a:pPr marL="1131030" lvl="2" indent="-457200">
+              <a:lnSpc>
+                <a:spcPct val="140013"/>
+              </a:lnSpc>
+              <a:buClr>
+                <a:srgbClr val="12312B"/>
+              </a:buClr>
+              <a:buSzPct val="115000"/>
+              <a:buFont typeface="+mj-lt"/>
+              <a:buAutoNum type="arabicPeriod"/>
+            </a:pPr>
+            <a:endParaRPr lang="en-US" dirty="0">
+              <a:solidFill>
+                <a:srgbClr val="12312B"/>
+              </a:solidFill>
+              <a:latin typeface="Archivo Medium"/>
+              <a:ea typeface="Archivo Medium"/>
+              <a:cs typeface="Archivo Medium"/>
+              <a:sym typeface="Archivo Medium"/>
+            </a:endParaRPr>
+          </a:p>
+          <a:p>
+            <a:pPr marL="673830" lvl="1" indent="-457200">
+              <a:lnSpc>
+                <a:spcPct val="140013"/>
+              </a:lnSpc>
+              <a:buClr>
+                <a:srgbClr val="12312B"/>
+              </a:buClr>
+              <a:buSzPct val="115000"/>
+              <a:buFont typeface="+mj-lt"/>
+              <a:buAutoNum type="arabicPeriod"/>
+            </a:pPr>
+            <a:endParaRPr lang="en-US" dirty="0">
+              <a:solidFill>
+                <a:srgbClr val="12312B"/>
+              </a:solidFill>
+              <a:latin typeface="Archivo Medium"/>
+              <a:ea typeface="Archivo Medium"/>
+              <a:cs typeface="Archivo Medium"/>
+              <a:sym typeface="Archivo Medium"/>
+            </a:endParaRPr>
+          </a:p>
+          <a:p>
+            <a:pPr marL="1131030" lvl="2" indent="-457200">
+              <a:lnSpc>
+                <a:spcPct val="140013"/>
+              </a:lnSpc>
+              <a:buClr>
+                <a:srgbClr val="12312B"/>
+              </a:buClr>
+              <a:buSzPct val="115000"/>
+              <a:buFont typeface="+mj-lt"/>
+              <a:buAutoNum type="arabicPeriod"/>
+            </a:pPr>
+            <a:endParaRPr sz="1200" dirty="0">
+              <a:latin typeface="Archivo Medium"/>
+              <a:ea typeface="Archivo Medium"/>
+              <a:cs typeface="Archivo Medium"/>
+              <a:sym typeface="Archivo Medium"/>
+            </a:endParaRPr>
+          </a:p>
+          <a:p>
+            <a:pPr marL="457200" indent="-457200">
+              <a:lnSpc>
+                <a:spcPct val="140013"/>
+              </a:lnSpc>
+              <a:buSzPct val="115000"/>
+              <a:buFont typeface="+mj-lt"/>
+              <a:buAutoNum type="arabicPeriod"/>
+            </a:pPr>
+            <a:endParaRPr sz="2006" dirty="0">
+              <a:solidFill>
+                <a:srgbClr val="12312B"/>
+              </a:solidFill>
+              <a:latin typeface="Arial"/>
+              <a:ea typeface="Arial"/>
+              <a:cs typeface="Arial"/>
+              <a:sym typeface="Arial"/>
+            </a:endParaRPr>
+          </a:p>
+        </p:txBody>
+      </p:sp>
     </p:spTree>
     <p:extLst>
       <p:ext uri="{BB962C8B-B14F-4D97-AF65-F5344CB8AC3E}">
-        <p14:creationId xmlns:p14="http://schemas.microsoft.com/office/powerpoint/2010/main" val="2220577475"/>
+        <p14:creationId xmlns:p14="http://schemas.microsoft.com/office/powerpoint/2010/main" val="3230328220"/>
       </p:ext>
     </p:extLst>
   </p:cSld>
@@ -18085,7 +19608,13 @@
   <p:cSld>
     <p:spTree>
       <p:nvGrpSpPr>
-        <p:cNvPr id="1" name=""/>
+        <p:cNvPr id="1" name="Shape 176">
+          <a:extLst>
+            <a:ext uri="{FF2B5EF4-FFF2-40B4-BE49-F238E27FC236}">
+              <a16:creationId xmlns:a16="http://schemas.microsoft.com/office/drawing/2014/main" id="{EA2D6361-1B7D-E1F6-1D7C-7B5CF31BC6E4}"/>
+            </a:ext>
+          </a:extLst>
+        </p:cNvPr>
         <p:cNvGrpSpPr/>
         <p:nvPr/>
       </p:nvGrpSpPr>
@@ -18097,10 +19626,256 @@
           <a:chExt cx="0" cy="0"/>
         </a:xfrm>
       </p:grpSpPr>
+      <p:sp>
+        <p:nvSpPr>
+          <p:cNvPr id="178" name="Google Shape;178;p31">
+            <a:extLst>
+              <a:ext uri="{FF2B5EF4-FFF2-40B4-BE49-F238E27FC236}">
+                <a16:creationId xmlns:a16="http://schemas.microsoft.com/office/drawing/2014/main" id="{F266C10B-FD7C-0DD2-D094-A8BF62F641D2}"/>
+              </a:ext>
+            </a:extLst>
+          </p:cNvPr>
+          <p:cNvSpPr txBox="1"/>
+          <p:nvPr/>
+        </p:nvSpPr>
+        <p:spPr>
+          <a:xfrm>
+            <a:off x="1100001" y="903695"/>
+            <a:ext cx="9718705" cy="742383"/>
+          </a:xfrm>
+          <a:prstGeom prst="rect">
+            <a:avLst/>
+          </a:prstGeom>
+          <a:noFill/>
+          <a:ln>
+            <a:noFill/>
+          </a:ln>
+        </p:spPr>
+        <p:txBody>
+          <a:bodyPr spcFirstLastPara="1" wrap="square" lIns="0" tIns="0" rIns="0" bIns="0" anchor="t" anchorCtr="0">
+            <a:spAutoFit/>
+          </a:bodyPr>
+          <a:lstStyle/>
+          <a:p>
+            <a:pPr>
+              <a:lnSpc>
+                <a:spcPct val="140007"/>
+              </a:lnSpc>
+            </a:pPr>
+            <a:r>
+              <a:rPr lang="en-US" sz="3446" dirty="0">
+                <a:solidFill>
+                  <a:srgbClr val="00693D"/>
+                </a:solidFill>
+                <a:latin typeface="Anton"/>
+                <a:ea typeface="Anton"/>
+                <a:cs typeface="Anton"/>
+                <a:sym typeface="Anton"/>
+              </a:rPr>
+              <a:t>Automating Workflows</a:t>
+            </a:r>
+            <a:endParaRPr sz="1200" dirty="0">
+              <a:latin typeface="Anton"/>
+              <a:ea typeface="Anton"/>
+              <a:cs typeface="Anton"/>
+              <a:sym typeface="Anton"/>
+            </a:endParaRPr>
+          </a:p>
+        </p:txBody>
+      </p:sp>
+      <p:sp>
+        <p:nvSpPr>
+          <p:cNvPr id="179" name="Google Shape;179;p31">
+            <a:extLst>
+              <a:ext uri="{FF2B5EF4-FFF2-40B4-BE49-F238E27FC236}">
+                <a16:creationId xmlns:a16="http://schemas.microsoft.com/office/drawing/2014/main" id="{637AA358-D452-3AF0-9D12-A7EB1ADCF0C6}"/>
+              </a:ext>
+            </a:extLst>
+          </p:cNvPr>
+          <p:cNvSpPr txBox="1"/>
+          <p:nvPr/>
+        </p:nvSpPr>
+        <p:spPr>
+          <a:xfrm>
+            <a:off x="922202" y="1736904"/>
+            <a:ext cx="9776400" cy="3017493"/>
+          </a:xfrm>
+          <a:prstGeom prst="rect">
+            <a:avLst/>
+          </a:prstGeom>
+          <a:noFill/>
+          <a:ln>
+            <a:noFill/>
+          </a:ln>
+        </p:spPr>
+        <p:txBody>
+          <a:bodyPr spcFirstLastPara="1" wrap="square" lIns="0" tIns="0" rIns="0" bIns="0" anchor="t" anchorCtr="0">
+            <a:spAutoFit/>
+          </a:bodyPr>
+          <a:lstStyle/>
+          <a:p>
+            <a:pPr marL="673830" lvl="1" indent="-457200">
+              <a:lnSpc>
+                <a:spcPct val="140013"/>
+              </a:lnSpc>
+              <a:buClr>
+                <a:srgbClr val="12312B"/>
+              </a:buClr>
+              <a:buSzPct val="115000"/>
+              <a:buFont typeface="+mj-lt"/>
+              <a:buAutoNum type="arabicPeriod"/>
+            </a:pPr>
+            <a:r>
+              <a:rPr lang="en-US" dirty="0">
+                <a:solidFill>
+                  <a:srgbClr val="12312B"/>
+                </a:solidFill>
+                <a:latin typeface="Archivo Medium"/>
+                <a:ea typeface="Archivo Medium"/>
+                <a:cs typeface="Archivo Medium"/>
+                <a:sym typeface="Archivo Medium"/>
+              </a:rPr>
+              <a:t>Create readable, well-documented, well-organized code</a:t>
+            </a:r>
+          </a:p>
+          <a:p>
+            <a:pPr marL="1131030" lvl="2" indent="-457200">
+              <a:lnSpc>
+                <a:spcPct val="140013"/>
+              </a:lnSpc>
+              <a:buClr>
+                <a:srgbClr val="12312B"/>
+              </a:buClr>
+              <a:buSzPct val="115000"/>
+              <a:buFont typeface="+mj-lt"/>
+              <a:buAutoNum type="arabicPeriod"/>
+            </a:pPr>
+            <a:r>
+              <a:rPr lang="en-US" dirty="0">
+                <a:solidFill>
+                  <a:srgbClr val="12312B"/>
+                </a:solidFill>
+                <a:latin typeface="Archivo Medium"/>
+                <a:ea typeface="Archivo Medium"/>
+                <a:cs typeface="Archivo Medium"/>
+                <a:sym typeface="Archivo Medium"/>
+              </a:rPr>
+              <a:t>Write scripts to automate complex workflows so they can be replicated for new data or other projects</a:t>
+            </a:r>
+          </a:p>
+          <a:p>
+            <a:pPr marL="1131030" lvl="2" indent="-457200">
+              <a:lnSpc>
+                <a:spcPct val="140013"/>
+              </a:lnSpc>
+              <a:buClr>
+                <a:srgbClr val="12312B"/>
+              </a:buClr>
+              <a:buSzPct val="115000"/>
+              <a:buFont typeface="+mj-lt"/>
+              <a:buAutoNum type="arabicPeriod"/>
+            </a:pPr>
+            <a:r>
+              <a:rPr lang="en-US" dirty="0">
+                <a:solidFill>
+                  <a:srgbClr val="12312B"/>
+                </a:solidFill>
+                <a:latin typeface="Archivo Medium"/>
+                <a:ea typeface="Archivo Medium"/>
+                <a:cs typeface="Archivo Medium"/>
+                <a:sym typeface="Archivo Medium"/>
+              </a:rPr>
+              <a:t>For modular coding: store code for each step in a separate script</a:t>
+            </a:r>
+          </a:p>
+          <a:p>
+            <a:pPr marL="1131030" lvl="2" indent="-457200">
+              <a:lnSpc>
+                <a:spcPct val="140013"/>
+              </a:lnSpc>
+              <a:buClr>
+                <a:srgbClr val="12312B"/>
+              </a:buClr>
+              <a:buSzPct val="115000"/>
+              <a:buFont typeface="+mj-lt"/>
+              <a:buAutoNum type="arabicPeriod"/>
+            </a:pPr>
+            <a:endParaRPr lang="en-US" dirty="0">
+              <a:solidFill>
+                <a:srgbClr val="12312B"/>
+              </a:solidFill>
+              <a:latin typeface="Archivo Medium"/>
+              <a:ea typeface="Archivo Medium"/>
+              <a:cs typeface="Archivo Medium"/>
+              <a:sym typeface="Archivo Medium"/>
+            </a:endParaRPr>
+          </a:p>
+          <a:p>
+            <a:pPr marL="673830" lvl="1" indent="-457200">
+              <a:lnSpc>
+                <a:spcPct val="140013"/>
+              </a:lnSpc>
+              <a:buClr>
+                <a:srgbClr val="12312B"/>
+              </a:buClr>
+              <a:buSzPct val="115000"/>
+              <a:buFont typeface="+mj-lt"/>
+              <a:buAutoNum type="arabicPeriod"/>
+            </a:pPr>
+            <a:endParaRPr lang="en-US" dirty="0">
+              <a:solidFill>
+                <a:srgbClr val="12312B"/>
+              </a:solidFill>
+              <a:latin typeface="Archivo Medium"/>
+              <a:ea typeface="Archivo Medium"/>
+              <a:cs typeface="Archivo Medium"/>
+              <a:sym typeface="Archivo Medium"/>
+            </a:endParaRPr>
+          </a:p>
+          <a:p>
+            <a:pPr marL="1131030" lvl="2" indent="-457200">
+              <a:lnSpc>
+                <a:spcPct val="140013"/>
+              </a:lnSpc>
+              <a:buClr>
+                <a:srgbClr val="12312B"/>
+              </a:buClr>
+              <a:buSzPct val="115000"/>
+              <a:buFont typeface="+mj-lt"/>
+              <a:buAutoNum type="arabicPeriod"/>
+            </a:pPr>
+            <a:endParaRPr sz="1200" dirty="0">
+              <a:latin typeface="Archivo Medium"/>
+              <a:ea typeface="Archivo Medium"/>
+              <a:cs typeface="Archivo Medium"/>
+              <a:sym typeface="Archivo Medium"/>
+            </a:endParaRPr>
+          </a:p>
+          <a:p>
+            <a:pPr marL="457200" indent="-457200">
+              <a:lnSpc>
+                <a:spcPct val="140013"/>
+              </a:lnSpc>
+              <a:buSzPct val="115000"/>
+              <a:buFont typeface="+mj-lt"/>
+              <a:buAutoNum type="arabicPeriod"/>
+            </a:pPr>
+            <a:endParaRPr sz="2006" dirty="0">
+              <a:solidFill>
+                <a:srgbClr val="12312B"/>
+              </a:solidFill>
+              <a:latin typeface="Arial"/>
+              <a:ea typeface="Arial"/>
+              <a:cs typeface="Arial"/>
+              <a:sym typeface="Arial"/>
+            </a:endParaRPr>
+          </a:p>
+        </p:txBody>
+      </p:sp>
     </p:spTree>
     <p:extLst>
       <p:ext uri="{BB962C8B-B14F-4D97-AF65-F5344CB8AC3E}">
-        <p14:creationId xmlns:p14="http://schemas.microsoft.com/office/powerpoint/2010/main" val="3090111024"/>
+        <p14:creationId xmlns:p14="http://schemas.microsoft.com/office/powerpoint/2010/main" val="1015867157"/>
       </p:ext>
     </p:extLst>
   </p:cSld>
@@ -18115,7 +19890,13 @@
   <p:cSld>
     <p:spTree>
       <p:nvGrpSpPr>
-        <p:cNvPr id="1" name=""/>
+        <p:cNvPr id="1" name="Shape 176">
+          <a:extLst>
+            <a:ext uri="{FF2B5EF4-FFF2-40B4-BE49-F238E27FC236}">
+              <a16:creationId xmlns:a16="http://schemas.microsoft.com/office/drawing/2014/main" id="{CF8FA4DA-97FF-739A-F770-6AB886F4103B}"/>
+            </a:ext>
+          </a:extLst>
+        </p:cNvPr>
         <p:cNvGrpSpPr/>
         <p:nvPr/>
       </p:nvGrpSpPr>
@@ -18127,10 +19908,259 @@
           <a:chExt cx="0" cy="0"/>
         </a:xfrm>
       </p:grpSpPr>
+      <p:sp>
+        <p:nvSpPr>
+          <p:cNvPr id="178" name="Google Shape;178;p31">
+            <a:extLst>
+              <a:ext uri="{FF2B5EF4-FFF2-40B4-BE49-F238E27FC236}">
+                <a16:creationId xmlns:a16="http://schemas.microsoft.com/office/drawing/2014/main" id="{DE50011B-E3DB-80FE-D340-07B4FBBBA47E}"/>
+              </a:ext>
+            </a:extLst>
+          </p:cNvPr>
+          <p:cNvSpPr txBox="1"/>
+          <p:nvPr/>
+        </p:nvSpPr>
+        <p:spPr>
+          <a:xfrm>
+            <a:off x="1100001" y="903695"/>
+            <a:ext cx="9718705" cy="742383"/>
+          </a:xfrm>
+          <a:prstGeom prst="rect">
+            <a:avLst/>
+          </a:prstGeom>
+          <a:noFill/>
+          <a:ln>
+            <a:noFill/>
+          </a:ln>
+        </p:spPr>
+        <p:txBody>
+          <a:bodyPr spcFirstLastPara="1" wrap="square" lIns="0" tIns="0" rIns="0" bIns="0" anchor="t" anchorCtr="0">
+            <a:spAutoFit/>
+          </a:bodyPr>
+          <a:lstStyle/>
+          <a:p>
+            <a:pPr>
+              <a:lnSpc>
+                <a:spcPct val="140007"/>
+              </a:lnSpc>
+            </a:pPr>
+            <a:r>
+              <a:rPr lang="en-US" sz="3446" dirty="0">
+                <a:solidFill>
+                  <a:srgbClr val="00693D"/>
+                </a:solidFill>
+                <a:latin typeface="Anton"/>
+                <a:ea typeface="Anton"/>
+                <a:cs typeface="Anton"/>
+                <a:sym typeface="Anton"/>
+              </a:rPr>
+              <a:t>Sharing &amp; Openness</a:t>
+            </a:r>
+            <a:endParaRPr sz="1200" dirty="0">
+              <a:latin typeface="Anton"/>
+              <a:ea typeface="Anton"/>
+              <a:cs typeface="Anton"/>
+              <a:sym typeface="Anton"/>
+            </a:endParaRPr>
+          </a:p>
+        </p:txBody>
+      </p:sp>
+      <p:sp>
+        <p:nvSpPr>
+          <p:cNvPr id="179" name="Google Shape;179;p31">
+            <a:extLst>
+              <a:ext uri="{FF2B5EF4-FFF2-40B4-BE49-F238E27FC236}">
+                <a16:creationId xmlns:a16="http://schemas.microsoft.com/office/drawing/2014/main" id="{62CD4EFF-3304-BF48-A03F-55B303456199}"/>
+              </a:ext>
+            </a:extLst>
+          </p:cNvPr>
+          <p:cNvSpPr txBox="1"/>
+          <p:nvPr/>
+        </p:nvSpPr>
+        <p:spPr>
+          <a:xfrm>
+            <a:off x="922202" y="1736904"/>
+            <a:ext cx="9776400" cy="3017493"/>
+          </a:xfrm>
+          <a:prstGeom prst="rect">
+            <a:avLst/>
+          </a:prstGeom>
+          <a:noFill/>
+          <a:ln>
+            <a:noFill/>
+          </a:ln>
+        </p:spPr>
+        <p:txBody>
+          <a:bodyPr spcFirstLastPara="1" wrap="square" lIns="0" tIns="0" rIns="0" bIns="0" anchor="t" anchorCtr="0">
+            <a:spAutoFit/>
+          </a:bodyPr>
+          <a:lstStyle/>
+          <a:p>
+            <a:pPr marL="673830" lvl="1" indent="-457200">
+              <a:lnSpc>
+                <a:spcPct val="140013"/>
+              </a:lnSpc>
+              <a:buClr>
+                <a:srgbClr val="12312B"/>
+              </a:buClr>
+              <a:buSzPct val="115000"/>
+              <a:buFont typeface="+mj-lt"/>
+              <a:buAutoNum type="arabicPeriod"/>
+            </a:pPr>
+            <a:r>
+              <a:rPr lang="en-US" dirty="0">
+                <a:solidFill>
+                  <a:srgbClr val="12312B"/>
+                </a:solidFill>
+                <a:latin typeface="Archivo Medium"/>
+                <a:ea typeface="Archivo Medium"/>
+                <a:cs typeface="Archivo Medium"/>
+                <a:sym typeface="Archivo Medium"/>
+              </a:rPr>
+              <a:t>Clearly state what uses are permitted through explicit licenses</a:t>
+            </a:r>
+          </a:p>
+          <a:p>
+            <a:pPr marL="673830" lvl="1" indent="-457200">
+              <a:lnSpc>
+                <a:spcPct val="140013"/>
+              </a:lnSpc>
+              <a:buClr>
+                <a:srgbClr val="12312B"/>
+              </a:buClr>
+              <a:buSzPct val="115000"/>
+              <a:buFont typeface="+mj-lt"/>
+              <a:buAutoNum type="arabicPeriod"/>
+            </a:pPr>
+            <a:r>
+              <a:rPr lang="en-US" dirty="0">
+                <a:solidFill>
+                  <a:srgbClr val="12312B"/>
+                </a:solidFill>
+                <a:latin typeface="Archivo Medium"/>
+                <a:ea typeface="Archivo Medium"/>
+                <a:cs typeface="Archivo Medium"/>
+                <a:sym typeface="Archivo Medium"/>
+              </a:rPr>
+              <a:t>store and share your code and relevant documentation in a code repository (i.e. GitHub)</a:t>
+            </a:r>
+          </a:p>
+          <a:p>
+            <a:pPr marL="673830" lvl="1" indent="-457200">
+              <a:lnSpc>
+                <a:spcPct val="140013"/>
+              </a:lnSpc>
+              <a:buClr>
+                <a:srgbClr val="12312B"/>
+              </a:buClr>
+              <a:buSzPct val="115000"/>
+              <a:buFont typeface="+mj-lt"/>
+              <a:buAutoNum type="arabicPeriod"/>
+            </a:pPr>
+            <a:r>
+              <a:rPr lang="en-US" dirty="0">
+                <a:solidFill>
+                  <a:srgbClr val="12312B"/>
+                </a:solidFill>
+                <a:latin typeface="Archivo Medium"/>
+                <a:ea typeface="Archivo Medium"/>
+                <a:cs typeface="Archivo Medium"/>
+                <a:sym typeface="Archivo Medium"/>
+              </a:rPr>
+              <a:t>Store your data in a data repository for preservation and use by others</a:t>
+            </a:r>
+          </a:p>
+          <a:p>
+            <a:pPr marL="673830" lvl="1" indent="-457200">
+              <a:lnSpc>
+                <a:spcPct val="140013"/>
+              </a:lnSpc>
+              <a:buClr>
+                <a:srgbClr val="12312B"/>
+              </a:buClr>
+              <a:buSzPct val="115000"/>
+              <a:buFont typeface="+mj-lt"/>
+              <a:buAutoNum type="arabicPeriod"/>
+            </a:pPr>
+            <a:r>
+              <a:rPr lang="en-US" dirty="0">
+                <a:solidFill>
+                  <a:srgbClr val="12312B"/>
+                </a:solidFill>
+                <a:latin typeface="Archivo Medium"/>
+                <a:ea typeface="Archivo Medium"/>
+                <a:cs typeface="Archivo Medium"/>
+                <a:sym typeface="Archivo Medium"/>
+              </a:rPr>
+              <a:t>Provide persistent identifiers or links to your data (repository) and code (i.e. GitHub) with your publications</a:t>
+            </a:r>
+          </a:p>
+          <a:p>
+            <a:pPr marL="673830" lvl="1" indent="-457200">
+              <a:lnSpc>
+                <a:spcPct val="140013"/>
+              </a:lnSpc>
+              <a:buClr>
+                <a:srgbClr val="12312B"/>
+              </a:buClr>
+              <a:buSzPct val="115000"/>
+              <a:buFont typeface="+mj-lt"/>
+              <a:buAutoNum type="arabicPeriod"/>
+            </a:pPr>
+            <a:endParaRPr lang="en-US" dirty="0">
+              <a:solidFill>
+                <a:srgbClr val="12312B"/>
+              </a:solidFill>
+              <a:latin typeface="Archivo Medium"/>
+              <a:ea typeface="Archivo Medium"/>
+              <a:cs typeface="Archivo Medium"/>
+              <a:sym typeface="Archivo Medium"/>
+            </a:endParaRPr>
+          </a:p>
+          <a:p>
+            <a:pPr marL="1131030" lvl="2" indent="-457200">
+              <a:lnSpc>
+                <a:spcPct val="140013"/>
+              </a:lnSpc>
+              <a:buClr>
+                <a:srgbClr val="12312B"/>
+              </a:buClr>
+              <a:buSzPct val="115000"/>
+              <a:buFont typeface="+mj-lt"/>
+              <a:buAutoNum type="arabicPeriod"/>
+            </a:pPr>
+            <a:endParaRPr sz="1200" dirty="0">
+              <a:latin typeface="Archivo Medium"/>
+              <a:ea typeface="Archivo Medium"/>
+              <a:cs typeface="Archivo Medium"/>
+              <a:sym typeface="Archivo Medium"/>
+            </a:endParaRPr>
+          </a:p>
+          <a:p>
+            <a:pPr marL="457200" indent="-457200">
+              <a:lnSpc>
+                <a:spcPct val="140013"/>
+              </a:lnSpc>
+              <a:buSzPct val="115000"/>
+              <a:buFont typeface="+mj-lt"/>
+              <a:buAutoNum type="arabicPeriod"/>
+            </a:pPr>
+            <a:endParaRPr sz="2006" dirty="0">
+              <a:solidFill>
+                <a:srgbClr val="12312B"/>
+              </a:solidFill>
+              <a:latin typeface="Arial"/>
+              <a:ea typeface="Arial"/>
+              <a:cs typeface="Arial"/>
+              <a:sym typeface="Arial"/>
+            </a:endParaRPr>
+          </a:p>
+        </p:txBody>
+      </p:sp>
     </p:spTree>
     <p:extLst>
       <p:ext uri="{BB962C8B-B14F-4D97-AF65-F5344CB8AC3E}">
-        <p14:creationId xmlns:p14="http://schemas.microsoft.com/office/powerpoint/2010/main" val="2183807426"/>
+        <p14:creationId xmlns:p14="http://schemas.microsoft.com/office/powerpoint/2010/main" val="423672219"/>
       </p:ext>
     </p:extLst>
   </p:cSld>
@@ -18141,6 +20171,313 @@
 </file>
 
 <file path=ppt/slides/slide23.xml><?xml version="1.0" encoding="utf-8"?>
+<p:sld xmlns:a="http://schemas.openxmlformats.org/drawingml/2006/main" xmlns:r="http://schemas.openxmlformats.org/officeDocument/2006/relationships" xmlns:p="http://schemas.openxmlformats.org/presentationml/2006/main">
+  <p:cSld>
+    <p:spTree>
+      <p:nvGrpSpPr>
+        <p:cNvPr id="1" name="Shape 176">
+          <a:extLst>
+            <a:ext uri="{FF2B5EF4-FFF2-40B4-BE49-F238E27FC236}">
+              <a16:creationId xmlns:a16="http://schemas.microsoft.com/office/drawing/2014/main" id="{32530125-AD3D-1EC2-6346-2DE18CB2F391}"/>
+            </a:ext>
+          </a:extLst>
+        </p:cNvPr>
+        <p:cNvGrpSpPr/>
+        <p:nvPr/>
+      </p:nvGrpSpPr>
+      <p:grpSpPr>
+        <a:xfrm>
+          <a:off x="0" y="0"/>
+          <a:ext cx="0" cy="0"/>
+          <a:chOff x="0" y="0"/>
+          <a:chExt cx="0" cy="0"/>
+        </a:xfrm>
+      </p:grpSpPr>
+      <p:sp>
+        <p:nvSpPr>
+          <p:cNvPr id="178" name="Google Shape;178;p31">
+            <a:extLst>
+              <a:ext uri="{FF2B5EF4-FFF2-40B4-BE49-F238E27FC236}">
+                <a16:creationId xmlns:a16="http://schemas.microsoft.com/office/drawing/2014/main" id="{5D7B79B5-1C62-A48E-6301-4E72CA66A143}"/>
+              </a:ext>
+            </a:extLst>
+          </p:cNvPr>
+          <p:cNvSpPr txBox="1"/>
+          <p:nvPr/>
+        </p:nvSpPr>
+        <p:spPr>
+          <a:xfrm>
+            <a:off x="1100001" y="903695"/>
+            <a:ext cx="9718705" cy="742383"/>
+          </a:xfrm>
+          <a:prstGeom prst="rect">
+            <a:avLst/>
+          </a:prstGeom>
+          <a:noFill/>
+          <a:ln>
+            <a:noFill/>
+          </a:ln>
+        </p:spPr>
+        <p:txBody>
+          <a:bodyPr spcFirstLastPara="1" wrap="square" lIns="0" tIns="0" rIns="0" bIns="0" anchor="t" anchorCtr="0">
+            <a:spAutoFit/>
+          </a:bodyPr>
+          <a:lstStyle/>
+          <a:p>
+            <a:pPr>
+              <a:lnSpc>
+                <a:spcPct val="140007"/>
+              </a:lnSpc>
+            </a:pPr>
+            <a:r>
+              <a:rPr lang="en-US" sz="3446" dirty="0">
+                <a:solidFill>
+                  <a:srgbClr val="00693D"/>
+                </a:solidFill>
+                <a:latin typeface="Anton"/>
+                <a:ea typeface="Anton"/>
+                <a:cs typeface="Anton"/>
+                <a:sym typeface="Anton"/>
+              </a:rPr>
+              <a:t>Version Control</a:t>
+            </a:r>
+            <a:endParaRPr sz="1200" dirty="0">
+              <a:latin typeface="Anton"/>
+              <a:ea typeface="Anton"/>
+              <a:cs typeface="Anton"/>
+              <a:sym typeface="Anton"/>
+            </a:endParaRPr>
+          </a:p>
+        </p:txBody>
+      </p:sp>
+      <p:sp>
+        <p:nvSpPr>
+          <p:cNvPr id="179" name="Google Shape;179;p31">
+            <a:extLst>
+              <a:ext uri="{FF2B5EF4-FFF2-40B4-BE49-F238E27FC236}">
+                <a16:creationId xmlns:a16="http://schemas.microsoft.com/office/drawing/2014/main" id="{87A5F2E5-10B5-3E29-E424-B1BA7DCC650B}"/>
+              </a:ext>
+            </a:extLst>
+          </p:cNvPr>
+          <p:cNvSpPr txBox="1"/>
+          <p:nvPr/>
+        </p:nvSpPr>
+        <p:spPr>
+          <a:xfrm>
+            <a:off x="922202" y="1736904"/>
+            <a:ext cx="9776400" cy="2629694"/>
+          </a:xfrm>
+          <a:prstGeom prst="rect">
+            <a:avLst/>
+          </a:prstGeom>
+          <a:noFill/>
+          <a:ln>
+            <a:noFill/>
+          </a:ln>
+        </p:spPr>
+        <p:txBody>
+          <a:bodyPr spcFirstLastPara="1" wrap="square" lIns="0" tIns="0" rIns="0" bIns="0" anchor="t" anchorCtr="0">
+            <a:spAutoFit/>
+          </a:bodyPr>
+          <a:lstStyle/>
+          <a:p>
+            <a:pPr marL="673830" lvl="1" indent="-457200">
+              <a:lnSpc>
+                <a:spcPct val="140013"/>
+              </a:lnSpc>
+              <a:buClr>
+                <a:srgbClr val="12312B"/>
+              </a:buClr>
+              <a:buSzPct val="115000"/>
+              <a:buFont typeface="+mj-lt"/>
+              <a:buAutoNum type="arabicPeriod"/>
+            </a:pPr>
+            <a:r>
+              <a:rPr lang="en-US" dirty="0">
+                <a:solidFill>
+                  <a:srgbClr val="12312B"/>
+                </a:solidFill>
+                <a:latin typeface="Archivo Medium"/>
+                <a:ea typeface="Archivo Medium"/>
+                <a:cs typeface="Archivo Medium"/>
+                <a:sym typeface="Archivo Medium"/>
+              </a:rPr>
+              <a:t>Track changes over time to your code (and other documentation) using </a:t>
+            </a:r>
+            <a:r>
+              <a:rPr lang="en-US" b="1" dirty="0">
+                <a:solidFill>
+                  <a:srgbClr val="12312B"/>
+                </a:solidFill>
+                <a:latin typeface="Archivo Medium"/>
+                <a:ea typeface="Archivo Medium"/>
+                <a:cs typeface="Archivo Medium"/>
+                <a:sym typeface="Archivo Medium"/>
+              </a:rPr>
+              <a:t>git </a:t>
+            </a:r>
+            <a:r>
+              <a:rPr lang="en-US" dirty="0">
+                <a:solidFill>
+                  <a:srgbClr val="12312B"/>
+                </a:solidFill>
+                <a:latin typeface="Archivo Medium"/>
+                <a:ea typeface="Archivo Medium"/>
+                <a:cs typeface="Archivo Medium"/>
+                <a:sym typeface="Archivo Medium"/>
+              </a:rPr>
+              <a:t>and store copy of project folder online via </a:t>
+            </a:r>
+            <a:r>
+              <a:rPr lang="en-US" b="1" dirty="0">
+                <a:solidFill>
+                  <a:srgbClr val="12312B"/>
+                </a:solidFill>
+                <a:latin typeface="Archivo Medium"/>
+                <a:ea typeface="Archivo Medium"/>
+                <a:cs typeface="Archivo Medium"/>
+                <a:sym typeface="Archivo Medium"/>
+              </a:rPr>
+              <a:t>GitHub</a:t>
+            </a:r>
+            <a:r>
+              <a:rPr lang="en-US" dirty="0">
+                <a:solidFill>
+                  <a:srgbClr val="12312B"/>
+                </a:solidFill>
+                <a:latin typeface="Archivo Medium"/>
+                <a:ea typeface="Archivo Medium"/>
+                <a:cs typeface="Archivo Medium"/>
+                <a:sym typeface="Archivo Medium"/>
+              </a:rPr>
+              <a:t>.</a:t>
+            </a:r>
+          </a:p>
+          <a:p>
+            <a:pPr marL="673830" lvl="1" indent="-457200">
+              <a:lnSpc>
+                <a:spcPct val="140013"/>
+              </a:lnSpc>
+              <a:buClr>
+                <a:srgbClr val="12312B"/>
+              </a:buClr>
+              <a:buSzPct val="115000"/>
+              <a:buFont typeface="+mj-lt"/>
+              <a:buAutoNum type="arabicPeriod"/>
+            </a:pPr>
+            <a:r>
+              <a:rPr lang="en-US" dirty="0">
+                <a:solidFill>
+                  <a:srgbClr val="12312B"/>
+                </a:solidFill>
+                <a:latin typeface="Archivo Medium"/>
+                <a:ea typeface="Archivo Medium"/>
+                <a:cs typeface="Archivo Medium"/>
+                <a:sym typeface="Archivo Medium"/>
+              </a:rPr>
+              <a:t>For other project information, use </a:t>
+            </a:r>
+            <a:r>
+              <a:rPr lang="en-US" b="1" dirty="0">
+                <a:solidFill>
+                  <a:srgbClr val="12312B"/>
+                </a:solidFill>
+                <a:latin typeface="Archivo Medium"/>
+                <a:ea typeface="Archivo Medium"/>
+                <a:cs typeface="Archivo Medium"/>
+                <a:sym typeface="Archivo Medium"/>
+              </a:rPr>
+              <a:t>cloud backup</a:t>
+            </a:r>
+            <a:r>
+              <a:rPr lang="en-US" dirty="0">
+                <a:solidFill>
+                  <a:srgbClr val="12312B"/>
+                </a:solidFill>
+                <a:latin typeface="Archivo Medium"/>
+                <a:ea typeface="Archivo Medium"/>
+                <a:cs typeface="Archivo Medium"/>
+                <a:sym typeface="Archivo Medium"/>
+              </a:rPr>
+              <a:t> to protect against data loss and allow you to revert to earlier versions of a file.</a:t>
+            </a:r>
+          </a:p>
+          <a:p>
+            <a:pPr marL="673830" lvl="1" indent="-457200">
+              <a:lnSpc>
+                <a:spcPct val="140013"/>
+              </a:lnSpc>
+              <a:buClr>
+                <a:srgbClr val="12312B"/>
+              </a:buClr>
+              <a:buSzPct val="115000"/>
+              <a:buFont typeface="+mj-lt"/>
+              <a:buAutoNum type="arabicPeriod"/>
+            </a:pPr>
+            <a:endParaRPr lang="en-US" dirty="0">
+              <a:solidFill>
+                <a:srgbClr val="12312B"/>
+              </a:solidFill>
+              <a:latin typeface="Archivo Medium"/>
+              <a:ea typeface="Archivo Medium"/>
+              <a:cs typeface="Archivo Medium"/>
+              <a:sym typeface="Archivo Medium"/>
+            </a:endParaRPr>
+          </a:p>
+          <a:p>
+            <a:pPr marL="1131030" lvl="2" indent="-457200">
+              <a:lnSpc>
+                <a:spcPct val="140013"/>
+              </a:lnSpc>
+              <a:buClr>
+                <a:srgbClr val="12312B"/>
+              </a:buClr>
+              <a:buSzPct val="115000"/>
+              <a:buFont typeface="+mj-lt"/>
+              <a:buAutoNum type="arabicPeriod"/>
+            </a:pPr>
+            <a:endParaRPr sz="1200" dirty="0">
+              <a:latin typeface="Archivo Medium"/>
+              <a:ea typeface="Archivo Medium"/>
+              <a:cs typeface="Archivo Medium"/>
+              <a:sym typeface="Archivo Medium"/>
+            </a:endParaRPr>
+          </a:p>
+          <a:p>
+            <a:pPr marL="457200" indent="-457200">
+              <a:lnSpc>
+                <a:spcPct val="140013"/>
+              </a:lnSpc>
+              <a:buSzPct val="115000"/>
+              <a:buFont typeface="+mj-lt"/>
+              <a:buAutoNum type="arabicPeriod"/>
+            </a:pPr>
+            <a:endParaRPr sz="2006" dirty="0">
+              <a:solidFill>
+                <a:srgbClr val="12312B"/>
+              </a:solidFill>
+              <a:latin typeface="Arial"/>
+              <a:ea typeface="Arial"/>
+              <a:cs typeface="Arial"/>
+              <a:sym typeface="Arial"/>
+            </a:endParaRPr>
+          </a:p>
+        </p:txBody>
+      </p:sp>
+    </p:spTree>
+    <p:extLst>
+      <p:ext uri="{BB962C8B-B14F-4D97-AF65-F5344CB8AC3E}">
+        <p14:creationId xmlns:p14="http://schemas.microsoft.com/office/powerpoint/2010/main" val="2591561472"/>
+      </p:ext>
+    </p:extLst>
+  </p:cSld>
+  <p:clrMapOvr>
+    <a:masterClrMapping/>
+  </p:clrMapOvr>
+</p:sld>
+</file>
+
+<file path=ppt/slides/slide24.xml><?xml version="1.0" encoding="utf-8"?>
 <p:sld xmlns:a="http://schemas.openxmlformats.org/drawingml/2006/main" xmlns:r="http://schemas.openxmlformats.org/officeDocument/2006/relationships" xmlns:p="http://schemas.openxmlformats.org/presentationml/2006/main">
   <p:cSld>
     <p:spTree>
@@ -18284,7 +20621,7 @@
 </p:sld>
 </file>
 
-<file path=ppt/slides/slide24.xml><?xml version="1.0" encoding="utf-8"?>
+<file path=ppt/slides/slide25.xml><?xml version="1.0" encoding="utf-8"?>
 <p:sld xmlns:a="http://schemas.openxmlformats.org/drawingml/2006/main" xmlns:r="http://schemas.openxmlformats.org/officeDocument/2006/relationships" xmlns:p="http://schemas.openxmlformats.org/presentationml/2006/main">
   <p:cSld>
     <p:spTree>
@@ -18456,7 +20793,930 @@
 </p:sld>
 </file>
 
+<file path=ppt/slides/slide26.xml><?xml version="1.0" encoding="utf-8"?>
+<p:sld xmlns:a="http://schemas.openxmlformats.org/drawingml/2006/main" xmlns:r="http://schemas.openxmlformats.org/officeDocument/2006/relationships" xmlns:p="http://schemas.openxmlformats.org/presentationml/2006/main">
+  <p:cSld>
+    <p:spTree>
+      <p:nvGrpSpPr>
+        <p:cNvPr id="1" name="Shape 176">
+          <a:extLst>
+            <a:ext uri="{FF2B5EF4-FFF2-40B4-BE49-F238E27FC236}">
+              <a16:creationId xmlns:a16="http://schemas.microsoft.com/office/drawing/2014/main" id="{E559EA52-476B-F83E-0F46-364E26991931}"/>
+            </a:ext>
+          </a:extLst>
+        </p:cNvPr>
+        <p:cNvGrpSpPr/>
+        <p:nvPr/>
+      </p:nvGrpSpPr>
+      <p:grpSpPr>
+        <a:xfrm>
+          <a:off x="0" y="0"/>
+          <a:ext cx="0" cy="0"/>
+          <a:chOff x="0" y="0"/>
+          <a:chExt cx="0" cy="0"/>
+        </a:xfrm>
+      </p:grpSpPr>
+      <p:sp>
+        <p:nvSpPr>
+          <p:cNvPr id="178" name="Google Shape;178;p31">
+            <a:extLst>
+              <a:ext uri="{FF2B5EF4-FFF2-40B4-BE49-F238E27FC236}">
+                <a16:creationId xmlns:a16="http://schemas.microsoft.com/office/drawing/2014/main" id="{5756544F-0298-4147-60E8-C03D3DE8BE78}"/>
+              </a:ext>
+            </a:extLst>
+          </p:cNvPr>
+          <p:cNvSpPr txBox="1"/>
+          <p:nvPr/>
+        </p:nvSpPr>
+        <p:spPr>
+          <a:xfrm>
+            <a:off x="1100001" y="903695"/>
+            <a:ext cx="9718705" cy="742383"/>
+          </a:xfrm>
+          <a:prstGeom prst="rect">
+            <a:avLst/>
+          </a:prstGeom>
+          <a:noFill/>
+          <a:ln>
+            <a:noFill/>
+          </a:ln>
+        </p:spPr>
+        <p:txBody>
+          <a:bodyPr spcFirstLastPara="1" wrap="square" lIns="0" tIns="0" rIns="0" bIns="0" anchor="t" anchorCtr="0">
+            <a:spAutoFit/>
+          </a:bodyPr>
+          <a:lstStyle/>
+          <a:p>
+            <a:pPr>
+              <a:lnSpc>
+                <a:spcPct val="140007"/>
+              </a:lnSpc>
+            </a:pPr>
+            <a:r>
+              <a:rPr lang="en-US" sz="3446" dirty="0">
+                <a:solidFill>
+                  <a:srgbClr val="00693D"/>
+                </a:solidFill>
+                <a:latin typeface="Anton"/>
+                <a:ea typeface="Anton"/>
+                <a:cs typeface="Anton"/>
+                <a:sym typeface="Anton"/>
+              </a:rPr>
+              <a:t>Where to get help</a:t>
+            </a:r>
+            <a:endParaRPr sz="1200" dirty="0">
+              <a:latin typeface="Anton"/>
+              <a:ea typeface="Anton"/>
+              <a:cs typeface="Anton"/>
+              <a:sym typeface="Anton"/>
+            </a:endParaRPr>
+          </a:p>
+        </p:txBody>
+      </p:sp>
+      <p:sp>
+        <p:nvSpPr>
+          <p:cNvPr id="179" name="Google Shape;179;p31">
+            <a:extLst>
+              <a:ext uri="{FF2B5EF4-FFF2-40B4-BE49-F238E27FC236}">
+                <a16:creationId xmlns:a16="http://schemas.microsoft.com/office/drawing/2014/main" id="{1F65CA32-3801-48A8-F591-474FF60CB72B}"/>
+              </a:ext>
+            </a:extLst>
+          </p:cNvPr>
+          <p:cNvSpPr txBox="1"/>
+          <p:nvPr/>
+        </p:nvSpPr>
+        <p:spPr>
+          <a:xfrm>
+            <a:off x="922202" y="1736904"/>
+            <a:ext cx="9776400" cy="4180888"/>
+          </a:xfrm>
+          <a:prstGeom prst="rect">
+            <a:avLst/>
+          </a:prstGeom>
+          <a:noFill/>
+          <a:ln>
+            <a:noFill/>
+          </a:ln>
+        </p:spPr>
+        <p:txBody>
+          <a:bodyPr spcFirstLastPara="1" wrap="square" lIns="0" tIns="0" rIns="0" bIns="0" anchor="t" anchorCtr="0">
+            <a:spAutoFit/>
+          </a:bodyPr>
+          <a:lstStyle/>
+          <a:p>
+            <a:pPr marL="216630" lvl="1">
+              <a:lnSpc>
+                <a:spcPct val="140013"/>
+              </a:lnSpc>
+              <a:buClr>
+                <a:srgbClr val="12312B"/>
+              </a:buClr>
+              <a:buSzPct val="115000"/>
+            </a:pPr>
+            <a:r>
+              <a:rPr lang="en-US" dirty="0">
+                <a:solidFill>
+                  <a:srgbClr val="12312B"/>
+                </a:solidFill>
+                <a:latin typeface="Archivo Medium"/>
+                <a:ea typeface="Archivo Medium"/>
+                <a:cs typeface="Archivo Medium"/>
+                <a:sym typeface="Archivo Medium"/>
+              </a:rPr>
+              <a:t>Errors will happen! Even once-working code will break! </a:t>
+            </a:r>
+          </a:p>
+          <a:p>
+            <a:pPr marL="216630" lvl="1">
+              <a:lnSpc>
+                <a:spcPct val="140013"/>
+              </a:lnSpc>
+              <a:buClr>
+                <a:srgbClr val="12312B"/>
+              </a:buClr>
+              <a:buSzPct val="115000"/>
+            </a:pPr>
+            <a:r>
+              <a:rPr lang="en-US" dirty="0">
+                <a:solidFill>
+                  <a:srgbClr val="12312B"/>
+                </a:solidFill>
+                <a:latin typeface="Archivo Medium"/>
+                <a:ea typeface="Archivo Medium"/>
+                <a:cs typeface="Archivo Medium"/>
+                <a:sym typeface="Archivo Medium"/>
+              </a:rPr>
+              <a:t>Steps to minimize these errors:</a:t>
+            </a:r>
+          </a:p>
+          <a:p>
+            <a:pPr marL="559530" lvl="1" indent="-342900">
+              <a:lnSpc>
+                <a:spcPct val="140013"/>
+              </a:lnSpc>
+              <a:buClr>
+                <a:srgbClr val="12312B"/>
+              </a:buClr>
+              <a:buSzPct val="115000"/>
+              <a:buAutoNum type="arabicPeriod"/>
+            </a:pPr>
+            <a:r>
+              <a:rPr lang="en-US" dirty="0">
+                <a:solidFill>
+                  <a:srgbClr val="12312B"/>
+                </a:solidFill>
+                <a:latin typeface="Archivo Medium"/>
+                <a:ea typeface="Archivo Medium"/>
+                <a:cs typeface="Archivo Medium"/>
+                <a:sym typeface="Archivo Medium"/>
+              </a:rPr>
+              <a:t>modular, well-documented code</a:t>
+            </a:r>
+          </a:p>
+          <a:p>
+            <a:pPr marL="559530" lvl="1" indent="-342900">
+              <a:lnSpc>
+                <a:spcPct val="140013"/>
+              </a:lnSpc>
+              <a:buClr>
+                <a:srgbClr val="12312B"/>
+              </a:buClr>
+              <a:buSzPct val="115000"/>
+              <a:buAutoNum type="arabicPeriod"/>
+            </a:pPr>
+            <a:r>
+              <a:rPr lang="en-US" dirty="0">
+                <a:solidFill>
+                  <a:srgbClr val="12312B"/>
+                </a:solidFill>
+                <a:latin typeface="Archivo Medium"/>
+                <a:ea typeface="Archivo Medium"/>
+                <a:cs typeface="Archivo Medium"/>
+                <a:sym typeface="Archivo Medium"/>
+              </a:rPr>
+              <a:t>Beg, borrow, steal (code): don’t reinvent the wheel</a:t>
+            </a:r>
+          </a:p>
+          <a:p>
+            <a:pPr marL="559530" lvl="1" indent="-342900">
+              <a:lnSpc>
+                <a:spcPct val="140013"/>
+              </a:lnSpc>
+              <a:buClr>
+                <a:srgbClr val="12312B"/>
+              </a:buClr>
+              <a:buSzPct val="115000"/>
+              <a:buAutoNum type="arabicPeriod"/>
+            </a:pPr>
+            <a:r>
+              <a:rPr lang="en-US" dirty="0">
+                <a:solidFill>
+                  <a:srgbClr val="12312B"/>
+                </a:solidFill>
+                <a:latin typeface="Archivo Medium"/>
+                <a:ea typeface="Archivo Medium"/>
+                <a:cs typeface="Archivo Medium"/>
+                <a:sym typeface="Archivo Medium"/>
+              </a:rPr>
+              <a:t>Error handling</a:t>
+            </a:r>
+          </a:p>
+          <a:p>
+            <a:pPr marL="216630" lvl="1">
+              <a:lnSpc>
+                <a:spcPct val="140013"/>
+              </a:lnSpc>
+              <a:buClr>
+                <a:srgbClr val="12312B"/>
+              </a:buClr>
+              <a:buSzPct val="115000"/>
+            </a:pPr>
+            <a:endParaRPr lang="en-US" dirty="0">
+              <a:solidFill>
+                <a:srgbClr val="12312B"/>
+              </a:solidFill>
+              <a:latin typeface="Archivo Medium"/>
+              <a:ea typeface="Archivo Medium"/>
+              <a:cs typeface="Archivo Medium"/>
+              <a:sym typeface="Archivo Medium"/>
+            </a:endParaRPr>
+          </a:p>
+          <a:p>
+            <a:pPr marL="216630" lvl="1">
+              <a:lnSpc>
+                <a:spcPct val="140013"/>
+              </a:lnSpc>
+              <a:buClr>
+                <a:srgbClr val="12312B"/>
+              </a:buClr>
+              <a:buSzPct val="115000"/>
+            </a:pPr>
+            <a:r>
+              <a:rPr lang="en-US" dirty="0">
+                <a:solidFill>
+                  <a:srgbClr val="12312B"/>
+                </a:solidFill>
+                <a:latin typeface="Archivo Medium"/>
+                <a:ea typeface="Archivo Medium"/>
+                <a:cs typeface="Archivo Medium"/>
+                <a:sym typeface="Archivo Medium"/>
+              </a:rPr>
+              <a:t>Kinds of issues: errors, warnings, unintended output</a:t>
+            </a:r>
+          </a:p>
+          <a:p>
+            <a:pPr marL="216630" lvl="1">
+              <a:lnSpc>
+                <a:spcPct val="140013"/>
+              </a:lnSpc>
+              <a:buClr>
+                <a:srgbClr val="12312B"/>
+              </a:buClr>
+              <a:buSzPct val="115000"/>
+            </a:pPr>
+            <a:endParaRPr lang="en-US" dirty="0">
+              <a:solidFill>
+                <a:srgbClr val="12312B"/>
+              </a:solidFill>
+              <a:latin typeface="Archivo Medium"/>
+              <a:ea typeface="Archivo Medium"/>
+              <a:cs typeface="Archivo Medium"/>
+              <a:sym typeface="Archivo Medium"/>
+            </a:endParaRPr>
+          </a:p>
+          <a:p>
+            <a:pPr marL="673830" lvl="1" indent="-457200">
+              <a:lnSpc>
+                <a:spcPct val="140013"/>
+              </a:lnSpc>
+              <a:buClr>
+                <a:srgbClr val="12312B"/>
+              </a:buClr>
+              <a:buSzPct val="115000"/>
+              <a:buFont typeface="+mj-lt"/>
+              <a:buAutoNum type="arabicPeriod"/>
+            </a:pPr>
+            <a:endParaRPr lang="en-US" dirty="0">
+              <a:solidFill>
+                <a:srgbClr val="12312B"/>
+              </a:solidFill>
+              <a:latin typeface="Archivo Medium"/>
+              <a:ea typeface="Archivo Medium"/>
+              <a:cs typeface="Archivo Medium"/>
+              <a:sym typeface="Archivo Medium"/>
+            </a:endParaRPr>
+          </a:p>
+          <a:p>
+            <a:pPr marL="1131030" lvl="2" indent="-457200">
+              <a:lnSpc>
+                <a:spcPct val="140013"/>
+              </a:lnSpc>
+              <a:buClr>
+                <a:srgbClr val="12312B"/>
+              </a:buClr>
+              <a:buSzPct val="115000"/>
+              <a:buFont typeface="+mj-lt"/>
+              <a:buAutoNum type="arabicPeriod"/>
+            </a:pPr>
+            <a:endParaRPr sz="1200" dirty="0">
+              <a:latin typeface="Archivo Medium"/>
+              <a:ea typeface="Archivo Medium"/>
+              <a:cs typeface="Archivo Medium"/>
+              <a:sym typeface="Archivo Medium"/>
+            </a:endParaRPr>
+          </a:p>
+          <a:p>
+            <a:pPr marL="457200" indent="-457200">
+              <a:lnSpc>
+                <a:spcPct val="140013"/>
+              </a:lnSpc>
+              <a:buSzPct val="115000"/>
+              <a:buFont typeface="+mj-lt"/>
+              <a:buAutoNum type="arabicPeriod"/>
+            </a:pPr>
+            <a:endParaRPr sz="2006" dirty="0">
+              <a:solidFill>
+                <a:srgbClr val="12312B"/>
+              </a:solidFill>
+              <a:latin typeface="Arial"/>
+              <a:ea typeface="Arial"/>
+              <a:cs typeface="Arial"/>
+              <a:sym typeface="Arial"/>
+            </a:endParaRPr>
+          </a:p>
+        </p:txBody>
+      </p:sp>
+    </p:spTree>
+    <p:extLst>
+      <p:ext uri="{BB962C8B-B14F-4D97-AF65-F5344CB8AC3E}">
+        <p14:creationId xmlns:p14="http://schemas.microsoft.com/office/powerpoint/2010/main" val="1977231586"/>
+      </p:ext>
+    </p:extLst>
+  </p:cSld>
+  <p:clrMapOvr>
+    <a:masterClrMapping/>
+  </p:clrMapOvr>
+</p:sld>
+</file>
+
+<file path=ppt/slides/slide27.xml><?xml version="1.0" encoding="utf-8"?>
+<p:sld xmlns:a="http://schemas.openxmlformats.org/drawingml/2006/main" xmlns:r="http://schemas.openxmlformats.org/officeDocument/2006/relationships" xmlns:p="http://schemas.openxmlformats.org/presentationml/2006/main">
+  <p:cSld>
+    <p:spTree>
+      <p:nvGrpSpPr>
+        <p:cNvPr id="1" name=""/>
+        <p:cNvGrpSpPr/>
+        <p:nvPr/>
+      </p:nvGrpSpPr>
+      <p:grpSpPr>
+        <a:xfrm>
+          <a:off x="0" y="0"/>
+          <a:ext cx="0" cy="0"/>
+          <a:chOff x="0" y="0"/>
+          <a:chExt cx="0" cy="0"/>
+        </a:xfrm>
+      </p:grpSpPr>
+      <p:sp>
+        <p:nvSpPr>
+          <p:cNvPr id="2" name="TextBox 1">
+            <a:extLst>
+              <a:ext uri="{FF2B5EF4-FFF2-40B4-BE49-F238E27FC236}">
+                <a16:creationId xmlns:a16="http://schemas.microsoft.com/office/drawing/2014/main" id="{4C34771B-82C0-6922-5FB0-A747C1E71DBE}"/>
+              </a:ext>
+            </a:extLst>
+          </p:cNvPr>
+          <p:cNvSpPr txBox="1"/>
+          <p:nvPr/>
+        </p:nvSpPr>
+        <p:spPr>
+          <a:xfrm>
+            <a:off x="1987550" y="917543"/>
+            <a:ext cx="8039100" cy="5798510"/>
+          </a:xfrm>
+          <a:prstGeom prst="rect">
+            <a:avLst/>
+          </a:prstGeom>
+          <a:noFill/>
+        </p:spPr>
+        <p:txBody>
+          <a:bodyPr wrap="square" rtlCol="0">
+            <a:spAutoFit/>
+          </a:bodyPr>
+          <a:lstStyle/>
+          <a:p>
+            <a:pPr marL="216630" lvl="1">
+              <a:lnSpc>
+                <a:spcPct val="140013"/>
+              </a:lnSpc>
+              <a:buClr>
+                <a:srgbClr val="12312B"/>
+              </a:buClr>
+              <a:buSzPct val="115000"/>
+            </a:pPr>
+            <a:r>
+              <a:rPr lang="en-US" dirty="0">
+                <a:solidFill>
+                  <a:srgbClr val="12312B"/>
+                </a:solidFill>
+                <a:latin typeface="Archivo Medium"/>
+                <a:ea typeface="Archivo Medium"/>
+                <a:cs typeface="Archivo Medium"/>
+                <a:sym typeface="Archivo Medium"/>
+              </a:rPr>
+              <a:t>How to handle errors when the inevitably occur</a:t>
+            </a:r>
+          </a:p>
+          <a:p>
+            <a:pPr marL="673830" lvl="1" indent="-457200">
+              <a:lnSpc>
+                <a:spcPct val="140013"/>
+              </a:lnSpc>
+              <a:buClr>
+                <a:srgbClr val="12312B"/>
+              </a:buClr>
+              <a:buSzPct val="115000"/>
+              <a:buFont typeface="+mj-lt"/>
+              <a:buAutoNum type="arabicPeriod"/>
+            </a:pPr>
+            <a:r>
+              <a:rPr lang="en-US" dirty="0">
+                <a:solidFill>
+                  <a:srgbClr val="12312B"/>
+                </a:solidFill>
+                <a:latin typeface="Archivo Medium"/>
+                <a:ea typeface="Archivo Medium"/>
+                <a:cs typeface="Archivo Medium"/>
+                <a:sym typeface="Archivo Medium"/>
+              </a:rPr>
+              <a:t>Read the error message carefully (especially the 1</a:t>
+            </a:r>
+            <a:r>
+              <a:rPr lang="en-US" baseline="30000" dirty="0">
+                <a:solidFill>
+                  <a:srgbClr val="12312B"/>
+                </a:solidFill>
+                <a:latin typeface="Archivo Medium"/>
+                <a:ea typeface="Archivo Medium"/>
+                <a:cs typeface="Archivo Medium"/>
+                <a:sym typeface="Archivo Medium"/>
+              </a:rPr>
+              <a:t>st</a:t>
+            </a:r>
+            <a:r>
+              <a:rPr lang="en-US" dirty="0">
+                <a:solidFill>
+                  <a:srgbClr val="12312B"/>
+                </a:solidFill>
+                <a:latin typeface="Archivo Medium"/>
+                <a:ea typeface="Archivo Medium"/>
+                <a:cs typeface="Archivo Medium"/>
+                <a:sym typeface="Archivo Medium"/>
+              </a:rPr>
+              <a:t> and last lines)</a:t>
+            </a:r>
+          </a:p>
+          <a:p>
+            <a:pPr marL="673830" lvl="1" indent="-457200">
+              <a:lnSpc>
+                <a:spcPct val="140013"/>
+              </a:lnSpc>
+              <a:buClr>
+                <a:srgbClr val="12312B"/>
+              </a:buClr>
+              <a:buSzPct val="115000"/>
+              <a:buFont typeface="+mj-lt"/>
+              <a:buAutoNum type="arabicPeriod"/>
+            </a:pPr>
+            <a:r>
+              <a:rPr lang="en-US" dirty="0">
+                <a:solidFill>
+                  <a:srgbClr val="12312B"/>
+                </a:solidFill>
+                <a:latin typeface="Archivo Medium"/>
+                <a:ea typeface="Archivo Medium"/>
+                <a:cs typeface="Archivo Medium"/>
+                <a:sym typeface="Archivo Medium"/>
+              </a:rPr>
+              <a:t>Search for the error message online or in an LLM</a:t>
+            </a:r>
+          </a:p>
+          <a:p>
+            <a:pPr marL="673830" lvl="1" indent="-457200">
+              <a:lnSpc>
+                <a:spcPct val="140013"/>
+              </a:lnSpc>
+              <a:buClr>
+                <a:srgbClr val="12312B"/>
+              </a:buClr>
+              <a:buSzPct val="115000"/>
+              <a:buFont typeface="+mj-lt"/>
+              <a:buAutoNum type="arabicPeriod"/>
+            </a:pPr>
+            <a:r>
+              <a:rPr lang="en-US" dirty="0">
+                <a:solidFill>
+                  <a:srgbClr val="12312B"/>
+                </a:solidFill>
+                <a:latin typeface="Archivo Medium"/>
+                <a:ea typeface="Archivo Medium"/>
+                <a:cs typeface="Archivo Medium"/>
+                <a:sym typeface="Archivo Medium"/>
+              </a:rPr>
+              <a:t>Run / click </a:t>
+            </a:r>
+            <a:r>
+              <a:rPr lang="en-US" b="1" dirty="0">
+                <a:solidFill>
+                  <a:srgbClr val="12312B"/>
+                </a:solidFill>
+                <a:latin typeface="Archivo Medium"/>
+                <a:ea typeface="Archivo Medium"/>
+                <a:cs typeface="Archivo Medium"/>
+                <a:sym typeface="Archivo Medium"/>
+              </a:rPr>
+              <a:t>traceback()</a:t>
+            </a:r>
+            <a:endParaRPr lang="en-US" dirty="0">
+              <a:solidFill>
+                <a:srgbClr val="12312B"/>
+              </a:solidFill>
+              <a:latin typeface="Archivo Medium"/>
+              <a:ea typeface="Archivo Medium"/>
+              <a:cs typeface="Archivo Medium"/>
+              <a:sym typeface="Archivo Medium"/>
+            </a:endParaRPr>
+          </a:p>
+          <a:p>
+            <a:pPr marL="673830" lvl="1" indent="-457200">
+              <a:lnSpc>
+                <a:spcPct val="140013"/>
+              </a:lnSpc>
+              <a:buClr>
+                <a:srgbClr val="12312B"/>
+              </a:buClr>
+              <a:buSzPct val="115000"/>
+              <a:buFont typeface="+mj-lt"/>
+              <a:buAutoNum type="arabicPeriod"/>
+            </a:pPr>
+            <a:r>
+              <a:rPr lang="en-US" dirty="0">
+                <a:solidFill>
+                  <a:srgbClr val="12312B"/>
+                </a:solidFill>
+                <a:latin typeface="Archivo Medium"/>
+                <a:ea typeface="Archivo Medium"/>
+                <a:cs typeface="Archivo Medium"/>
+                <a:sym typeface="Archivo Medium"/>
+              </a:rPr>
+              <a:t>Try passing in different inputs (does the error re-occur always? Or only with certain inputs?)</a:t>
+            </a:r>
+          </a:p>
+          <a:p>
+            <a:pPr marL="673830" lvl="1" indent="-457200">
+              <a:lnSpc>
+                <a:spcPct val="140013"/>
+              </a:lnSpc>
+              <a:buClr>
+                <a:srgbClr val="12312B"/>
+              </a:buClr>
+              <a:buSzPct val="115000"/>
+              <a:buFont typeface="+mj-lt"/>
+              <a:buAutoNum type="arabicPeriod"/>
+            </a:pPr>
+            <a:r>
+              <a:rPr lang="en-US" dirty="0">
+                <a:solidFill>
+                  <a:srgbClr val="12312B"/>
+                </a:solidFill>
+                <a:latin typeface="Archivo Medium"/>
+                <a:ea typeface="Archivo Medium"/>
+                <a:cs typeface="Archivo Medium"/>
+                <a:sym typeface="Archivo Medium"/>
+              </a:rPr>
+              <a:t>Identify, isolate, and re-run the minimal chunk of code that reproduces the problem </a:t>
+            </a:r>
+          </a:p>
+          <a:p>
+            <a:pPr marL="673830" lvl="1" indent="-457200">
+              <a:lnSpc>
+                <a:spcPct val="140013"/>
+              </a:lnSpc>
+              <a:buClr>
+                <a:srgbClr val="12312B"/>
+              </a:buClr>
+              <a:buSzPct val="115000"/>
+              <a:buFont typeface="+mj-lt"/>
+              <a:buAutoNum type="arabicPeriod"/>
+            </a:pPr>
+            <a:r>
+              <a:rPr lang="en-US" dirty="0">
+                <a:solidFill>
+                  <a:srgbClr val="12312B"/>
+                </a:solidFill>
+                <a:latin typeface="Archivo Medium"/>
+                <a:ea typeface="Archivo Medium"/>
+                <a:cs typeface="Archivo Medium"/>
+                <a:sym typeface="Archivo Medium"/>
+              </a:rPr>
+              <a:t>Run your code one step at a time, outputting each intermediate result for review</a:t>
+            </a:r>
+          </a:p>
+          <a:p>
+            <a:pPr marL="673830" lvl="1" indent="-457200">
+              <a:lnSpc>
+                <a:spcPct val="140013"/>
+              </a:lnSpc>
+              <a:buClr>
+                <a:srgbClr val="12312B"/>
+              </a:buClr>
+              <a:buSzPct val="115000"/>
+              <a:buFont typeface="+mj-lt"/>
+              <a:buAutoNum type="arabicPeriod"/>
+            </a:pPr>
+            <a:r>
+              <a:rPr lang="en-US" dirty="0">
+                <a:solidFill>
+                  <a:srgbClr val="12312B"/>
+                </a:solidFill>
+                <a:latin typeface="Archivo Medium"/>
+                <a:ea typeface="Archivo Medium"/>
+                <a:cs typeface="Archivo Medium"/>
+                <a:sym typeface="Archivo Medium"/>
+              </a:rPr>
+              <a:t>Look for common bugs: data type mismatches, syntax errors (unclosed “” or []), name mismatches, NA / null values, etc.</a:t>
+            </a:r>
+          </a:p>
+          <a:p>
+            <a:pPr marL="673830" lvl="1" indent="-457200">
+              <a:lnSpc>
+                <a:spcPct val="140013"/>
+              </a:lnSpc>
+              <a:buClr>
+                <a:srgbClr val="12312B"/>
+              </a:buClr>
+              <a:buSzPct val="115000"/>
+              <a:buFont typeface="+mj-lt"/>
+              <a:buAutoNum type="arabicPeriod"/>
+            </a:pPr>
+            <a:r>
+              <a:rPr lang="en-US" dirty="0">
+                <a:solidFill>
+                  <a:srgbClr val="12312B"/>
+                </a:solidFill>
+                <a:latin typeface="Archivo Medium"/>
+                <a:ea typeface="Archivo Medium"/>
+                <a:cs typeface="Archivo Medium"/>
+                <a:sym typeface="Archivo Medium"/>
+              </a:rPr>
+              <a:t>Search for / ask for help: online, LLMs, humans</a:t>
+            </a:r>
+          </a:p>
+          <a:p>
+            <a:pPr marL="673830" lvl="1" indent="-457200">
+              <a:lnSpc>
+                <a:spcPct val="140013"/>
+              </a:lnSpc>
+              <a:buClr>
+                <a:srgbClr val="12312B"/>
+              </a:buClr>
+              <a:buSzPct val="115000"/>
+              <a:buFont typeface="+mj-lt"/>
+              <a:buAutoNum type="arabicPeriod"/>
+            </a:pPr>
+            <a:r>
+              <a:rPr lang="en-US" dirty="0">
+                <a:solidFill>
+                  <a:srgbClr val="12312B"/>
+                </a:solidFill>
+                <a:latin typeface="Archivo Medium"/>
+                <a:ea typeface="Archivo Medium"/>
+                <a:cs typeface="Archivo Medium"/>
+                <a:sym typeface="Archivo Medium"/>
+              </a:rPr>
+              <a:t>Fix one problem at a time and test it</a:t>
+            </a:r>
+          </a:p>
+          <a:p>
+            <a:endParaRPr lang="en-US" dirty="0"/>
+          </a:p>
+        </p:txBody>
+      </p:sp>
+    </p:spTree>
+    <p:extLst>
+      <p:ext uri="{BB962C8B-B14F-4D97-AF65-F5344CB8AC3E}">
+        <p14:creationId xmlns:p14="http://schemas.microsoft.com/office/powerpoint/2010/main" val="952488446"/>
+      </p:ext>
+    </p:extLst>
+  </p:cSld>
+  <p:clrMapOvr>
+    <a:masterClrMapping/>
+  </p:clrMapOvr>
+</p:sld>
+</file>
+
+<file path=ppt/slides/slide28.xml><?xml version="1.0" encoding="utf-8"?>
+<p:sld xmlns:a="http://schemas.openxmlformats.org/drawingml/2006/main" xmlns:r="http://schemas.openxmlformats.org/officeDocument/2006/relationships" xmlns:p="http://schemas.openxmlformats.org/presentationml/2006/main">
+  <p:cSld>
+    <p:spTree>
+      <p:nvGrpSpPr>
+        <p:cNvPr id="1" name=""/>
+        <p:cNvGrpSpPr/>
+        <p:nvPr/>
+      </p:nvGrpSpPr>
+      <p:grpSpPr>
+        <a:xfrm>
+          <a:off x="0" y="0"/>
+          <a:ext cx="0" cy="0"/>
+          <a:chOff x="0" y="0"/>
+          <a:chExt cx="0" cy="0"/>
+        </a:xfrm>
+      </p:grpSpPr>
+    </p:spTree>
+    <p:extLst>
+      <p:ext uri="{BB962C8B-B14F-4D97-AF65-F5344CB8AC3E}">
+        <p14:creationId xmlns:p14="http://schemas.microsoft.com/office/powerpoint/2010/main" val="3824464935"/>
+      </p:ext>
+    </p:extLst>
+  </p:cSld>
+  <p:clrMapOvr>
+    <a:masterClrMapping/>
+  </p:clrMapOvr>
+</p:sld>
+</file>
+
 <file path=ppt/slides/slide3.xml><?xml version="1.0" encoding="utf-8"?>
+<p:sld xmlns:a="http://schemas.openxmlformats.org/drawingml/2006/main" xmlns:r="http://schemas.openxmlformats.org/officeDocument/2006/relationships" xmlns:p="http://schemas.openxmlformats.org/presentationml/2006/main">
+  <p:cSld>
+    <p:spTree>
+      <p:nvGrpSpPr>
+        <p:cNvPr id="1" name="Shape 133">
+          <a:extLst>
+            <a:ext uri="{FF2B5EF4-FFF2-40B4-BE49-F238E27FC236}">
+              <a16:creationId xmlns:a16="http://schemas.microsoft.com/office/drawing/2014/main" id="{E8A7C709-B121-E543-2BF3-403B8EB1C8CC}"/>
+            </a:ext>
+          </a:extLst>
+        </p:cNvPr>
+        <p:cNvGrpSpPr/>
+        <p:nvPr/>
+      </p:nvGrpSpPr>
+      <p:grpSpPr>
+        <a:xfrm>
+          <a:off x="0" y="0"/>
+          <a:ext cx="0" cy="0"/>
+          <a:chOff x="0" y="0"/>
+          <a:chExt cx="0" cy="0"/>
+        </a:xfrm>
+      </p:grpSpPr>
+      <p:sp>
+        <p:nvSpPr>
+          <p:cNvPr id="134" name="Google Shape;134;p25">
+            <a:extLst>
+              <a:ext uri="{FF2B5EF4-FFF2-40B4-BE49-F238E27FC236}">
+                <a16:creationId xmlns:a16="http://schemas.microsoft.com/office/drawing/2014/main" id="{34AB5467-5185-A812-C09F-F87686BB4A87}"/>
+              </a:ext>
+            </a:extLst>
+          </p:cNvPr>
+          <p:cNvSpPr txBox="1"/>
+          <p:nvPr/>
+        </p:nvSpPr>
+        <p:spPr>
+          <a:xfrm>
+            <a:off x="1417320" y="2148841"/>
+            <a:ext cx="9930384" cy="738664"/>
+          </a:xfrm>
+          <a:prstGeom prst="rect">
+            <a:avLst/>
+          </a:prstGeom>
+          <a:noFill/>
+          <a:ln>
+            <a:noFill/>
+          </a:ln>
+        </p:spPr>
+        <p:txBody>
+          <a:bodyPr spcFirstLastPara="1" wrap="square" lIns="0" tIns="0" rIns="0" bIns="0" anchor="t" anchorCtr="0">
+            <a:spAutoFit/>
+          </a:bodyPr>
+          <a:lstStyle/>
+          <a:p>
+            <a:pPr defTabSz="609630">
+              <a:buClr>
+                <a:srgbClr val="000000"/>
+              </a:buClr>
+            </a:pPr>
+            <a:r>
+              <a:rPr lang="en-US" sz="4800" kern="0" dirty="0">
+                <a:solidFill>
+                  <a:srgbClr val="A5D75F"/>
+                </a:solidFill>
+                <a:latin typeface="Anton"/>
+                <a:ea typeface="Anton"/>
+                <a:cs typeface="Anton"/>
+                <a:sym typeface="Anton"/>
+              </a:rPr>
+              <a:t>Open and (or?) Reproducible Research</a:t>
+            </a:r>
+            <a:endParaRPr sz="100" kern="0" dirty="0">
+              <a:solidFill>
+                <a:srgbClr val="A5D75F"/>
+              </a:solidFill>
+              <a:latin typeface="Anton"/>
+              <a:ea typeface="Anton"/>
+              <a:cs typeface="Anton"/>
+              <a:sym typeface="Anton"/>
+            </a:endParaRPr>
+          </a:p>
+        </p:txBody>
+      </p:sp>
+      <p:sp>
+        <p:nvSpPr>
+          <p:cNvPr id="135" name="Google Shape;135;p25">
+            <a:extLst>
+              <a:ext uri="{FF2B5EF4-FFF2-40B4-BE49-F238E27FC236}">
+                <a16:creationId xmlns:a16="http://schemas.microsoft.com/office/drawing/2014/main" id="{988BCB17-4724-EC55-C938-A911166E56FC}"/>
+              </a:ext>
+            </a:extLst>
+          </p:cNvPr>
+          <p:cNvSpPr/>
+          <p:nvPr/>
+        </p:nvSpPr>
+        <p:spPr>
+          <a:xfrm>
+            <a:off x="959495" y="2887505"/>
+            <a:ext cx="7287037" cy="780393"/>
+          </a:xfrm>
+          <a:custGeom>
+            <a:avLst/>
+            <a:gdLst/>
+            <a:ahLst/>
+            <a:cxnLst/>
+            <a:rect l="l" t="t" r="r" b="b"/>
+            <a:pathLst>
+              <a:path w="6287497" h="938348" extrusionOk="0">
+                <a:moveTo>
+                  <a:pt x="0" y="0"/>
+                </a:moveTo>
+                <a:lnTo>
+                  <a:pt x="6287496" y="0"/>
+                </a:lnTo>
+                <a:lnTo>
+                  <a:pt x="6287496" y="938349"/>
+                </a:lnTo>
+                <a:lnTo>
+                  <a:pt x="0" y="938349"/>
+                </a:lnTo>
+                <a:lnTo>
+                  <a:pt x="0" y="0"/>
+                </a:lnTo>
+                <a:close/>
+              </a:path>
+            </a:pathLst>
+          </a:custGeom>
+          <a:blipFill rotWithShape="1">
+            <a:blip r:embed="rId3">
+              <a:alphaModFix/>
+            </a:blip>
+            <a:stretch>
+              <a:fillRect/>
+            </a:stretch>
+          </a:blipFill>
+          <a:ln>
+            <a:noFill/>
+          </a:ln>
+        </p:spPr>
+        <p:txBody>
+          <a:bodyPr/>
+          <a:lstStyle/>
+          <a:p>
+            <a:pPr defTabSz="609630">
+              <a:buClr>
+                <a:srgbClr val="000000"/>
+              </a:buClr>
+            </a:pPr>
+            <a:endParaRPr lang="en-US" sz="933" kern="0">
+              <a:solidFill>
+                <a:srgbClr val="000000"/>
+              </a:solidFill>
+              <a:latin typeface="Arial"/>
+              <a:cs typeface="Arial"/>
+              <a:sym typeface="Arial"/>
+            </a:endParaRPr>
+          </a:p>
+        </p:txBody>
+      </p:sp>
+    </p:spTree>
+    <p:extLst>
+      <p:ext uri="{BB962C8B-B14F-4D97-AF65-F5344CB8AC3E}">
+        <p14:creationId xmlns:p14="http://schemas.microsoft.com/office/powerpoint/2010/main" val="2948736131"/>
+      </p:ext>
+    </p:extLst>
+  </p:cSld>
+  <p:clrMapOvr>
+    <a:masterClrMapping/>
+  </p:clrMapOvr>
+</p:sld>
+</file>
+
+<file path=ppt/slides/slide4.xml><?xml version="1.0" encoding="utf-8"?>
 <p:sld xmlns:a="http://schemas.openxmlformats.org/drawingml/2006/main" xmlns:r="http://schemas.openxmlformats.org/officeDocument/2006/relationships" xmlns:p="http://schemas.openxmlformats.org/presentationml/2006/main">
   <p:cSld>
     <p:spTree>
@@ -18530,7 +21790,15 @@
             <a:pPr lvl="1"/>
             <a:r>
               <a:rPr lang="en-US" dirty="0"/>
-              <a:t>Goal: conduct and document your research in a way that allows others (including future you!) to understand, verify, and rerun the analysis using the same data and methods.</a:t>
+              <a:t>Goal: </a:t>
+            </a:r>
+            <a:r>
+              <a:rPr lang="en-US" b="1" dirty="0"/>
+              <a:t>conduct and document your research in a way that allows others (including future you!) to understand, verify, and rerun the analysis </a:t>
+            </a:r>
+            <a:r>
+              <a:rPr lang="en-US" dirty="0"/>
+              <a:t>using the same data and methods.</a:t>
             </a:r>
           </a:p>
           <a:p>
@@ -18550,7 +21818,15 @@
             <a:pPr lvl="1"/>
             <a:r>
               <a:rPr lang="en-US" dirty="0"/>
-              <a:t>Goal: make the products of our research as accessible and reusable as possible. Products may include publications, data, code, documentation, descriptions of methods, and other materials. Open Scholarship looks different across disciplines and must balance accessibility with privacy, safety, community needs, and cultural protocols. But all open scholarship shares a common principle: reducing barriers to allowing others to engage with and benefit from your research (especially those who could be most positively affected).</a:t>
+              <a:t>Goal: </a:t>
+            </a:r>
+            <a:r>
+              <a:rPr lang="en-US" b="1" dirty="0"/>
+              <a:t>make the products of our research as accessible and reusable as possible. </a:t>
+            </a:r>
+            <a:r>
+              <a:rPr lang="en-US" dirty="0"/>
+              <a:t>Products may include publications, data, code, documentation, descriptions of methods, and other materials. Open Scholarship looks different across disciplines and must balance accessibility with privacy, safety, community needs, and cultural protocols. But all open scholarship shares a common principle: reducing barriers to allowing others to engage with and benefit from your research (especially those who could be most positively affected).</a:t>
             </a:r>
           </a:p>
         </p:txBody>
@@ -18568,7 +21844,7 @@
 </p:sld>
 </file>
 
-<file path=ppt/slides/slide4.xml><?xml version="1.0" encoding="utf-8"?>
+<file path=ppt/slides/slide5.xml><?xml version="1.0" encoding="utf-8"?>
 <p:sld xmlns:a="http://schemas.openxmlformats.org/drawingml/2006/main" xmlns:r="http://schemas.openxmlformats.org/officeDocument/2006/relationships" xmlns:p="http://schemas.openxmlformats.org/presentationml/2006/main">
   <p:cSld>
     <p:spTree>
@@ -18740,7 +22016,7 @@
 </p:sld>
 </file>
 
-<file path=ppt/slides/slide5.xml><?xml version="1.0" encoding="utf-8"?>
+<file path=ppt/slides/slide6.xml><?xml version="1.0" encoding="utf-8"?>
 <p:sld xmlns:a="http://schemas.openxmlformats.org/drawingml/2006/main" xmlns:r="http://schemas.openxmlformats.org/officeDocument/2006/relationships" xmlns:p="http://schemas.openxmlformats.org/presentationml/2006/main">
   <p:cSld>
     <p:spTree>
@@ -18926,7 +22202,7 @@
 </p:sld>
 </file>
 
-<file path=ppt/slides/slide6.xml><?xml version="1.0" encoding="utf-8"?>
+<file path=ppt/slides/slide7.xml><?xml version="1.0" encoding="utf-8"?>
 <p:sld xmlns:a="http://schemas.openxmlformats.org/drawingml/2006/main" xmlns:r="http://schemas.openxmlformats.org/officeDocument/2006/relationships" xmlns:p="http://schemas.openxmlformats.org/presentationml/2006/main">
   <p:cSld>
     <p:spTree>
@@ -19173,7 +22449,7 @@
 </p:sld>
 </file>
 
-<file path=ppt/slides/slide7.xml><?xml version="1.0" encoding="utf-8"?>
+<file path=ppt/slides/slide8.xml><?xml version="1.0" encoding="utf-8"?>
 <p:sld xmlns:a="http://schemas.openxmlformats.org/drawingml/2006/main" xmlns:r="http://schemas.openxmlformats.org/officeDocument/2006/relationships" xmlns:p="http://schemas.openxmlformats.org/presentationml/2006/main">
   <p:cSld>
     <p:spTree>
@@ -19328,15 +22604,15 @@
 </p:sld>
 </file>
 
-<file path=ppt/slides/slide8.xml><?xml version="1.0" encoding="utf-8"?>
+<file path=ppt/slides/slide9.xml><?xml version="1.0" encoding="utf-8"?>
 <p:sld xmlns:a="http://schemas.openxmlformats.org/drawingml/2006/main" xmlns:r="http://schemas.openxmlformats.org/officeDocument/2006/relationships" xmlns:p="http://schemas.openxmlformats.org/presentationml/2006/main">
   <p:cSld>
     <p:spTree>
       <p:nvGrpSpPr>
-        <p:cNvPr id="1" name="Shape 133">
+        <p:cNvPr id="1" name="Shape 139">
           <a:extLst>
             <a:ext uri="{FF2B5EF4-FFF2-40B4-BE49-F238E27FC236}">
-              <a16:creationId xmlns:a16="http://schemas.microsoft.com/office/drawing/2014/main" id="{E8A7C709-B121-E543-2BF3-403B8EB1C8CC}"/>
+              <a16:creationId xmlns:a16="http://schemas.microsoft.com/office/drawing/2014/main" id="{9D08716B-E435-BFFC-1B82-7F291BB09BAE}"/>
             </a:ext>
           </a:extLst>
         </p:cNvPr>
@@ -19353,10 +22629,10 @@
       </p:grpSpPr>
       <p:sp>
         <p:nvSpPr>
-          <p:cNvPr id="134" name="Google Shape;134;p25">
+          <p:cNvPr id="141" name="Google Shape;141;p26">
             <a:extLst>
               <a:ext uri="{FF2B5EF4-FFF2-40B4-BE49-F238E27FC236}">
-                <a16:creationId xmlns:a16="http://schemas.microsoft.com/office/drawing/2014/main" id="{34AB5467-5185-A812-C09F-F87686BB4A87}"/>
+                <a16:creationId xmlns:a16="http://schemas.microsoft.com/office/drawing/2014/main" id="{78E586CE-EAB9-478A-905E-310D986723F8}"/>
               </a:ext>
             </a:extLst>
           </p:cNvPr>
@@ -19365,8 +22641,8 @@
         </p:nvSpPr>
         <p:spPr>
           <a:xfrm>
-            <a:off x="1417320" y="2148841"/>
-            <a:ext cx="9930384" cy="738664"/>
+            <a:off x="922202" y="1157695"/>
+            <a:ext cx="8511218" cy="742383"/>
           </a:xfrm>
           <a:prstGeom prst="rect">
             <a:avLst/>
@@ -19383,25 +22659,28 @@
           <a:lstStyle/>
           <a:p>
             <a:pPr defTabSz="609630">
+              <a:lnSpc>
+                <a:spcPct val="140007"/>
+              </a:lnSpc>
               <a:buClr>
                 <a:srgbClr val="000000"/>
               </a:buClr>
             </a:pPr>
             <a:r>
-              <a:rPr lang="en-US" sz="4800" kern="0" dirty="0">
+              <a:rPr lang="en-US" sz="3446" kern="0" dirty="0">
                 <a:solidFill>
-                  <a:srgbClr val="A5D75F"/>
+                  <a:srgbClr val="00693D"/>
                 </a:solidFill>
                 <a:latin typeface="Anton"/>
                 <a:ea typeface="Anton"/>
                 <a:cs typeface="Anton"/>
                 <a:sym typeface="Anton"/>
               </a:rPr>
-              <a:t>Open and (or?) Reproducible Research</a:t>
-            </a:r>
-            <a:endParaRPr sz="100" kern="0" dirty="0">
+              <a:t>Different Disciplines, different needs</a:t>
+            </a:r>
+            <a:endParaRPr sz="933" kern="0" dirty="0">
               <a:solidFill>
-                <a:srgbClr val="A5D75F"/>
+                <a:srgbClr val="000000"/>
               </a:solidFill>
               <a:latin typeface="Anton"/>
               <a:ea typeface="Anton"/>
@@ -19411,116 +22690,10 @@
           </a:p>
         </p:txBody>
       </p:sp>
-      <p:sp>
-        <p:nvSpPr>
-          <p:cNvPr id="135" name="Google Shape;135;p25">
-            <a:extLst>
-              <a:ext uri="{FF2B5EF4-FFF2-40B4-BE49-F238E27FC236}">
-                <a16:creationId xmlns:a16="http://schemas.microsoft.com/office/drawing/2014/main" id="{988BCB17-4724-EC55-C938-A911166E56FC}"/>
-              </a:ext>
-            </a:extLst>
-          </p:cNvPr>
-          <p:cNvSpPr/>
-          <p:nvPr/>
-        </p:nvSpPr>
-        <p:spPr>
-          <a:xfrm>
-            <a:off x="959495" y="2887505"/>
-            <a:ext cx="7287037" cy="780393"/>
-          </a:xfrm>
-          <a:custGeom>
-            <a:avLst/>
-            <a:gdLst/>
-            <a:ahLst/>
-            <a:cxnLst/>
-            <a:rect l="l" t="t" r="r" b="b"/>
-            <a:pathLst>
-              <a:path w="6287497" h="938348" extrusionOk="0">
-                <a:moveTo>
-                  <a:pt x="0" y="0"/>
-                </a:moveTo>
-                <a:lnTo>
-                  <a:pt x="6287496" y="0"/>
-                </a:lnTo>
-                <a:lnTo>
-                  <a:pt x="6287496" y="938349"/>
-                </a:lnTo>
-                <a:lnTo>
-                  <a:pt x="0" y="938349"/>
-                </a:lnTo>
-                <a:lnTo>
-                  <a:pt x="0" y="0"/>
-                </a:lnTo>
-                <a:close/>
-              </a:path>
-            </a:pathLst>
-          </a:custGeom>
-          <a:blipFill rotWithShape="1">
-            <a:blip r:embed="rId3">
-              <a:alphaModFix/>
-            </a:blip>
-            <a:stretch>
-              <a:fillRect/>
-            </a:stretch>
-          </a:blipFill>
-          <a:ln>
-            <a:noFill/>
-          </a:ln>
-        </p:spPr>
-        <p:txBody>
-          <a:bodyPr/>
-          <a:lstStyle/>
-          <a:p>
-            <a:pPr defTabSz="609630">
-              <a:buClr>
-                <a:srgbClr val="000000"/>
-              </a:buClr>
-            </a:pPr>
-            <a:endParaRPr lang="en-US" sz="933" kern="0">
-              <a:solidFill>
-                <a:srgbClr val="000000"/>
-              </a:solidFill>
-              <a:latin typeface="Arial"/>
-              <a:cs typeface="Arial"/>
-              <a:sym typeface="Arial"/>
-            </a:endParaRPr>
-          </a:p>
-        </p:txBody>
-      </p:sp>
     </p:spTree>
     <p:extLst>
       <p:ext uri="{BB962C8B-B14F-4D97-AF65-F5344CB8AC3E}">
-        <p14:creationId xmlns:p14="http://schemas.microsoft.com/office/powerpoint/2010/main" val="2948736131"/>
-      </p:ext>
-    </p:extLst>
-  </p:cSld>
-  <p:clrMapOvr>
-    <a:masterClrMapping/>
-  </p:clrMapOvr>
-</p:sld>
-</file>
-
-<file path=ppt/slides/slide9.xml><?xml version="1.0" encoding="utf-8"?>
-<p:sld xmlns:a="http://schemas.openxmlformats.org/drawingml/2006/main" xmlns:r="http://schemas.openxmlformats.org/officeDocument/2006/relationships" xmlns:p="http://schemas.openxmlformats.org/presentationml/2006/main">
-  <p:cSld>
-    <p:spTree>
-      <p:nvGrpSpPr>
-        <p:cNvPr id="1" name=""/>
-        <p:cNvGrpSpPr/>
-        <p:nvPr/>
-      </p:nvGrpSpPr>
-      <p:grpSpPr>
-        <a:xfrm>
-          <a:off x="0" y="0"/>
-          <a:ext cx="0" cy="0"/>
-          <a:chOff x="0" y="0"/>
-          <a:chExt cx="0" cy="0"/>
-        </a:xfrm>
-      </p:grpSpPr>
-    </p:spTree>
-    <p:extLst>
-      <p:ext uri="{BB962C8B-B14F-4D97-AF65-F5344CB8AC3E}">
-        <p14:creationId xmlns:p14="http://schemas.microsoft.com/office/powerpoint/2010/main" val="747715104"/>
+        <p14:creationId xmlns:p14="http://schemas.microsoft.com/office/powerpoint/2010/main" val="2405714910"/>
       </p:ext>
     </p:extLst>
   </p:cSld>
